--- a/competition/EraSeMap_RKNP_ISEF_RU_HEX.pptx
+++ b/competition/EraSeMap_RKNP_ISEF_RU_HEX.pptx
@@ -2,25 +2,25 @@
 <file path=ppt/presentation.xml><?xml version="1.0" encoding="utf-8"?>
 <p:presentation xmlns:p="http://schemas.openxmlformats.org/presentationml/2006/main">
   <p:sldMasterIdLst>
-    <p:sldMasterId xmlns:r="http://schemas.openxmlformats.org/officeDocument/2006/relationships" id="2147483648" r:id="Rbc41ed4f2aa744f1"/>
+    <p:sldMasterId xmlns:r="http://schemas.openxmlformats.org/officeDocument/2006/relationships" id="2147483648" r:id="R212bfafe825c41d8"/>
   </p:sldMasterIdLst>
   <p:notesMasterIdLst>
-    <p:notesMasterId xmlns:r="http://schemas.openxmlformats.org/officeDocument/2006/relationships" r:id="R7397f1c21643490e"/>
+    <p:notesMasterId xmlns:r="http://schemas.openxmlformats.org/officeDocument/2006/relationships" r:id="R3c35da0c616c4e58"/>
   </p:notesMasterIdLst>
   <p:sldIdLst>
-    <p:sldId xmlns:r="http://schemas.openxmlformats.org/officeDocument/2006/relationships" id="256" r:id="R1c5c36f680254da6"/>
-    <p:sldId xmlns:r="http://schemas.openxmlformats.org/officeDocument/2006/relationships" id="257" r:id="R3d27ccead1464f2f"/>
-    <p:sldId xmlns:r="http://schemas.openxmlformats.org/officeDocument/2006/relationships" id="258" r:id="R70895a719da84201"/>
-    <p:sldId xmlns:r="http://schemas.openxmlformats.org/officeDocument/2006/relationships" id="259" r:id="R76b5fd50d5504cff"/>
-    <p:sldId xmlns:r="http://schemas.openxmlformats.org/officeDocument/2006/relationships" id="260" r:id="Ra73ad893b9234df4"/>
-    <p:sldId xmlns:r="http://schemas.openxmlformats.org/officeDocument/2006/relationships" id="261" r:id="Re54c45cb911947a3"/>
-    <p:sldId xmlns:r="http://schemas.openxmlformats.org/officeDocument/2006/relationships" id="262" r:id="R0c61749bf74a4899"/>
-    <p:sldId xmlns:r="http://schemas.openxmlformats.org/officeDocument/2006/relationships" id="263" r:id="R538ee6a470c34d74"/>
-    <p:sldId xmlns:r="http://schemas.openxmlformats.org/officeDocument/2006/relationships" id="264" r:id="R235a04a14bda4222"/>
-    <p:sldId xmlns:r="http://schemas.openxmlformats.org/officeDocument/2006/relationships" id="265" r:id="Rd11fbb40832d4b5d"/>
-    <p:sldId xmlns:r="http://schemas.openxmlformats.org/officeDocument/2006/relationships" id="266" r:id="Rdd4b3eb024284401"/>
-    <p:sldId xmlns:r="http://schemas.openxmlformats.org/officeDocument/2006/relationships" id="267" r:id="Rbdb2c7acd1434753"/>
-    <p:sldId xmlns:r="http://schemas.openxmlformats.org/officeDocument/2006/relationships" id="268" r:id="R511fdb9d41ce4e07"/>
+    <p:sldId xmlns:r="http://schemas.openxmlformats.org/officeDocument/2006/relationships" id="256" r:id="R8acd291a56f140c0"/>
+    <p:sldId xmlns:r="http://schemas.openxmlformats.org/officeDocument/2006/relationships" id="257" r:id="R5992104fadfe41fc"/>
+    <p:sldId xmlns:r="http://schemas.openxmlformats.org/officeDocument/2006/relationships" id="258" r:id="R3baea67b876c4881"/>
+    <p:sldId xmlns:r="http://schemas.openxmlformats.org/officeDocument/2006/relationships" id="259" r:id="R5261537177374eb8"/>
+    <p:sldId xmlns:r="http://schemas.openxmlformats.org/officeDocument/2006/relationships" id="260" r:id="R1e0a568f1c844e44"/>
+    <p:sldId xmlns:r="http://schemas.openxmlformats.org/officeDocument/2006/relationships" id="261" r:id="Rbb2e217040054a47"/>
+    <p:sldId xmlns:r="http://schemas.openxmlformats.org/officeDocument/2006/relationships" id="262" r:id="R6bedd7df493243b1"/>
+    <p:sldId xmlns:r="http://schemas.openxmlformats.org/officeDocument/2006/relationships" id="263" r:id="R4596e5eab2e94583"/>
+    <p:sldId xmlns:r="http://schemas.openxmlformats.org/officeDocument/2006/relationships" id="264" r:id="R06a13e6591714bd5"/>
+    <p:sldId xmlns:r="http://schemas.openxmlformats.org/officeDocument/2006/relationships" id="265" r:id="Rdafe33efc3364bce"/>
+    <p:sldId xmlns:r="http://schemas.openxmlformats.org/officeDocument/2006/relationships" id="266" r:id="Rbdd65f6fd4ea45d9"/>
+    <p:sldId xmlns:r="http://schemas.openxmlformats.org/officeDocument/2006/relationships" id="267" r:id="Rcd9b5d4265d24861"/>
+    <p:sldId xmlns:r="http://schemas.openxmlformats.org/officeDocument/2006/relationships" id="268" r:id="R4718bfc6603a4e9f"/>
   </p:sldIdLst>
   <p:sldSz cx="9144000" cy="5143500"/>
   <p:notesSz cx="6858000" cy="9144000"/>
@@ -1387,7 +1387,7 @@
   </p:cSld>
   <p:clrMap bg1="lt1" tx1="dk1" bg2="lt2" tx2="dk2" accent1="accent1" accent2="accent2" accent3="accent3" accent4="accent4" accent5="accent5" accent6="accent6" hlink="hlink" folHlink="folHlink"/>
   <p:sldLayoutIdLst>
-    <p:sldLayoutId xmlns:r="http://schemas.openxmlformats.org/officeDocument/2006/relationships" id="2147483649" r:id="Rdc3a1012233a41b1"/>
+    <p:sldLayoutId xmlns:r="http://schemas.openxmlformats.org/officeDocument/2006/relationships" id="2147483649" r:id="Rd2b49cb69a4d4eb8"/>
   </p:sldLayoutIdLst>
   <p:txStyles>
     <p:titleStyle>
@@ -1920,7 +1920,7 @@
     <p:bg>
       <p:bgPr>
         <a:solidFill xmlns:a="http://schemas.openxmlformats.org/drawingml/2006/main">
-          <a:srgbClr val="0E293C"/>
+          <a:srgbClr val="F3F1EB"/>
         </a:solidFill>
       </p:bgPr>
     </p:bg>
@@ -1938,7 +1938,7 @@
           <p:cNvPr id="38" name="">
             <a:extLst xmlns:a="http://schemas.openxmlformats.org/drawingml/2006/main">
               <a:ext uri="{FF2B5EF4-FFF2-40B4-BE49-F238E27FC236}">
-                <a16:creationId xmlns:a16="http://schemas.microsoft.com/office/drawing/2014/main" id="{8EF691A0-BED2-4317-9727-8979D0F82777}"/>
+                <a16:creationId xmlns:a16="http://schemas.microsoft.com/office/drawing/2014/main" id="{99F178C2-88B2-4DA7-BDB9-80461BC26B86}"/>
               </a:ext>
             </a:extLst>
           </p:cNvPr>
@@ -1995,7 +1995,7 @@
           <p:cNvPr id="2" name="">
             <a:extLst xmlns:a="http://schemas.openxmlformats.org/drawingml/2006/main">
               <a:ext uri="{FF2B5EF4-FFF2-40B4-BE49-F238E27FC236}">
-                <a16:creationId xmlns:a16="http://schemas.microsoft.com/office/drawing/2014/main" id="{DE43EDA4-1402-426C-91A1-06673D57B604}"/>
+                <a16:creationId xmlns:a16="http://schemas.microsoft.com/office/drawing/2014/main" id="{307564CD-6A92-4EFE-B331-7E816157E2F5}"/>
               </a:ext>
             </a:extLst>
           </p:cNvPr>
@@ -2052,7 +2052,7 @@
           <p:cNvPr id="3" name="">
             <a:extLst xmlns:a="http://schemas.openxmlformats.org/drawingml/2006/main">
               <a:ext uri="{FF2B5EF4-FFF2-40B4-BE49-F238E27FC236}">
-                <a16:creationId xmlns:a16="http://schemas.microsoft.com/office/drawing/2014/main" id="{739D9751-F99A-4BDA-8B2C-60CDA4EC9802}"/>
+                <a16:creationId xmlns:a16="http://schemas.microsoft.com/office/drawing/2014/main" id="{74DBC465-94F6-40ED-89E3-E8844C009C23}"/>
               </a:ext>
             </a:extLst>
           </p:cNvPr>
@@ -2109,7 +2109,7 @@
           <p:cNvPr id="4" name="">
             <a:extLst xmlns:a="http://schemas.openxmlformats.org/drawingml/2006/main">
               <a:ext uri="{FF2B5EF4-FFF2-40B4-BE49-F238E27FC236}">
-                <a16:creationId xmlns:a16="http://schemas.microsoft.com/office/drawing/2014/main" id="{5CD01492-1E92-47F9-BFD5-4608D782DC48}"/>
+                <a16:creationId xmlns:a16="http://schemas.microsoft.com/office/drawing/2014/main" id="{3BECFA6B-2F04-4671-A09B-CA4E20952B10}"/>
               </a:ext>
             </a:extLst>
           </p:cNvPr>
@@ -2140,7 +2140,7 @@
           <p:cNvPr id="5" name="">
             <a:extLst xmlns:a="http://schemas.openxmlformats.org/drawingml/2006/main">
               <a:ext uri="{FF2B5EF4-FFF2-40B4-BE49-F238E27FC236}">
-                <a16:creationId xmlns:a16="http://schemas.microsoft.com/office/drawing/2014/main" id="{3392CE35-D8EB-4F0B-91D5-93F16D11DF74}"/>
+                <a16:creationId xmlns:a16="http://schemas.microsoft.com/office/drawing/2014/main" id="{24399E37-FF99-454B-AE8C-8139A9B35BCB}"/>
               </a:ext>
             </a:extLst>
           </p:cNvPr>
@@ -2160,7 +2160,7 @@
           <a:noFill xmlns:a="http://schemas.openxmlformats.org/drawingml/2006/main"/>
           <a:ln xmlns:a="http://schemas.openxmlformats.org/drawingml/2006/main" w="9525">
             <a:solidFill>
-              <a:srgbClr val="2A4D65"/>
+              <a:srgbClr val="C5D4DC"/>
             </a:solidFill>
             <a:prstDash val="solid"/>
           </a:ln>
@@ -2171,7 +2171,7 @@
           <p:cNvPr id="6" name="">
             <a:extLst xmlns:a="http://schemas.openxmlformats.org/drawingml/2006/main">
               <a:ext uri="{FF2B5EF4-FFF2-40B4-BE49-F238E27FC236}">
-                <a16:creationId xmlns:a16="http://schemas.microsoft.com/office/drawing/2014/main" id="{17D2FF23-2C3C-4011-8CC9-200DDDC8DE3D}"/>
+                <a16:creationId xmlns:a16="http://schemas.microsoft.com/office/drawing/2014/main" id="{BE5B9EFE-8A60-467E-97A7-1FB2D3604BAD}"/>
               </a:ext>
             </a:extLst>
           </p:cNvPr>
@@ -2228,7 +2228,7 @@
           <p:cNvPr id="7" name="">
             <a:extLst xmlns:a="http://schemas.openxmlformats.org/drawingml/2006/main">
               <a:ext uri="{FF2B5EF4-FFF2-40B4-BE49-F238E27FC236}">
-                <a16:creationId xmlns:a16="http://schemas.microsoft.com/office/drawing/2014/main" id="{A2576EA0-A939-4FF8-A98B-FF0DC3D19567}"/>
+                <a16:creationId xmlns:a16="http://schemas.microsoft.com/office/drawing/2014/main" id="{0563FCCD-466B-4A79-8463-4F0F40D6A867}"/>
               </a:ext>
             </a:extLst>
           </p:cNvPr>
@@ -2285,7 +2285,7 @@
           <p:cNvPr id="8" name="">
             <a:extLst xmlns:a="http://schemas.openxmlformats.org/drawingml/2006/main">
               <a:ext uri="{FF2B5EF4-FFF2-40B4-BE49-F238E27FC236}">
-                <a16:creationId xmlns:a16="http://schemas.microsoft.com/office/drawing/2014/main" id="{F5A8B15B-C066-4CA3-B481-F164FB0CB5A1}"/>
+                <a16:creationId xmlns:a16="http://schemas.microsoft.com/office/drawing/2014/main" id="{7A198857-245C-424A-8D31-CDDDAE727490}"/>
               </a:ext>
             </a:extLst>
           </p:cNvPr>
@@ -2342,7 +2342,7 @@
           <p:cNvPr id="9" name="">
             <a:extLst xmlns:a="http://schemas.openxmlformats.org/drawingml/2006/main">
               <a:ext uri="{FF2B5EF4-FFF2-40B4-BE49-F238E27FC236}">
-                <a16:creationId xmlns:a16="http://schemas.microsoft.com/office/drawing/2014/main" id="{D3C392BD-50F4-40DF-B144-297648C117D4}"/>
+                <a16:creationId xmlns:a16="http://schemas.microsoft.com/office/drawing/2014/main" id="{700391B0-734A-4725-A5FE-4D57BF0DF752}"/>
               </a:ext>
             </a:extLst>
           </p:cNvPr>
@@ -2373,7 +2373,7 @@
           <p:cNvPr id="10" name="">
             <a:extLst xmlns:a="http://schemas.openxmlformats.org/drawingml/2006/main">
               <a:ext uri="{FF2B5EF4-FFF2-40B4-BE49-F238E27FC236}">
-                <a16:creationId xmlns:a16="http://schemas.microsoft.com/office/drawing/2014/main" id="{D317EAD1-9150-4DCC-8159-B3D1E2734C88}"/>
+                <a16:creationId xmlns:a16="http://schemas.microsoft.com/office/drawing/2014/main" id="{1B9A4CA6-C869-4A65-B07D-C16ED0E1A200}"/>
               </a:ext>
             </a:extLst>
           </p:cNvPr>
@@ -2393,7 +2393,7 @@
           <a:noFill xmlns:a="http://schemas.openxmlformats.org/drawingml/2006/main"/>
           <a:ln xmlns:a="http://schemas.openxmlformats.org/drawingml/2006/main" w="9525">
             <a:solidFill>
-              <a:srgbClr val="2A4D65"/>
+              <a:srgbClr val="C5D4DC"/>
             </a:solidFill>
             <a:prstDash val="solid"/>
           </a:ln>
@@ -2404,7 +2404,7 @@
           <p:cNvPr id="11" name="">
             <a:extLst xmlns:a="http://schemas.openxmlformats.org/drawingml/2006/main">
               <a:ext uri="{FF2B5EF4-FFF2-40B4-BE49-F238E27FC236}">
-                <a16:creationId xmlns:a16="http://schemas.microsoft.com/office/drawing/2014/main" id="{EE75B423-C411-49AE-92E4-B294969F9483}"/>
+                <a16:creationId xmlns:a16="http://schemas.microsoft.com/office/drawing/2014/main" id="{0A5FC105-1026-402E-8C88-015B4F0FAA13}"/>
               </a:ext>
             </a:extLst>
           </p:cNvPr>
@@ -2462,7 +2462,7 @@
           <p:cNvPr id="12" name="">
             <a:extLst xmlns:a="http://schemas.openxmlformats.org/drawingml/2006/main">
               <a:ext uri="{FF2B5EF4-FFF2-40B4-BE49-F238E27FC236}">
-                <a16:creationId xmlns:a16="http://schemas.microsoft.com/office/drawing/2014/main" id="{BE51354F-7C1C-4FEB-89EF-D4D7748227A0}"/>
+                <a16:creationId xmlns:a16="http://schemas.microsoft.com/office/drawing/2014/main" id="{BC8BA8C8-EB14-4C77-A59C-7FA9FC2CAAA6}"/>
               </a:ext>
             </a:extLst>
           </p:cNvPr>
@@ -2482,7 +2482,7 @@
             </a:avLst>
           </a:prstGeom>
           <a:solidFill xmlns:a="http://schemas.openxmlformats.org/drawingml/2006/main">
-            <a:srgbClr val="102F46"/>
+            <a:srgbClr val="FFFFFF"/>
           </a:solidFill>
           <a:ln xmlns:a="http://schemas.openxmlformats.org/drawingml/2006/main" w="9525">
             <a:solidFill>
@@ -2497,7 +2497,7 @@
           <p:cNvPr id="13" name="">
             <a:extLst xmlns:a="http://schemas.openxmlformats.org/drawingml/2006/main">
               <a:ext uri="{FF2B5EF4-FFF2-40B4-BE49-F238E27FC236}">
-                <a16:creationId xmlns:a16="http://schemas.microsoft.com/office/drawing/2014/main" id="{D5FAC75A-1FD7-48AB-AF0B-84CEF6EF2AB6}"/>
+                <a16:creationId xmlns:a16="http://schemas.microsoft.com/office/drawing/2014/main" id="{BDADFC30-CE31-4B4A-90BA-307D2BC6D058}"/>
               </a:ext>
             </a:extLst>
           </p:cNvPr>
@@ -2555,7 +2555,7 @@
           <p:cNvPr id="14" name="">
             <a:extLst xmlns:a="http://schemas.openxmlformats.org/drawingml/2006/main">
               <a:ext uri="{FF2B5EF4-FFF2-40B4-BE49-F238E27FC236}">
-                <a16:creationId xmlns:a16="http://schemas.microsoft.com/office/drawing/2014/main" id="{2C88EBCE-72B4-4ECE-AD61-2D8F70C5A10A}"/>
+                <a16:creationId xmlns:a16="http://schemas.microsoft.com/office/drawing/2014/main" id="{EB44BE91-2BB1-401B-BA71-BCE92FC30BE6}"/>
               </a:ext>
             </a:extLst>
           </p:cNvPr>
@@ -2587,7 +2587,7 @@
             <a:pPr algn="l">
               <a:defRPr sz="3000" b="0">
                 <a:solidFill>
-                  <a:srgbClr val="F3F8FA"/>
+                  <a:srgbClr val="132E41"/>
                 </a:solidFill>
                 <a:latin typeface="Georgia"/>
                 <a:ea typeface="Georgia"/>
@@ -2597,7 +2597,7 @@
             <a:r>
               <a:rPr sz="3000" b="0">
                 <a:solidFill>
-                  <a:srgbClr val="F3F8FA"/>
+                  <a:srgbClr val="132E41"/>
                 </a:solidFill>
                 <a:latin typeface="Georgia"/>
                 <a:ea typeface="Georgia"/>
@@ -2613,7 +2613,7 @@
           <p:cNvPr id="15" name="">
             <a:extLst xmlns:a="http://schemas.openxmlformats.org/drawingml/2006/main">
               <a:ext uri="{FF2B5EF4-FFF2-40B4-BE49-F238E27FC236}">
-                <a16:creationId xmlns:a16="http://schemas.microsoft.com/office/drawing/2014/main" id="{15E24CBF-6048-4991-9D0A-EAB4C9571873}"/>
+                <a16:creationId xmlns:a16="http://schemas.microsoft.com/office/drawing/2014/main" id="{88E1C52C-D1B6-4DA8-AFB7-CA917FFCE115}"/>
               </a:ext>
             </a:extLst>
           </p:cNvPr>
@@ -2671,7 +2671,7 @@
           <p:cNvPr id="16" name="">
             <a:extLst xmlns:a="http://schemas.openxmlformats.org/drawingml/2006/main">
               <a:ext uri="{FF2B5EF4-FFF2-40B4-BE49-F238E27FC236}">
-                <a16:creationId xmlns:a16="http://schemas.microsoft.com/office/drawing/2014/main" id="{8F499841-8D8A-437B-B7A0-23FE633A9BD2}"/>
+                <a16:creationId xmlns:a16="http://schemas.microsoft.com/office/drawing/2014/main" id="{399AF69E-9B18-467B-8114-794F0832E405}"/>
               </a:ext>
             </a:extLst>
           </p:cNvPr>
@@ -2703,7 +2703,7 @@
             <a:pPr algn="l">
               <a:defRPr sz="1350" b="0">
                 <a:solidFill>
-                  <a:srgbClr val="B8C9D3"/>
+                  <a:srgbClr val="587080"/>
                 </a:solidFill>
                 <a:latin typeface="Arial"/>
                 <a:ea typeface="Arial"/>
@@ -2713,7 +2713,7 @@
             <a:r>
               <a:rPr sz="1350" b="0">
                 <a:solidFill>
-                  <a:srgbClr val="B8C9D3"/>
+                  <a:srgbClr val="587080"/>
                 </a:solidFill>
                 <a:latin typeface="Arial"/>
                 <a:ea typeface="Arial"/>
@@ -2726,7 +2726,7 @@
             <a:pPr algn="l">
               <a:defRPr sz="1350" b="0">
                 <a:solidFill>
-                  <a:srgbClr val="B8C9D3"/>
+                  <a:srgbClr val="587080"/>
                 </a:solidFill>
                 <a:latin typeface="Arial"/>
                 <a:ea typeface="Arial"/>
@@ -2736,7 +2736,7 @@
             <a:r>
               <a:rPr sz="1350" b="0">
                 <a:solidFill>
-                  <a:srgbClr val="B8C9D3"/>
+                  <a:srgbClr val="587080"/>
                 </a:solidFill>
                 <a:latin typeface="Arial"/>
                 <a:ea typeface="Arial"/>
@@ -2752,7 +2752,7 @@
           <p:cNvPr id="17" name="">
             <a:extLst xmlns:a="http://schemas.openxmlformats.org/drawingml/2006/main">
               <a:ext uri="{FF2B5EF4-FFF2-40B4-BE49-F238E27FC236}">
-                <a16:creationId xmlns:a16="http://schemas.microsoft.com/office/drawing/2014/main" id="{5C78B164-1312-4551-BC5D-087C60E5206A}"/>
+                <a16:creationId xmlns:a16="http://schemas.microsoft.com/office/drawing/2014/main" id="{E5A1C2F6-B0F2-4296-BB41-2B7622EEC471}"/>
               </a:ext>
             </a:extLst>
           </p:cNvPr>
@@ -2810,7 +2810,7 @@
           <p:cNvPr id="18" name="">
             <a:extLst xmlns:a="http://schemas.openxmlformats.org/drawingml/2006/main">
               <a:ext uri="{FF2B5EF4-FFF2-40B4-BE49-F238E27FC236}">
-                <a16:creationId xmlns:a16="http://schemas.microsoft.com/office/drawing/2014/main" id="{77DFE1D1-3100-4D1B-821C-9B9FBEEFD797}"/>
+                <a16:creationId xmlns:a16="http://schemas.microsoft.com/office/drawing/2014/main" id="{FBF2C624-83C1-4B87-9DDF-339E4006A3B5}"/>
               </a:ext>
             </a:extLst>
           </p:cNvPr>
@@ -2867,7 +2867,7 @@
           <p:cNvPr id="19" name="">
             <a:extLst xmlns:a="http://schemas.openxmlformats.org/drawingml/2006/main">
               <a:ext uri="{FF2B5EF4-FFF2-40B4-BE49-F238E27FC236}">
-                <a16:creationId xmlns:a16="http://schemas.microsoft.com/office/drawing/2014/main" id="{5FCD479E-50BA-49DD-B913-5E286B67DC6C}"/>
+                <a16:creationId xmlns:a16="http://schemas.microsoft.com/office/drawing/2014/main" id="{31B6068E-4DC0-4DB7-936C-6AE5D8C4A4CE}"/>
               </a:ext>
             </a:extLst>
           </p:cNvPr>
@@ -2898,7 +2898,7 @@
           <p:cNvPr id="20" name="">
             <a:extLst xmlns:a="http://schemas.openxmlformats.org/drawingml/2006/main">
               <a:ext uri="{FF2B5EF4-FFF2-40B4-BE49-F238E27FC236}">
-                <a16:creationId xmlns:a16="http://schemas.microsoft.com/office/drawing/2014/main" id="{8438550C-8B28-43B0-9FAF-59153FC518DB}"/>
+                <a16:creationId xmlns:a16="http://schemas.microsoft.com/office/drawing/2014/main" id="{4BFF503E-6617-4A70-A33D-DA8C0DC7FB26}"/>
               </a:ext>
             </a:extLst>
           </p:cNvPr>
@@ -2930,7 +2930,7 @@
             <a:pPr algn="ctr">
               <a:defRPr sz="750" b="1">
                 <a:solidFill>
-                  <a:srgbClr val="B8C9D3"/>
+                  <a:srgbClr val="587080"/>
                 </a:solidFill>
                 <a:latin typeface="Arial"/>
                 <a:ea typeface="Arial"/>
@@ -2940,7 +2940,7 @@
             <a:r>
               <a:rPr sz="750" b="1">
                 <a:solidFill>
-                  <a:srgbClr val="B8C9D3"/>
+                  <a:srgbClr val="587080"/>
                 </a:solidFill>
                 <a:latin typeface="Arial"/>
                 <a:ea typeface="Arial"/>
@@ -2956,7 +2956,7 @@
           <p:cNvPr id="21" name="">
             <a:extLst xmlns:a="http://schemas.openxmlformats.org/drawingml/2006/main">
               <a:ext uri="{FF2B5EF4-FFF2-40B4-BE49-F238E27FC236}">
-                <a16:creationId xmlns:a16="http://schemas.microsoft.com/office/drawing/2014/main" id="{8F993A89-F703-4ED2-87B0-02EC5321A9D8}"/>
+                <a16:creationId xmlns:a16="http://schemas.microsoft.com/office/drawing/2014/main" id="{938D8B42-4116-46EB-B6A5-6582D11EEB40}"/>
               </a:ext>
             </a:extLst>
           </p:cNvPr>
@@ -3013,7 +3013,7 @@
           <p:cNvPr id="22" name="">
             <a:extLst xmlns:a="http://schemas.openxmlformats.org/drawingml/2006/main">
               <a:ext uri="{FF2B5EF4-FFF2-40B4-BE49-F238E27FC236}">
-                <a16:creationId xmlns:a16="http://schemas.microsoft.com/office/drawing/2014/main" id="{FBFEC773-20BE-4238-AC1D-DA5B5EAFDD44}"/>
+                <a16:creationId xmlns:a16="http://schemas.microsoft.com/office/drawing/2014/main" id="{A0E72602-D6A0-4DDE-84F3-13C679EC3340}"/>
               </a:ext>
             </a:extLst>
           </p:cNvPr>
@@ -3044,7 +3044,7 @@
           <p:cNvPr id="23" name="">
             <a:extLst xmlns:a="http://schemas.openxmlformats.org/drawingml/2006/main">
               <a:ext uri="{FF2B5EF4-FFF2-40B4-BE49-F238E27FC236}">
-                <a16:creationId xmlns:a16="http://schemas.microsoft.com/office/drawing/2014/main" id="{E4EFD743-D30C-4E26-854B-6AE313CC2A6E}"/>
+                <a16:creationId xmlns:a16="http://schemas.microsoft.com/office/drawing/2014/main" id="{9C893D50-3F76-4178-A410-23728134D221}"/>
               </a:ext>
             </a:extLst>
           </p:cNvPr>
@@ -3076,7 +3076,7 @@
             <a:pPr algn="ctr">
               <a:defRPr sz="750" b="1">
                 <a:solidFill>
-                  <a:srgbClr val="B8C9D3"/>
+                  <a:srgbClr val="587080"/>
                 </a:solidFill>
                 <a:latin typeface="Arial"/>
                 <a:ea typeface="Arial"/>
@@ -3086,7 +3086,7 @@
             <a:r>
               <a:rPr sz="750" b="1">
                 <a:solidFill>
-                  <a:srgbClr val="B8C9D3"/>
+                  <a:srgbClr val="587080"/>
                 </a:solidFill>
                 <a:latin typeface="Arial"/>
                 <a:ea typeface="Arial"/>
@@ -3102,7 +3102,7 @@
           <p:cNvPr id="24" name="">
             <a:extLst xmlns:a="http://schemas.openxmlformats.org/drawingml/2006/main">
               <a:ext uri="{FF2B5EF4-FFF2-40B4-BE49-F238E27FC236}">
-                <a16:creationId xmlns:a16="http://schemas.microsoft.com/office/drawing/2014/main" id="{14ECB9B4-AD2A-48BF-A454-A61AA5E5FCD4}"/>
+                <a16:creationId xmlns:a16="http://schemas.microsoft.com/office/drawing/2014/main" id="{6F6A7480-DE09-4D2B-8461-C0B08A2E57DA}"/>
               </a:ext>
             </a:extLst>
           </p:cNvPr>
@@ -3159,7 +3159,7 @@
           <p:cNvPr id="25" name="">
             <a:extLst xmlns:a="http://schemas.openxmlformats.org/drawingml/2006/main">
               <a:ext uri="{FF2B5EF4-FFF2-40B4-BE49-F238E27FC236}">
-                <a16:creationId xmlns:a16="http://schemas.microsoft.com/office/drawing/2014/main" id="{65642278-7C93-4657-A36A-DF2771E3DDAA}"/>
+                <a16:creationId xmlns:a16="http://schemas.microsoft.com/office/drawing/2014/main" id="{3A9FAC64-8946-4653-BAF1-539F24C2B3BC}"/>
               </a:ext>
             </a:extLst>
           </p:cNvPr>
@@ -3190,7 +3190,7 @@
           <p:cNvPr id="26" name="">
             <a:extLst xmlns:a="http://schemas.openxmlformats.org/drawingml/2006/main">
               <a:ext uri="{FF2B5EF4-FFF2-40B4-BE49-F238E27FC236}">
-                <a16:creationId xmlns:a16="http://schemas.microsoft.com/office/drawing/2014/main" id="{EFF99457-FF7B-4715-BC3B-32E34251B5B5}"/>
+                <a16:creationId xmlns:a16="http://schemas.microsoft.com/office/drawing/2014/main" id="{2FAF6B22-8EE3-451A-9214-84F688DDC03B}"/>
               </a:ext>
             </a:extLst>
           </p:cNvPr>
@@ -3222,7 +3222,7 @@
             <a:pPr algn="ctr">
               <a:defRPr sz="750" b="1">
                 <a:solidFill>
-                  <a:srgbClr val="B8C9D3"/>
+                  <a:srgbClr val="587080"/>
                 </a:solidFill>
                 <a:latin typeface="Arial"/>
                 <a:ea typeface="Arial"/>
@@ -3232,7 +3232,7 @@
             <a:r>
               <a:rPr sz="750" b="1">
                 <a:solidFill>
-                  <a:srgbClr val="B8C9D3"/>
+                  <a:srgbClr val="587080"/>
                 </a:solidFill>
                 <a:latin typeface="Arial"/>
                 <a:ea typeface="Arial"/>
@@ -3248,7 +3248,7 @@
           <p:cNvPr id="27" name="">
             <a:extLst xmlns:a="http://schemas.openxmlformats.org/drawingml/2006/main">
               <a:ext uri="{FF2B5EF4-FFF2-40B4-BE49-F238E27FC236}">
-                <a16:creationId xmlns:a16="http://schemas.microsoft.com/office/drawing/2014/main" id="{63408B6A-E240-4279-8148-33A9BE053D3B}"/>
+                <a16:creationId xmlns:a16="http://schemas.microsoft.com/office/drawing/2014/main" id="{15B4E1D9-85B4-4A05-802D-C7751D802F0B}"/>
               </a:ext>
             </a:extLst>
           </p:cNvPr>
@@ -3305,7 +3305,7 @@
           <p:cNvPr id="28" name="">
             <a:extLst xmlns:a="http://schemas.openxmlformats.org/drawingml/2006/main">
               <a:ext uri="{FF2B5EF4-FFF2-40B4-BE49-F238E27FC236}">
-                <a16:creationId xmlns:a16="http://schemas.microsoft.com/office/drawing/2014/main" id="{84B08FBC-E13F-437B-9300-CB409D49C6E4}"/>
+                <a16:creationId xmlns:a16="http://schemas.microsoft.com/office/drawing/2014/main" id="{99249210-6266-4C4E-A34C-A2E8087A1B79}"/>
               </a:ext>
             </a:extLst>
           </p:cNvPr>
@@ -3336,7 +3336,7 @@
           <p:cNvPr id="29" name="">
             <a:extLst xmlns:a="http://schemas.openxmlformats.org/drawingml/2006/main">
               <a:ext uri="{FF2B5EF4-FFF2-40B4-BE49-F238E27FC236}">
-                <a16:creationId xmlns:a16="http://schemas.microsoft.com/office/drawing/2014/main" id="{10CD66DD-3B08-42FD-B65C-043B2C738A32}"/>
+                <a16:creationId xmlns:a16="http://schemas.microsoft.com/office/drawing/2014/main" id="{82E69894-B416-46F6-81DD-62F142DB35A0}"/>
               </a:ext>
             </a:extLst>
           </p:cNvPr>
@@ -3368,7 +3368,7 @@
             <a:pPr algn="ctr">
               <a:defRPr sz="750" b="1">
                 <a:solidFill>
-                  <a:srgbClr val="B8C9D3"/>
+                  <a:srgbClr val="587080"/>
                 </a:solidFill>
                 <a:latin typeface="Arial"/>
                 <a:ea typeface="Arial"/>
@@ -3378,7 +3378,7 @@
             <a:r>
               <a:rPr sz="750" b="1">
                 <a:solidFill>
-                  <a:srgbClr val="B8C9D3"/>
+                  <a:srgbClr val="587080"/>
                 </a:solidFill>
                 <a:latin typeface="Arial"/>
                 <a:ea typeface="Arial"/>
@@ -3394,7 +3394,7 @@
           <p:cNvPr id="30" name="">
             <a:extLst xmlns:a="http://schemas.openxmlformats.org/drawingml/2006/main">
               <a:ext uri="{FF2B5EF4-FFF2-40B4-BE49-F238E27FC236}">
-                <a16:creationId xmlns:a16="http://schemas.microsoft.com/office/drawing/2014/main" id="{1A596611-3EB9-4C99-91AC-9B7F24ECDCB1}"/>
+                <a16:creationId xmlns:a16="http://schemas.microsoft.com/office/drawing/2014/main" id="{37A398B0-548A-4395-9251-65CD961FD106}"/>
               </a:ext>
             </a:extLst>
           </p:cNvPr>
@@ -3414,7 +3414,7 @@
           <a:noFill xmlns:a="http://schemas.openxmlformats.org/drawingml/2006/main"/>
           <a:ln xmlns:a="http://schemas.openxmlformats.org/drawingml/2006/main" w="19050">
             <a:solidFill>
-              <a:srgbClr val="2A4D65"/>
+              <a:srgbClr val="C5D4DC"/>
             </a:solidFill>
             <a:prstDash val="solid"/>
           </a:ln>
@@ -3425,7 +3425,7 @@
           <p:cNvPr id="31" name="">
             <a:extLst xmlns:a="http://schemas.openxmlformats.org/drawingml/2006/main">
               <a:ext uri="{FF2B5EF4-FFF2-40B4-BE49-F238E27FC236}">
-                <a16:creationId xmlns:a16="http://schemas.microsoft.com/office/drawing/2014/main" id="{DC5A3CBB-A8F0-41F4-A349-4E0008EC7A52}"/>
+                <a16:creationId xmlns:a16="http://schemas.microsoft.com/office/drawing/2014/main" id="{D0D4A92D-4468-40F6-A7D8-0CCF9CD21F5B}"/>
               </a:ext>
             </a:extLst>
           </p:cNvPr>
@@ -3445,7 +3445,7 @@
           <a:noFill xmlns:a="http://schemas.openxmlformats.org/drawingml/2006/main"/>
           <a:ln xmlns:a="http://schemas.openxmlformats.org/drawingml/2006/main" w="19050">
             <a:solidFill>
-              <a:srgbClr val="2A4D65"/>
+              <a:srgbClr val="C5D4DC"/>
             </a:solidFill>
             <a:prstDash val="solid"/>
           </a:ln>
@@ -3456,7 +3456,7 @@
           <p:cNvPr id="32" name="">
             <a:extLst xmlns:a="http://schemas.openxmlformats.org/drawingml/2006/main">
               <a:ext uri="{FF2B5EF4-FFF2-40B4-BE49-F238E27FC236}">
-                <a16:creationId xmlns:a16="http://schemas.microsoft.com/office/drawing/2014/main" id="{A9B5D9AB-783F-433B-AA24-93DE348029FB}"/>
+                <a16:creationId xmlns:a16="http://schemas.microsoft.com/office/drawing/2014/main" id="{9FAF37DC-69B9-47FE-AF47-27D9C641A1DE}"/>
               </a:ext>
             </a:extLst>
           </p:cNvPr>
@@ -3476,7 +3476,7 @@
           <a:noFill xmlns:a="http://schemas.openxmlformats.org/drawingml/2006/main"/>
           <a:ln xmlns:a="http://schemas.openxmlformats.org/drawingml/2006/main" w="19050">
             <a:solidFill>
-              <a:srgbClr val="2A4D65"/>
+              <a:srgbClr val="C5D4DC"/>
             </a:solidFill>
             <a:prstDash val="solid"/>
           </a:ln>
@@ -3487,7 +3487,7 @@
           <p:cNvPr id="33" name="">
             <a:extLst xmlns:a="http://schemas.openxmlformats.org/drawingml/2006/main">
               <a:ext uri="{FF2B5EF4-FFF2-40B4-BE49-F238E27FC236}">
-                <a16:creationId xmlns:a16="http://schemas.microsoft.com/office/drawing/2014/main" id="{5957C680-1003-44BA-B8F0-F29498DCA8A5}"/>
+                <a16:creationId xmlns:a16="http://schemas.microsoft.com/office/drawing/2014/main" id="{C95C4534-BD2F-47E8-A5DC-D243CDFC28DC}"/>
               </a:ext>
             </a:extLst>
           </p:cNvPr>
@@ -3507,7 +3507,7 @@
           <a:noFill xmlns:a="http://schemas.openxmlformats.org/drawingml/2006/main"/>
           <a:ln xmlns:a="http://schemas.openxmlformats.org/drawingml/2006/main" w="19050">
             <a:solidFill>
-              <a:srgbClr val="2A4D65"/>
+              <a:srgbClr val="C5D4DC"/>
             </a:solidFill>
             <a:prstDash val="solid"/>
           </a:ln>
@@ -3518,7 +3518,7 @@
           <p:cNvPr id="34" name="">
             <a:extLst xmlns:a="http://schemas.openxmlformats.org/drawingml/2006/main">
               <a:ext uri="{FF2B5EF4-FFF2-40B4-BE49-F238E27FC236}">
-                <a16:creationId xmlns:a16="http://schemas.microsoft.com/office/drawing/2014/main" id="{278C5D91-8CBF-43AD-AAE3-EE655D18E5F4}"/>
+                <a16:creationId xmlns:a16="http://schemas.microsoft.com/office/drawing/2014/main" id="{7E503BF8-EF75-4F48-BB3C-F00EEE865A35}"/>
               </a:ext>
             </a:extLst>
           </p:cNvPr>
@@ -3575,7 +3575,7 @@
           <p:cNvPr id="35" name="">
             <a:extLst xmlns:a="http://schemas.openxmlformats.org/drawingml/2006/main">
               <a:ext uri="{FF2B5EF4-FFF2-40B4-BE49-F238E27FC236}">
-                <a16:creationId xmlns:a16="http://schemas.microsoft.com/office/drawing/2014/main" id="{72B2CD5A-61BC-4F27-9F1A-52F815BC153F}"/>
+                <a16:creationId xmlns:a16="http://schemas.microsoft.com/office/drawing/2014/main" id="{6515B930-3144-43E7-A8FA-45E2AE4A0B46}"/>
               </a:ext>
             </a:extLst>
           </p:cNvPr>
@@ -3633,7 +3633,7 @@
           <p:cNvPr id="36" name="">
             <a:extLst xmlns:a="http://schemas.openxmlformats.org/drawingml/2006/main">
               <a:ext uri="{FF2B5EF4-FFF2-40B4-BE49-F238E27FC236}">
-                <a16:creationId xmlns:a16="http://schemas.microsoft.com/office/drawing/2014/main" id="{1BEC3AE8-8060-4288-AE71-D20382113DD0}"/>
+                <a16:creationId xmlns:a16="http://schemas.microsoft.com/office/drawing/2014/main" id="{A9BFB888-9959-4EE8-B73F-1FED2274386D}"/>
               </a:ext>
             </a:extLst>
           </p:cNvPr>
@@ -3665,7 +3665,7 @@
             <a:pPr algn="l">
               <a:defRPr sz="600" b="0">
                 <a:solidFill>
-                  <a:srgbClr val="B8C9D3"/>
+                  <a:srgbClr val="587080"/>
                 </a:solidFill>
                 <a:latin typeface="Arial"/>
                 <a:ea typeface="Arial"/>
@@ -3675,7 +3675,7 @@
             <a:r>
               <a:rPr sz="600" b="0">
                 <a:solidFill>
-                  <a:srgbClr val="B8C9D3"/>
+                  <a:srgbClr val="587080"/>
                 </a:solidFill>
                 <a:latin typeface="Arial"/>
                 <a:ea typeface="Arial"/>
@@ -3691,7 +3691,7 @@
           <p:cNvPr id="37" name="">
             <a:extLst xmlns:a="http://schemas.openxmlformats.org/drawingml/2006/main">
               <a:ext uri="{FF2B5EF4-FFF2-40B4-BE49-F238E27FC236}">
-                <a16:creationId xmlns:a16="http://schemas.microsoft.com/office/drawing/2014/main" id="{6BDCCC25-FC77-484C-B05E-F51A63520631}"/>
+                <a16:creationId xmlns:a16="http://schemas.microsoft.com/office/drawing/2014/main" id="{ACA37F5D-8CE0-49E2-9525-030159E21510}"/>
               </a:ext>
             </a:extLst>
           </p:cNvPr>
@@ -3723,7 +3723,7 @@
             <a:pPr algn="r">
               <a:defRPr sz="750" b="1">
                 <a:solidFill>
-                  <a:srgbClr val="B8C9D3"/>
+                  <a:srgbClr val="587080"/>
                 </a:solidFill>
                 <a:latin typeface="Arial"/>
                 <a:ea typeface="Arial"/>
@@ -3733,7 +3733,7 @@
             <a:r>
               <a:rPr sz="750" b="1">
                 <a:solidFill>
-                  <a:srgbClr val="B8C9D3"/>
+                  <a:srgbClr val="587080"/>
                 </a:solidFill>
                 <a:latin typeface="Arial"/>
                 <a:ea typeface="Arial"/>
@@ -3747,7 +3747,7 @@
     </p:spTree>
     <p:extLst>
       <p:ext uri="{BB962C8B-B14F-4D97-AF65-F5344CB8AC3E}">
-        <p14:creationId xmlns:p14="http://schemas.microsoft.com/office/powerpoint/2010/main" val="765956325"/>
+        <p14:creationId xmlns:p14="http://schemas.microsoft.com/office/powerpoint/2010/main" val="1161232878"/>
       </p:ext>
     </p:extLst>
   </p:cSld>
@@ -3760,7 +3760,7 @@
     <p:bg>
       <p:bgPr>
         <a:solidFill xmlns:a="http://schemas.openxmlformats.org/drawingml/2006/main">
-          <a:srgbClr val="0E293C"/>
+          <a:srgbClr val="F3F1EB"/>
         </a:solidFill>
       </p:bgPr>
     </p:bg>
@@ -3778,7 +3778,7 @@
           <p:cNvPr id="32" name="">
             <a:extLst xmlns:a="http://schemas.openxmlformats.org/drawingml/2006/main">
               <a:ext uri="{FF2B5EF4-FFF2-40B4-BE49-F238E27FC236}">
-                <a16:creationId xmlns:a16="http://schemas.microsoft.com/office/drawing/2014/main" id="{4F6B85A8-39B2-4AE0-A3CE-8A176AE6D536}"/>
+                <a16:creationId xmlns:a16="http://schemas.microsoft.com/office/drawing/2014/main" id="{C66D79EC-DF3D-4351-9C8C-143C3911D07E}"/>
               </a:ext>
             </a:extLst>
           </p:cNvPr>
@@ -3835,7 +3835,7 @@
           <p:cNvPr id="2" name="">
             <a:extLst xmlns:a="http://schemas.openxmlformats.org/drawingml/2006/main">
               <a:ext uri="{FF2B5EF4-FFF2-40B4-BE49-F238E27FC236}">
-                <a16:creationId xmlns:a16="http://schemas.microsoft.com/office/drawing/2014/main" id="{5ED11260-BEF8-4423-87D4-53ADB09A7614}"/>
+                <a16:creationId xmlns:a16="http://schemas.microsoft.com/office/drawing/2014/main" id="{FBA4F72F-DA49-4FC7-905F-6010B6551B13}"/>
               </a:ext>
             </a:extLst>
           </p:cNvPr>
@@ -3892,7 +3892,7 @@
           <p:cNvPr id="3" name="">
             <a:extLst xmlns:a="http://schemas.openxmlformats.org/drawingml/2006/main">
               <a:ext uri="{FF2B5EF4-FFF2-40B4-BE49-F238E27FC236}">
-                <a16:creationId xmlns:a16="http://schemas.microsoft.com/office/drawing/2014/main" id="{4636B0F7-6536-4135-ABCE-3DC00BC00B08}"/>
+                <a16:creationId xmlns:a16="http://schemas.microsoft.com/office/drawing/2014/main" id="{F715B160-2DBD-45C8-BD40-69A4BE7F5F73}"/>
               </a:ext>
             </a:extLst>
           </p:cNvPr>
@@ -3949,7 +3949,7 @@
           <p:cNvPr id="4" name="">
             <a:extLst xmlns:a="http://schemas.openxmlformats.org/drawingml/2006/main">
               <a:ext uri="{FF2B5EF4-FFF2-40B4-BE49-F238E27FC236}">
-                <a16:creationId xmlns:a16="http://schemas.microsoft.com/office/drawing/2014/main" id="{23780CD7-F57B-4235-A6DA-A83C535B775E}"/>
+                <a16:creationId xmlns:a16="http://schemas.microsoft.com/office/drawing/2014/main" id="{EC490613-E303-431B-8F4F-2D390893FC07}"/>
               </a:ext>
             </a:extLst>
           </p:cNvPr>
@@ -3980,7 +3980,7 @@
           <p:cNvPr id="5" name="">
             <a:extLst xmlns:a="http://schemas.openxmlformats.org/drawingml/2006/main">
               <a:ext uri="{FF2B5EF4-FFF2-40B4-BE49-F238E27FC236}">
-                <a16:creationId xmlns:a16="http://schemas.microsoft.com/office/drawing/2014/main" id="{287A9252-2C90-40CB-B7B2-CA850C8A8807}"/>
+                <a16:creationId xmlns:a16="http://schemas.microsoft.com/office/drawing/2014/main" id="{C98EEBEC-E5AC-47D3-A809-507732251851}"/>
               </a:ext>
             </a:extLst>
           </p:cNvPr>
@@ -4000,7 +4000,7 @@
           <a:noFill xmlns:a="http://schemas.openxmlformats.org/drawingml/2006/main"/>
           <a:ln xmlns:a="http://schemas.openxmlformats.org/drawingml/2006/main" w="9525">
             <a:solidFill>
-              <a:srgbClr val="2A4D65"/>
+              <a:srgbClr val="C5D4DC"/>
             </a:solidFill>
             <a:prstDash val="solid"/>
           </a:ln>
@@ -4011,7 +4011,7 @@
           <p:cNvPr id="6" name="">
             <a:extLst xmlns:a="http://schemas.openxmlformats.org/drawingml/2006/main">
               <a:ext uri="{FF2B5EF4-FFF2-40B4-BE49-F238E27FC236}">
-                <a16:creationId xmlns:a16="http://schemas.microsoft.com/office/drawing/2014/main" id="{021E9560-150E-44D3-B168-34B134DE8E4E}"/>
+                <a16:creationId xmlns:a16="http://schemas.microsoft.com/office/drawing/2014/main" id="{8D660959-576B-4378-9F8B-8F58779264F8}"/>
               </a:ext>
             </a:extLst>
           </p:cNvPr>
@@ -4068,7 +4068,7 @@
           <p:cNvPr id="7" name="">
             <a:extLst xmlns:a="http://schemas.openxmlformats.org/drawingml/2006/main">
               <a:ext uri="{FF2B5EF4-FFF2-40B4-BE49-F238E27FC236}">
-                <a16:creationId xmlns:a16="http://schemas.microsoft.com/office/drawing/2014/main" id="{4F9B00DA-06FC-42EC-BDD1-CA1DE102794B}"/>
+                <a16:creationId xmlns:a16="http://schemas.microsoft.com/office/drawing/2014/main" id="{065F4C60-00A0-4862-8394-011D13272EEC}"/>
               </a:ext>
             </a:extLst>
           </p:cNvPr>
@@ -4125,7 +4125,7 @@
           <p:cNvPr id="8" name="">
             <a:extLst xmlns:a="http://schemas.openxmlformats.org/drawingml/2006/main">
               <a:ext uri="{FF2B5EF4-FFF2-40B4-BE49-F238E27FC236}">
-                <a16:creationId xmlns:a16="http://schemas.microsoft.com/office/drawing/2014/main" id="{EAB01C30-0BCB-4B2D-9421-0A09846F5D5B}"/>
+                <a16:creationId xmlns:a16="http://schemas.microsoft.com/office/drawing/2014/main" id="{A63393BF-3D27-468A-AA1F-37CAB88B7BB9}"/>
               </a:ext>
             </a:extLst>
           </p:cNvPr>
@@ -4182,7 +4182,7 @@
           <p:cNvPr id="9" name="">
             <a:extLst xmlns:a="http://schemas.openxmlformats.org/drawingml/2006/main">
               <a:ext uri="{FF2B5EF4-FFF2-40B4-BE49-F238E27FC236}">
-                <a16:creationId xmlns:a16="http://schemas.microsoft.com/office/drawing/2014/main" id="{7C8DBED4-778B-438D-BFE9-C8AE6D651AC4}"/>
+                <a16:creationId xmlns:a16="http://schemas.microsoft.com/office/drawing/2014/main" id="{1CF1A4B4-3675-4E20-A982-DE5EC351A94A}"/>
               </a:ext>
             </a:extLst>
           </p:cNvPr>
@@ -4213,7 +4213,7 @@
           <p:cNvPr id="10" name="">
             <a:extLst xmlns:a="http://schemas.openxmlformats.org/drawingml/2006/main">
               <a:ext uri="{FF2B5EF4-FFF2-40B4-BE49-F238E27FC236}">
-                <a16:creationId xmlns:a16="http://schemas.microsoft.com/office/drawing/2014/main" id="{DB79F57A-36FB-4B0E-BAE5-D44212F6E8A1}"/>
+                <a16:creationId xmlns:a16="http://schemas.microsoft.com/office/drawing/2014/main" id="{B2FF55C9-8331-42CC-9478-1AFFBB8598F3}"/>
               </a:ext>
             </a:extLst>
           </p:cNvPr>
@@ -4233,7 +4233,7 @@
           <a:noFill xmlns:a="http://schemas.openxmlformats.org/drawingml/2006/main"/>
           <a:ln xmlns:a="http://schemas.openxmlformats.org/drawingml/2006/main" w="9525">
             <a:solidFill>
-              <a:srgbClr val="2A4D65"/>
+              <a:srgbClr val="C5D4DC"/>
             </a:solidFill>
             <a:prstDash val="solid"/>
           </a:ln>
@@ -4244,7 +4244,7 @@
           <p:cNvPr id="11" name="">
             <a:extLst xmlns:a="http://schemas.openxmlformats.org/drawingml/2006/main">
               <a:ext uri="{FF2B5EF4-FFF2-40B4-BE49-F238E27FC236}">
-                <a16:creationId xmlns:a16="http://schemas.microsoft.com/office/drawing/2014/main" id="{D14F5288-518C-4885-B1EF-EE557181F28C}"/>
+                <a16:creationId xmlns:a16="http://schemas.microsoft.com/office/drawing/2014/main" id="{D2744AA4-2E32-4AB6-855A-F12A5CEA965F}"/>
               </a:ext>
             </a:extLst>
           </p:cNvPr>
@@ -4302,7 +4302,7 @@
           <p:cNvPr id="12" name="">
             <a:extLst xmlns:a="http://schemas.openxmlformats.org/drawingml/2006/main">
               <a:ext uri="{FF2B5EF4-FFF2-40B4-BE49-F238E27FC236}">
-                <a16:creationId xmlns:a16="http://schemas.microsoft.com/office/drawing/2014/main" id="{7B964BB7-EB34-41E2-AA0F-25EE68445D98}"/>
+                <a16:creationId xmlns:a16="http://schemas.microsoft.com/office/drawing/2014/main" id="{ED73540C-5281-46DE-98A2-ED0EDD0DD2D9}"/>
               </a:ext>
             </a:extLst>
           </p:cNvPr>
@@ -4334,7 +4334,7 @@
             <a:pPr algn="r">
               <a:defRPr sz="750" b="1">
                 <a:solidFill>
-                  <a:srgbClr val="B8C9D3"/>
+                  <a:srgbClr val="587080"/>
                 </a:solidFill>
                 <a:latin typeface="Arial"/>
                 <a:ea typeface="Arial"/>
@@ -4344,7 +4344,7 @@
             <a:r>
               <a:rPr sz="750" b="1">
                 <a:solidFill>
-                  <a:srgbClr val="B8C9D3"/>
+                  <a:srgbClr val="587080"/>
                 </a:solidFill>
                 <a:latin typeface="Arial"/>
                 <a:ea typeface="Arial"/>
@@ -4360,7 +4360,7 @@
           <p:cNvPr id="13" name="">
             <a:extLst xmlns:a="http://schemas.openxmlformats.org/drawingml/2006/main">
               <a:ext uri="{FF2B5EF4-FFF2-40B4-BE49-F238E27FC236}">
-                <a16:creationId xmlns:a16="http://schemas.microsoft.com/office/drawing/2014/main" id="{F2E40A40-1B49-4573-9F1E-DA5FA1472B45}"/>
+                <a16:creationId xmlns:a16="http://schemas.microsoft.com/office/drawing/2014/main" id="{F88911D3-70FC-403B-8DAC-C1B8974560E8}"/>
               </a:ext>
             </a:extLst>
           </p:cNvPr>
@@ -4392,7 +4392,7 @@
             <a:pPr algn="l">
               <a:defRPr sz="600" b="0">
                 <a:solidFill>
-                  <a:srgbClr val="B8C9D3"/>
+                  <a:srgbClr val="587080"/>
                 </a:solidFill>
                 <a:latin typeface="Arial"/>
                 <a:ea typeface="Arial"/>
@@ -4402,7 +4402,7 @@
             <a:r>
               <a:rPr sz="600" b="0">
                 <a:solidFill>
-                  <a:srgbClr val="B8C9D3"/>
+                  <a:srgbClr val="587080"/>
                 </a:solidFill>
                 <a:latin typeface="Arial"/>
                 <a:ea typeface="Arial"/>
@@ -4418,7 +4418,7 @@
           <p:cNvPr id="14" name="">
             <a:extLst xmlns:a="http://schemas.openxmlformats.org/drawingml/2006/main">
               <a:ext uri="{FF2B5EF4-FFF2-40B4-BE49-F238E27FC236}">
-                <a16:creationId xmlns:a16="http://schemas.microsoft.com/office/drawing/2014/main" id="{2D71EE50-8143-493A-B780-8ECE1B919243}"/>
+                <a16:creationId xmlns:a16="http://schemas.microsoft.com/office/drawing/2014/main" id="{58F7DFBA-42AA-495F-AC10-84000FE16A90}"/>
               </a:ext>
             </a:extLst>
           </p:cNvPr>
@@ -4450,7 +4450,7 @@
             <a:pPr algn="r">
               <a:defRPr sz="600" b="1">
                 <a:solidFill>
-                  <a:srgbClr val="B8C9D3"/>
+                  <a:srgbClr val="587080"/>
                 </a:solidFill>
                 <a:latin typeface="Arial"/>
                 <a:ea typeface="Arial"/>
@@ -4460,7 +4460,7 @@
             <a:r>
               <a:rPr sz="600" b="1">
                 <a:solidFill>
-                  <a:srgbClr val="B8C9D3"/>
+                  <a:srgbClr val="587080"/>
                 </a:solidFill>
                 <a:latin typeface="Arial"/>
                 <a:ea typeface="Arial"/>
@@ -4476,7 +4476,7 @@
           <p:cNvPr id="15" name="">
             <a:extLst xmlns:a="http://schemas.openxmlformats.org/drawingml/2006/main">
               <a:ext uri="{FF2B5EF4-FFF2-40B4-BE49-F238E27FC236}">
-                <a16:creationId xmlns:a16="http://schemas.microsoft.com/office/drawing/2014/main" id="{07FC05BB-4A0E-4351-B6ED-849B1F08CBA6}"/>
+                <a16:creationId xmlns:a16="http://schemas.microsoft.com/office/drawing/2014/main" id="{B1B4ECD2-7804-450F-A4DA-1D4201006762}"/>
               </a:ext>
             </a:extLst>
           </p:cNvPr>
@@ -4508,7 +4508,7 @@
             <a:pPr algn="l">
               <a:defRPr sz="2250" b="0">
                 <a:solidFill>
-                  <a:srgbClr val="00E1C6"/>
+                  <a:srgbClr val="132E41"/>
                 </a:solidFill>
                 <a:latin typeface="Georgia"/>
                 <a:ea typeface="Georgia"/>
@@ -4518,7 +4518,7 @@
             <a:r>
               <a:rPr sz="2250" b="0">
                 <a:solidFill>
-                  <a:srgbClr val="00E1C6"/>
+                  <a:srgbClr val="132E41"/>
                 </a:solidFill>
                 <a:latin typeface="Georgia"/>
                 <a:ea typeface="Georgia"/>
@@ -4534,7 +4534,7 @@
           <p:cNvPr id="16" name="">
             <a:extLst xmlns:a="http://schemas.openxmlformats.org/drawingml/2006/main">
               <a:ext uri="{FF2B5EF4-FFF2-40B4-BE49-F238E27FC236}">
-                <a16:creationId xmlns:a16="http://schemas.microsoft.com/office/drawing/2014/main" id="{EA9DEC39-3A70-4351-AB30-805D1F59762F}"/>
+                <a16:creationId xmlns:a16="http://schemas.microsoft.com/office/drawing/2014/main" id="{69F1C88F-D6EA-4B22-865E-612412FAC668}"/>
               </a:ext>
             </a:extLst>
           </p:cNvPr>
@@ -4566,7 +4566,7 @@
             <a:pPr algn="l">
               <a:defRPr sz="1125" b="0">
                 <a:solidFill>
-                  <a:srgbClr val="B8C9D3"/>
+                  <a:srgbClr val="587080"/>
                 </a:solidFill>
                 <a:latin typeface="Arial"/>
                 <a:ea typeface="Arial"/>
@@ -4576,7 +4576,7 @@
             <a:r>
               <a:rPr sz="1125" b="0">
                 <a:solidFill>
-                  <a:srgbClr val="B8C9D3"/>
+                  <a:srgbClr val="587080"/>
                 </a:solidFill>
                 <a:latin typeface="Arial"/>
                 <a:ea typeface="Arial"/>
@@ -4592,7 +4592,7 @@
           <p:cNvPr id="17" name="">
             <a:extLst xmlns:a="http://schemas.openxmlformats.org/drawingml/2006/main">
               <a:ext uri="{FF2B5EF4-FFF2-40B4-BE49-F238E27FC236}">
-                <a16:creationId xmlns:a16="http://schemas.microsoft.com/office/drawing/2014/main" id="{DB83B2D6-967A-4A12-A3A8-F566AC8BBF68}"/>
+                <a16:creationId xmlns:a16="http://schemas.microsoft.com/office/drawing/2014/main" id="{8C3F6B29-5D6C-41CF-B23A-669862488C0F}"/>
               </a:ext>
             </a:extLst>
           </p:cNvPr>
@@ -4612,7 +4612,7 @@
             </a:avLst>
           </a:prstGeom>
           <a:solidFill xmlns:a="http://schemas.openxmlformats.org/drawingml/2006/main">
-            <a:srgbClr val="102F46"/>
+            <a:srgbClr val="FFFFFF"/>
           </a:solidFill>
           <a:ln xmlns:a="http://schemas.openxmlformats.org/drawingml/2006/main" w="13335">
             <a:solidFill>
@@ -4627,7 +4627,7 @@
           <p:cNvPr id="18" name="">
             <a:extLst xmlns:a="http://schemas.openxmlformats.org/drawingml/2006/main">
               <a:ext uri="{FF2B5EF4-FFF2-40B4-BE49-F238E27FC236}">
-                <a16:creationId xmlns:a16="http://schemas.microsoft.com/office/drawing/2014/main" id="{86EFD8C7-6AE5-4102-87FB-37B67B8AD8F2}"/>
+                <a16:creationId xmlns:a16="http://schemas.microsoft.com/office/drawing/2014/main" id="{1777926D-C63D-48C0-AAB8-C5CC21AD2B78}"/>
               </a:ext>
             </a:extLst>
           </p:cNvPr>
@@ -4685,7 +4685,7 @@
           <p:cNvPr id="19" name="">
             <a:extLst xmlns:a="http://schemas.openxmlformats.org/drawingml/2006/main">
               <a:ext uri="{FF2B5EF4-FFF2-40B4-BE49-F238E27FC236}">
-                <a16:creationId xmlns:a16="http://schemas.microsoft.com/office/drawing/2014/main" id="{4D360FD3-F2C9-45BB-AEFD-113E152B4D35}"/>
+                <a16:creationId xmlns:a16="http://schemas.microsoft.com/office/drawing/2014/main" id="{FAA2BDB1-A870-4442-AD83-A9DDAD4D0BF0}"/>
               </a:ext>
             </a:extLst>
           </p:cNvPr>
@@ -4705,7 +4705,7 @@
             </a:avLst>
           </a:prstGeom>
           <a:solidFill xmlns:a="http://schemas.openxmlformats.org/drawingml/2006/main">
-            <a:srgbClr val="102F46"/>
+            <a:srgbClr val="FFFFFF"/>
           </a:solidFill>
           <a:ln xmlns:a="http://schemas.openxmlformats.org/drawingml/2006/main" w="9525">
             <a:solidFill>
@@ -4720,7 +4720,7 @@
           <p:cNvPr id="20" name="">
             <a:extLst xmlns:a="http://schemas.openxmlformats.org/drawingml/2006/main">
               <a:ext uri="{FF2B5EF4-FFF2-40B4-BE49-F238E27FC236}">
-                <a16:creationId xmlns:a16="http://schemas.microsoft.com/office/drawing/2014/main" id="{3999B31D-2F07-494F-98D7-8E2864F5334D}"/>
+                <a16:creationId xmlns:a16="http://schemas.microsoft.com/office/drawing/2014/main" id="{20BC654D-6928-43A4-88F6-F2796391CA59}"/>
               </a:ext>
             </a:extLst>
           </p:cNvPr>
@@ -4778,7 +4778,7 @@
           <p:cNvPr id="21" name="">
             <a:extLst xmlns:a="http://schemas.openxmlformats.org/drawingml/2006/main">
               <a:ext uri="{FF2B5EF4-FFF2-40B4-BE49-F238E27FC236}">
-                <a16:creationId xmlns:a16="http://schemas.microsoft.com/office/drawing/2014/main" id="{56007244-3829-4F65-9016-2F8CDD8439F5}"/>
+                <a16:creationId xmlns:a16="http://schemas.microsoft.com/office/drawing/2014/main" id="{C439F998-F8DA-4CD6-AC7D-AA34387D7C6E}"/>
               </a:ext>
             </a:extLst>
           </p:cNvPr>
@@ -4810,7 +4810,7 @@
             <a:pPr algn="l">
               <a:defRPr sz="975" b="1">
                 <a:solidFill>
-                  <a:srgbClr val="F3F8FA"/>
+                  <a:srgbClr val="132E41"/>
                 </a:solidFill>
                 <a:latin typeface="Arial"/>
                 <a:ea typeface="Arial"/>
@@ -4820,7 +4820,7 @@
             <a:r>
               <a:rPr sz="975" b="1">
                 <a:solidFill>
-                  <a:srgbClr val="F3F8FA"/>
+                  <a:srgbClr val="132E41"/>
                 </a:solidFill>
                 <a:latin typeface="Arial"/>
                 <a:ea typeface="Arial"/>
@@ -4836,7 +4836,7 @@
           <p:cNvPr id="22" name="">
             <a:extLst xmlns:a="http://schemas.openxmlformats.org/drawingml/2006/main">
               <a:ext uri="{FF2B5EF4-FFF2-40B4-BE49-F238E27FC236}">
-                <a16:creationId xmlns:a16="http://schemas.microsoft.com/office/drawing/2014/main" id="{B4C67E4F-FA19-4D59-946A-0ABA54FBD67D}"/>
+                <a16:creationId xmlns:a16="http://schemas.microsoft.com/office/drawing/2014/main" id="{16EA5B43-EA83-4B23-922B-F766FC4E36DC}"/>
               </a:ext>
             </a:extLst>
           </p:cNvPr>
@@ -4868,7 +4868,7 @@
             <a:pPr algn="l">
               <a:defRPr sz="825" b="0">
                 <a:solidFill>
-                  <a:srgbClr val="B8C9D3"/>
+                  <a:srgbClr val="587080"/>
                 </a:solidFill>
                 <a:latin typeface="Arial"/>
                 <a:ea typeface="Arial"/>
@@ -4878,7 +4878,7 @@
             <a:r>
               <a:rPr sz="825" b="0">
                 <a:solidFill>
-                  <a:srgbClr val="B8C9D3"/>
+                  <a:srgbClr val="587080"/>
                 </a:solidFill>
                 <a:latin typeface="Arial"/>
                 <a:ea typeface="Arial"/>
@@ -4894,7 +4894,7 @@
           <p:cNvPr id="23" name="">
             <a:extLst xmlns:a="http://schemas.openxmlformats.org/drawingml/2006/main">
               <a:ext uri="{FF2B5EF4-FFF2-40B4-BE49-F238E27FC236}">
-                <a16:creationId xmlns:a16="http://schemas.microsoft.com/office/drawing/2014/main" id="{BA62784A-8519-4872-90D8-6017D5B658C7}"/>
+                <a16:creationId xmlns:a16="http://schemas.microsoft.com/office/drawing/2014/main" id="{FDADFB56-5BFB-4F23-B772-941B59F0CB18}"/>
               </a:ext>
             </a:extLst>
           </p:cNvPr>
@@ -4914,7 +4914,7 @@
             </a:avLst>
           </a:prstGeom>
           <a:solidFill xmlns:a="http://schemas.openxmlformats.org/drawingml/2006/main">
-            <a:srgbClr val="102F46"/>
+            <a:srgbClr val="FFFFFF"/>
           </a:solidFill>
           <a:ln xmlns:a="http://schemas.openxmlformats.org/drawingml/2006/main" w="9525">
             <a:solidFill>
@@ -4929,7 +4929,7 @@
           <p:cNvPr id="24" name="">
             <a:extLst xmlns:a="http://schemas.openxmlformats.org/drawingml/2006/main">
               <a:ext uri="{FF2B5EF4-FFF2-40B4-BE49-F238E27FC236}">
-                <a16:creationId xmlns:a16="http://schemas.microsoft.com/office/drawing/2014/main" id="{374FA0CC-2B71-4613-BED9-C4FC1E505C72}"/>
+                <a16:creationId xmlns:a16="http://schemas.microsoft.com/office/drawing/2014/main" id="{BB0FEFCD-9B8D-4EB4-B838-3B2C25278487}"/>
               </a:ext>
             </a:extLst>
           </p:cNvPr>
@@ -4987,7 +4987,7 @@
           <p:cNvPr id="25" name="">
             <a:extLst xmlns:a="http://schemas.openxmlformats.org/drawingml/2006/main">
               <a:ext uri="{FF2B5EF4-FFF2-40B4-BE49-F238E27FC236}">
-                <a16:creationId xmlns:a16="http://schemas.microsoft.com/office/drawing/2014/main" id="{4C35330B-CD32-410D-A947-40D4F1C448E8}"/>
+                <a16:creationId xmlns:a16="http://schemas.microsoft.com/office/drawing/2014/main" id="{AC35EF1E-7F1F-423D-A79C-332B08DED2EB}"/>
               </a:ext>
             </a:extLst>
           </p:cNvPr>
@@ -5019,7 +5019,7 @@
             <a:pPr algn="l">
               <a:defRPr sz="975" b="1">
                 <a:solidFill>
-                  <a:srgbClr val="F3F8FA"/>
+                  <a:srgbClr val="132E41"/>
                 </a:solidFill>
                 <a:latin typeface="Arial"/>
                 <a:ea typeface="Arial"/>
@@ -5029,7 +5029,7 @@
             <a:r>
               <a:rPr sz="975" b="1">
                 <a:solidFill>
-                  <a:srgbClr val="F3F8FA"/>
+                  <a:srgbClr val="132E41"/>
                 </a:solidFill>
                 <a:latin typeface="Arial"/>
                 <a:ea typeface="Arial"/>
@@ -5045,7 +5045,7 @@
           <p:cNvPr id="26" name="">
             <a:extLst xmlns:a="http://schemas.openxmlformats.org/drawingml/2006/main">
               <a:ext uri="{FF2B5EF4-FFF2-40B4-BE49-F238E27FC236}">
-                <a16:creationId xmlns:a16="http://schemas.microsoft.com/office/drawing/2014/main" id="{F8AFA470-864C-4184-9BE2-51E4820A0791}"/>
+                <a16:creationId xmlns:a16="http://schemas.microsoft.com/office/drawing/2014/main" id="{C6906B4E-2E2D-4FD3-B65D-F4C38B9D1336}"/>
               </a:ext>
             </a:extLst>
           </p:cNvPr>
@@ -5077,7 +5077,7 @@
             <a:pPr algn="l">
               <a:defRPr sz="825" b="0">
                 <a:solidFill>
-                  <a:srgbClr val="B8C9D3"/>
+                  <a:srgbClr val="587080"/>
                 </a:solidFill>
                 <a:latin typeface="Arial"/>
                 <a:ea typeface="Arial"/>
@@ -5087,7 +5087,7 @@
             <a:r>
               <a:rPr sz="825" b="0">
                 <a:solidFill>
-                  <a:srgbClr val="B8C9D3"/>
+                  <a:srgbClr val="587080"/>
                 </a:solidFill>
                 <a:latin typeface="Arial"/>
                 <a:ea typeface="Arial"/>
@@ -5103,7 +5103,7 @@
           <p:cNvPr id="27" name="">
             <a:extLst xmlns:a="http://schemas.openxmlformats.org/drawingml/2006/main">
               <a:ext uri="{FF2B5EF4-FFF2-40B4-BE49-F238E27FC236}">
-                <a16:creationId xmlns:a16="http://schemas.microsoft.com/office/drawing/2014/main" id="{D5A182C6-6C12-4B16-99E5-4B53D59C691E}"/>
+                <a16:creationId xmlns:a16="http://schemas.microsoft.com/office/drawing/2014/main" id="{E4861082-C3CA-4939-95DA-86E171B39EF6}"/>
               </a:ext>
             </a:extLst>
           </p:cNvPr>
@@ -5123,7 +5123,7 @@
             </a:avLst>
           </a:prstGeom>
           <a:solidFill xmlns:a="http://schemas.openxmlformats.org/drawingml/2006/main">
-            <a:srgbClr val="102F46"/>
+            <a:srgbClr val="FFFFFF"/>
           </a:solidFill>
           <a:ln xmlns:a="http://schemas.openxmlformats.org/drawingml/2006/main" w="9525">
             <a:solidFill>
@@ -5138,7 +5138,7 @@
           <p:cNvPr id="28" name="">
             <a:extLst xmlns:a="http://schemas.openxmlformats.org/drawingml/2006/main">
               <a:ext uri="{FF2B5EF4-FFF2-40B4-BE49-F238E27FC236}">
-                <a16:creationId xmlns:a16="http://schemas.microsoft.com/office/drawing/2014/main" id="{63DF9748-F0E9-407D-96FA-821AE23E7209}"/>
+                <a16:creationId xmlns:a16="http://schemas.microsoft.com/office/drawing/2014/main" id="{0EDDE5F4-4796-4BA5-B8CB-02896FD6E6A2}"/>
               </a:ext>
             </a:extLst>
           </p:cNvPr>
@@ -5196,7 +5196,7 @@
           <p:cNvPr id="29" name="">
             <a:extLst xmlns:a="http://schemas.openxmlformats.org/drawingml/2006/main">
               <a:ext uri="{FF2B5EF4-FFF2-40B4-BE49-F238E27FC236}">
-                <a16:creationId xmlns:a16="http://schemas.microsoft.com/office/drawing/2014/main" id="{33DBC9DF-2F52-4D23-899B-24E241B5FC3F}"/>
+                <a16:creationId xmlns:a16="http://schemas.microsoft.com/office/drawing/2014/main" id="{F63F4064-24C0-4B52-9E6D-B3E087116BB5}"/>
               </a:ext>
             </a:extLst>
           </p:cNvPr>
@@ -5228,7 +5228,7 @@
             <a:pPr algn="l">
               <a:defRPr sz="975" b="1">
                 <a:solidFill>
-                  <a:srgbClr val="F3F8FA"/>
+                  <a:srgbClr val="132E41"/>
                 </a:solidFill>
                 <a:latin typeface="Arial"/>
                 <a:ea typeface="Arial"/>
@@ -5238,7 +5238,7 @@
             <a:r>
               <a:rPr sz="975" b="1">
                 <a:solidFill>
-                  <a:srgbClr val="F3F8FA"/>
+                  <a:srgbClr val="132E41"/>
                 </a:solidFill>
                 <a:latin typeface="Arial"/>
                 <a:ea typeface="Arial"/>
@@ -5254,7 +5254,7 @@
           <p:cNvPr id="30" name="">
             <a:extLst xmlns:a="http://schemas.openxmlformats.org/drawingml/2006/main">
               <a:ext uri="{FF2B5EF4-FFF2-40B4-BE49-F238E27FC236}">
-                <a16:creationId xmlns:a16="http://schemas.microsoft.com/office/drawing/2014/main" id="{2E489A25-F7E0-4C2E-A9D6-2B0BF2EB660E}"/>
+                <a16:creationId xmlns:a16="http://schemas.microsoft.com/office/drawing/2014/main" id="{3BD31B73-FAE3-4388-96D8-0EC33456B5DC}"/>
               </a:ext>
             </a:extLst>
           </p:cNvPr>
@@ -5286,7 +5286,7 @@
             <a:pPr algn="l">
               <a:defRPr sz="825" b="0">
                 <a:solidFill>
-                  <a:srgbClr val="B8C9D3"/>
+                  <a:srgbClr val="587080"/>
                 </a:solidFill>
                 <a:latin typeface="Arial"/>
                 <a:ea typeface="Arial"/>
@@ -5296,7 +5296,7 @@
             <a:r>
               <a:rPr sz="825" b="0">
                 <a:solidFill>
-                  <a:srgbClr val="B8C9D3"/>
+                  <a:srgbClr val="587080"/>
                 </a:solidFill>
                 <a:latin typeface="Arial"/>
                 <a:ea typeface="Arial"/>
@@ -5312,7 +5312,7 @@
           <p:cNvPr id="31" name="">
             <a:extLst xmlns:a="http://schemas.openxmlformats.org/drawingml/2006/main">
               <a:ext uri="{FF2B5EF4-FFF2-40B4-BE49-F238E27FC236}">
-                <a16:creationId xmlns:a16="http://schemas.microsoft.com/office/drawing/2014/main" id="{DB667B26-3B16-46E4-883C-3A35B4C57143}"/>
+                <a16:creationId xmlns:a16="http://schemas.microsoft.com/office/drawing/2014/main" id="{07DE6CA9-1BC4-46DE-B83E-8FD49EE65B1C}"/>
               </a:ext>
             </a:extLst>
           </p:cNvPr>
@@ -5344,7 +5344,7 @@
             <a:pPr algn="ctr">
               <a:defRPr sz="900" b="1">
                 <a:solidFill>
-                  <a:srgbClr val="B8C9D3"/>
+                  <a:srgbClr val="587080"/>
                 </a:solidFill>
                 <a:latin typeface="Arial"/>
                 <a:ea typeface="Arial"/>
@@ -5354,7 +5354,7 @@
             <a:r>
               <a:rPr sz="900" b="1">
                 <a:solidFill>
-                  <a:srgbClr val="B8C9D3"/>
+                  <a:srgbClr val="587080"/>
                 </a:solidFill>
                 <a:latin typeface="Arial"/>
                 <a:ea typeface="Arial"/>
@@ -5368,7 +5368,7 @@
     </p:spTree>
     <p:extLst>
       <p:ext uri="{BB962C8B-B14F-4D97-AF65-F5344CB8AC3E}">
-        <p14:creationId xmlns:p14="http://schemas.microsoft.com/office/powerpoint/2010/main" val="2012354401"/>
+        <p14:creationId xmlns:p14="http://schemas.microsoft.com/office/powerpoint/2010/main" val="508251691"/>
       </p:ext>
     </p:extLst>
   </p:cSld>
@@ -5381,7 +5381,7 @@
     <p:bg>
       <p:bgPr>
         <a:solidFill xmlns:a="http://schemas.openxmlformats.org/drawingml/2006/main">
-          <a:srgbClr val="0E293C"/>
+          <a:srgbClr val="F3F1EB"/>
         </a:solidFill>
       </p:bgPr>
     </p:bg>
@@ -5399,7 +5399,7 @@
           <p:cNvPr id="33" name="">
             <a:extLst xmlns:a="http://schemas.openxmlformats.org/drawingml/2006/main">
               <a:ext uri="{FF2B5EF4-FFF2-40B4-BE49-F238E27FC236}">
-                <a16:creationId xmlns:a16="http://schemas.microsoft.com/office/drawing/2014/main" id="{2696752D-CB95-4260-AF8B-C6E49A82E057}"/>
+                <a16:creationId xmlns:a16="http://schemas.microsoft.com/office/drawing/2014/main" id="{46831BF8-C6D3-41D1-974F-5970141BC8C6}"/>
               </a:ext>
             </a:extLst>
           </p:cNvPr>
@@ -5456,7 +5456,7 @@
           <p:cNvPr id="2" name="">
             <a:extLst xmlns:a="http://schemas.openxmlformats.org/drawingml/2006/main">
               <a:ext uri="{FF2B5EF4-FFF2-40B4-BE49-F238E27FC236}">
-                <a16:creationId xmlns:a16="http://schemas.microsoft.com/office/drawing/2014/main" id="{B234EE72-F7A5-49DF-B9CA-9A1503C153B3}"/>
+                <a16:creationId xmlns:a16="http://schemas.microsoft.com/office/drawing/2014/main" id="{284EA1CF-2EA8-4943-AC7B-B32F5420ADFA}"/>
               </a:ext>
             </a:extLst>
           </p:cNvPr>
@@ -5513,7 +5513,7 @@
           <p:cNvPr id="3" name="">
             <a:extLst xmlns:a="http://schemas.openxmlformats.org/drawingml/2006/main">
               <a:ext uri="{FF2B5EF4-FFF2-40B4-BE49-F238E27FC236}">
-                <a16:creationId xmlns:a16="http://schemas.microsoft.com/office/drawing/2014/main" id="{1E351CB2-16DE-4DD2-B416-8250387CC8A8}"/>
+                <a16:creationId xmlns:a16="http://schemas.microsoft.com/office/drawing/2014/main" id="{84010C09-B771-4D43-A0C9-1E10FC8D7A1D}"/>
               </a:ext>
             </a:extLst>
           </p:cNvPr>
@@ -5570,7 +5570,7 @@
           <p:cNvPr id="4" name="">
             <a:extLst xmlns:a="http://schemas.openxmlformats.org/drawingml/2006/main">
               <a:ext uri="{FF2B5EF4-FFF2-40B4-BE49-F238E27FC236}">
-                <a16:creationId xmlns:a16="http://schemas.microsoft.com/office/drawing/2014/main" id="{491C7599-9886-43A4-B4A5-C99C7A1A7BF3}"/>
+                <a16:creationId xmlns:a16="http://schemas.microsoft.com/office/drawing/2014/main" id="{71A2AFD6-9E7E-4D70-953F-63A635BB219C}"/>
               </a:ext>
             </a:extLst>
           </p:cNvPr>
@@ -5601,7 +5601,7 @@
           <p:cNvPr id="5" name="">
             <a:extLst xmlns:a="http://schemas.openxmlformats.org/drawingml/2006/main">
               <a:ext uri="{FF2B5EF4-FFF2-40B4-BE49-F238E27FC236}">
-                <a16:creationId xmlns:a16="http://schemas.microsoft.com/office/drawing/2014/main" id="{8B8378DF-2E19-43F7-9DAB-3118F53AE9B3}"/>
+                <a16:creationId xmlns:a16="http://schemas.microsoft.com/office/drawing/2014/main" id="{09983583-19F9-4395-97FC-EB0BFD5D67A0}"/>
               </a:ext>
             </a:extLst>
           </p:cNvPr>
@@ -5621,7 +5621,7 @@
           <a:noFill xmlns:a="http://schemas.openxmlformats.org/drawingml/2006/main"/>
           <a:ln xmlns:a="http://schemas.openxmlformats.org/drawingml/2006/main" w="9525">
             <a:solidFill>
-              <a:srgbClr val="2A4D65"/>
+              <a:srgbClr val="C5D4DC"/>
             </a:solidFill>
             <a:prstDash val="solid"/>
           </a:ln>
@@ -5632,7 +5632,7 @@
           <p:cNvPr id="6" name="">
             <a:extLst xmlns:a="http://schemas.openxmlformats.org/drawingml/2006/main">
               <a:ext uri="{FF2B5EF4-FFF2-40B4-BE49-F238E27FC236}">
-                <a16:creationId xmlns:a16="http://schemas.microsoft.com/office/drawing/2014/main" id="{EC374CFE-3FF2-4F2B-8B5E-D72DDAC538AB}"/>
+                <a16:creationId xmlns:a16="http://schemas.microsoft.com/office/drawing/2014/main" id="{312C31AC-65E6-4EAE-ADC3-6102CF1890B8}"/>
               </a:ext>
             </a:extLst>
           </p:cNvPr>
@@ -5689,7 +5689,7 @@
           <p:cNvPr id="7" name="">
             <a:extLst xmlns:a="http://schemas.openxmlformats.org/drawingml/2006/main">
               <a:ext uri="{FF2B5EF4-FFF2-40B4-BE49-F238E27FC236}">
-                <a16:creationId xmlns:a16="http://schemas.microsoft.com/office/drawing/2014/main" id="{9BF5BBF0-C5C5-401D-98B1-AC2CF859179F}"/>
+                <a16:creationId xmlns:a16="http://schemas.microsoft.com/office/drawing/2014/main" id="{B3B10F98-84A5-42C7-88B0-089BD84C1908}"/>
               </a:ext>
             </a:extLst>
           </p:cNvPr>
@@ -5746,7 +5746,7 @@
           <p:cNvPr id="8" name="">
             <a:extLst xmlns:a="http://schemas.openxmlformats.org/drawingml/2006/main">
               <a:ext uri="{FF2B5EF4-FFF2-40B4-BE49-F238E27FC236}">
-                <a16:creationId xmlns:a16="http://schemas.microsoft.com/office/drawing/2014/main" id="{DD5CE964-D7AC-45E7-847F-6C255480AA57}"/>
+                <a16:creationId xmlns:a16="http://schemas.microsoft.com/office/drawing/2014/main" id="{BA1CFC2D-1581-49D1-A554-C255A520EC82}"/>
               </a:ext>
             </a:extLst>
           </p:cNvPr>
@@ -5803,7 +5803,7 @@
           <p:cNvPr id="9" name="">
             <a:extLst xmlns:a="http://schemas.openxmlformats.org/drawingml/2006/main">
               <a:ext uri="{FF2B5EF4-FFF2-40B4-BE49-F238E27FC236}">
-                <a16:creationId xmlns:a16="http://schemas.microsoft.com/office/drawing/2014/main" id="{396B13AB-EB1C-4307-9402-96F7C1A16626}"/>
+                <a16:creationId xmlns:a16="http://schemas.microsoft.com/office/drawing/2014/main" id="{2A550412-E298-4A93-8103-FFF4C8A0D1E5}"/>
               </a:ext>
             </a:extLst>
           </p:cNvPr>
@@ -5834,7 +5834,7 @@
           <p:cNvPr id="10" name="">
             <a:extLst xmlns:a="http://schemas.openxmlformats.org/drawingml/2006/main">
               <a:ext uri="{FF2B5EF4-FFF2-40B4-BE49-F238E27FC236}">
-                <a16:creationId xmlns:a16="http://schemas.microsoft.com/office/drawing/2014/main" id="{D4D47C1B-F606-4366-B365-79508F14405B}"/>
+                <a16:creationId xmlns:a16="http://schemas.microsoft.com/office/drawing/2014/main" id="{62D436F0-1066-4407-95ED-EC65EEDE40CE}"/>
               </a:ext>
             </a:extLst>
           </p:cNvPr>
@@ -5854,7 +5854,7 @@
           <a:noFill xmlns:a="http://schemas.openxmlformats.org/drawingml/2006/main"/>
           <a:ln xmlns:a="http://schemas.openxmlformats.org/drawingml/2006/main" w="9525">
             <a:solidFill>
-              <a:srgbClr val="2A4D65"/>
+              <a:srgbClr val="C5D4DC"/>
             </a:solidFill>
             <a:prstDash val="solid"/>
           </a:ln>
@@ -5865,7 +5865,7 @@
           <p:cNvPr id="11" name="">
             <a:extLst xmlns:a="http://schemas.openxmlformats.org/drawingml/2006/main">
               <a:ext uri="{FF2B5EF4-FFF2-40B4-BE49-F238E27FC236}">
-                <a16:creationId xmlns:a16="http://schemas.microsoft.com/office/drawing/2014/main" id="{64A8589F-D141-4263-AF49-7722E4F7536C}"/>
+                <a16:creationId xmlns:a16="http://schemas.microsoft.com/office/drawing/2014/main" id="{08C30976-C6A5-43A7-8EBF-3BDFA2FEA1F3}"/>
               </a:ext>
             </a:extLst>
           </p:cNvPr>
@@ -5923,7 +5923,7 @@
           <p:cNvPr id="12" name="">
             <a:extLst xmlns:a="http://schemas.openxmlformats.org/drawingml/2006/main">
               <a:ext uri="{FF2B5EF4-FFF2-40B4-BE49-F238E27FC236}">
-                <a16:creationId xmlns:a16="http://schemas.microsoft.com/office/drawing/2014/main" id="{A39FEC0D-330C-4680-AC17-73402FAD4984}"/>
+                <a16:creationId xmlns:a16="http://schemas.microsoft.com/office/drawing/2014/main" id="{39B6AA7D-093F-4BFD-BD91-A756ECBF97F2}"/>
               </a:ext>
             </a:extLst>
           </p:cNvPr>
@@ -5955,7 +5955,7 @@
             <a:pPr algn="r">
               <a:defRPr sz="750" b="1">
                 <a:solidFill>
-                  <a:srgbClr val="B8C9D3"/>
+                  <a:srgbClr val="587080"/>
                 </a:solidFill>
                 <a:latin typeface="Arial"/>
                 <a:ea typeface="Arial"/>
@@ -5965,7 +5965,7 @@
             <a:r>
               <a:rPr sz="750" b="1">
                 <a:solidFill>
-                  <a:srgbClr val="B8C9D3"/>
+                  <a:srgbClr val="587080"/>
                 </a:solidFill>
                 <a:latin typeface="Arial"/>
                 <a:ea typeface="Arial"/>
@@ -5981,7 +5981,7 @@
           <p:cNvPr id="13" name="">
             <a:extLst xmlns:a="http://schemas.openxmlformats.org/drawingml/2006/main">
               <a:ext uri="{FF2B5EF4-FFF2-40B4-BE49-F238E27FC236}">
-                <a16:creationId xmlns:a16="http://schemas.microsoft.com/office/drawing/2014/main" id="{F6D3F258-BCE4-43E5-A910-97E922F11ADF}"/>
+                <a16:creationId xmlns:a16="http://schemas.microsoft.com/office/drawing/2014/main" id="{66343435-905C-4B46-A9F6-BE7CFCE2C5FA}"/>
               </a:ext>
             </a:extLst>
           </p:cNvPr>
@@ -6013,7 +6013,7 @@
             <a:pPr algn="l">
               <a:defRPr sz="600" b="0">
                 <a:solidFill>
-                  <a:srgbClr val="B8C9D3"/>
+                  <a:srgbClr val="587080"/>
                 </a:solidFill>
                 <a:latin typeface="Arial"/>
                 <a:ea typeface="Arial"/>
@@ -6023,7 +6023,7 @@
             <a:r>
               <a:rPr sz="600" b="0">
                 <a:solidFill>
-                  <a:srgbClr val="B8C9D3"/>
+                  <a:srgbClr val="587080"/>
                 </a:solidFill>
                 <a:latin typeface="Arial"/>
                 <a:ea typeface="Arial"/>
@@ -6039,7 +6039,7 @@
           <p:cNvPr id="14" name="">
             <a:extLst xmlns:a="http://schemas.openxmlformats.org/drawingml/2006/main">
               <a:ext uri="{FF2B5EF4-FFF2-40B4-BE49-F238E27FC236}">
-                <a16:creationId xmlns:a16="http://schemas.microsoft.com/office/drawing/2014/main" id="{15B85B7F-AC64-4388-B4BA-89971CA1C4EC}"/>
+                <a16:creationId xmlns:a16="http://schemas.microsoft.com/office/drawing/2014/main" id="{35876216-D126-4842-93CC-B79EA2751E73}"/>
               </a:ext>
             </a:extLst>
           </p:cNvPr>
@@ -6071,7 +6071,7 @@
             <a:pPr algn="r">
               <a:defRPr sz="600" b="1">
                 <a:solidFill>
-                  <a:srgbClr val="B8C9D3"/>
+                  <a:srgbClr val="587080"/>
                 </a:solidFill>
                 <a:latin typeface="Arial"/>
                 <a:ea typeface="Arial"/>
@@ -6081,7 +6081,7 @@
             <a:r>
               <a:rPr sz="600" b="1">
                 <a:solidFill>
-                  <a:srgbClr val="B8C9D3"/>
+                  <a:srgbClr val="587080"/>
                 </a:solidFill>
                 <a:latin typeface="Arial"/>
                 <a:ea typeface="Arial"/>
@@ -6097,7 +6097,7 @@
           <p:cNvPr id="15" name="">
             <a:extLst xmlns:a="http://schemas.openxmlformats.org/drawingml/2006/main">
               <a:ext uri="{FF2B5EF4-FFF2-40B4-BE49-F238E27FC236}">
-                <a16:creationId xmlns:a16="http://schemas.microsoft.com/office/drawing/2014/main" id="{4C1AF100-C437-4BA4-BC2E-BFC5A46EEE4B}"/>
+                <a16:creationId xmlns:a16="http://schemas.microsoft.com/office/drawing/2014/main" id="{F80DC087-DC12-4C3D-B135-8CFE8DD9D6A5}"/>
               </a:ext>
             </a:extLst>
           </p:cNvPr>
@@ -6129,7 +6129,7 @@
             <a:pPr algn="l">
               <a:defRPr sz="2250" b="0">
                 <a:solidFill>
-                  <a:srgbClr val="00E1C6"/>
+                  <a:srgbClr val="132E41"/>
                 </a:solidFill>
                 <a:latin typeface="Georgia"/>
                 <a:ea typeface="Georgia"/>
@@ -6139,7 +6139,7 @@
             <a:r>
               <a:rPr sz="2250" b="0">
                 <a:solidFill>
-                  <a:srgbClr val="00E1C6"/>
+                  <a:srgbClr val="132E41"/>
                 </a:solidFill>
                 <a:latin typeface="Georgia"/>
                 <a:ea typeface="Georgia"/>
@@ -6155,7 +6155,7 @@
           <p:cNvPr id="16" name="">
             <a:extLst xmlns:a="http://schemas.openxmlformats.org/drawingml/2006/main">
               <a:ext uri="{FF2B5EF4-FFF2-40B4-BE49-F238E27FC236}">
-                <a16:creationId xmlns:a16="http://schemas.microsoft.com/office/drawing/2014/main" id="{D863272C-6FF1-4761-A7A8-F181B412150E}"/>
+                <a16:creationId xmlns:a16="http://schemas.microsoft.com/office/drawing/2014/main" id="{773B569C-8486-49B6-97C5-F906C15EA2C1}"/>
               </a:ext>
             </a:extLst>
           </p:cNvPr>
@@ -6187,7 +6187,7 @@
             <a:pPr algn="l">
               <a:defRPr sz="1125" b="0">
                 <a:solidFill>
-                  <a:srgbClr val="B8C9D3"/>
+                  <a:srgbClr val="587080"/>
                 </a:solidFill>
                 <a:latin typeface="Arial"/>
                 <a:ea typeface="Arial"/>
@@ -6197,7 +6197,7 @@
             <a:r>
               <a:rPr sz="1125" b="0">
                 <a:solidFill>
-                  <a:srgbClr val="B8C9D3"/>
+                  <a:srgbClr val="587080"/>
                 </a:solidFill>
                 <a:latin typeface="Arial"/>
                 <a:ea typeface="Arial"/>
@@ -6213,7 +6213,7 @@
           <p:cNvPr id="17" name="">
             <a:extLst xmlns:a="http://schemas.openxmlformats.org/drawingml/2006/main">
               <a:ext uri="{FF2B5EF4-FFF2-40B4-BE49-F238E27FC236}">
-                <a16:creationId xmlns:a16="http://schemas.microsoft.com/office/drawing/2014/main" id="{93D95CA9-2190-4D74-BB32-1ADF407B59CB}"/>
+                <a16:creationId xmlns:a16="http://schemas.microsoft.com/office/drawing/2014/main" id="{3854EDBF-1123-4C70-9CCE-CA6A14C246DC}"/>
               </a:ext>
             </a:extLst>
           </p:cNvPr>
@@ -6233,11 +6233,11 @@
             </a:avLst>
           </a:prstGeom>
           <a:solidFill xmlns:a="http://schemas.openxmlformats.org/drawingml/2006/main">
-            <a:srgbClr val="102F46"/>
+            <a:srgbClr val="FFFFFF"/>
           </a:solidFill>
           <a:ln xmlns:a="http://schemas.openxmlformats.org/drawingml/2006/main" w="9525">
             <a:solidFill>
-              <a:srgbClr val="2A4D65"/>
+              <a:srgbClr val="C5D4DC"/>
             </a:solidFill>
             <a:prstDash val="solid"/>
           </a:ln>
@@ -6248,7 +6248,7 @@
           <p:cNvPr id="18" name="">
             <a:extLst xmlns:a="http://schemas.openxmlformats.org/drawingml/2006/main">
               <a:ext uri="{FF2B5EF4-FFF2-40B4-BE49-F238E27FC236}">
-                <a16:creationId xmlns:a16="http://schemas.microsoft.com/office/drawing/2014/main" id="{59C00DBE-DCA0-4D68-8F47-E4A3ED06D5E1}"/>
+                <a16:creationId xmlns:a16="http://schemas.microsoft.com/office/drawing/2014/main" id="{C53E8B9C-5C83-4F91-9D70-A1A92614E226}"/>
               </a:ext>
             </a:extLst>
           </p:cNvPr>
@@ -6306,7 +6306,7 @@
           <p:cNvPr id="19" name="">
             <a:extLst xmlns:a="http://schemas.openxmlformats.org/drawingml/2006/main">
               <a:ext uri="{FF2B5EF4-FFF2-40B4-BE49-F238E27FC236}">
-                <a16:creationId xmlns:a16="http://schemas.microsoft.com/office/drawing/2014/main" id="{8E3E7DEC-764E-424F-B2BC-B30A8376BE16}"/>
+                <a16:creationId xmlns:a16="http://schemas.microsoft.com/office/drawing/2014/main" id="{19E50E14-6C8A-4068-A530-A8D0CEED6912}"/>
               </a:ext>
             </a:extLst>
           </p:cNvPr>
@@ -6364,7 +6364,7 @@
           <p:cNvPr id="20" name="">
             <a:extLst xmlns:a="http://schemas.openxmlformats.org/drawingml/2006/main">
               <a:ext uri="{FF2B5EF4-FFF2-40B4-BE49-F238E27FC236}">
-                <a16:creationId xmlns:a16="http://schemas.microsoft.com/office/drawing/2014/main" id="{54F9D570-07FA-438A-AEB5-04744EBF1636}"/>
+                <a16:creationId xmlns:a16="http://schemas.microsoft.com/office/drawing/2014/main" id="{73B6B93D-FE97-43E1-88E6-333419311256}"/>
               </a:ext>
             </a:extLst>
           </p:cNvPr>
@@ -6396,7 +6396,7 @@
             <a:pPr algn="l">
               <a:defRPr sz="975" b="1">
                 <a:solidFill>
-                  <a:srgbClr val="F3F8FA"/>
+                  <a:srgbClr val="132E41"/>
                 </a:solidFill>
                 <a:latin typeface="Arial"/>
                 <a:ea typeface="Arial"/>
@@ -6406,7 +6406,7 @@
             <a:r>
               <a:rPr sz="975" b="1">
                 <a:solidFill>
-                  <a:srgbClr val="F3F8FA"/>
+                  <a:srgbClr val="132E41"/>
                 </a:solidFill>
                 <a:latin typeface="Arial"/>
                 <a:ea typeface="Arial"/>
@@ -6422,7 +6422,7 @@
           <p:cNvPr id="21" name="">
             <a:extLst xmlns:a="http://schemas.openxmlformats.org/drawingml/2006/main">
               <a:ext uri="{FF2B5EF4-FFF2-40B4-BE49-F238E27FC236}">
-                <a16:creationId xmlns:a16="http://schemas.microsoft.com/office/drawing/2014/main" id="{992228C7-5BC4-415C-8B18-EECAB776C5CC}"/>
+                <a16:creationId xmlns:a16="http://schemas.microsoft.com/office/drawing/2014/main" id="{C636A582-847A-44E7-9F78-C6C35F9A4D07}"/>
               </a:ext>
             </a:extLst>
           </p:cNvPr>
@@ -6480,7 +6480,7 @@
           <p:cNvPr id="22" name="">
             <a:extLst xmlns:a="http://schemas.openxmlformats.org/drawingml/2006/main">
               <a:ext uri="{FF2B5EF4-FFF2-40B4-BE49-F238E27FC236}">
-                <a16:creationId xmlns:a16="http://schemas.microsoft.com/office/drawing/2014/main" id="{6D1FBF75-E27A-437D-915B-39BB37AF39B7}"/>
+                <a16:creationId xmlns:a16="http://schemas.microsoft.com/office/drawing/2014/main" id="{4D6D3ADA-CAE1-45D1-A01B-3196ADD60818}"/>
               </a:ext>
             </a:extLst>
           </p:cNvPr>
@@ -6512,7 +6512,7 @@
             <a:pPr algn="l">
               <a:defRPr sz="975" b="1">
                 <a:solidFill>
-                  <a:srgbClr val="F3F8FA"/>
+                  <a:srgbClr val="132E41"/>
                 </a:solidFill>
                 <a:latin typeface="Arial"/>
                 <a:ea typeface="Arial"/>
@@ -6522,7 +6522,7 @@
             <a:r>
               <a:rPr sz="975" b="1">
                 <a:solidFill>
-                  <a:srgbClr val="F3F8FA"/>
+                  <a:srgbClr val="132E41"/>
                 </a:solidFill>
                 <a:latin typeface="Arial"/>
                 <a:ea typeface="Arial"/>
@@ -6538,7 +6538,7 @@
           <p:cNvPr id="23" name="">
             <a:extLst xmlns:a="http://schemas.openxmlformats.org/drawingml/2006/main">
               <a:ext uri="{FF2B5EF4-FFF2-40B4-BE49-F238E27FC236}">
-                <a16:creationId xmlns:a16="http://schemas.microsoft.com/office/drawing/2014/main" id="{A5D00269-822D-4A81-B4B5-2A12059F8837}"/>
+                <a16:creationId xmlns:a16="http://schemas.microsoft.com/office/drawing/2014/main" id="{16A68E98-EDB0-46F8-95D9-94C35FAB5AE3}"/>
               </a:ext>
             </a:extLst>
           </p:cNvPr>
@@ -6596,7 +6596,7 @@
           <p:cNvPr id="24" name="">
             <a:extLst xmlns:a="http://schemas.openxmlformats.org/drawingml/2006/main">
               <a:ext uri="{FF2B5EF4-FFF2-40B4-BE49-F238E27FC236}">
-                <a16:creationId xmlns:a16="http://schemas.microsoft.com/office/drawing/2014/main" id="{EE9AD212-1CF7-43BC-8D07-F5C4158E492D}"/>
+                <a16:creationId xmlns:a16="http://schemas.microsoft.com/office/drawing/2014/main" id="{15445D07-7990-4B38-A2D3-17AA0AB3AE21}"/>
               </a:ext>
             </a:extLst>
           </p:cNvPr>
@@ -6628,7 +6628,7 @@
             <a:pPr algn="l">
               <a:defRPr sz="975" b="1">
                 <a:solidFill>
-                  <a:srgbClr val="F3F8FA"/>
+                  <a:srgbClr val="132E41"/>
                 </a:solidFill>
                 <a:latin typeface="Arial"/>
                 <a:ea typeface="Arial"/>
@@ -6638,7 +6638,7 @@
             <a:r>
               <a:rPr sz="975" b="1">
                 <a:solidFill>
-                  <a:srgbClr val="F3F8FA"/>
+                  <a:srgbClr val="132E41"/>
                 </a:solidFill>
                 <a:latin typeface="Arial"/>
                 <a:ea typeface="Arial"/>
@@ -6654,7 +6654,7 @@
           <p:cNvPr id="25" name="">
             <a:extLst xmlns:a="http://schemas.openxmlformats.org/drawingml/2006/main">
               <a:ext uri="{FF2B5EF4-FFF2-40B4-BE49-F238E27FC236}">
-                <a16:creationId xmlns:a16="http://schemas.microsoft.com/office/drawing/2014/main" id="{43F1A193-CC6C-44DC-8FC3-C6D43D5534B5}"/>
+                <a16:creationId xmlns:a16="http://schemas.microsoft.com/office/drawing/2014/main" id="{3CD97DEC-3BDE-448C-B5D9-8491C2B54F4E}"/>
               </a:ext>
             </a:extLst>
           </p:cNvPr>
@@ -6674,7 +6674,7 @@
             </a:avLst>
           </a:prstGeom>
           <a:solidFill xmlns:a="http://schemas.openxmlformats.org/drawingml/2006/main">
-            <a:srgbClr val="102F46"/>
+            <a:srgbClr val="FFFFFF"/>
           </a:solidFill>
           <a:ln xmlns:a="http://schemas.openxmlformats.org/drawingml/2006/main" w="11430">
             <a:solidFill>
@@ -6689,7 +6689,7 @@
           <p:cNvPr id="26" name="">
             <a:extLst xmlns:a="http://schemas.openxmlformats.org/drawingml/2006/main">
               <a:ext uri="{FF2B5EF4-FFF2-40B4-BE49-F238E27FC236}">
-                <a16:creationId xmlns:a16="http://schemas.microsoft.com/office/drawing/2014/main" id="{16E83390-4252-4CD0-B61D-16FF2A2CA70D}"/>
+                <a16:creationId xmlns:a16="http://schemas.microsoft.com/office/drawing/2014/main" id="{2939C827-D71B-464E-8B7A-5463F96E1456}"/>
               </a:ext>
             </a:extLst>
           </p:cNvPr>
@@ -6747,7 +6747,7 @@
           <p:cNvPr id="27" name="">
             <a:extLst xmlns:a="http://schemas.openxmlformats.org/drawingml/2006/main">
               <a:ext uri="{FF2B5EF4-FFF2-40B4-BE49-F238E27FC236}">
-                <a16:creationId xmlns:a16="http://schemas.microsoft.com/office/drawing/2014/main" id="{41F9C086-327A-487B-B743-87F701A7270E}"/>
+                <a16:creationId xmlns:a16="http://schemas.microsoft.com/office/drawing/2014/main" id="{798043F3-6A87-446B-9F00-CC25419D78B5}"/>
               </a:ext>
             </a:extLst>
           </p:cNvPr>
@@ -6779,7 +6779,7 @@
             <a:pPr algn="l">
               <a:defRPr sz="1425" b="1">
                 <a:solidFill>
-                  <a:srgbClr val="F3F8FA"/>
+                  <a:srgbClr val="132E41"/>
                 </a:solidFill>
                 <a:latin typeface="Arial"/>
                 <a:ea typeface="Arial"/>
@@ -6789,7 +6789,7 @@
             <a:r>
               <a:rPr sz="1425" b="1">
                 <a:solidFill>
-                  <a:srgbClr val="F3F8FA"/>
+                  <a:srgbClr val="132E41"/>
                 </a:solidFill>
                 <a:latin typeface="Arial"/>
                 <a:ea typeface="Arial"/>
@@ -6805,7 +6805,7 @@
           <p:cNvPr id="28" name="">
             <a:extLst xmlns:a="http://schemas.openxmlformats.org/drawingml/2006/main">
               <a:ext uri="{FF2B5EF4-FFF2-40B4-BE49-F238E27FC236}">
-                <a16:creationId xmlns:a16="http://schemas.microsoft.com/office/drawing/2014/main" id="{B2260BD5-929D-498E-A55D-FF9174438DB8}"/>
+                <a16:creationId xmlns:a16="http://schemas.microsoft.com/office/drawing/2014/main" id="{7951A9D7-E150-4D49-BF83-94ECF542A22C}"/>
               </a:ext>
             </a:extLst>
           </p:cNvPr>
@@ -6842,7 +6842,7 @@
           <p:cNvPr id="29" name="">
             <a:extLst xmlns:a="http://schemas.openxmlformats.org/drawingml/2006/main">
               <a:ext uri="{FF2B5EF4-FFF2-40B4-BE49-F238E27FC236}">
-                <a16:creationId xmlns:a16="http://schemas.microsoft.com/office/drawing/2014/main" id="{7D1DB5E2-2EA1-4A73-88BD-366991870E88}"/>
+                <a16:creationId xmlns:a16="http://schemas.microsoft.com/office/drawing/2014/main" id="{48EF9602-0D8F-4806-A2E3-53FA4F59E5F1}"/>
               </a:ext>
             </a:extLst>
           </p:cNvPr>
@@ -6900,7 +6900,7 @@
           <p:cNvPr id="30" name="">
             <a:extLst xmlns:a="http://schemas.openxmlformats.org/drawingml/2006/main">
               <a:ext uri="{FF2B5EF4-FFF2-40B4-BE49-F238E27FC236}">
-                <a16:creationId xmlns:a16="http://schemas.microsoft.com/office/drawing/2014/main" id="{932047F1-4F62-4216-A08F-988E29161E28}"/>
+                <a16:creationId xmlns:a16="http://schemas.microsoft.com/office/drawing/2014/main" id="{997E5F4D-CDC6-46BD-9C44-62DA53482E17}"/>
               </a:ext>
             </a:extLst>
           </p:cNvPr>
@@ -6958,7 +6958,7 @@
           <p:cNvPr id="31" name="">
             <a:extLst xmlns:a="http://schemas.openxmlformats.org/drawingml/2006/main">
               <a:ext uri="{FF2B5EF4-FFF2-40B4-BE49-F238E27FC236}">
-                <a16:creationId xmlns:a16="http://schemas.microsoft.com/office/drawing/2014/main" id="{9A61490A-73E4-44CE-97B5-61FED38A89EF}"/>
+                <a16:creationId xmlns:a16="http://schemas.microsoft.com/office/drawing/2014/main" id="{C075DF91-93DC-449D-B364-2BC124B66689}"/>
               </a:ext>
             </a:extLst>
           </p:cNvPr>
@@ -6995,7 +6995,7 @@
           <p:cNvPr id="32" name="">
             <a:extLst xmlns:a="http://schemas.openxmlformats.org/drawingml/2006/main">
               <a:ext uri="{FF2B5EF4-FFF2-40B4-BE49-F238E27FC236}">
-                <a16:creationId xmlns:a16="http://schemas.microsoft.com/office/drawing/2014/main" id="{77D4A4FF-D13B-4EEB-9395-E6417F18B6D6}"/>
+                <a16:creationId xmlns:a16="http://schemas.microsoft.com/office/drawing/2014/main" id="{F8990B96-BF76-4730-BD06-F2E4AC5F1645}"/>
               </a:ext>
             </a:extLst>
           </p:cNvPr>
@@ -7051,7 +7051,7 @@
     </p:spTree>
     <p:extLst>
       <p:ext uri="{BB962C8B-B14F-4D97-AF65-F5344CB8AC3E}">
-        <p14:creationId xmlns:p14="http://schemas.microsoft.com/office/powerpoint/2010/main" val="819406499"/>
+        <p14:creationId xmlns:p14="http://schemas.microsoft.com/office/powerpoint/2010/main" val="997914488"/>
       </p:ext>
     </p:extLst>
   </p:cSld>
@@ -7064,7 +7064,7 @@
     <p:bg>
       <p:bgPr>
         <a:solidFill xmlns:a="http://schemas.openxmlformats.org/drawingml/2006/main">
-          <a:srgbClr val="0E293C"/>
+          <a:srgbClr val="F3F1EB"/>
         </a:solidFill>
       </p:bgPr>
     </p:bg>
@@ -7082,7 +7082,7 @@
           <p:cNvPr id="45" name="">
             <a:extLst xmlns:a="http://schemas.openxmlformats.org/drawingml/2006/main">
               <a:ext uri="{FF2B5EF4-FFF2-40B4-BE49-F238E27FC236}">
-                <a16:creationId xmlns:a16="http://schemas.microsoft.com/office/drawing/2014/main" id="{229837A6-F846-462D-8AF3-D5F1915F56E2}"/>
+                <a16:creationId xmlns:a16="http://schemas.microsoft.com/office/drawing/2014/main" id="{3DC3BCC2-CA36-48D0-AD5F-4683CEA62E9C}"/>
               </a:ext>
             </a:extLst>
           </p:cNvPr>
@@ -7139,7 +7139,7 @@
           <p:cNvPr id="2" name="">
             <a:extLst xmlns:a="http://schemas.openxmlformats.org/drawingml/2006/main">
               <a:ext uri="{FF2B5EF4-FFF2-40B4-BE49-F238E27FC236}">
-                <a16:creationId xmlns:a16="http://schemas.microsoft.com/office/drawing/2014/main" id="{CE0DCE66-B308-4F70-8D59-7226EB315094}"/>
+                <a16:creationId xmlns:a16="http://schemas.microsoft.com/office/drawing/2014/main" id="{3560EAE4-752A-46A1-AB77-345AFC562927}"/>
               </a:ext>
             </a:extLst>
           </p:cNvPr>
@@ -7196,7 +7196,7 @@
           <p:cNvPr id="3" name="">
             <a:extLst xmlns:a="http://schemas.openxmlformats.org/drawingml/2006/main">
               <a:ext uri="{FF2B5EF4-FFF2-40B4-BE49-F238E27FC236}">
-                <a16:creationId xmlns:a16="http://schemas.microsoft.com/office/drawing/2014/main" id="{504497B1-2FEC-4EE4-98F3-B785FADEAFA5}"/>
+                <a16:creationId xmlns:a16="http://schemas.microsoft.com/office/drawing/2014/main" id="{0CE8CE45-ED5F-40A2-8FCB-246F0055045B}"/>
               </a:ext>
             </a:extLst>
           </p:cNvPr>
@@ -7253,7 +7253,7 @@
           <p:cNvPr id="4" name="">
             <a:extLst xmlns:a="http://schemas.openxmlformats.org/drawingml/2006/main">
               <a:ext uri="{FF2B5EF4-FFF2-40B4-BE49-F238E27FC236}">
-                <a16:creationId xmlns:a16="http://schemas.microsoft.com/office/drawing/2014/main" id="{8A3FCA61-5B78-4911-8C37-89BECA39497B}"/>
+                <a16:creationId xmlns:a16="http://schemas.microsoft.com/office/drawing/2014/main" id="{4A8B349E-0551-4139-B920-336DC9103C13}"/>
               </a:ext>
             </a:extLst>
           </p:cNvPr>
@@ -7284,7 +7284,7 @@
           <p:cNvPr id="5" name="">
             <a:extLst xmlns:a="http://schemas.openxmlformats.org/drawingml/2006/main">
               <a:ext uri="{FF2B5EF4-FFF2-40B4-BE49-F238E27FC236}">
-                <a16:creationId xmlns:a16="http://schemas.microsoft.com/office/drawing/2014/main" id="{7E1B0D25-43A5-4C29-9A35-7D8E8775CD08}"/>
+                <a16:creationId xmlns:a16="http://schemas.microsoft.com/office/drawing/2014/main" id="{67E2F878-A65A-4F77-B678-A64A1108D770}"/>
               </a:ext>
             </a:extLst>
           </p:cNvPr>
@@ -7304,7 +7304,7 @@
           <a:noFill xmlns:a="http://schemas.openxmlformats.org/drawingml/2006/main"/>
           <a:ln xmlns:a="http://schemas.openxmlformats.org/drawingml/2006/main" w="9525">
             <a:solidFill>
-              <a:srgbClr val="2A4D65"/>
+              <a:srgbClr val="C5D4DC"/>
             </a:solidFill>
             <a:prstDash val="solid"/>
           </a:ln>
@@ -7315,7 +7315,7 @@
           <p:cNvPr id="6" name="">
             <a:extLst xmlns:a="http://schemas.openxmlformats.org/drawingml/2006/main">
               <a:ext uri="{FF2B5EF4-FFF2-40B4-BE49-F238E27FC236}">
-                <a16:creationId xmlns:a16="http://schemas.microsoft.com/office/drawing/2014/main" id="{27AA86F9-AE0F-4455-80DF-736C400BB76B}"/>
+                <a16:creationId xmlns:a16="http://schemas.microsoft.com/office/drawing/2014/main" id="{C303D46D-3CF2-4C48-9533-E1F24796476A}"/>
               </a:ext>
             </a:extLst>
           </p:cNvPr>
@@ -7372,7 +7372,7 @@
           <p:cNvPr id="7" name="">
             <a:extLst xmlns:a="http://schemas.openxmlformats.org/drawingml/2006/main">
               <a:ext uri="{FF2B5EF4-FFF2-40B4-BE49-F238E27FC236}">
-                <a16:creationId xmlns:a16="http://schemas.microsoft.com/office/drawing/2014/main" id="{63646F34-1204-4E99-9EA8-737C6DDE23B8}"/>
+                <a16:creationId xmlns:a16="http://schemas.microsoft.com/office/drawing/2014/main" id="{BEFFD9FB-FDAF-4117-AD50-9C38E36DBA87}"/>
               </a:ext>
             </a:extLst>
           </p:cNvPr>
@@ -7429,7 +7429,7 @@
           <p:cNvPr id="8" name="">
             <a:extLst xmlns:a="http://schemas.openxmlformats.org/drawingml/2006/main">
               <a:ext uri="{FF2B5EF4-FFF2-40B4-BE49-F238E27FC236}">
-                <a16:creationId xmlns:a16="http://schemas.microsoft.com/office/drawing/2014/main" id="{7FACABBE-AF26-4EE8-9699-57C7BE9D9D61}"/>
+                <a16:creationId xmlns:a16="http://schemas.microsoft.com/office/drawing/2014/main" id="{C818316E-3132-4775-9084-0919F8DEE59B}"/>
               </a:ext>
             </a:extLst>
           </p:cNvPr>
@@ -7486,7 +7486,7 @@
           <p:cNvPr id="9" name="">
             <a:extLst xmlns:a="http://schemas.openxmlformats.org/drawingml/2006/main">
               <a:ext uri="{FF2B5EF4-FFF2-40B4-BE49-F238E27FC236}">
-                <a16:creationId xmlns:a16="http://schemas.microsoft.com/office/drawing/2014/main" id="{2EF78D1C-B2A2-4250-9C3B-71F2A7ED94CC}"/>
+                <a16:creationId xmlns:a16="http://schemas.microsoft.com/office/drawing/2014/main" id="{BF3CFA38-52D0-4289-88D7-F429D90F22B9}"/>
               </a:ext>
             </a:extLst>
           </p:cNvPr>
@@ -7517,7 +7517,7 @@
           <p:cNvPr id="10" name="">
             <a:extLst xmlns:a="http://schemas.openxmlformats.org/drawingml/2006/main">
               <a:ext uri="{FF2B5EF4-FFF2-40B4-BE49-F238E27FC236}">
-                <a16:creationId xmlns:a16="http://schemas.microsoft.com/office/drawing/2014/main" id="{B37B89D6-0786-4EC4-9594-8802A64B0185}"/>
+                <a16:creationId xmlns:a16="http://schemas.microsoft.com/office/drawing/2014/main" id="{3E3DDBE7-D14E-4E48-99D4-3B3AC44615FE}"/>
               </a:ext>
             </a:extLst>
           </p:cNvPr>
@@ -7537,7 +7537,7 @@
           <a:noFill xmlns:a="http://schemas.openxmlformats.org/drawingml/2006/main"/>
           <a:ln xmlns:a="http://schemas.openxmlformats.org/drawingml/2006/main" w="9525">
             <a:solidFill>
-              <a:srgbClr val="2A4D65"/>
+              <a:srgbClr val="C5D4DC"/>
             </a:solidFill>
             <a:prstDash val="solid"/>
           </a:ln>
@@ -7548,7 +7548,7 @@
           <p:cNvPr id="11" name="">
             <a:extLst xmlns:a="http://schemas.openxmlformats.org/drawingml/2006/main">
               <a:ext uri="{FF2B5EF4-FFF2-40B4-BE49-F238E27FC236}">
-                <a16:creationId xmlns:a16="http://schemas.microsoft.com/office/drawing/2014/main" id="{9DF909B1-91F3-4ABF-83D5-D75F27B15E06}"/>
+                <a16:creationId xmlns:a16="http://schemas.microsoft.com/office/drawing/2014/main" id="{B29C5097-3975-4B1A-AE1B-003A2CDA32B3}"/>
               </a:ext>
             </a:extLst>
           </p:cNvPr>
@@ -7606,7 +7606,7 @@
           <p:cNvPr id="12" name="">
             <a:extLst xmlns:a="http://schemas.openxmlformats.org/drawingml/2006/main">
               <a:ext uri="{FF2B5EF4-FFF2-40B4-BE49-F238E27FC236}">
-                <a16:creationId xmlns:a16="http://schemas.microsoft.com/office/drawing/2014/main" id="{91855859-CECF-49A5-A05F-195D3FFA9B66}"/>
+                <a16:creationId xmlns:a16="http://schemas.microsoft.com/office/drawing/2014/main" id="{B663172A-8082-4C9D-B8A3-9398DA9BE019}"/>
               </a:ext>
             </a:extLst>
           </p:cNvPr>
@@ -7638,7 +7638,7 @@
             <a:pPr algn="r">
               <a:defRPr sz="750" b="1">
                 <a:solidFill>
-                  <a:srgbClr val="B8C9D3"/>
+                  <a:srgbClr val="587080"/>
                 </a:solidFill>
                 <a:latin typeface="Arial"/>
                 <a:ea typeface="Arial"/>
@@ -7648,7 +7648,7 @@
             <a:r>
               <a:rPr sz="750" b="1">
                 <a:solidFill>
-                  <a:srgbClr val="B8C9D3"/>
+                  <a:srgbClr val="587080"/>
                 </a:solidFill>
                 <a:latin typeface="Arial"/>
                 <a:ea typeface="Arial"/>
@@ -7664,7 +7664,7 @@
           <p:cNvPr id="13" name="">
             <a:extLst xmlns:a="http://schemas.openxmlformats.org/drawingml/2006/main">
               <a:ext uri="{FF2B5EF4-FFF2-40B4-BE49-F238E27FC236}">
-                <a16:creationId xmlns:a16="http://schemas.microsoft.com/office/drawing/2014/main" id="{C3095ED1-B4FF-48C3-B599-565767B9C7B5}"/>
+                <a16:creationId xmlns:a16="http://schemas.microsoft.com/office/drawing/2014/main" id="{9A49980A-8F3F-4C2F-8270-075B4DAA0F0E}"/>
               </a:ext>
             </a:extLst>
           </p:cNvPr>
@@ -7696,7 +7696,7 @@
             <a:pPr algn="l">
               <a:defRPr sz="600" b="0">
                 <a:solidFill>
-                  <a:srgbClr val="B8C9D3"/>
+                  <a:srgbClr val="587080"/>
                 </a:solidFill>
                 <a:latin typeface="Arial"/>
                 <a:ea typeface="Arial"/>
@@ -7706,7 +7706,7 @@
             <a:r>
               <a:rPr sz="600" b="0">
                 <a:solidFill>
-                  <a:srgbClr val="B8C9D3"/>
+                  <a:srgbClr val="587080"/>
                 </a:solidFill>
                 <a:latin typeface="Arial"/>
                 <a:ea typeface="Arial"/>
@@ -7722,7 +7722,7 @@
           <p:cNvPr id="14" name="">
             <a:extLst xmlns:a="http://schemas.openxmlformats.org/drawingml/2006/main">
               <a:ext uri="{FF2B5EF4-FFF2-40B4-BE49-F238E27FC236}">
-                <a16:creationId xmlns:a16="http://schemas.microsoft.com/office/drawing/2014/main" id="{6BB55F76-2B6B-48C6-BA91-3F5BB575A70B}"/>
+                <a16:creationId xmlns:a16="http://schemas.microsoft.com/office/drawing/2014/main" id="{FDED5B98-806C-4BE1-8F41-4905572205E9}"/>
               </a:ext>
             </a:extLst>
           </p:cNvPr>
@@ -7754,7 +7754,7 @@
             <a:pPr algn="r">
               <a:defRPr sz="600" b="1">
                 <a:solidFill>
-                  <a:srgbClr val="B8C9D3"/>
+                  <a:srgbClr val="587080"/>
                 </a:solidFill>
                 <a:latin typeface="Arial"/>
                 <a:ea typeface="Arial"/>
@@ -7764,7 +7764,7 @@
             <a:r>
               <a:rPr sz="600" b="1">
                 <a:solidFill>
-                  <a:srgbClr val="B8C9D3"/>
+                  <a:srgbClr val="587080"/>
                 </a:solidFill>
                 <a:latin typeface="Arial"/>
                 <a:ea typeface="Arial"/>
@@ -7780,7 +7780,7 @@
           <p:cNvPr id="15" name="">
             <a:extLst xmlns:a="http://schemas.openxmlformats.org/drawingml/2006/main">
               <a:ext uri="{FF2B5EF4-FFF2-40B4-BE49-F238E27FC236}">
-                <a16:creationId xmlns:a16="http://schemas.microsoft.com/office/drawing/2014/main" id="{FEF618D8-41E8-4DEA-A477-0522F3B2BA4A}"/>
+                <a16:creationId xmlns:a16="http://schemas.microsoft.com/office/drawing/2014/main" id="{E1ECBA15-C1B9-409C-B530-34F8BB876393}"/>
               </a:ext>
             </a:extLst>
           </p:cNvPr>
@@ -7812,7 +7812,7 @@
             <a:pPr algn="l">
               <a:defRPr sz="2250" b="0">
                 <a:solidFill>
-                  <a:srgbClr val="00E1C6"/>
+                  <a:srgbClr val="132E41"/>
                 </a:solidFill>
                 <a:latin typeface="Georgia"/>
                 <a:ea typeface="Georgia"/>
@@ -7822,7 +7822,7 @@
             <a:r>
               <a:rPr sz="2250" b="0">
                 <a:solidFill>
-                  <a:srgbClr val="00E1C6"/>
+                  <a:srgbClr val="132E41"/>
                 </a:solidFill>
                 <a:latin typeface="Georgia"/>
                 <a:ea typeface="Georgia"/>
@@ -7838,7 +7838,7 @@
           <p:cNvPr id="16" name="">
             <a:extLst xmlns:a="http://schemas.openxmlformats.org/drawingml/2006/main">
               <a:ext uri="{FF2B5EF4-FFF2-40B4-BE49-F238E27FC236}">
-                <a16:creationId xmlns:a16="http://schemas.microsoft.com/office/drawing/2014/main" id="{93C94403-415E-4A93-A1E1-14C8150841B9}"/>
+                <a16:creationId xmlns:a16="http://schemas.microsoft.com/office/drawing/2014/main" id="{F87682B1-92F1-4081-B6C7-464A09C0DEA8}"/>
               </a:ext>
             </a:extLst>
           </p:cNvPr>
@@ -7870,7 +7870,7 @@
             <a:pPr algn="l">
               <a:defRPr sz="1125" b="0">
                 <a:solidFill>
-                  <a:srgbClr val="B8C9D3"/>
+                  <a:srgbClr val="587080"/>
                 </a:solidFill>
                 <a:latin typeface="Arial"/>
                 <a:ea typeface="Arial"/>
@@ -7880,7 +7880,7 @@
             <a:r>
               <a:rPr sz="1125" b="0">
                 <a:solidFill>
-                  <a:srgbClr val="B8C9D3"/>
+                  <a:srgbClr val="587080"/>
                 </a:solidFill>
                 <a:latin typeface="Arial"/>
                 <a:ea typeface="Arial"/>
@@ -7896,7 +7896,7 @@
           <p:cNvPr id="17" name="">
             <a:extLst xmlns:a="http://schemas.openxmlformats.org/drawingml/2006/main">
               <a:ext uri="{FF2B5EF4-FFF2-40B4-BE49-F238E27FC236}">
-                <a16:creationId xmlns:a16="http://schemas.microsoft.com/office/drawing/2014/main" id="{DDDFDC3B-6939-493B-BDDD-8B60C8E6D47E}"/>
+                <a16:creationId xmlns:a16="http://schemas.microsoft.com/office/drawing/2014/main" id="{E9CED515-3779-4199-BDAC-357961A0FA31}"/>
               </a:ext>
             </a:extLst>
           </p:cNvPr>
@@ -7954,7 +7954,7 @@
           <p:cNvPr id="18" name="">
             <a:extLst xmlns:a="http://schemas.openxmlformats.org/drawingml/2006/main">
               <a:ext uri="{FF2B5EF4-FFF2-40B4-BE49-F238E27FC236}">
-                <a16:creationId xmlns:a16="http://schemas.microsoft.com/office/drawing/2014/main" id="{D5DB6D9F-3100-4BC9-AA2B-6EDB72FA395D}"/>
+                <a16:creationId xmlns:a16="http://schemas.microsoft.com/office/drawing/2014/main" id="{92D3B160-A1A5-4877-91DE-657D71496328}"/>
               </a:ext>
             </a:extLst>
           </p:cNvPr>
@@ -8011,7 +8011,7 @@
           <p:cNvPr id="19" name="">
             <a:extLst xmlns:a="http://schemas.openxmlformats.org/drawingml/2006/main">
               <a:ext uri="{FF2B5EF4-FFF2-40B4-BE49-F238E27FC236}">
-                <a16:creationId xmlns:a16="http://schemas.microsoft.com/office/drawing/2014/main" id="{94CE3D43-21E5-40D5-A7C7-67EA9C980A17}"/>
+                <a16:creationId xmlns:a16="http://schemas.microsoft.com/office/drawing/2014/main" id="{099B022D-BBFA-4815-AD2F-54D1D23E1B0D}"/>
               </a:ext>
             </a:extLst>
           </p:cNvPr>
@@ -8043,7 +8043,7 @@
             <a:pPr algn="l">
               <a:defRPr sz="975" b="1">
                 <a:solidFill>
-                  <a:srgbClr val="F3F8FA"/>
+                  <a:srgbClr val="132E41"/>
                 </a:solidFill>
                 <a:latin typeface="Arial"/>
                 <a:ea typeface="Arial"/>
@@ -8053,7 +8053,7 @@
             <a:r>
               <a:rPr sz="975" b="1">
                 <a:solidFill>
-                  <a:srgbClr val="F3F8FA"/>
+                  <a:srgbClr val="132E41"/>
                 </a:solidFill>
                 <a:latin typeface="Arial"/>
                 <a:ea typeface="Arial"/>
@@ -8069,7 +8069,7 @@
           <p:cNvPr id="20" name="">
             <a:extLst xmlns:a="http://schemas.openxmlformats.org/drawingml/2006/main">
               <a:ext uri="{FF2B5EF4-FFF2-40B4-BE49-F238E27FC236}">
-                <a16:creationId xmlns:a16="http://schemas.microsoft.com/office/drawing/2014/main" id="{E24A26E6-61B4-4853-B1F1-782491B3AC06}"/>
+                <a16:creationId xmlns:a16="http://schemas.microsoft.com/office/drawing/2014/main" id="{54C3500F-6CE0-4111-8324-A52FEB7A7D37}"/>
               </a:ext>
             </a:extLst>
           </p:cNvPr>
@@ -8101,7 +8101,7 @@
             <a:pPr algn="l">
               <a:defRPr sz="750" b="0">
                 <a:solidFill>
-                  <a:srgbClr val="B8C9D3"/>
+                  <a:srgbClr val="587080"/>
                 </a:solidFill>
                 <a:latin typeface="Arial"/>
                 <a:ea typeface="Arial"/>
@@ -8111,7 +8111,7 @@
             <a:r>
               <a:rPr sz="750" b="0">
                 <a:solidFill>
-                  <a:srgbClr val="B8C9D3"/>
+                  <a:srgbClr val="587080"/>
                 </a:solidFill>
                 <a:latin typeface="Arial"/>
                 <a:ea typeface="Arial"/>
@@ -8127,7 +8127,7 @@
           <p:cNvPr id="21" name="">
             <a:extLst xmlns:a="http://schemas.openxmlformats.org/drawingml/2006/main">
               <a:ext uri="{FF2B5EF4-FFF2-40B4-BE49-F238E27FC236}">
-                <a16:creationId xmlns:a16="http://schemas.microsoft.com/office/drawing/2014/main" id="{13964EBB-932D-4E2A-8F97-4C78A27DA7FB}"/>
+                <a16:creationId xmlns:a16="http://schemas.microsoft.com/office/drawing/2014/main" id="{189BB76F-1247-42D2-8489-3F594B4E4770}"/>
               </a:ext>
             </a:extLst>
           </p:cNvPr>
@@ -8184,7 +8184,7 @@
           <p:cNvPr id="22" name="">
             <a:extLst xmlns:a="http://schemas.openxmlformats.org/drawingml/2006/main">
               <a:ext uri="{FF2B5EF4-FFF2-40B4-BE49-F238E27FC236}">
-                <a16:creationId xmlns:a16="http://schemas.microsoft.com/office/drawing/2014/main" id="{4BE603A2-2F73-41E4-9699-56B68C944217}"/>
+                <a16:creationId xmlns:a16="http://schemas.microsoft.com/office/drawing/2014/main" id="{69072C18-676B-49A3-AC06-FB3C09D7239B}"/>
               </a:ext>
             </a:extLst>
           </p:cNvPr>
@@ -8216,7 +8216,7 @@
             <a:pPr algn="l">
               <a:defRPr sz="975" b="1">
                 <a:solidFill>
-                  <a:srgbClr val="F3F8FA"/>
+                  <a:srgbClr val="132E41"/>
                 </a:solidFill>
                 <a:latin typeface="Arial"/>
                 <a:ea typeface="Arial"/>
@@ -8226,7 +8226,7 @@
             <a:r>
               <a:rPr sz="975" b="1">
                 <a:solidFill>
-                  <a:srgbClr val="F3F8FA"/>
+                  <a:srgbClr val="132E41"/>
                 </a:solidFill>
                 <a:latin typeface="Arial"/>
                 <a:ea typeface="Arial"/>
@@ -8242,7 +8242,7 @@
           <p:cNvPr id="23" name="">
             <a:extLst xmlns:a="http://schemas.openxmlformats.org/drawingml/2006/main">
               <a:ext uri="{FF2B5EF4-FFF2-40B4-BE49-F238E27FC236}">
-                <a16:creationId xmlns:a16="http://schemas.microsoft.com/office/drawing/2014/main" id="{119A2536-D49A-4275-9351-E3E339AC8411}"/>
+                <a16:creationId xmlns:a16="http://schemas.microsoft.com/office/drawing/2014/main" id="{7423598E-15E1-4BB1-BE7F-6115163F1A4A}"/>
               </a:ext>
             </a:extLst>
           </p:cNvPr>
@@ -8274,7 +8274,7 @@
             <a:pPr algn="l">
               <a:defRPr sz="750" b="0">
                 <a:solidFill>
-                  <a:srgbClr val="B8C9D3"/>
+                  <a:srgbClr val="587080"/>
                 </a:solidFill>
                 <a:latin typeface="Arial"/>
                 <a:ea typeface="Arial"/>
@@ -8284,7 +8284,7 @@
             <a:r>
               <a:rPr sz="750" b="0">
                 <a:solidFill>
-                  <a:srgbClr val="B8C9D3"/>
+                  <a:srgbClr val="587080"/>
                 </a:solidFill>
                 <a:latin typeface="Arial"/>
                 <a:ea typeface="Arial"/>
@@ -8300,7 +8300,7 @@
           <p:cNvPr id="24" name="">
             <a:extLst xmlns:a="http://schemas.openxmlformats.org/drawingml/2006/main">
               <a:ext uri="{FF2B5EF4-FFF2-40B4-BE49-F238E27FC236}">
-                <a16:creationId xmlns:a16="http://schemas.microsoft.com/office/drawing/2014/main" id="{940ACE01-AB60-49D1-877E-B34CA24DF2D8}"/>
+                <a16:creationId xmlns:a16="http://schemas.microsoft.com/office/drawing/2014/main" id="{A2D94FC7-1852-4872-90FE-3DAB512FFE43}"/>
               </a:ext>
             </a:extLst>
           </p:cNvPr>
@@ -8357,7 +8357,7 @@
           <p:cNvPr id="25" name="">
             <a:extLst xmlns:a="http://schemas.openxmlformats.org/drawingml/2006/main">
               <a:ext uri="{FF2B5EF4-FFF2-40B4-BE49-F238E27FC236}">
-                <a16:creationId xmlns:a16="http://schemas.microsoft.com/office/drawing/2014/main" id="{48729EA2-3279-4B22-9754-2AF4F6F11E79}"/>
+                <a16:creationId xmlns:a16="http://schemas.microsoft.com/office/drawing/2014/main" id="{C289CD24-3C6D-434B-AD58-E289B3DA4676}"/>
               </a:ext>
             </a:extLst>
           </p:cNvPr>
@@ -8389,7 +8389,7 @@
             <a:pPr algn="l">
               <a:defRPr sz="975" b="1">
                 <a:solidFill>
-                  <a:srgbClr val="F3F8FA"/>
+                  <a:srgbClr val="132E41"/>
                 </a:solidFill>
                 <a:latin typeface="Arial"/>
                 <a:ea typeface="Arial"/>
@@ -8399,7 +8399,7 @@
             <a:r>
               <a:rPr sz="975" b="1">
                 <a:solidFill>
-                  <a:srgbClr val="F3F8FA"/>
+                  <a:srgbClr val="132E41"/>
                 </a:solidFill>
                 <a:latin typeface="Arial"/>
                 <a:ea typeface="Arial"/>
@@ -8415,7 +8415,7 @@
           <p:cNvPr id="26" name="">
             <a:extLst xmlns:a="http://schemas.openxmlformats.org/drawingml/2006/main">
               <a:ext uri="{FF2B5EF4-FFF2-40B4-BE49-F238E27FC236}">
-                <a16:creationId xmlns:a16="http://schemas.microsoft.com/office/drawing/2014/main" id="{E71023CA-BFC4-4584-858D-B58714AB603F}"/>
+                <a16:creationId xmlns:a16="http://schemas.microsoft.com/office/drawing/2014/main" id="{D2929A49-930F-42B4-A8D0-8E505C44AD1C}"/>
               </a:ext>
             </a:extLst>
           </p:cNvPr>
@@ -8447,7 +8447,7 @@
             <a:pPr algn="l">
               <a:defRPr sz="750" b="0">
                 <a:solidFill>
-                  <a:srgbClr val="B8C9D3"/>
+                  <a:srgbClr val="587080"/>
                 </a:solidFill>
                 <a:latin typeface="Arial"/>
                 <a:ea typeface="Arial"/>
@@ -8457,7 +8457,7 @@
             <a:r>
               <a:rPr sz="750" b="0">
                 <a:solidFill>
-                  <a:srgbClr val="B8C9D3"/>
+                  <a:srgbClr val="587080"/>
                 </a:solidFill>
                 <a:latin typeface="Arial"/>
                 <a:ea typeface="Arial"/>
@@ -8473,7 +8473,7 @@
           <p:cNvPr id="27" name="">
             <a:extLst xmlns:a="http://schemas.openxmlformats.org/drawingml/2006/main">
               <a:ext uri="{FF2B5EF4-FFF2-40B4-BE49-F238E27FC236}">
-                <a16:creationId xmlns:a16="http://schemas.microsoft.com/office/drawing/2014/main" id="{7055448F-0E2D-4F00-8E70-09359202D8C6}"/>
+                <a16:creationId xmlns:a16="http://schemas.microsoft.com/office/drawing/2014/main" id="{805663E8-454A-41A2-A8AF-D0D14554CD30}"/>
               </a:ext>
             </a:extLst>
           </p:cNvPr>
@@ -8493,11 +8493,11 @@
             </a:avLst>
           </a:prstGeom>
           <a:solidFill xmlns:a="http://schemas.openxmlformats.org/drawingml/2006/main">
-            <a:srgbClr val="102F46"/>
+            <a:srgbClr val="FFFFFF"/>
           </a:solidFill>
           <a:ln xmlns:a="http://schemas.openxmlformats.org/drawingml/2006/main" w="9525">
             <a:solidFill>
-              <a:srgbClr val="2A4D65"/>
+              <a:srgbClr val="C5D4DC"/>
             </a:solidFill>
             <a:prstDash val="solid"/>
           </a:ln>
@@ -8508,7 +8508,7 @@
           <p:cNvPr id="28" name="">
             <a:extLst xmlns:a="http://schemas.openxmlformats.org/drawingml/2006/main">
               <a:ext uri="{FF2B5EF4-FFF2-40B4-BE49-F238E27FC236}">
-                <a16:creationId xmlns:a16="http://schemas.microsoft.com/office/drawing/2014/main" id="{E3A95F62-B5C5-4B65-A47C-939E14CD8DB8}"/>
+                <a16:creationId xmlns:a16="http://schemas.microsoft.com/office/drawing/2014/main" id="{6615C04E-429B-4022-A110-61790ED63640}"/>
               </a:ext>
             </a:extLst>
           </p:cNvPr>
@@ -8566,7 +8566,7 @@
           <p:cNvPr id="29" name="">
             <a:extLst xmlns:a="http://schemas.openxmlformats.org/drawingml/2006/main">
               <a:ext uri="{FF2B5EF4-FFF2-40B4-BE49-F238E27FC236}">
-                <a16:creationId xmlns:a16="http://schemas.microsoft.com/office/drawing/2014/main" id="{A2F0BFAA-6794-460F-93D5-02324F1BF472}"/>
+                <a16:creationId xmlns:a16="http://schemas.microsoft.com/office/drawing/2014/main" id="{8C407330-02C3-4A67-AE6D-59592D99F206}"/>
               </a:ext>
             </a:extLst>
           </p:cNvPr>
@@ -8603,7 +8603,7 @@
           <p:cNvPr id="30" name="">
             <a:extLst xmlns:a="http://schemas.openxmlformats.org/drawingml/2006/main">
               <a:ext uri="{FF2B5EF4-FFF2-40B4-BE49-F238E27FC236}">
-                <a16:creationId xmlns:a16="http://schemas.microsoft.com/office/drawing/2014/main" id="{3B68E7BA-9CEC-4A72-9731-2C7A3941C161}"/>
+                <a16:creationId xmlns:a16="http://schemas.microsoft.com/office/drawing/2014/main" id="{A4753FA7-063B-4B56-A562-D2481F5F995D}"/>
               </a:ext>
             </a:extLst>
           </p:cNvPr>
@@ -8661,7 +8661,7 @@
           <p:cNvPr id="31" name="">
             <a:extLst xmlns:a="http://schemas.openxmlformats.org/drawingml/2006/main">
               <a:ext uri="{FF2B5EF4-FFF2-40B4-BE49-F238E27FC236}">
-                <a16:creationId xmlns:a16="http://schemas.microsoft.com/office/drawing/2014/main" id="{899F017B-459E-4CB2-A771-56C24393E368}"/>
+                <a16:creationId xmlns:a16="http://schemas.microsoft.com/office/drawing/2014/main" id="{F14C4851-3562-4563-8263-F9DD00A78835}"/>
               </a:ext>
             </a:extLst>
           </p:cNvPr>
@@ -8693,7 +8693,7 @@
             <a:pPr algn="l">
               <a:defRPr sz="675" b="1">
                 <a:solidFill>
-                  <a:srgbClr val="B8C9D3"/>
+                  <a:srgbClr val="587080"/>
                 </a:solidFill>
                 <a:latin typeface="Arial"/>
                 <a:ea typeface="Arial"/>
@@ -8703,7 +8703,7 @@
             <a:r>
               <a:rPr sz="675" b="1">
                 <a:solidFill>
-                  <a:srgbClr val="B8C9D3"/>
+                  <a:srgbClr val="587080"/>
                 </a:solidFill>
                 <a:latin typeface="Arial"/>
                 <a:ea typeface="Arial"/>
@@ -8719,7 +8719,7 @@
           <p:cNvPr id="32" name="">
             <a:extLst xmlns:a="http://schemas.openxmlformats.org/drawingml/2006/main">
               <a:ext uri="{FF2B5EF4-FFF2-40B4-BE49-F238E27FC236}">
-                <a16:creationId xmlns:a16="http://schemas.microsoft.com/office/drawing/2014/main" id="{DD338E6B-8A53-407E-BD2A-341FD587057C}"/>
+                <a16:creationId xmlns:a16="http://schemas.microsoft.com/office/drawing/2014/main" id="{4F7E8C42-8F59-473F-B821-74E6D3F6B326}"/>
               </a:ext>
             </a:extLst>
           </p:cNvPr>
@@ -8756,7 +8756,7 @@
           <p:cNvPr id="33" name="">
             <a:extLst xmlns:a="http://schemas.openxmlformats.org/drawingml/2006/main">
               <a:ext uri="{FF2B5EF4-FFF2-40B4-BE49-F238E27FC236}">
-                <a16:creationId xmlns:a16="http://schemas.microsoft.com/office/drawing/2014/main" id="{F31F5325-995B-4581-90FD-C27168CF2ADF}"/>
+                <a16:creationId xmlns:a16="http://schemas.microsoft.com/office/drawing/2014/main" id="{DA677549-C366-4E13-AB54-686D3A5C751F}"/>
               </a:ext>
             </a:extLst>
           </p:cNvPr>
@@ -8814,7 +8814,7 @@
           <p:cNvPr id="34" name="">
             <a:extLst xmlns:a="http://schemas.openxmlformats.org/drawingml/2006/main">
               <a:ext uri="{FF2B5EF4-FFF2-40B4-BE49-F238E27FC236}">
-                <a16:creationId xmlns:a16="http://schemas.microsoft.com/office/drawing/2014/main" id="{26503D47-EBA0-4593-A82F-54D3217BC675}"/>
+                <a16:creationId xmlns:a16="http://schemas.microsoft.com/office/drawing/2014/main" id="{6727E1CC-9FD1-49DC-A05C-2B6DCDEE50DE}"/>
               </a:ext>
             </a:extLst>
           </p:cNvPr>
@@ -8846,7 +8846,7 @@
             <a:pPr algn="l">
               <a:defRPr sz="675" b="1">
                 <a:solidFill>
-                  <a:srgbClr val="B8C9D3"/>
+                  <a:srgbClr val="587080"/>
                 </a:solidFill>
                 <a:latin typeface="Arial"/>
                 <a:ea typeface="Arial"/>
@@ -8856,7 +8856,7 @@
             <a:r>
               <a:rPr sz="675" b="1">
                 <a:solidFill>
-                  <a:srgbClr val="B8C9D3"/>
+                  <a:srgbClr val="587080"/>
                 </a:solidFill>
                 <a:latin typeface="Arial"/>
                 <a:ea typeface="Arial"/>
@@ -8872,7 +8872,7 @@
           <p:cNvPr id="35" name="">
             <a:extLst xmlns:a="http://schemas.openxmlformats.org/drawingml/2006/main">
               <a:ext uri="{FF2B5EF4-FFF2-40B4-BE49-F238E27FC236}">
-                <a16:creationId xmlns:a16="http://schemas.microsoft.com/office/drawing/2014/main" id="{04B19396-3D36-41C0-9C36-85DB3793DB0F}"/>
+                <a16:creationId xmlns:a16="http://schemas.microsoft.com/office/drawing/2014/main" id="{4A8999E3-BEE1-44BF-92EC-785CA0AE2C9B}"/>
               </a:ext>
             </a:extLst>
           </p:cNvPr>
@@ -8909,7 +8909,7 @@
           <p:cNvPr id="36" name="">
             <a:extLst xmlns:a="http://schemas.openxmlformats.org/drawingml/2006/main">
               <a:ext uri="{FF2B5EF4-FFF2-40B4-BE49-F238E27FC236}">
-                <a16:creationId xmlns:a16="http://schemas.microsoft.com/office/drawing/2014/main" id="{C8FAF6BB-9798-4419-96E4-2978057ED57E}"/>
+                <a16:creationId xmlns:a16="http://schemas.microsoft.com/office/drawing/2014/main" id="{DE58479E-5936-4D3C-8A40-E4C2BA9C5670}"/>
               </a:ext>
             </a:extLst>
           </p:cNvPr>
@@ -8967,7 +8967,7 @@
           <p:cNvPr id="37" name="">
             <a:extLst xmlns:a="http://schemas.openxmlformats.org/drawingml/2006/main">
               <a:ext uri="{FF2B5EF4-FFF2-40B4-BE49-F238E27FC236}">
-                <a16:creationId xmlns:a16="http://schemas.microsoft.com/office/drawing/2014/main" id="{FD121E13-0B4D-4257-8A3E-0F85E0DC4CC3}"/>
+                <a16:creationId xmlns:a16="http://schemas.microsoft.com/office/drawing/2014/main" id="{0ACB9D26-2EEA-4772-A0A9-5943EA3D6CEC}"/>
               </a:ext>
             </a:extLst>
           </p:cNvPr>
@@ -8999,7 +8999,7 @@
             <a:pPr algn="l">
               <a:defRPr sz="675" b="1">
                 <a:solidFill>
-                  <a:srgbClr val="F3F8FA"/>
+                  <a:srgbClr val="132E41"/>
                 </a:solidFill>
                 <a:latin typeface="Arial"/>
                 <a:ea typeface="Arial"/>
@@ -9009,7 +9009,7 @@
             <a:r>
               <a:rPr sz="675" b="1">
                 <a:solidFill>
-                  <a:srgbClr val="F3F8FA"/>
+                  <a:srgbClr val="132E41"/>
                 </a:solidFill>
                 <a:latin typeface="Arial"/>
                 <a:ea typeface="Arial"/>
@@ -9025,7 +9025,7 @@
           <p:cNvPr id="38" name="">
             <a:extLst xmlns:a="http://schemas.openxmlformats.org/drawingml/2006/main">
               <a:ext uri="{FF2B5EF4-FFF2-40B4-BE49-F238E27FC236}">
-                <a16:creationId xmlns:a16="http://schemas.microsoft.com/office/drawing/2014/main" id="{E16F98EF-9CB9-4A97-A809-BEA306FF7FFC}"/>
+                <a16:creationId xmlns:a16="http://schemas.microsoft.com/office/drawing/2014/main" id="{DB84EDBB-FF49-47C7-9F5A-F0DAB8B613E3}"/>
               </a:ext>
             </a:extLst>
           </p:cNvPr>
@@ -9062,7 +9062,7 @@
           <p:cNvPr id="39" name="">
             <a:extLst xmlns:a="http://schemas.openxmlformats.org/drawingml/2006/main">
               <a:ext uri="{FF2B5EF4-FFF2-40B4-BE49-F238E27FC236}">
-                <a16:creationId xmlns:a16="http://schemas.microsoft.com/office/drawing/2014/main" id="{D21D1E34-6248-4191-9373-117AB72974B0}"/>
+                <a16:creationId xmlns:a16="http://schemas.microsoft.com/office/drawing/2014/main" id="{3DA713AB-3BEB-4DB4-8BC7-D82ABB0DBCED}"/>
               </a:ext>
             </a:extLst>
           </p:cNvPr>
@@ -9120,7 +9120,7 @@
           <p:cNvPr id="40" name="">
             <a:extLst xmlns:a="http://schemas.openxmlformats.org/drawingml/2006/main">
               <a:ext uri="{FF2B5EF4-FFF2-40B4-BE49-F238E27FC236}">
-                <a16:creationId xmlns:a16="http://schemas.microsoft.com/office/drawing/2014/main" id="{B21AC56F-55D1-4BC1-A84A-D7FD3D0F3E8C}"/>
+                <a16:creationId xmlns:a16="http://schemas.microsoft.com/office/drawing/2014/main" id="{196B0270-DEF5-4A6C-9BFD-86C63254C646}"/>
               </a:ext>
             </a:extLst>
           </p:cNvPr>
@@ -9152,7 +9152,7 @@
             <a:pPr algn="l">
               <a:defRPr sz="675" b="1">
                 <a:solidFill>
-                  <a:srgbClr val="F3F8FA"/>
+                  <a:srgbClr val="132E41"/>
                 </a:solidFill>
                 <a:latin typeface="Arial"/>
                 <a:ea typeface="Arial"/>
@@ -9162,7 +9162,7 @@
             <a:r>
               <a:rPr sz="675" b="1">
                 <a:solidFill>
-                  <a:srgbClr val="F3F8FA"/>
+                  <a:srgbClr val="132E41"/>
                 </a:solidFill>
                 <a:latin typeface="Arial"/>
                 <a:ea typeface="Arial"/>
@@ -9178,7 +9178,7 @@
           <p:cNvPr id="41" name="">
             <a:extLst xmlns:a="http://schemas.openxmlformats.org/drawingml/2006/main">
               <a:ext uri="{FF2B5EF4-FFF2-40B4-BE49-F238E27FC236}">
-                <a16:creationId xmlns:a16="http://schemas.microsoft.com/office/drawing/2014/main" id="{14ECB84E-9BFB-44CF-B22C-D8A78F6C97AC}"/>
+                <a16:creationId xmlns:a16="http://schemas.microsoft.com/office/drawing/2014/main" id="{1C3A5FB6-E26C-4390-A564-55A486CF4C83}"/>
               </a:ext>
             </a:extLst>
           </p:cNvPr>
@@ -9215,7 +9215,7 @@
           <p:cNvPr id="42" name="">
             <a:extLst xmlns:a="http://schemas.openxmlformats.org/drawingml/2006/main">
               <a:ext uri="{FF2B5EF4-FFF2-40B4-BE49-F238E27FC236}">
-                <a16:creationId xmlns:a16="http://schemas.microsoft.com/office/drawing/2014/main" id="{340332B6-C95D-4716-93DB-0CDAA56F99DD}"/>
+                <a16:creationId xmlns:a16="http://schemas.microsoft.com/office/drawing/2014/main" id="{B315EA91-0189-464E-8BEC-D67DF1087EAA}"/>
               </a:ext>
             </a:extLst>
           </p:cNvPr>
@@ -9273,7 +9273,7 @@
           <p:cNvPr id="43" name="">
             <a:extLst xmlns:a="http://schemas.openxmlformats.org/drawingml/2006/main">
               <a:ext uri="{FF2B5EF4-FFF2-40B4-BE49-F238E27FC236}">
-                <a16:creationId xmlns:a16="http://schemas.microsoft.com/office/drawing/2014/main" id="{E4FDA080-9FD2-4298-8EDF-644591A1EBDF}"/>
+                <a16:creationId xmlns:a16="http://schemas.microsoft.com/office/drawing/2014/main" id="{5434CA21-24C9-4CF2-A892-584E19294632}"/>
               </a:ext>
             </a:extLst>
           </p:cNvPr>
@@ -9305,7 +9305,7 @@
             <a:pPr algn="l">
               <a:defRPr sz="675" b="1">
                 <a:solidFill>
-                  <a:srgbClr val="F3F8FA"/>
+                  <a:srgbClr val="132E41"/>
                 </a:solidFill>
                 <a:latin typeface="Arial"/>
                 <a:ea typeface="Arial"/>
@@ -9315,7 +9315,7 @@
             <a:r>
               <a:rPr sz="675" b="1">
                 <a:solidFill>
-                  <a:srgbClr val="F3F8FA"/>
+                  <a:srgbClr val="132E41"/>
                 </a:solidFill>
                 <a:latin typeface="Arial"/>
                 <a:ea typeface="Arial"/>
@@ -9331,7 +9331,7 @@
           <p:cNvPr id="44" name="">
             <a:extLst xmlns:a="http://schemas.openxmlformats.org/drawingml/2006/main">
               <a:ext uri="{FF2B5EF4-FFF2-40B4-BE49-F238E27FC236}">
-                <a16:creationId xmlns:a16="http://schemas.microsoft.com/office/drawing/2014/main" id="{2968E0C1-9EA1-4A08-A96D-BD3E789BF94E}"/>
+                <a16:creationId xmlns:a16="http://schemas.microsoft.com/office/drawing/2014/main" id="{984141E6-4B36-42D5-A787-B1D9A38388C8}"/>
               </a:ext>
             </a:extLst>
           </p:cNvPr>
@@ -9363,7 +9363,7 @@
             <a:pPr algn="ctr">
               <a:defRPr sz="750" b="0">
                 <a:solidFill>
-                  <a:srgbClr val="B8C9D3"/>
+                  <a:srgbClr val="587080"/>
                 </a:solidFill>
                 <a:latin typeface="Arial"/>
                 <a:ea typeface="Arial"/>
@@ -9373,7 +9373,7 @@
             <a:r>
               <a:rPr sz="750" b="0">
                 <a:solidFill>
-                  <a:srgbClr val="B8C9D3"/>
+                  <a:srgbClr val="587080"/>
                 </a:solidFill>
                 <a:latin typeface="Arial"/>
                 <a:ea typeface="Arial"/>
@@ -9386,7 +9386,7 @@
             <a:pPr algn="ctr">
               <a:defRPr sz="750" b="0">
                 <a:solidFill>
-                  <a:srgbClr val="B8C9D3"/>
+                  <a:srgbClr val="587080"/>
                 </a:solidFill>
                 <a:latin typeface="Arial"/>
                 <a:ea typeface="Arial"/>
@@ -9396,7 +9396,7 @@
             <a:r>
               <a:rPr sz="750" b="0">
                 <a:solidFill>
-                  <a:srgbClr val="B8C9D3"/>
+                  <a:srgbClr val="587080"/>
                 </a:solidFill>
                 <a:latin typeface="Arial"/>
                 <a:ea typeface="Arial"/>
@@ -9410,7 +9410,7 @@
     </p:spTree>
     <p:extLst>
       <p:ext uri="{BB962C8B-B14F-4D97-AF65-F5344CB8AC3E}">
-        <p14:creationId xmlns:p14="http://schemas.microsoft.com/office/powerpoint/2010/main" val="71159976"/>
+        <p14:creationId xmlns:p14="http://schemas.microsoft.com/office/powerpoint/2010/main" val="209758999"/>
       </p:ext>
     </p:extLst>
   </p:cSld>
@@ -9423,7 +9423,7 @@
     <p:bg>
       <p:bgPr>
         <a:solidFill xmlns:a="http://schemas.openxmlformats.org/drawingml/2006/main">
-          <a:srgbClr val="0E293C"/>
+          <a:srgbClr val="F3F1EB"/>
         </a:solidFill>
       </p:bgPr>
     </p:bg>
@@ -9441,7 +9441,7 @@
           <p:cNvPr id="23" name="">
             <a:extLst xmlns:a="http://schemas.openxmlformats.org/drawingml/2006/main">
               <a:ext uri="{FF2B5EF4-FFF2-40B4-BE49-F238E27FC236}">
-                <a16:creationId xmlns:a16="http://schemas.microsoft.com/office/drawing/2014/main" id="{AB47ED4A-E2B4-4558-9D06-2C173531F286}"/>
+                <a16:creationId xmlns:a16="http://schemas.microsoft.com/office/drawing/2014/main" id="{00BC9626-28BE-4D5D-BDB4-7456EE221E97}"/>
               </a:ext>
             </a:extLst>
           </p:cNvPr>
@@ -9498,7 +9498,7 @@
           <p:cNvPr id="2" name="">
             <a:extLst xmlns:a="http://schemas.openxmlformats.org/drawingml/2006/main">
               <a:ext uri="{FF2B5EF4-FFF2-40B4-BE49-F238E27FC236}">
-                <a16:creationId xmlns:a16="http://schemas.microsoft.com/office/drawing/2014/main" id="{B6561EA3-6ECC-47C9-97FC-401AFEC29E8E}"/>
+                <a16:creationId xmlns:a16="http://schemas.microsoft.com/office/drawing/2014/main" id="{28019D43-1B69-4B2A-895A-0B1C7F49CD40}"/>
               </a:ext>
             </a:extLst>
           </p:cNvPr>
@@ -9555,7 +9555,7 @@
           <p:cNvPr id="3" name="">
             <a:extLst xmlns:a="http://schemas.openxmlformats.org/drawingml/2006/main">
               <a:ext uri="{FF2B5EF4-FFF2-40B4-BE49-F238E27FC236}">
-                <a16:creationId xmlns:a16="http://schemas.microsoft.com/office/drawing/2014/main" id="{2900FCD8-7CF1-43A7-81FF-A1A6DF21E691}"/>
+                <a16:creationId xmlns:a16="http://schemas.microsoft.com/office/drawing/2014/main" id="{DD552CC4-B8F4-4FA0-A702-898A410FDAD2}"/>
               </a:ext>
             </a:extLst>
           </p:cNvPr>
@@ -9612,7 +9612,7 @@
           <p:cNvPr id="4" name="">
             <a:extLst xmlns:a="http://schemas.openxmlformats.org/drawingml/2006/main">
               <a:ext uri="{FF2B5EF4-FFF2-40B4-BE49-F238E27FC236}">
-                <a16:creationId xmlns:a16="http://schemas.microsoft.com/office/drawing/2014/main" id="{998931C0-F548-4A67-B03F-DF927018A034}"/>
+                <a16:creationId xmlns:a16="http://schemas.microsoft.com/office/drawing/2014/main" id="{7FDBB61B-527C-4038-BC2D-051EB8B30360}"/>
               </a:ext>
             </a:extLst>
           </p:cNvPr>
@@ -9643,7 +9643,7 @@
           <p:cNvPr id="5" name="">
             <a:extLst xmlns:a="http://schemas.openxmlformats.org/drawingml/2006/main">
               <a:ext uri="{FF2B5EF4-FFF2-40B4-BE49-F238E27FC236}">
-                <a16:creationId xmlns:a16="http://schemas.microsoft.com/office/drawing/2014/main" id="{A1EB8AF7-496F-4B75-8F54-B61ABD562D8E}"/>
+                <a16:creationId xmlns:a16="http://schemas.microsoft.com/office/drawing/2014/main" id="{67EA91F6-59B2-4127-80F6-9207CC2B3DC7}"/>
               </a:ext>
             </a:extLst>
           </p:cNvPr>
@@ -9663,7 +9663,7 @@
           <a:noFill xmlns:a="http://schemas.openxmlformats.org/drawingml/2006/main"/>
           <a:ln xmlns:a="http://schemas.openxmlformats.org/drawingml/2006/main" w="9525">
             <a:solidFill>
-              <a:srgbClr val="2A4D65"/>
+              <a:srgbClr val="C5D4DC"/>
             </a:solidFill>
             <a:prstDash val="solid"/>
           </a:ln>
@@ -9674,7 +9674,7 @@
           <p:cNvPr id="6" name="">
             <a:extLst xmlns:a="http://schemas.openxmlformats.org/drawingml/2006/main">
               <a:ext uri="{FF2B5EF4-FFF2-40B4-BE49-F238E27FC236}">
-                <a16:creationId xmlns:a16="http://schemas.microsoft.com/office/drawing/2014/main" id="{DCE75D9B-E15C-4F49-927A-C586BFF8CD5B}"/>
+                <a16:creationId xmlns:a16="http://schemas.microsoft.com/office/drawing/2014/main" id="{7FEF554E-5426-4A62-9BE1-4CF632F6A594}"/>
               </a:ext>
             </a:extLst>
           </p:cNvPr>
@@ -9731,7 +9731,7 @@
           <p:cNvPr id="7" name="">
             <a:extLst xmlns:a="http://schemas.openxmlformats.org/drawingml/2006/main">
               <a:ext uri="{FF2B5EF4-FFF2-40B4-BE49-F238E27FC236}">
-                <a16:creationId xmlns:a16="http://schemas.microsoft.com/office/drawing/2014/main" id="{70615EBE-6BFF-4ADC-83E5-0A16A98D0E9B}"/>
+                <a16:creationId xmlns:a16="http://schemas.microsoft.com/office/drawing/2014/main" id="{B510E4E2-04E3-46B3-AEF5-0FB61F54F538}"/>
               </a:ext>
             </a:extLst>
           </p:cNvPr>
@@ -9788,7 +9788,7 @@
           <p:cNvPr id="8" name="">
             <a:extLst xmlns:a="http://schemas.openxmlformats.org/drawingml/2006/main">
               <a:ext uri="{FF2B5EF4-FFF2-40B4-BE49-F238E27FC236}">
-                <a16:creationId xmlns:a16="http://schemas.microsoft.com/office/drawing/2014/main" id="{7ECFA82A-B4D6-4E62-846E-554695082EF2}"/>
+                <a16:creationId xmlns:a16="http://schemas.microsoft.com/office/drawing/2014/main" id="{52D778A3-FCD4-4C26-B750-9034B4B07369}"/>
               </a:ext>
             </a:extLst>
           </p:cNvPr>
@@ -9845,7 +9845,7 @@
           <p:cNvPr id="9" name="">
             <a:extLst xmlns:a="http://schemas.openxmlformats.org/drawingml/2006/main">
               <a:ext uri="{FF2B5EF4-FFF2-40B4-BE49-F238E27FC236}">
-                <a16:creationId xmlns:a16="http://schemas.microsoft.com/office/drawing/2014/main" id="{2BBEEF69-A66D-4298-A852-57A81664C73B}"/>
+                <a16:creationId xmlns:a16="http://schemas.microsoft.com/office/drawing/2014/main" id="{5D7982BA-950F-4028-8807-6A54E8477A19}"/>
               </a:ext>
             </a:extLst>
           </p:cNvPr>
@@ -9876,7 +9876,7 @@
           <p:cNvPr id="10" name="">
             <a:extLst xmlns:a="http://schemas.openxmlformats.org/drawingml/2006/main">
               <a:ext uri="{FF2B5EF4-FFF2-40B4-BE49-F238E27FC236}">
-                <a16:creationId xmlns:a16="http://schemas.microsoft.com/office/drawing/2014/main" id="{F7F2DBC7-0DB7-48F0-AF05-38F1C71195F6}"/>
+                <a16:creationId xmlns:a16="http://schemas.microsoft.com/office/drawing/2014/main" id="{1FFF04CA-C51D-4C78-ADF7-524BDA4BD414}"/>
               </a:ext>
             </a:extLst>
           </p:cNvPr>
@@ -9896,7 +9896,7 @@
           <a:noFill xmlns:a="http://schemas.openxmlformats.org/drawingml/2006/main"/>
           <a:ln xmlns:a="http://schemas.openxmlformats.org/drawingml/2006/main" w="9525">
             <a:solidFill>
-              <a:srgbClr val="2A4D65"/>
+              <a:srgbClr val="C5D4DC"/>
             </a:solidFill>
             <a:prstDash val="solid"/>
           </a:ln>
@@ -9907,7 +9907,7 @@
           <p:cNvPr id="11" name="">
             <a:extLst xmlns:a="http://schemas.openxmlformats.org/drawingml/2006/main">
               <a:ext uri="{FF2B5EF4-FFF2-40B4-BE49-F238E27FC236}">
-                <a16:creationId xmlns:a16="http://schemas.microsoft.com/office/drawing/2014/main" id="{6BA4D7B4-67D0-48B3-9BE2-CB82FEA93025}"/>
+                <a16:creationId xmlns:a16="http://schemas.microsoft.com/office/drawing/2014/main" id="{E4DFDAC4-004C-40AC-95D7-F9A7FBC4E9BD}"/>
               </a:ext>
             </a:extLst>
           </p:cNvPr>
@@ -9965,7 +9965,7 @@
           <p:cNvPr id="12" name="">
             <a:extLst xmlns:a="http://schemas.openxmlformats.org/drawingml/2006/main">
               <a:ext uri="{FF2B5EF4-FFF2-40B4-BE49-F238E27FC236}">
-                <a16:creationId xmlns:a16="http://schemas.microsoft.com/office/drawing/2014/main" id="{B1A0EFC1-6FDD-4C6C-ADFA-7524AAC9698B}"/>
+                <a16:creationId xmlns:a16="http://schemas.microsoft.com/office/drawing/2014/main" id="{A35C13E3-0098-4919-9CAE-79E049AB901B}"/>
               </a:ext>
             </a:extLst>
           </p:cNvPr>
@@ -10046,7 +10046,7 @@
           <p:cNvPr id="13" name="">
             <a:extLst xmlns:a="http://schemas.openxmlformats.org/drawingml/2006/main">
               <a:ext uri="{FF2B5EF4-FFF2-40B4-BE49-F238E27FC236}">
-                <a16:creationId xmlns:a16="http://schemas.microsoft.com/office/drawing/2014/main" id="{90833010-F4C0-432B-AD21-ED75A473285F}"/>
+                <a16:creationId xmlns:a16="http://schemas.microsoft.com/office/drawing/2014/main" id="{B52E437B-2E16-46A4-81D7-06D285DD3DFC}"/>
               </a:ext>
             </a:extLst>
           </p:cNvPr>
@@ -10078,7 +10078,7 @@
             <a:pPr algn="l">
               <a:defRPr sz="1275" b="0">
                 <a:solidFill>
-                  <a:srgbClr val="B8C9D3"/>
+                  <a:srgbClr val="587080"/>
                 </a:solidFill>
                 <a:latin typeface="Arial"/>
                 <a:ea typeface="Arial"/>
@@ -10088,7 +10088,7 @@
             <a:r>
               <a:rPr sz="1275" b="0">
                 <a:solidFill>
-                  <a:srgbClr val="B8C9D3"/>
+                  <a:srgbClr val="587080"/>
                 </a:solidFill>
                 <a:latin typeface="Arial"/>
                 <a:ea typeface="Arial"/>
@@ -10101,7 +10101,7 @@
             <a:pPr algn="l">
               <a:defRPr sz="1275" b="0">
                 <a:solidFill>
-                  <a:srgbClr val="B8C9D3"/>
+                  <a:srgbClr val="587080"/>
                 </a:solidFill>
                 <a:latin typeface="Arial"/>
                 <a:ea typeface="Arial"/>
@@ -10111,7 +10111,7 @@
             <a:r>
               <a:rPr sz="1275" b="0">
                 <a:solidFill>
-                  <a:srgbClr val="B8C9D3"/>
+                  <a:srgbClr val="587080"/>
                 </a:solidFill>
                 <a:latin typeface="Arial"/>
                 <a:ea typeface="Arial"/>
@@ -10127,7 +10127,7 @@
           <p:cNvPr id="14" name="">
             <a:extLst xmlns:a="http://schemas.openxmlformats.org/drawingml/2006/main">
               <a:ext uri="{FF2B5EF4-FFF2-40B4-BE49-F238E27FC236}">
-                <a16:creationId xmlns:a16="http://schemas.microsoft.com/office/drawing/2014/main" id="{8388CCD6-C7F7-4830-95D4-F4E47AE0863A}"/>
+                <a16:creationId xmlns:a16="http://schemas.microsoft.com/office/drawing/2014/main" id="{5C45079A-AE29-41C7-9FD6-E7E05A7A7861}"/>
               </a:ext>
             </a:extLst>
           </p:cNvPr>
@@ -10164,7 +10164,7 @@
           <p:cNvPr id="15" name="">
             <a:extLst xmlns:a="http://schemas.openxmlformats.org/drawingml/2006/main">
               <a:ext uri="{FF2B5EF4-FFF2-40B4-BE49-F238E27FC236}">
-                <a16:creationId xmlns:a16="http://schemas.microsoft.com/office/drawing/2014/main" id="{A8B2DFC0-0894-4B32-B92C-977F85327018}"/>
+                <a16:creationId xmlns:a16="http://schemas.microsoft.com/office/drawing/2014/main" id="{8598C0B8-109E-488A-9DAE-8A3FBDDCE193}"/>
               </a:ext>
             </a:extLst>
           </p:cNvPr>
@@ -10196,7 +10196,7 @@
             <a:pPr algn="ctr">
               <a:defRPr sz="900" b="1">
                 <a:solidFill>
-                  <a:srgbClr val="F3F8FA"/>
+                  <a:srgbClr val="132E41"/>
                 </a:solidFill>
                 <a:latin typeface="Arial"/>
                 <a:ea typeface="Arial"/>
@@ -10206,7 +10206,7 @@
             <a:r>
               <a:rPr sz="900" b="1">
                 <a:solidFill>
-                  <a:srgbClr val="F3F8FA"/>
+                  <a:srgbClr val="132E41"/>
                 </a:solidFill>
                 <a:latin typeface="Arial"/>
                 <a:ea typeface="Arial"/>
@@ -10222,7 +10222,7 @@
           <p:cNvPr id="16" name="">
             <a:extLst xmlns:a="http://schemas.openxmlformats.org/drawingml/2006/main">
               <a:ext uri="{FF2B5EF4-FFF2-40B4-BE49-F238E27FC236}">
-                <a16:creationId xmlns:a16="http://schemas.microsoft.com/office/drawing/2014/main" id="{BFD83FEA-26D3-411F-BD5D-1AAF9746570B}"/>
+                <a16:creationId xmlns:a16="http://schemas.microsoft.com/office/drawing/2014/main" id="{D9DD83F7-6757-4151-8A2E-0B73790ED7AE}"/>
               </a:ext>
             </a:extLst>
           </p:cNvPr>
@@ -10279,7 +10279,7 @@
           <p:cNvPr id="17" name="">
             <a:extLst xmlns:a="http://schemas.openxmlformats.org/drawingml/2006/main">
               <a:ext uri="{FF2B5EF4-FFF2-40B4-BE49-F238E27FC236}">
-                <a16:creationId xmlns:a16="http://schemas.microsoft.com/office/drawing/2014/main" id="{9982FBCF-F79D-4B14-BE19-575F9CCCBF69}"/>
+                <a16:creationId xmlns:a16="http://schemas.microsoft.com/office/drawing/2014/main" id="{2CABB680-35EC-4DE8-8CD5-E047BC03A02B}"/>
               </a:ext>
             </a:extLst>
           </p:cNvPr>
@@ -10337,7 +10337,7 @@
           <p:cNvPr id="18" name="">
             <a:extLst xmlns:a="http://schemas.openxmlformats.org/drawingml/2006/main">
               <a:ext uri="{FF2B5EF4-FFF2-40B4-BE49-F238E27FC236}">
-                <a16:creationId xmlns:a16="http://schemas.microsoft.com/office/drawing/2014/main" id="{2B01C278-DF13-4D1B-937E-67CA88E93F0B}"/>
+                <a16:creationId xmlns:a16="http://schemas.microsoft.com/office/drawing/2014/main" id="{FD0DB0B4-C0A2-49F5-9D8E-37A5B65F1CA0}"/>
               </a:ext>
             </a:extLst>
           </p:cNvPr>
@@ -10394,7 +10394,7 @@
           <p:cNvPr id="19" name="">
             <a:extLst xmlns:a="http://schemas.openxmlformats.org/drawingml/2006/main">
               <a:ext uri="{FF2B5EF4-FFF2-40B4-BE49-F238E27FC236}">
-                <a16:creationId xmlns:a16="http://schemas.microsoft.com/office/drawing/2014/main" id="{29F16E66-3706-49BB-858D-C0A0B801C05D}"/>
+                <a16:creationId xmlns:a16="http://schemas.microsoft.com/office/drawing/2014/main" id="{78B4A8AD-1E63-43E4-9017-E20C53BF21A2}"/>
               </a:ext>
             </a:extLst>
           </p:cNvPr>
@@ -10452,7 +10452,7 @@
           <p:cNvPr id="20" name="">
             <a:extLst xmlns:a="http://schemas.openxmlformats.org/drawingml/2006/main">
               <a:ext uri="{FF2B5EF4-FFF2-40B4-BE49-F238E27FC236}">
-                <a16:creationId xmlns:a16="http://schemas.microsoft.com/office/drawing/2014/main" id="{042F6AA7-9257-4AB8-9234-B7371BD7F081}"/>
+                <a16:creationId xmlns:a16="http://schemas.microsoft.com/office/drawing/2014/main" id="{2FE9AFD0-78F2-424A-B8AB-FD9159E4CEEA}"/>
               </a:ext>
             </a:extLst>
           </p:cNvPr>
@@ -10472,7 +10472,7 @@
           <a:noFill xmlns:a="http://schemas.openxmlformats.org/drawingml/2006/main"/>
           <a:ln xmlns:a="http://schemas.openxmlformats.org/drawingml/2006/main" w="19050">
             <a:solidFill>
-              <a:srgbClr val="2A4D65"/>
+              <a:srgbClr val="C5D4DC"/>
             </a:solidFill>
             <a:prstDash val="solid"/>
           </a:ln>
@@ -10483,7 +10483,7 @@
           <p:cNvPr id="21" name="">
             <a:extLst xmlns:a="http://schemas.openxmlformats.org/drawingml/2006/main">
               <a:ext uri="{FF2B5EF4-FFF2-40B4-BE49-F238E27FC236}">
-                <a16:creationId xmlns:a16="http://schemas.microsoft.com/office/drawing/2014/main" id="{9BB2CD9A-9E08-4593-990E-A7E008AA1DF4}"/>
+                <a16:creationId xmlns:a16="http://schemas.microsoft.com/office/drawing/2014/main" id="{65A5780C-E2DA-49B7-B3CF-6C30DF731BE3}"/>
               </a:ext>
             </a:extLst>
           </p:cNvPr>
@@ -10515,7 +10515,7 @@
             <a:pPr algn="l">
               <a:defRPr sz="600" b="0">
                 <a:solidFill>
-                  <a:srgbClr val="B8C9D3"/>
+                  <a:srgbClr val="587080"/>
                 </a:solidFill>
                 <a:latin typeface="Arial"/>
                 <a:ea typeface="Arial"/>
@@ -10525,7 +10525,7 @@
             <a:r>
               <a:rPr sz="600" b="0">
                 <a:solidFill>
-                  <a:srgbClr val="B8C9D3"/>
+                  <a:srgbClr val="587080"/>
                 </a:solidFill>
                 <a:latin typeface="Arial"/>
                 <a:ea typeface="Arial"/>
@@ -10541,7 +10541,7 @@
           <p:cNvPr id="22" name="">
             <a:extLst xmlns:a="http://schemas.openxmlformats.org/drawingml/2006/main">
               <a:ext uri="{FF2B5EF4-FFF2-40B4-BE49-F238E27FC236}">
-                <a16:creationId xmlns:a16="http://schemas.microsoft.com/office/drawing/2014/main" id="{F802AF3E-DE5A-4535-8866-DE425F36A541}"/>
+                <a16:creationId xmlns:a16="http://schemas.microsoft.com/office/drawing/2014/main" id="{40AB8744-9597-41F0-928D-CC200C48D89E}"/>
               </a:ext>
             </a:extLst>
           </p:cNvPr>
@@ -10573,7 +10573,7 @@
             <a:pPr algn="r">
               <a:defRPr sz="750" b="1">
                 <a:solidFill>
-                  <a:srgbClr val="B8C9D3"/>
+                  <a:srgbClr val="587080"/>
                 </a:solidFill>
                 <a:latin typeface="Arial"/>
                 <a:ea typeface="Arial"/>
@@ -10583,7 +10583,7 @@
             <a:r>
               <a:rPr sz="750" b="1">
                 <a:solidFill>
-                  <a:srgbClr val="B8C9D3"/>
+                  <a:srgbClr val="587080"/>
                 </a:solidFill>
                 <a:latin typeface="Arial"/>
                 <a:ea typeface="Arial"/>
@@ -10597,7 +10597,7 @@
     </p:spTree>
     <p:extLst>
       <p:ext uri="{BB962C8B-B14F-4D97-AF65-F5344CB8AC3E}">
-        <p14:creationId xmlns:p14="http://schemas.microsoft.com/office/powerpoint/2010/main" val="1105959956"/>
+        <p14:creationId xmlns:p14="http://schemas.microsoft.com/office/powerpoint/2010/main" val="362314632"/>
       </p:ext>
     </p:extLst>
   </p:cSld>
@@ -10610,7 +10610,7 @@
     <p:bg>
       <p:bgPr>
         <a:solidFill xmlns:a="http://schemas.openxmlformats.org/drawingml/2006/main">
-          <a:srgbClr val="0E293C"/>
+          <a:srgbClr val="F3F1EB"/>
         </a:solidFill>
       </p:bgPr>
     </p:bg>
@@ -10628,7 +10628,7 @@
           <p:cNvPr id="54" name="">
             <a:extLst xmlns:a="http://schemas.openxmlformats.org/drawingml/2006/main">
               <a:ext uri="{FF2B5EF4-FFF2-40B4-BE49-F238E27FC236}">
-                <a16:creationId xmlns:a16="http://schemas.microsoft.com/office/drawing/2014/main" id="{BE6C0A19-BCA3-45CF-96F9-6B36D83EF4DA}"/>
+                <a16:creationId xmlns:a16="http://schemas.microsoft.com/office/drawing/2014/main" id="{18E300D9-87D8-4CA2-BD45-D32B7A167487}"/>
               </a:ext>
             </a:extLst>
           </p:cNvPr>
@@ -10685,7 +10685,7 @@
           <p:cNvPr id="2" name="">
             <a:extLst xmlns:a="http://schemas.openxmlformats.org/drawingml/2006/main">
               <a:ext uri="{FF2B5EF4-FFF2-40B4-BE49-F238E27FC236}">
-                <a16:creationId xmlns:a16="http://schemas.microsoft.com/office/drawing/2014/main" id="{60E11619-5EBC-4298-9464-6C0046ABA3E6}"/>
+                <a16:creationId xmlns:a16="http://schemas.microsoft.com/office/drawing/2014/main" id="{3D6B8FE5-002E-47A9-924D-32041472085E}"/>
               </a:ext>
             </a:extLst>
           </p:cNvPr>
@@ -10742,7 +10742,7 @@
           <p:cNvPr id="3" name="">
             <a:extLst xmlns:a="http://schemas.openxmlformats.org/drawingml/2006/main">
               <a:ext uri="{FF2B5EF4-FFF2-40B4-BE49-F238E27FC236}">
-                <a16:creationId xmlns:a16="http://schemas.microsoft.com/office/drawing/2014/main" id="{5607D9EF-4F52-4446-8D17-D9B4CC830991}"/>
+                <a16:creationId xmlns:a16="http://schemas.microsoft.com/office/drawing/2014/main" id="{8383B5F0-2348-4D7E-A610-6660519949D2}"/>
               </a:ext>
             </a:extLst>
           </p:cNvPr>
@@ -10799,7 +10799,7 @@
           <p:cNvPr id="4" name="">
             <a:extLst xmlns:a="http://schemas.openxmlformats.org/drawingml/2006/main">
               <a:ext uri="{FF2B5EF4-FFF2-40B4-BE49-F238E27FC236}">
-                <a16:creationId xmlns:a16="http://schemas.microsoft.com/office/drawing/2014/main" id="{CAD195B5-394C-407D-BB3D-9ED09096C9E1}"/>
+                <a16:creationId xmlns:a16="http://schemas.microsoft.com/office/drawing/2014/main" id="{84A6ED10-681A-4AB7-BE6B-50D3D946CEBE}"/>
               </a:ext>
             </a:extLst>
           </p:cNvPr>
@@ -10830,7 +10830,7 @@
           <p:cNvPr id="5" name="">
             <a:extLst xmlns:a="http://schemas.openxmlformats.org/drawingml/2006/main">
               <a:ext uri="{FF2B5EF4-FFF2-40B4-BE49-F238E27FC236}">
-                <a16:creationId xmlns:a16="http://schemas.microsoft.com/office/drawing/2014/main" id="{85D652B2-CB02-42F7-B612-6A99804E2A6F}"/>
+                <a16:creationId xmlns:a16="http://schemas.microsoft.com/office/drawing/2014/main" id="{9C4E0460-54EB-47B8-9CD5-F3AADE4DA1AC}"/>
               </a:ext>
             </a:extLst>
           </p:cNvPr>
@@ -10850,7 +10850,7 @@
           <a:noFill xmlns:a="http://schemas.openxmlformats.org/drawingml/2006/main"/>
           <a:ln xmlns:a="http://schemas.openxmlformats.org/drawingml/2006/main" w="9525">
             <a:solidFill>
-              <a:srgbClr val="2A4D65"/>
+              <a:srgbClr val="C5D4DC"/>
             </a:solidFill>
             <a:prstDash val="solid"/>
           </a:ln>
@@ -10861,7 +10861,7 @@
           <p:cNvPr id="6" name="">
             <a:extLst xmlns:a="http://schemas.openxmlformats.org/drawingml/2006/main">
               <a:ext uri="{FF2B5EF4-FFF2-40B4-BE49-F238E27FC236}">
-                <a16:creationId xmlns:a16="http://schemas.microsoft.com/office/drawing/2014/main" id="{28A5A90F-6BDA-4A74-A0DA-0F56F47C95C9}"/>
+                <a16:creationId xmlns:a16="http://schemas.microsoft.com/office/drawing/2014/main" id="{F533E501-C8A5-42B3-A822-AB0A7B6AD52E}"/>
               </a:ext>
             </a:extLst>
           </p:cNvPr>
@@ -10918,7 +10918,7 @@
           <p:cNvPr id="7" name="">
             <a:extLst xmlns:a="http://schemas.openxmlformats.org/drawingml/2006/main">
               <a:ext uri="{FF2B5EF4-FFF2-40B4-BE49-F238E27FC236}">
-                <a16:creationId xmlns:a16="http://schemas.microsoft.com/office/drawing/2014/main" id="{F02570C6-897E-4A12-8421-A5D9DC573D3D}"/>
+                <a16:creationId xmlns:a16="http://schemas.microsoft.com/office/drawing/2014/main" id="{9261F034-D75E-42C7-9829-87B6C6A7892F}"/>
               </a:ext>
             </a:extLst>
           </p:cNvPr>
@@ -10975,7 +10975,7 @@
           <p:cNvPr id="8" name="">
             <a:extLst xmlns:a="http://schemas.openxmlformats.org/drawingml/2006/main">
               <a:ext uri="{FF2B5EF4-FFF2-40B4-BE49-F238E27FC236}">
-                <a16:creationId xmlns:a16="http://schemas.microsoft.com/office/drawing/2014/main" id="{E88A9CC8-E93F-461F-BFCD-CCCA1013C5B0}"/>
+                <a16:creationId xmlns:a16="http://schemas.microsoft.com/office/drawing/2014/main" id="{3F31123A-4ECC-4C64-8258-C20FC724C7DD}"/>
               </a:ext>
             </a:extLst>
           </p:cNvPr>
@@ -11032,7 +11032,7 @@
           <p:cNvPr id="9" name="">
             <a:extLst xmlns:a="http://schemas.openxmlformats.org/drawingml/2006/main">
               <a:ext uri="{FF2B5EF4-FFF2-40B4-BE49-F238E27FC236}">
-                <a16:creationId xmlns:a16="http://schemas.microsoft.com/office/drawing/2014/main" id="{AFB10599-A092-44DB-B3CF-9CC018FECD14}"/>
+                <a16:creationId xmlns:a16="http://schemas.microsoft.com/office/drawing/2014/main" id="{A97D1D1B-8EA4-4158-9321-F276ABA05253}"/>
               </a:ext>
             </a:extLst>
           </p:cNvPr>
@@ -11063,7 +11063,7 @@
           <p:cNvPr id="10" name="">
             <a:extLst xmlns:a="http://schemas.openxmlformats.org/drawingml/2006/main">
               <a:ext uri="{FF2B5EF4-FFF2-40B4-BE49-F238E27FC236}">
-                <a16:creationId xmlns:a16="http://schemas.microsoft.com/office/drawing/2014/main" id="{206CC26D-B5CF-4E65-B38F-507254079B3A}"/>
+                <a16:creationId xmlns:a16="http://schemas.microsoft.com/office/drawing/2014/main" id="{BB479165-2F67-46A9-865A-0D90456A2508}"/>
               </a:ext>
             </a:extLst>
           </p:cNvPr>
@@ -11083,7 +11083,7 @@
           <a:noFill xmlns:a="http://schemas.openxmlformats.org/drawingml/2006/main"/>
           <a:ln xmlns:a="http://schemas.openxmlformats.org/drawingml/2006/main" w="9525">
             <a:solidFill>
-              <a:srgbClr val="2A4D65"/>
+              <a:srgbClr val="C5D4DC"/>
             </a:solidFill>
             <a:prstDash val="solid"/>
           </a:ln>
@@ -11094,7 +11094,7 @@
           <p:cNvPr id="11" name="">
             <a:extLst xmlns:a="http://schemas.openxmlformats.org/drawingml/2006/main">
               <a:ext uri="{FF2B5EF4-FFF2-40B4-BE49-F238E27FC236}">
-                <a16:creationId xmlns:a16="http://schemas.microsoft.com/office/drawing/2014/main" id="{6E18AABD-2169-434B-817B-305FB6EAC4CB}"/>
+                <a16:creationId xmlns:a16="http://schemas.microsoft.com/office/drawing/2014/main" id="{301D7CB1-0186-4D91-BA56-4E41E2F802B5}"/>
               </a:ext>
             </a:extLst>
           </p:cNvPr>
@@ -11152,7 +11152,7 @@
           <p:cNvPr id="12" name="">
             <a:extLst xmlns:a="http://schemas.openxmlformats.org/drawingml/2006/main">
               <a:ext uri="{FF2B5EF4-FFF2-40B4-BE49-F238E27FC236}">
-                <a16:creationId xmlns:a16="http://schemas.microsoft.com/office/drawing/2014/main" id="{7FBA5570-404F-45E0-AC34-654A50FC13C7}"/>
+                <a16:creationId xmlns:a16="http://schemas.microsoft.com/office/drawing/2014/main" id="{E9A22EE0-E0D8-420E-93DD-9D4FBA28A8D3}"/>
               </a:ext>
             </a:extLst>
           </p:cNvPr>
@@ -11184,7 +11184,7 @@
             <a:pPr algn="r">
               <a:defRPr sz="750" b="1">
                 <a:solidFill>
-                  <a:srgbClr val="B8C9D3"/>
+                  <a:srgbClr val="587080"/>
                 </a:solidFill>
                 <a:latin typeface="Arial"/>
                 <a:ea typeface="Arial"/>
@@ -11194,7 +11194,7 @@
             <a:r>
               <a:rPr sz="750" b="1">
                 <a:solidFill>
-                  <a:srgbClr val="B8C9D3"/>
+                  <a:srgbClr val="587080"/>
                 </a:solidFill>
                 <a:latin typeface="Arial"/>
                 <a:ea typeface="Arial"/>
@@ -11210,7 +11210,7 @@
           <p:cNvPr id="13" name="">
             <a:extLst xmlns:a="http://schemas.openxmlformats.org/drawingml/2006/main">
               <a:ext uri="{FF2B5EF4-FFF2-40B4-BE49-F238E27FC236}">
-                <a16:creationId xmlns:a16="http://schemas.microsoft.com/office/drawing/2014/main" id="{168AC32A-A7CB-481E-80BD-C7E0EB34B6EF}"/>
+                <a16:creationId xmlns:a16="http://schemas.microsoft.com/office/drawing/2014/main" id="{A97853B3-99D9-4B2C-AC68-1B2575A38553}"/>
               </a:ext>
             </a:extLst>
           </p:cNvPr>
@@ -11242,7 +11242,7 @@
             <a:pPr algn="l">
               <a:defRPr sz="600" b="0">
                 <a:solidFill>
-                  <a:srgbClr val="B8C9D3"/>
+                  <a:srgbClr val="587080"/>
                 </a:solidFill>
                 <a:latin typeface="Arial"/>
                 <a:ea typeface="Arial"/>
@@ -11252,7 +11252,7 @@
             <a:r>
               <a:rPr sz="600" b="0">
                 <a:solidFill>
-                  <a:srgbClr val="B8C9D3"/>
+                  <a:srgbClr val="587080"/>
                 </a:solidFill>
                 <a:latin typeface="Arial"/>
                 <a:ea typeface="Arial"/>
@@ -11268,7 +11268,7 @@
           <p:cNvPr id="14" name="">
             <a:extLst xmlns:a="http://schemas.openxmlformats.org/drawingml/2006/main">
               <a:ext uri="{FF2B5EF4-FFF2-40B4-BE49-F238E27FC236}">
-                <a16:creationId xmlns:a16="http://schemas.microsoft.com/office/drawing/2014/main" id="{6ACDDFF2-2B8B-4913-8C79-40DABCF925D6}"/>
+                <a16:creationId xmlns:a16="http://schemas.microsoft.com/office/drawing/2014/main" id="{3B90B573-98F1-44EF-93E8-A59BD781902B}"/>
               </a:ext>
             </a:extLst>
           </p:cNvPr>
@@ -11300,7 +11300,7 @@
             <a:pPr algn="r">
               <a:defRPr sz="600" b="1">
                 <a:solidFill>
-                  <a:srgbClr val="B8C9D3"/>
+                  <a:srgbClr val="587080"/>
                 </a:solidFill>
                 <a:latin typeface="Arial"/>
                 <a:ea typeface="Arial"/>
@@ -11310,7 +11310,7 @@
             <a:r>
               <a:rPr sz="600" b="1">
                 <a:solidFill>
-                  <a:srgbClr val="B8C9D3"/>
+                  <a:srgbClr val="587080"/>
                 </a:solidFill>
                 <a:latin typeface="Arial"/>
                 <a:ea typeface="Arial"/>
@@ -11326,7 +11326,7 @@
           <p:cNvPr id="15" name="">
             <a:extLst xmlns:a="http://schemas.openxmlformats.org/drawingml/2006/main">
               <a:ext uri="{FF2B5EF4-FFF2-40B4-BE49-F238E27FC236}">
-                <a16:creationId xmlns:a16="http://schemas.microsoft.com/office/drawing/2014/main" id="{E300FB6A-DA2D-45BD-9098-73B0A1A9B04A}"/>
+                <a16:creationId xmlns:a16="http://schemas.microsoft.com/office/drawing/2014/main" id="{424DCCDE-3339-455D-A9EB-BD9DFBA565E8}"/>
               </a:ext>
             </a:extLst>
           </p:cNvPr>
@@ -11358,7 +11358,7 @@
             <a:pPr algn="l">
               <a:defRPr sz="2250" b="0">
                 <a:solidFill>
-                  <a:srgbClr val="00E1C6"/>
+                  <a:srgbClr val="132E41"/>
                 </a:solidFill>
                 <a:latin typeface="Georgia"/>
                 <a:ea typeface="Georgia"/>
@@ -11368,7 +11368,7 @@
             <a:r>
               <a:rPr sz="2250" b="0">
                 <a:solidFill>
-                  <a:srgbClr val="00E1C6"/>
+                  <a:srgbClr val="132E41"/>
                 </a:solidFill>
                 <a:latin typeface="Georgia"/>
                 <a:ea typeface="Georgia"/>
@@ -11384,7 +11384,7 @@
           <p:cNvPr id="16" name="">
             <a:extLst xmlns:a="http://schemas.openxmlformats.org/drawingml/2006/main">
               <a:ext uri="{FF2B5EF4-FFF2-40B4-BE49-F238E27FC236}">
-                <a16:creationId xmlns:a16="http://schemas.microsoft.com/office/drawing/2014/main" id="{D4CBB087-9110-4579-A8B8-4C851919052A}"/>
+                <a16:creationId xmlns:a16="http://schemas.microsoft.com/office/drawing/2014/main" id="{0CAC5092-9154-4956-B692-C1ACD91E2450}"/>
               </a:ext>
             </a:extLst>
           </p:cNvPr>
@@ -11416,7 +11416,7 @@
             <a:pPr algn="l">
               <a:defRPr sz="1125" b="0">
                 <a:solidFill>
-                  <a:srgbClr val="B8C9D3"/>
+                  <a:srgbClr val="587080"/>
                 </a:solidFill>
                 <a:latin typeface="Arial"/>
                 <a:ea typeface="Arial"/>
@@ -11426,7 +11426,7 @@
             <a:r>
               <a:rPr sz="1125" b="0">
                 <a:solidFill>
-                  <a:srgbClr val="B8C9D3"/>
+                  <a:srgbClr val="587080"/>
                 </a:solidFill>
                 <a:latin typeface="Arial"/>
                 <a:ea typeface="Arial"/>
@@ -11442,7 +11442,7 @@
           <p:cNvPr id="17" name="">
             <a:extLst xmlns:a="http://schemas.openxmlformats.org/drawingml/2006/main">
               <a:ext uri="{FF2B5EF4-FFF2-40B4-BE49-F238E27FC236}">
-                <a16:creationId xmlns:a16="http://schemas.microsoft.com/office/drawing/2014/main" id="{A043B45B-F913-49F5-9F63-7B42E1CAFDA2}"/>
+                <a16:creationId xmlns:a16="http://schemas.microsoft.com/office/drawing/2014/main" id="{B0C95857-3309-44AE-90CB-7A34AD5EFF19}"/>
               </a:ext>
             </a:extLst>
           </p:cNvPr>
@@ -11462,11 +11462,11 @@
             </a:avLst>
           </a:prstGeom>
           <a:solidFill xmlns:a="http://schemas.openxmlformats.org/drawingml/2006/main">
-            <a:srgbClr val="102F46"/>
+            <a:srgbClr val="FFFFFF"/>
           </a:solidFill>
           <a:ln xmlns:a="http://schemas.openxmlformats.org/drawingml/2006/main" w="9525">
             <a:solidFill>
-              <a:srgbClr val="2A4D65"/>
+              <a:srgbClr val="C5D4DC"/>
             </a:solidFill>
             <a:prstDash val="solid"/>
           </a:ln>
@@ -11477,7 +11477,7 @@
           <p:cNvPr id="18" name="">
             <a:extLst xmlns:a="http://schemas.openxmlformats.org/drawingml/2006/main">
               <a:ext uri="{FF2B5EF4-FFF2-40B4-BE49-F238E27FC236}">
-                <a16:creationId xmlns:a16="http://schemas.microsoft.com/office/drawing/2014/main" id="{6769C061-AB62-4D24-BE0F-FB15CF264CBF}"/>
+                <a16:creationId xmlns:a16="http://schemas.microsoft.com/office/drawing/2014/main" id="{790DFA5C-F503-4900-B61D-021E37E5A286}"/>
               </a:ext>
             </a:extLst>
           </p:cNvPr>
@@ -11535,7 +11535,7 @@
           <p:cNvPr id="19" name="">
             <a:extLst xmlns:a="http://schemas.openxmlformats.org/drawingml/2006/main">
               <a:ext uri="{FF2B5EF4-FFF2-40B4-BE49-F238E27FC236}">
-                <a16:creationId xmlns:a16="http://schemas.microsoft.com/office/drawing/2014/main" id="{067D9337-1E6D-44A4-9D7D-BB4F094A6D7A}"/>
+                <a16:creationId xmlns:a16="http://schemas.microsoft.com/office/drawing/2014/main" id="{F5DD1FA6-D7F8-4C97-BF08-9BA039B53A25}"/>
               </a:ext>
             </a:extLst>
           </p:cNvPr>
@@ -11592,7 +11592,7 @@
           <p:cNvPr id="20" name="">
             <a:extLst xmlns:a="http://schemas.openxmlformats.org/drawingml/2006/main">
               <a:ext uri="{FF2B5EF4-FFF2-40B4-BE49-F238E27FC236}">
-                <a16:creationId xmlns:a16="http://schemas.microsoft.com/office/drawing/2014/main" id="{EAC96907-A89E-4EFB-BE74-58AB57F7F22F}"/>
+                <a16:creationId xmlns:a16="http://schemas.microsoft.com/office/drawing/2014/main" id="{692DC0BD-6715-4551-A738-78552ACA3013}"/>
               </a:ext>
             </a:extLst>
           </p:cNvPr>
@@ -11623,7 +11623,7 @@
           <p:cNvPr id="21" name="">
             <a:extLst xmlns:a="http://schemas.openxmlformats.org/drawingml/2006/main">
               <a:ext uri="{FF2B5EF4-FFF2-40B4-BE49-F238E27FC236}">
-                <a16:creationId xmlns:a16="http://schemas.microsoft.com/office/drawing/2014/main" id="{68CAB6DC-1968-41C9-BA87-554847AD89F3}"/>
+                <a16:creationId xmlns:a16="http://schemas.microsoft.com/office/drawing/2014/main" id="{F453BA09-B9E4-4748-9304-0C0CAE5AC230}"/>
               </a:ext>
             </a:extLst>
           </p:cNvPr>
@@ -11655,7 +11655,7 @@
             <a:pPr algn="l">
               <a:defRPr sz="1050" b="1">
                 <a:solidFill>
-                  <a:srgbClr val="F3F8FA"/>
+                  <a:srgbClr val="132E41"/>
                 </a:solidFill>
                 <a:latin typeface="Arial"/>
                 <a:ea typeface="Arial"/>
@@ -11665,7 +11665,7 @@
             <a:r>
               <a:rPr sz="1050" b="1">
                 <a:solidFill>
-                  <a:srgbClr val="F3F8FA"/>
+                  <a:srgbClr val="132E41"/>
                 </a:solidFill>
                 <a:latin typeface="Arial"/>
                 <a:ea typeface="Arial"/>
@@ -11681,7 +11681,7 @@
           <p:cNvPr id="22" name="">
             <a:extLst xmlns:a="http://schemas.openxmlformats.org/drawingml/2006/main">
               <a:ext uri="{FF2B5EF4-FFF2-40B4-BE49-F238E27FC236}">
-                <a16:creationId xmlns:a16="http://schemas.microsoft.com/office/drawing/2014/main" id="{0E8030D9-7E4C-4F6C-8C2C-7B02B7441192}"/>
+                <a16:creationId xmlns:a16="http://schemas.microsoft.com/office/drawing/2014/main" id="{6A9794F2-9393-449D-B1EC-D798292B9015}"/>
               </a:ext>
             </a:extLst>
           </p:cNvPr>
@@ -11738,7 +11738,7 @@
           <p:cNvPr id="23" name="">
             <a:extLst xmlns:a="http://schemas.openxmlformats.org/drawingml/2006/main">
               <a:ext uri="{FF2B5EF4-FFF2-40B4-BE49-F238E27FC236}">
-                <a16:creationId xmlns:a16="http://schemas.microsoft.com/office/drawing/2014/main" id="{07D0AEB3-5B8D-4522-9EDC-CE6BDC04295A}"/>
+                <a16:creationId xmlns:a16="http://schemas.microsoft.com/office/drawing/2014/main" id="{D7D2875F-EEED-403C-A1F6-DA62C02BCF86}"/>
               </a:ext>
             </a:extLst>
           </p:cNvPr>
@@ -11769,7 +11769,7 @@
           <p:cNvPr id="24" name="">
             <a:extLst xmlns:a="http://schemas.openxmlformats.org/drawingml/2006/main">
               <a:ext uri="{FF2B5EF4-FFF2-40B4-BE49-F238E27FC236}">
-                <a16:creationId xmlns:a16="http://schemas.microsoft.com/office/drawing/2014/main" id="{080F95CE-91DC-4B9A-AC31-0D5FF9423DE5}"/>
+                <a16:creationId xmlns:a16="http://schemas.microsoft.com/office/drawing/2014/main" id="{BD1EDB6C-66C7-4970-A071-3B191FA08665}"/>
               </a:ext>
             </a:extLst>
           </p:cNvPr>
@@ -11801,7 +11801,7 @@
             <a:pPr algn="l">
               <a:defRPr sz="1050" b="1">
                 <a:solidFill>
-                  <a:srgbClr val="F3F8FA"/>
+                  <a:srgbClr val="132E41"/>
                 </a:solidFill>
                 <a:latin typeface="Arial"/>
                 <a:ea typeface="Arial"/>
@@ -11811,7 +11811,7 @@
             <a:r>
               <a:rPr sz="1050" b="1">
                 <a:solidFill>
-                  <a:srgbClr val="F3F8FA"/>
+                  <a:srgbClr val="132E41"/>
                 </a:solidFill>
                 <a:latin typeface="Arial"/>
                 <a:ea typeface="Arial"/>
@@ -11827,7 +11827,7 @@
           <p:cNvPr id="25" name="">
             <a:extLst xmlns:a="http://schemas.openxmlformats.org/drawingml/2006/main">
               <a:ext uri="{FF2B5EF4-FFF2-40B4-BE49-F238E27FC236}">
-                <a16:creationId xmlns:a16="http://schemas.microsoft.com/office/drawing/2014/main" id="{3126A8FD-A671-4AA7-98E2-2DDEBC48439B}"/>
+                <a16:creationId xmlns:a16="http://schemas.microsoft.com/office/drawing/2014/main" id="{04C9093B-0E16-40BA-8AE8-A0236CE0EA78}"/>
               </a:ext>
             </a:extLst>
           </p:cNvPr>
@@ -11884,7 +11884,7 @@
           <p:cNvPr id="26" name="">
             <a:extLst xmlns:a="http://schemas.openxmlformats.org/drawingml/2006/main">
               <a:ext uri="{FF2B5EF4-FFF2-40B4-BE49-F238E27FC236}">
-                <a16:creationId xmlns:a16="http://schemas.microsoft.com/office/drawing/2014/main" id="{F3B1323C-2F06-4D42-8963-1EF1E8113963}"/>
+                <a16:creationId xmlns:a16="http://schemas.microsoft.com/office/drawing/2014/main" id="{78A57A7E-D00F-4CE9-AA1D-181B6CCF5343}"/>
               </a:ext>
             </a:extLst>
           </p:cNvPr>
@@ -11915,7 +11915,7 @@
           <p:cNvPr id="27" name="">
             <a:extLst xmlns:a="http://schemas.openxmlformats.org/drawingml/2006/main">
               <a:ext uri="{FF2B5EF4-FFF2-40B4-BE49-F238E27FC236}">
-                <a16:creationId xmlns:a16="http://schemas.microsoft.com/office/drawing/2014/main" id="{68BC827B-D8A7-40C3-AFA7-2E1CB6B28975}"/>
+                <a16:creationId xmlns:a16="http://schemas.microsoft.com/office/drawing/2014/main" id="{DD579E64-26CB-467F-B3CC-D2BBFCC6A478}"/>
               </a:ext>
             </a:extLst>
           </p:cNvPr>
@@ -11947,7 +11947,7 @@
             <a:pPr algn="l">
               <a:defRPr sz="1050" b="1">
                 <a:solidFill>
-                  <a:srgbClr val="F3F8FA"/>
+                  <a:srgbClr val="132E41"/>
                 </a:solidFill>
                 <a:latin typeface="Arial"/>
                 <a:ea typeface="Arial"/>
@@ -11957,7 +11957,7 @@
             <a:r>
               <a:rPr sz="1050" b="1">
                 <a:solidFill>
-                  <a:srgbClr val="F3F8FA"/>
+                  <a:srgbClr val="132E41"/>
                 </a:solidFill>
                 <a:latin typeface="Arial"/>
                 <a:ea typeface="Arial"/>
@@ -11973,7 +11973,7 @@
           <p:cNvPr id="28" name="">
             <a:extLst xmlns:a="http://schemas.openxmlformats.org/drawingml/2006/main">
               <a:ext uri="{FF2B5EF4-FFF2-40B4-BE49-F238E27FC236}">
-                <a16:creationId xmlns:a16="http://schemas.microsoft.com/office/drawing/2014/main" id="{141F2815-8AA7-49F3-B829-2B3A6FD8386B}"/>
+                <a16:creationId xmlns:a16="http://schemas.microsoft.com/office/drawing/2014/main" id="{94498AEE-DDCE-46F0-AAB5-B4E71FA8ABCB}"/>
               </a:ext>
             </a:extLst>
           </p:cNvPr>
@@ -12030,7 +12030,7 @@
           <p:cNvPr id="29" name="">
             <a:extLst xmlns:a="http://schemas.openxmlformats.org/drawingml/2006/main">
               <a:ext uri="{FF2B5EF4-FFF2-40B4-BE49-F238E27FC236}">
-                <a16:creationId xmlns:a16="http://schemas.microsoft.com/office/drawing/2014/main" id="{7F02B0E4-84E6-4138-A54E-FD09F7BAD39B}"/>
+                <a16:creationId xmlns:a16="http://schemas.microsoft.com/office/drawing/2014/main" id="{81BA3704-3B2F-437E-8EA3-109A7FDBE416}"/>
               </a:ext>
             </a:extLst>
           </p:cNvPr>
@@ -12061,7 +12061,7 @@
           <p:cNvPr id="30" name="">
             <a:extLst xmlns:a="http://schemas.openxmlformats.org/drawingml/2006/main">
               <a:ext uri="{FF2B5EF4-FFF2-40B4-BE49-F238E27FC236}">
-                <a16:creationId xmlns:a16="http://schemas.microsoft.com/office/drawing/2014/main" id="{1A19C850-731E-4259-8FFE-104132D18EC7}"/>
+                <a16:creationId xmlns:a16="http://schemas.microsoft.com/office/drawing/2014/main" id="{3DB10D04-E807-4C4D-8C52-4987A590A4AD}"/>
               </a:ext>
             </a:extLst>
           </p:cNvPr>
@@ -12093,7 +12093,7 @@
             <a:pPr algn="l">
               <a:defRPr sz="1050" b="1">
                 <a:solidFill>
-                  <a:srgbClr val="F3F8FA"/>
+                  <a:srgbClr val="132E41"/>
                 </a:solidFill>
                 <a:latin typeface="Arial"/>
                 <a:ea typeface="Arial"/>
@@ -12103,7 +12103,7 @@
             <a:r>
               <a:rPr sz="1050" b="1">
                 <a:solidFill>
-                  <a:srgbClr val="F3F8FA"/>
+                  <a:srgbClr val="132E41"/>
                 </a:solidFill>
                 <a:latin typeface="Arial"/>
                 <a:ea typeface="Arial"/>
@@ -12119,7 +12119,7 @@
           <p:cNvPr id="31" name="">
             <a:extLst xmlns:a="http://schemas.openxmlformats.org/drawingml/2006/main">
               <a:ext uri="{FF2B5EF4-FFF2-40B4-BE49-F238E27FC236}">
-                <a16:creationId xmlns:a16="http://schemas.microsoft.com/office/drawing/2014/main" id="{4DAC76B1-E074-4939-B808-C3811D5CA519}"/>
+                <a16:creationId xmlns:a16="http://schemas.microsoft.com/office/drawing/2014/main" id="{F79AB76A-57C3-4303-A429-06D8B69D1982}"/>
               </a:ext>
             </a:extLst>
           </p:cNvPr>
@@ -12176,7 +12176,7 @@
           <p:cNvPr id="32" name="">
             <a:extLst xmlns:a="http://schemas.openxmlformats.org/drawingml/2006/main">
               <a:ext uri="{FF2B5EF4-FFF2-40B4-BE49-F238E27FC236}">
-                <a16:creationId xmlns:a16="http://schemas.microsoft.com/office/drawing/2014/main" id="{A7D20EDA-3B36-4B14-B60C-AD7EB2B3BD06}"/>
+                <a16:creationId xmlns:a16="http://schemas.microsoft.com/office/drawing/2014/main" id="{E3052349-90F8-4A1A-8163-AA36EE6A3815}"/>
               </a:ext>
             </a:extLst>
           </p:cNvPr>
@@ -12207,7 +12207,7 @@
           <p:cNvPr id="33" name="">
             <a:extLst xmlns:a="http://schemas.openxmlformats.org/drawingml/2006/main">
               <a:ext uri="{FF2B5EF4-FFF2-40B4-BE49-F238E27FC236}">
-                <a16:creationId xmlns:a16="http://schemas.microsoft.com/office/drawing/2014/main" id="{FFE98BDF-B3F2-49A9-B419-8A647DB67FE0}"/>
+                <a16:creationId xmlns:a16="http://schemas.microsoft.com/office/drawing/2014/main" id="{36F6EBCC-41FB-4948-BE1D-0532C0D4508D}"/>
               </a:ext>
             </a:extLst>
           </p:cNvPr>
@@ -12239,7 +12239,7 @@
             <a:pPr algn="l">
               <a:defRPr sz="1050" b="1">
                 <a:solidFill>
-                  <a:srgbClr val="F3F8FA"/>
+                  <a:srgbClr val="132E41"/>
                 </a:solidFill>
                 <a:latin typeface="Arial"/>
                 <a:ea typeface="Arial"/>
@@ -12249,7 +12249,7 @@
             <a:r>
               <a:rPr sz="1050" b="1">
                 <a:solidFill>
-                  <a:srgbClr val="F3F8FA"/>
+                  <a:srgbClr val="132E41"/>
                 </a:solidFill>
                 <a:latin typeface="Arial"/>
                 <a:ea typeface="Arial"/>
@@ -12265,7 +12265,7 @@
           <p:cNvPr id="34" name="">
             <a:extLst xmlns:a="http://schemas.openxmlformats.org/drawingml/2006/main">
               <a:ext uri="{FF2B5EF4-FFF2-40B4-BE49-F238E27FC236}">
-                <a16:creationId xmlns:a16="http://schemas.microsoft.com/office/drawing/2014/main" id="{2257BA96-3CA5-4177-AA42-023542FAE1C9}"/>
+                <a16:creationId xmlns:a16="http://schemas.microsoft.com/office/drawing/2014/main" id="{22E980E3-9BCC-453F-9E53-25ADBB4FA26C}"/>
               </a:ext>
             </a:extLst>
           </p:cNvPr>
@@ -12285,11 +12285,11 @@
             </a:avLst>
           </a:prstGeom>
           <a:solidFill xmlns:a="http://schemas.openxmlformats.org/drawingml/2006/main">
-            <a:srgbClr val="102F46"/>
+            <a:srgbClr val="FFFFFF"/>
           </a:solidFill>
           <a:ln xmlns:a="http://schemas.openxmlformats.org/drawingml/2006/main" w="9525">
             <a:solidFill>
-              <a:srgbClr val="2A4D65"/>
+              <a:srgbClr val="C5D4DC"/>
             </a:solidFill>
             <a:prstDash val="solid"/>
           </a:ln>
@@ -12300,7 +12300,7 @@
           <p:cNvPr id="35" name="">
             <a:extLst xmlns:a="http://schemas.openxmlformats.org/drawingml/2006/main">
               <a:ext uri="{FF2B5EF4-FFF2-40B4-BE49-F238E27FC236}">
-                <a16:creationId xmlns:a16="http://schemas.microsoft.com/office/drawing/2014/main" id="{0442CD30-49BB-4196-9F5F-26C1E4B14A2C}"/>
+                <a16:creationId xmlns:a16="http://schemas.microsoft.com/office/drawing/2014/main" id="{56864A1B-ECFD-4350-AB66-5DE5899F19AF}"/>
               </a:ext>
             </a:extLst>
           </p:cNvPr>
@@ -12358,7 +12358,7 @@
           <p:cNvPr id="36" name="">
             <a:extLst xmlns:a="http://schemas.openxmlformats.org/drawingml/2006/main">
               <a:ext uri="{FF2B5EF4-FFF2-40B4-BE49-F238E27FC236}">
-                <a16:creationId xmlns:a16="http://schemas.microsoft.com/office/drawing/2014/main" id="{F84E7264-B32C-490D-B0AC-4893E2A7F2CF}"/>
+                <a16:creationId xmlns:a16="http://schemas.microsoft.com/office/drawing/2014/main" id="{D101F072-B7A1-457B-A84B-63A6BA6E1035}"/>
               </a:ext>
             </a:extLst>
           </p:cNvPr>
@@ -12378,7 +12378,7 @@
           <a:noFill xmlns:a="http://schemas.openxmlformats.org/drawingml/2006/main"/>
           <a:ln xmlns:a="http://schemas.openxmlformats.org/drawingml/2006/main" w="19050">
             <a:solidFill>
-              <a:srgbClr val="2A4D65"/>
+              <a:srgbClr val="C5D4DC"/>
             </a:solidFill>
             <a:prstDash val="solid"/>
           </a:ln>
@@ -12389,7 +12389,7 @@
           <p:cNvPr id="37" name="">
             <a:extLst xmlns:a="http://schemas.openxmlformats.org/drawingml/2006/main">
               <a:ext uri="{FF2B5EF4-FFF2-40B4-BE49-F238E27FC236}">
-                <a16:creationId xmlns:a16="http://schemas.microsoft.com/office/drawing/2014/main" id="{2D2E9ECB-3FAA-43E2-A4BD-D07B8C3E4E64}"/>
+                <a16:creationId xmlns:a16="http://schemas.microsoft.com/office/drawing/2014/main" id="{0107D37B-C9F1-4F63-A70C-7E3F03FF7DA7}"/>
               </a:ext>
             </a:extLst>
           </p:cNvPr>
@@ -12409,7 +12409,7 @@
           <a:noFill xmlns:a="http://schemas.openxmlformats.org/drawingml/2006/main"/>
           <a:ln xmlns:a="http://schemas.openxmlformats.org/drawingml/2006/main" w="19050">
             <a:solidFill>
-              <a:srgbClr val="2A4D65"/>
+              <a:srgbClr val="C5D4DC"/>
             </a:solidFill>
             <a:prstDash val="solid"/>
           </a:ln>
@@ -12420,7 +12420,7 @@
           <p:cNvPr id="38" name="">
             <a:extLst xmlns:a="http://schemas.openxmlformats.org/drawingml/2006/main">
               <a:ext uri="{FF2B5EF4-FFF2-40B4-BE49-F238E27FC236}">
-                <a16:creationId xmlns:a16="http://schemas.microsoft.com/office/drawing/2014/main" id="{A2F9F3F5-B6CD-4DE5-B15A-D0D0EBE16A2B}"/>
+                <a16:creationId xmlns:a16="http://schemas.microsoft.com/office/drawing/2014/main" id="{5BC4F618-AA82-4105-A0DD-86A0B96969A4}"/>
               </a:ext>
             </a:extLst>
           </p:cNvPr>
@@ -12440,7 +12440,7 @@
           <a:noFill xmlns:a="http://schemas.openxmlformats.org/drawingml/2006/main"/>
           <a:ln xmlns:a="http://schemas.openxmlformats.org/drawingml/2006/main" w="19050">
             <a:solidFill>
-              <a:srgbClr val="2A4D65"/>
+              <a:srgbClr val="C5D4DC"/>
             </a:solidFill>
             <a:prstDash val="solid"/>
           </a:ln>
@@ -12451,7 +12451,7 @@
           <p:cNvPr id="39" name="">
             <a:extLst xmlns:a="http://schemas.openxmlformats.org/drawingml/2006/main">
               <a:ext uri="{FF2B5EF4-FFF2-40B4-BE49-F238E27FC236}">
-                <a16:creationId xmlns:a16="http://schemas.microsoft.com/office/drawing/2014/main" id="{F30D4699-44BB-4653-A37C-F0E3EF69B49F}"/>
+                <a16:creationId xmlns:a16="http://schemas.microsoft.com/office/drawing/2014/main" id="{7BFFABD7-DA44-43A6-B5ED-B2D9E456BB0C}"/>
               </a:ext>
             </a:extLst>
           </p:cNvPr>
@@ -12471,7 +12471,7 @@
           <a:noFill xmlns:a="http://schemas.openxmlformats.org/drawingml/2006/main"/>
           <a:ln xmlns:a="http://schemas.openxmlformats.org/drawingml/2006/main" w="19050">
             <a:solidFill>
-              <a:srgbClr val="2A4D65"/>
+              <a:srgbClr val="C5D4DC"/>
             </a:solidFill>
             <a:prstDash val="solid"/>
           </a:ln>
@@ -12482,7 +12482,7 @@
           <p:cNvPr id="40" name="">
             <a:extLst xmlns:a="http://schemas.openxmlformats.org/drawingml/2006/main">
               <a:ext uri="{FF2B5EF4-FFF2-40B4-BE49-F238E27FC236}">
-                <a16:creationId xmlns:a16="http://schemas.microsoft.com/office/drawing/2014/main" id="{83F435FC-E5B6-4BB0-934D-8B82C1EDE149}"/>
+                <a16:creationId xmlns:a16="http://schemas.microsoft.com/office/drawing/2014/main" id="{1E168C19-C512-4145-84D8-281DAE105D13}"/>
               </a:ext>
             </a:extLst>
           </p:cNvPr>
@@ -12539,7 +12539,7 @@
           <p:cNvPr id="41" name="">
             <a:extLst xmlns:a="http://schemas.openxmlformats.org/drawingml/2006/main">
               <a:ext uri="{FF2B5EF4-FFF2-40B4-BE49-F238E27FC236}">
-                <a16:creationId xmlns:a16="http://schemas.microsoft.com/office/drawing/2014/main" id="{59C9D899-649A-48D9-A09D-80AE9233E5A7}"/>
+                <a16:creationId xmlns:a16="http://schemas.microsoft.com/office/drawing/2014/main" id="{B32802CE-B980-412C-A7EA-7F93960EC5E3}"/>
               </a:ext>
             </a:extLst>
           </p:cNvPr>
@@ -12570,7 +12570,7 @@
           <p:cNvPr id="42" name="">
             <a:extLst xmlns:a="http://schemas.openxmlformats.org/drawingml/2006/main">
               <a:ext uri="{FF2B5EF4-FFF2-40B4-BE49-F238E27FC236}">
-                <a16:creationId xmlns:a16="http://schemas.microsoft.com/office/drawing/2014/main" id="{57655D24-B86A-46EB-B507-D74C7865FDBE}"/>
+                <a16:creationId xmlns:a16="http://schemas.microsoft.com/office/drawing/2014/main" id="{76CBB806-B1C9-4D1C-A1BA-89E434E27BA2}"/>
               </a:ext>
             </a:extLst>
           </p:cNvPr>
@@ -12602,7 +12602,7 @@
             <a:pPr algn="ctr">
               <a:defRPr sz="825" b="1">
                 <a:solidFill>
-                  <a:srgbClr val="B8C9D3"/>
+                  <a:srgbClr val="587080"/>
                 </a:solidFill>
                 <a:latin typeface="Arial"/>
                 <a:ea typeface="Arial"/>
@@ -12612,7 +12612,7 @@
             <a:r>
               <a:rPr sz="825" b="1">
                 <a:solidFill>
-                  <a:srgbClr val="B8C9D3"/>
+                  <a:srgbClr val="587080"/>
                 </a:solidFill>
                 <a:latin typeface="Arial"/>
                 <a:ea typeface="Arial"/>
@@ -12628,7 +12628,7 @@
           <p:cNvPr id="43" name="">
             <a:extLst xmlns:a="http://schemas.openxmlformats.org/drawingml/2006/main">
               <a:ext uri="{FF2B5EF4-FFF2-40B4-BE49-F238E27FC236}">
-                <a16:creationId xmlns:a16="http://schemas.microsoft.com/office/drawing/2014/main" id="{6A8668AF-5455-4C3B-BA1B-8296F17C96CD}"/>
+                <a16:creationId xmlns:a16="http://schemas.microsoft.com/office/drawing/2014/main" id="{26AB6B92-7F44-4CC7-B4D4-469937EB9967}"/>
               </a:ext>
             </a:extLst>
           </p:cNvPr>
@@ -12685,7 +12685,7 @@
           <p:cNvPr id="44" name="">
             <a:extLst xmlns:a="http://schemas.openxmlformats.org/drawingml/2006/main">
               <a:ext uri="{FF2B5EF4-FFF2-40B4-BE49-F238E27FC236}">
-                <a16:creationId xmlns:a16="http://schemas.microsoft.com/office/drawing/2014/main" id="{E6ED4402-4E03-4580-81AB-2C05A2B392E9}"/>
+                <a16:creationId xmlns:a16="http://schemas.microsoft.com/office/drawing/2014/main" id="{C700AABD-0E4A-4F1E-A1C1-10C73FBF77C9}"/>
               </a:ext>
             </a:extLst>
           </p:cNvPr>
@@ -12716,7 +12716,7 @@
           <p:cNvPr id="45" name="">
             <a:extLst xmlns:a="http://schemas.openxmlformats.org/drawingml/2006/main">
               <a:ext uri="{FF2B5EF4-FFF2-40B4-BE49-F238E27FC236}">
-                <a16:creationId xmlns:a16="http://schemas.microsoft.com/office/drawing/2014/main" id="{0D591746-5EAE-477E-B5DB-A3AD49D23D0B}"/>
+                <a16:creationId xmlns:a16="http://schemas.microsoft.com/office/drawing/2014/main" id="{F6D7CCB4-8559-4687-A5D1-4245A8A821D9}"/>
               </a:ext>
             </a:extLst>
           </p:cNvPr>
@@ -12748,7 +12748,7 @@
             <a:pPr algn="ctr">
               <a:defRPr sz="825" b="1">
                 <a:solidFill>
-                  <a:srgbClr val="B8C9D3"/>
+                  <a:srgbClr val="587080"/>
                 </a:solidFill>
                 <a:latin typeface="Arial"/>
                 <a:ea typeface="Arial"/>
@@ -12758,7 +12758,7 @@
             <a:r>
               <a:rPr sz="825" b="1">
                 <a:solidFill>
-                  <a:srgbClr val="B8C9D3"/>
+                  <a:srgbClr val="587080"/>
                 </a:solidFill>
                 <a:latin typeface="Arial"/>
                 <a:ea typeface="Arial"/>
@@ -12774,7 +12774,7 @@
           <p:cNvPr id="46" name="">
             <a:extLst xmlns:a="http://schemas.openxmlformats.org/drawingml/2006/main">
               <a:ext uri="{FF2B5EF4-FFF2-40B4-BE49-F238E27FC236}">
-                <a16:creationId xmlns:a16="http://schemas.microsoft.com/office/drawing/2014/main" id="{EF902E5C-2CFA-46D6-8AFD-F8E145A46DEE}"/>
+                <a16:creationId xmlns:a16="http://schemas.microsoft.com/office/drawing/2014/main" id="{A1E7D3C2-7499-45DE-906D-2DC6F7AFA137}"/>
               </a:ext>
             </a:extLst>
           </p:cNvPr>
@@ -12831,7 +12831,7 @@
           <p:cNvPr id="47" name="">
             <a:extLst xmlns:a="http://schemas.openxmlformats.org/drawingml/2006/main">
               <a:ext uri="{FF2B5EF4-FFF2-40B4-BE49-F238E27FC236}">
-                <a16:creationId xmlns:a16="http://schemas.microsoft.com/office/drawing/2014/main" id="{46AF4C84-D46A-4ED7-9373-16FF7B7F2CFA}"/>
+                <a16:creationId xmlns:a16="http://schemas.microsoft.com/office/drawing/2014/main" id="{F7C25319-ED4A-4F84-9D5B-14AC78D84398}"/>
               </a:ext>
             </a:extLst>
           </p:cNvPr>
@@ -12862,7 +12862,7 @@
           <p:cNvPr id="48" name="">
             <a:extLst xmlns:a="http://schemas.openxmlformats.org/drawingml/2006/main">
               <a:ext uri="{FF2B5EF4-FFF2-40B4-BE49-F238E27FC236}">
-                <a16:creationId xmlns:a16="http://schemas.microsoft.com/office/drawing/2014/main" id="{E943EA02-CBE2-433F-9A15-6B6ADAF4BE47}"/>
+                <a16:creationId xmlns:a16="http://schemas.microsoft.com/office/drawing/2014/main" id="{08FABF2F-0A89-408A-84EB-B5CDAAE05A49}"/>
               </a:ext>
             </a:extLst>
           </p:cNvPr>
@@ -12894,7 +12894,7 @@
             <a:pPr algn="ctr">
               <a:defRPr sz="825" b="1">
                 <a:solidFill>
-                  <a:srgbClr val="B8C9D3"/>
+                  <a:srgbClr val="587080"/>
                 </a:solidFill>
                 <a:latin typeface="Arial"/>
                 <a:ea typeface="Arial"/>
@@ -12904,7 +12904,7 @@
             <a:r>
               <a:rPr sz="825" b="1">
                 <a:solidFill>
-                  <a:srgbClr val="B8C9D3"/>
+                  <a:srgbClr val="587080"/>
                 </a:solidFill>
                 <a:latin typeface="Arial"/>
                 <a:ea typeface="Arial"/>
@@ -12920,7 +12920,7 @@
           <p:cNvPr id="49" name="">
             <a:extLst xmlns:a="http://schemas.openxmlformats.org/drawingml/2006/main">
               <a:ext uri="{FF2B5EF4-FFF2-40B4-BE49-F238E27FC236}">
-                <a16:creationId xmlns:a16="http://schemas.microsoft.com/office/drawing/2014/main" id="{68527575-F192-4DF8-B1D4-E557003E6E55}"/>
+                <a16:creationId xmlns:a16="http://schemas.microsoft.com/office/drawing/2014/main" id="{F418AF38-ABB7-4CE1-BD48-E195A2A0B323}"/>
               </a:ext>
             </a:extLst>
           </p:cNvPr>
@@ -12977,7 +12977,7 @@
           <p:cNvPr id="50" name="">
             <a:extLst xmlns:a="http://schemas.openxmlformats.org/drawingml/2006/main">
               <a:ext uri="{FF2B5EF4-FFF2-40B4-BE49-F238E27FC236}">
-                <a16:creationId xmlns:a16="http://schemas.microsoft.com/office/drawing/2014/main" id="{EF417DA2-AB4E-4795-8E2B-CBB5D866468C}"/>
+                <a16:creationId xmlns:a16="http://schemas.microsoft.com/office/drawing/2014/main" id="{987B0609-883C-49DA-8F37-7153EC56C64A}"/>
               </a:ext>
             </a:extLst>
           </p:cNvPr>
@@ -13008,7 +13008,7 @@
           <p:cNvPr id="51" name="">
             <a:extLst xmlns:a="http://schemas.openxmlformats.org/drawingml/2006/main">
               <a:ext uri="{FF2B5EF4-FFF2-40B4-BE49-F238E27FC236}">
-                <a16:creationId xmlns:a16="http://schemas.microsoft.com/office/drawing/2014/main" id="{8D38416E-B857-4B26-A620-CDE455F2A812}"/>
+                <a16:creationId xmlns:a16="http://schemas.microsoft.com/office/drawing/2014/main" id="{38EBE843-0EF0-429D-A8A2-49D7557A4B7D}"/>
               </a:ext>
             </a:extLst>
           </p:cNvPr>
@@ -13040,7 +13040,7 @@
             <a:pPr algn="ctr">
               <a:defRPr sz="825" b="1">
                 <a:solidFill>
-                  <a:srgbClr val="B8C9D3"/>
+                  <a:srgbClr val="587080"/>
                 </a:solidFill>
                 <a:latin typeface="Arial"/>
                 <a:ea typeface="Arial"/>
@@ -13050,7 +13050,7 @@
             <a:r>
               <a:rPr sz="825" b="1">
                 <a:solidFill>
-                  <a:srgbClr val="B8C9D3"/>
+                  <a:srgbClr val="587080"/>
                 </a:solidFill>
                 <a:latin typeface="Arial"/>
                 <a:ea typeface="Arial"/>
@@ -13066,7 +13066,7 @@
           <p:cNvPr id="52" name="">
             <a:extLst xmlns:a="http://schemas.openxmlformats.org/drawingml/2006/main">
               <a:ext uri="{FF2B5EF4-FFF2-40B4-BE49-F238E27FC236}">
-                <a16:creationId xmlns:a16="http://schemas.microsoft.com/office/drawing/2014/main" id="{2DC58B7B-A8CA-4447-9380-7914A8F68BC5}"/>
+                <a16:creationId xmlns:a16="http://schemas.microsoft.com/office/drawing/2014/main" id="{264776B5-E24C-448E-AF29-679D6C40B54A}"/>
               </a:ext>
             </a:extLst>
           </p:cNvPr>
@@ -13103,7 +13103,7 @@
           <p:cNvPr id="53" name="">
             <a:extLst xmlns:a="http://schemas.openxmlformats.org/drawingml/2006/main">
               <a:ext uri="{FF2B5EF4-FFF2-40B4-BE49-F238E27FC236}">
-                <a16:creationId xmlns:a16="http://schemas.microsoft.com/office/drawing/2014/main" id="{1C4E41E5-6921-4559-979E-E6D5781A46DD}"/>
+                <a16:creationId xmlns:a16="http://schemas.microsoft.com/office/drawing/2014/main" id="{8E191D6A-0AFE-46D2-B6B9-A8E5604F2C4C}"/>
               </a:ext>
             </a:extLst>
           </p:cNvPr>
@@ -13159,7 +13159,7 @@
     </p:spTree>
     <p:extLst>
       <p:ext uri="{BB962C8B-B14F-4D97-AF65-F5344CB8AC3E}">
-        <p14:creationId xmlns:p14="http://schemas.microsoft.com/office/powerpoint/2010/main" val="2128469520"/>
+        <p14:creationId xmlns:p14="http://schemas.microsoft.com/office/powerpoint/2010/main" val="1570406256"/>
       </p:ext>
     </p:extLst>
   </p:cSld>
@@ -13172,7 +13172,7 @@
     <p:bg>
       <p:bgPr>
         <a:solidFill xmlns:a="http://schemas.openxmlformats.org/drawingml/2006/main">
-          <a:srgbClr val="0E293C"/>
+          <a:srgbClr val="F3F1EB"/>
         </a:solidFill>
       </p:bgPr>
     </p:bg>
@@ -13190,7 +13190,7 @@
           <p:cNvPr id="43" name="">
             <a:extLst xmlns:a="http://schemas.openxmlformats.org/drawingml/2006/main">
               <a:ext uri="{FF2B5EF4-FFF2-40B4-BE49-F238E27FC236}">
-                <a16:creationId xmlns:a16="http://schemas.microsoft.com/office/drawing/2014/main" id="{AB4E043D-9B89-4CD0-BCB4-85A274CF61D8}"/>
+                <a16:creationId xmlns:a16="http://schemas.microsoft.com/office/drawing/2014/main" id="{EDB7D07B-DB33-4735-8FFF-68EEF39189C3}"/>
               </a:ext>
             </a:extLst>
           </p:cNvPr>
@@ -13247,7 +13247,7 @@
           <p:cNvPr id="2" name="">
             <a:extLst xmlns:a="http://schemas.openxmlformats.org/drawingml/2006/main">
               <a:ext uri="{FF2B5EF4-FFF2-40B4-BE49-F238E27FC236}">
-                <a16:creationId xmlns:a16="http://schemas.microsoft.com/office/drawing/2014/main" id="{D36776D5-72C0-49F5-BD53-93935D18E485}"/>
+                <a16:creationId xmlns:a16="http://schemas.microsoft.com/office/drawing/2014/main" id="{CF1BAADC-8429-4665-A074-EBA36C538974}"/>
               </a:ext>
             </a:extLst>
           </p:cNvPr>
@@ -13304,7 +13304,7 @@
           <p:cNvPr id="3" name="">
             <a:extLst xmlns:a="http://schemas.openxmlformats.org/drawingml/2006/main">
               <a:ext uri="{FF2B5EF4-FFF2-40B4-BE49-F238E27FC236}">
-                <a16:creationId xmlns:a16="http://schemas.microsoft.com/office/drawing/2014/main" id="{5C42C6BD-C439-4266-9724-A057F7803ACB}"/>
+                <a16:creationId xmlns:a16="http://schemas.microsoft.com/office/drawing/2014/main" id="{BE4F14E9-4AC0-4FCC-9016-1C0EE0A86D99}"/>
               </a:ext>
             </a:extLst>
           </p:cNvPr>
@@ -13361,7 +13361,7 @@
           <p:cNvPr id="4" name="">
             <a:extLst xmlns:a="http://schemas.openxmlformats.org/drawingml/2006/main">
               <a:ext uri="{FF2B5EF4-FFF2-40B4-BE49-F238E27FC236}">
-                <a16:creationId xmlns:a16="http://schemas.microsoft.com/office/drawing/2014/main" id="{AC68E985-B11A-493D-B4D4-BA874ADB344E}"/>
+                <a16:creationId xmlns:a16="http://schemas.microsoft.com/office/drawing/2014/main" id="{3E965749-2CF6-4B19-9289-0F29B083F514}"/>
               </a:ext>
             </a:extLst>
           </p:cNvPr>
@@ -13392,7 +13392,7 @@
           <p:cNvPr id="5" name="">
             <a:extLst xmlns:a="http://schemas.openxmlformats.org/drawingml/2006/main">
               <a:ext uri="{FF2B5EF4-FFF2-40B4-BE49-F238E27FC236}">
-                <a16:creationId xmlns:a16="http://schemas.microsoft.com/office/drawing/2014/main" id="{ED6E433C-511F-4D36-99DE-7D4C018E19CB}"/>
+                <a16:creationId xmlns:a16="http://schemas.microsoft.com/office/drawing/2014/main" id="{738A0032-8B87-45BF-8EB2-C003BABB56C6}"/>
               </a:ext>
             </a:extLst>
           </p:cNvPr>
@@ -13412,7 +13412,7 @@
           <a:noFill xmlns:a="http://schemas.openxmlformats.org/drawingml/2006/main"/>
           <a:ln xmlns:a="http://schemas.openxmlformats.org/drawingml/2006/main" w="9525">
             <a:solidFill>
-              <a:srgbClr val="2A4D65"/>
+              <a:srgbClr val="C5D4DC"/>
             </a:solidFill>
             <a:prstDash val="solid"/>
           </a:ln>
@@ -13423,7 +13423,7 @@
           <p:cNvPr id="6" name="">
             <a:extLst xmlns:a="http://schemas.openxmlformats.org/drawingml/2006/main">
               <a:ext uri="{FF2B5EF4-FFF2-40B4-BE49-F238E27FC236}">
-                <a16:creationId xmlns:a16="http://schemas.microsoft.com/office/drawing/2014/main" id="{8623A5F0-FE54-4FC0-AFE5-132A9D7AB578}"/>
+                <a16:creationId xmlns:a16="http://schemas.microsoft.com/office/drawing/2014/main" id="{D56FB5CF-227A-42D9-B988-5F7F8EEAF690}"/>
               </a:ext>
             </a:extLst>
           </p:cNvPr>
@@ -13480,7 +13480,7 @@
           <p:cNvPr id="7" name="">
             <a:extLst xmlns:a="http://schemas.openxmlformats.org/drawingml/2006/main">
               <a:ext uri="{FF2B5EF4-FFF2-40B4-BE49-F238E27FC236}">
-                <a16:creationId xmlns:a16="http://schemas.microsoft.com/office/drawing/2014/main" id="{BDC82194-F8CA-4A2D-BF2B-41E316A4AA06}"/>
+                <a16:creationId xmlns:a16="http://schemas.microsoft.com/office/drawing/2014/main" id="{87DDB7CC-4C73-40EB-8789-80C0EE078C21}"/>
               </a:ext>
             </a:extLst>
           </p:cNvPr>
@@ -13537,7 +13537,7 @@
           <p:cNvPr id="8" name="">
             <a:extLst xmlns:a="http://schemas.openxmlformats.org/drawingml/2006/main">
               <a:ext uri="{FF2B5EF4-FFF2-40B4-BE49-F238E27FC236}">
-                <a16:creationId xmlns:a16="http://schemas.microsoft.com/office/drawing/2014/main" id="{105A9C72-3403-47E3-84C7-9DF0BE2F364D}"/>
+                <a16:creationId xmlns:a16="http://schemas.microsoft.com/office/drawing/2014/main" id="{731915E9-82CD-4B27-A1D6-59D6BBE143A4}"/>
               </a:ext>
             </a:extLst>
           </p:cNvPr>
@@ -13594,7 +13594,7 @@
           <p:cNvPr id="9" name="">
             <a:extLst xmlns:a="http://schemas.openxmlformats.org/drawingml/2006/main">
               <a:ext uri="{FF2B5EF4-FFF2-40B4-BE49-F238E27FC236}">
-                <a16:creationId xmlns:a16="http://schemas.microsoft.com/office/drawing/2014/main" id="{6EC41EA7-114C-4D4A-A6EF-28489BAA02B7}"/>
+                <a16:creationId xmlns:a16="http://schemas.microsoft.com/office/drawing/2014/main" id="{0F620E18-08DB-45D1-8BEF-3A961F14E1E1}"/>
               </a:ext>
             </a:extLst>
           </p:cNvPr>
@@ -13625,7 +13625,7 @@
           <p:cNvPr id="10" name="">
             <a:extLst xmlns:a="http://schemas.openxmlformats.org/drawingml/2006/main">
               <a:ext uri="{FF2B5EF4-FFF2-40B4-BE49-F238E27FC236}">
-                <a16:creationId xmlns:a16="http://schemas.microsoft.com/office/drawing/2014/main" id="{698D8B86-CFE7-4D0F-B4D0-15FE4AE480C9}"/>
+                <a16:creationId xmlns:a16="http://schemas.microsoft.com/office/drawing/2014/main" id="{9EE77F44-824D-45E5-965F-0EF8A6C3A53A}"/>
               </a:ext>
             </a:extLst>
           </p:cNvPr>
@@ -13645,7 +13645,7 @@
           <a:noFill xmlns:a="http://schemas.openxmlformats.org/drawingml/2006/main"/>
           <a:ln xmlns:a="http://schemas.openxmlformats.org/drawingml/2006/main" w="9525">
             <a:solidFill>
-              <a:srgbClr val="2A4D65"/>
+              <a:srgbClr val="C5D4DC"/>
             </a:solidFill>
             <a:prstDash val="solid"/>
           </a:ln>
@@ -13656,7 +13656,7 @@
           <p:cNvPr id="11" name="">
             <a:extLst xmlns:a="http://schemas.openxmlformats.org/drawingml/2006/main">
               <a:ext uri="{FF2B5EF4-FFF2-40B4-BE49-F238E27FC236}">
-                <a16:creationId xmlns:a16="http://schemas.microsoft.com/office/drawing/2014/main" id="{7AF28C1C-3349-4CBC-AC0D-2C7278F97564}"/>
+                <a16:creationId xmlns:a16="http://schemas.microsoft.com/office/drawing/2014/main" id="{2059B7E4-D436-4F49-8EA3-6A637F43DFEE}"/>
               </a:ext>
             </a:extLst>
           </p:cNvPr>
@@ -13714,7 +13714,7 @@
           <p:cNvPr id="12" name="">
             <a:extLst xmlns:a="http://schemas.openxmlformats.org/drawingml/2006/main">
               <a:ext uri="{FF2B5EF4-FFF2-40B4-BE49-F238E27FC236}">
-                <a16:creationId xmlns:a16="http://schemas.microsoft.com/office/drawing/2014/main" id="{C8C1AC73-8628-43E8-8759-7C2A5F0394B4}"/>
+                <a16:creationId xmlns:a16="http://schemas.microsoft.com/office/drawing/2014/main" id="{FB9DEB03-D62F-49A6-8826-99FB54DB7157}"/>
               </a:ext>
             </a:extLst>
           </p:cNvPr>
@@ -13746,7 +13746,7 @@
             <a:pPr algn="r">
               <a:defRPr sz="750" b="1">
                 <a:solidFill>
-                  <a:srgbClr val="B8C9D3"/>
+                  <a:srgbClr val="587080"/>
                 </a:solidFill>
                 <a:latin typeface="Arial"/>
                 <a:ea typeface="Arial"/>
@@ -13756,7 +13756,7 @@
             <a:r>
               <a:rPr sz="750" b="1">
                 <a:solidFill>
-                  <a:srgbClr val="B8C9D3"/>
+                  <a:srgbClr val="587080"/>
                 </a:solidFill>
                 <a:latin typeface="Arial"/>
                 <a:ea typeface="Arial"/>
@@ -13772,7 +13772,7 @@
           <p:cNvPr id="13" name="">
             <a:extLst xmlns:a="http://schemas.openxmlformats.org/drawingml/2006/main">
               <a:ext uri="{FF2B5EF4-FFF2-40B4-BE49-F238E27FC236}">
-                <a16:creationId xmlns:a16="http://schemas.microsoft.com/office/drawing/2014/main" id="{98C51052-8446-4954-8C2D-A8171C017238}"/>
+                <a16:creationId xmlns:a16="http://schemas.microsoft.com/office/drawing/2014/main" id="{77BA16AD-7C1E-463C-9EB3-5ECEA4DBB8E7}"/>
               </a:ext>
             </a:extLst>
           </p:cNvPr>
@@ -13804,7 +13804,7 @@
             <a:pPr algn="l">
               <a:defRPr sz="600" b="0">
                 <a:solidFill>
-                  <a:srgbClr val="B8C9D3"/>
+                  <a:srgbClr val="587080"/>
                 </a:solidFill>
                 <a:latin typeface="Arial"/>
                 <a:ea typeface="Arial"/>
@@ -13814,7 +13814,7 @@
             <a:r>
               <a:rPr sz="600" b="0">
                 <a:solidFill>
-                  <a:srgbClr val="B8C9D3"/>
+                  <a:srgbClr val="587080"/>
                 </a:solidFill>
                 <a:latin typeface="Arial"/>
                 <a:ea typeface="Arial"/>
@@ -13830,7 +13830,7 @@
           <p:cNvPr id="14" name="">
             <a:extLst xmlns:a="http://schemas.openxmlformats.org/drawingml/2006/main">
               <a:ext uri="{FF2B5EF4-FFF2-40B4-BE49-F238E27FC236}">
-                <a16:creationId xmlns:a16="http://schemas.microsoft.com/office/drawing/2014/main" id="{41B572FB-13C4-46FC-BC1E-FA44D184232E}"/>
+                <a16:creationId xmlns:a16="http://schemas.microsoft.com/office/drawing/2014/main" id="{9F97F6ED-9083-4612-9F10-303AE524FF5C}"/>
               </a:ext>
             </a:extLst>
           </p:cNvPr>
@@ -13862,7 +13862,7 @@
             <a:pPr algn="r">
               <a:defRPr sz="600" b="1">
                 <a:solidFill>
-                  <a:srgbClr val="B8C9D3"/>
+                  <a:srgbClr val="587080"/>
                 </a:solidFill>
                 <a:latin typeface="Arial"/>
                 <a:ea typeface="Arial"/>
@@ -13872,7 +13872,7 @@
             <a:r>
               <a:rPr sz="600" b="1">
                 <a:solidFill>
-                  <a:srgbClr val="B8C9D3"/>
+                  <a:srgbClr val="587080"/>
                 </a:solidFill>
                 <a:latin typeface="Arial"/>
                 <a:ea typeface="Arial"/>
@@ -13888,7 +13888,7 @@
           <p:cNvPr id="15" name="">
             <a:extLst xmlns:a="http://schemas.openxmlformats.org/drawingml/2006/main">
               <a:ext uri="{FF2B5EF4-FFF2-40B4-BE49-F238E27FC236}">
-                <a16:creationId xmlns:a16="http://schemas.microsoft.com/office/drawing/2014/main" id="{7D2CFF79-DE42-44B8-A188-6EBB7FB007E3}"/>
+                <a16:creationId xmlns:a16="http://schemas.microsoft.com/office/drawing/2014/main" id="{39E350AD-BE0A-41DD-85C4-018CAC07EB49}"/>
               </a:ext>
             </a:extLst>
           </p:cNvPr>
@@ -13920,7 +13920,7 @@
             <a:pPr algn="l">
               <a:defRPr sz="2250" b="0">
                 <a:solidFill>
-                  <a:srgbClr val="00E1C6"/>
+                  <a:srgbClr val="132E41"/>
                 </a:solidFill>
                 <a:latin typeface="Georgia"/>
                 <a:ea typeface="Georgia"/>
@@ -13930,7 +13930,7 @@
             <a:r>
               <a:rPr sz="2250" b="0">
                 <a:solidFill>
-                  <a:srgbClr val="00E1C6"/>
+                  <a:srgbClr val="132E41"/>
                 </a:solidFill>
                 <a:latin typeface="Georgia"/>
                 <a:ea typeface="Georgia"/>
@@ -13946,7 +13946,7 @@
           <p:cNvPr id="16" name="">
             <a:extLst xmlns:a="http://schemas.openxmlformats.org/drawingml/2006/main">
               <a:ext uri="{FF2B5EF4-FFF2-40B4-BE49-F238E27FC236}">
-                <a16:creationId xmlns:a16="http://schemas.microsoft.com/office/drawing/2014/main" id="{0633B0FF-1A9D-4AA8-8F40-AA5C1E185396}"/>
+                <a16:creationId xmlns:a16="http://schemas.microsoft.com/office/drawing/2014/main" id="{1DAA5926-B033-44F1-87B5-022F45F91BA8}"/>
               </a:ext>
             </a:extLst>
           </p:cNvPr>
@@ -13978,7 +13978,7 @@
             <a:pPr algn="l">
               <a:defRPr sz="1125" b="0">
                 <a:solidFill>
-                  <a:srgbClr val="B8C9D3"/>
+                  <a:srgbClr val="587080"/>
                 </a:solidFill>
                 <a:latin typeface="Arial"/>
                 <a:ea typeface="Arial"/>
@@ -13988,7 +13988,7 @@
             <a:r>
               <a:rPr sz="1125" b="0">
                 <a:solidFill>
-                  <a:srgbClr val="B8C9D3"/>
+                  <a:srgbClr val="587080"/>
                 </a:solidFill>
                 <a:latin typeface="Arial"/>
                 <a:ea typeface="Arial"/>
@@ -14004,7 +14004,7 @@
           <p:cNvPr id="17" name="">
             <a:extLst xmlns:a="http://schemas.openxmlformats.org/drawingml/2006/main">
               <a:ext uri="{FF2B5EF4-FFF2-40B4-BE49-F238E27FC236}">
-                <a16:creationId xmlns:a16="http://schemas.microsoft.com/office/drawing/2014/main" id="{1941E5CF-8359-4C76-A6B7-31BC455D2910}"/>
+                <a16:creationId xmlns:a16="http://schemas.microsoft.com/office/drawing/2014/main" id="{2611A7BE-AFB1-40CF-B6BF-4D03334A40A7}"/>
               </a:ext>
             </a:extLst>
           </p:cNvPr>
@@ -14024,7 +14024,7 @@
           <a:noFill xmlns:a="http://schemas.openxmlformats.org/drawingml/2006/main"/>
           <a:ln xmlns:a="http://schemas.openxmlformats.org/drawingml/2006/main" w="28575">
             <a:solidFill>
-              <a:srgbClr val="2A4D65"/>
+              <a:srgbClr val="C5D4DC"/>
             </a:solidFill>
             <a:prstDash val="solid"/>
           </a:ln>
@@ -14035,7 +14035,7 @@
           <p:cNvPr id="18" name="">
             <a:extLst xmlns:a="http://schemas.openxmlformats.org/drawingml/2006/main">
               <a:ext uri="{FF2B5EF4-FFF2-40B4-BE49-F238E27FC236}">
-                <a16:creationId xmlns:a16="http://schemas.microsoft.com/office/drawing/2014/main" id="{C8B76919-2A52-40E1-A5FE-AFDC05F40897}"/>
+                <a16:creationId xmlns:a16="http://schemas.microsoft.com/office/drawing/2014/main" id="{FD86F077-DB6B-4FA6-B430-0ABEFED23439}"/>
               </a:ext>
             </a:extLst>
           </p:cNvPr>
@@ -14092,7 +14092,7 @@
           <p:cNvPr id="19" name="">
             <a:extLst xmlns:a="http://schemas.openxmlformats.org/drawingml/2006/main">
               <a:ext uri="{FF2B5EF4-FFF2-40B4-BE49-F238E27FC236}">
-                <a16:creationId xmlns:a16="http://schemas.microsoft.com/office/drawing/2014/main" id="{399F1E47-0B5A-42F9-B19D-3247E5EDA4F5}"/>
+                <a16:creationId xmlns:a16="http://schemas.microsoft.com/office/drawing/2014/main" id="{F137DFDA-FC05-437F-962C-375E710824D2}"/>
               </a:ext>
             </a:extLst>
           </p:cNvPr>
@@ -14150,7 +14150,7 @@
           <p:cNvPr id="20" name="">
             <a:extLst xmlns:a="http://schemas.openxmlformats.org/drawingml/2006/main">
               <a:ext uri="{FF2B5EF4-FFF2-40B4-BE49-F238E27FC236}">
-                <a16:creationId xmlns:a16="http://schemas.microsoft.com/office/drawing/2014/main" id="{D35A5C21-2C9A-4C48-8A1F-257E71D30950}"/>
+                <a16:creationId xmlns:a16="http://schemas.microsoft.com/office/drawing/2014/main" id="{79379DD2-69DD-4A4B-81D8-D4AD94F0BAAD}"/>
               </a:ext>
             </a:extLst>
           </p:cNvPr>
@@ -14182,7 +14182,7 @@
             <a:pPr algn="ctr">
               <a:defRPr sz="975" b="1">
                 <a:solidFill>
-                  <a:srgbClr val="F3F8FA"/>
+                  <a:srgbClr val="132E41"/>
                 </a:solidFill>
                 <a:latin typeface="Arial"/>
                 <a:ea typeface="Arial"/>
@@ -14192,7 +14192,7 @@
             <a:r>
               <a:rPr sz="975" b="1">
                 <a:solidFill>
-                  <a:srgbClr val="F3F8FA"/>
+                  <a:srgbClr val="132E41"/>
                 </a:solidFill>
                 <a:latin typeface="Arial"/>
                 <a:ea typeface="Arial"/>
@@ -14208,7 +14208,7 @@
           <p:cNvPr id="21" name="">
             <a:extLst xmlns:a="http://schemas.openxmlformats.org/drawingml/2006/main">
               <a:ext uri="{FF2B5EF4-FFF2-40B4-BE49-F238E27FC236}">
-                <a16:creationId xmlns:a16="http://schemas.microsoft.com/office/drawing/2014/main" id="{9F1BF507-388C-41F0-88C2-55A8970D94EF}"/>
+                <a16:creationId xmlns:a16="http://schemas.microsoft.com/office/drawing/2014/main" id="{8A71595C-E57D-4899-97D5-1DA2623998FA}"/>
               </a:ext>
             </a:extLst>
           </p:cNvPr>
@@ -14240,7 +14240,7 @@
             <a:pPr algn="ctr">
               <a:defRPr sz="825" b="0">
                 <a:solidFill>
-                  <a:srgbClr val="B8C9D3"/>
+                  <a:srgbClr val="587080"/>
                 </a:solidFill>
                 <a:latin typeface="Arial"/>
                 <a:ea typeface="Arial"/>
@@ -14250,7 +14250,7 @@
             <a:r>
               <a:rPr sz="825" b="0">
                 <a:solidFill>
-                  <a:srgbClr val="B8C9D3"/>
+                  <a:srgbClr val="587080"/>
                 </a:solidFill>
                 <a:latin typeface="Arial"/>
                 <a:ea typeface="Arial"/>
@@ -14266,7 +14266,7 @@
           <p:cNvPr id="22" name="">
             <a:extLst xmlns:a="http://schemas.openxmlformats.org/drawingml/2006/main">
               <a:ext uri="{FF2B5EF4-FFF2-40B4-BE49-F238E27FC236}">
-                <a16:creationId xmlns:a16="http://schemas.microsoft.com/office/drawing/2014/main" id="{467E66F8-A3D9-4A9C-9ED9-C7BEF3E64D3F}"/>
+                <a16:creationId xmlns:a16="http://schemas.microsoft.com/office/drawing/2014/main" id="{19864F64-4149-4F2B-BCBD-68D9E70DE618}"/>
               </a:ext>
             </a:extLst>
           </p:cNvPr>
@@ -14286,7 +14286,7 @@
           <a:noFill xmlns:a="http://schemas.openxmlformats.org/drawingml/2006/main"/>
           <a:ln xmlns:a="http://schemas.openxmlformats.org/drawingml/2006/main" w="28575">
             <a:solidFill>
-              <a:srgbClr val="2A4D65"/>
+              <a:srgbClr val="C5D4DC"/>
             </a:solidFill>
             <a:prstDash val="solid"/>
           </a:ln>
@@ -14297,7 +14297,7 @@
           <p:cNvPr id="23" name="">
             <a:extLst xmlns:a="http://schemas.openxmlformats.org/drawingml/2006/main">
               <a:ext uri="{FF2B5EF4-FFF2-40B4-BE49-F238E27FC236}">
-                <a16:creationId xmlns:a16="http://schemas.microsoft.com/office/drawing/2014/main" id="{02D754F0-F868-45FC-9AAC-B4D5A247F8A9}"/>
+                <a16:creationId xmlns:a16="http://schemas.microsoft.com/office/drawing/2014/main" id="{A4069148-5A29-4076-961D-7ECACC99E6CD}"/>
               </a:ext>
             </a:extLst>
           </p:cNvPr>
@@ -14354,7 +14354,7 @@
           <p:cNvPr id="24" name="">
             <a:extLst xmlns:a="http://schemas.openxmlformats.org/drawingml/2006/main">
               <a:ext uri="{FF2B5EF4-FFF2-40B4-BE49-F238E27FC236}">
-                <a16:creationId xmlns:a16="http://schemas.microsoft.com/office/drawing/2014/main" id="{6E396950-E05B-460F-8067-D942E703870E}"/>
+                <a16:creationId xmlns:a16="http://schemas.microsoft.com/office/drawing/2014/main" id="{F2322B2B-366F-4809-B350-CBCE180BCEEF}"/>
               </a:ext>
             </a:extLst>
           </p:cNvPr>
@@ -14412,7 +14412,7 @@
           <p:cNvPr id="25" name="">
             <a:extLst xmlns:a="http://schemas.openxmlformats.org/drawingml/2006/main">
               <a:ext uri="{FF2B5EF4-FFF2-40B4-BE49-F238E27FC236}">
-                <a16:creationId xmlns:a16="http://schemas.microsoft.com/office/drawing/2014/main" id="{186D77AE-ECA4-4519-A042-17816F91A360}"/>
+                <a16:creationId xmlns:a16="http://schemas.microsoft.com/office/drawing/2014/main" id="{91D9ED45-7967-4C98-A31B-E3972182FE74}"/>
               </a:ext>
             </a:extLst>
           </p:cNvPr>
@@ -14444,7 +14444,7 @@
             <a:pPr algn="ctr">
               <a:defRPr sz="975" b="1">
                 <a:solidFill>
-                  <a:srgbClr val="F3F8FA"/>
+                  <a:srgbClr val="132E41"/>
                 </a:solidFill>
                 <a:latin typeface="Arial"/>
                 <a:ea typeface="Arial"/>
@@ -14454,7 +14454,7 @@
             <a:r>
               <a:rPr sz="975" b="1">
                 <a:solidFill>
-                  <a:srgbClr val="F3F8FA"/>
+                  <a:srgbClr val="132E41"/>
                 </a:solidFill>
                 <a:latin typeface="Arial"/>
                 <a:ea typeface="Arial"/>
@@ -14470,7 +14470,7 @@
           <p:cNvPr id="26" name="">
             <a:extLst xmlns:a="http://schemas.openxmlformats.org/drawingml/2006/main">
               <a:ext uri="{FF2B5EF4-FFF2-40B4-BE49-F238E27FC236}">
-                <a16:creationId xmlns:a16="http://schemas.microsoft.com/office/drawing/2014/main" id="{697C88BE-4B9D-49E7-89E7-F9A48102B853}"/>
+                <a16:creationId xmlns:a16="http://schemas.microsoft.com/office/drawing/2014/main" id="{F5CD25D2-EE79-4E4B-98F5-D246592B11F7}"/>
               </a:ext>
             </a:extLst>
           </p:cNvPr>
@@ -14502,7 +14502,7 @@
             <a:pPr algn="ctr">
               <a:defRPr sz="825" b="0">
                 <a:solidFill>
-                  <a:srgbClr val="B8C9D3"/>
+                  <a:srgbClr val="587080"/>
                 </a:solidFill>
                 <a:latin typeface="Arial"/>
                 <a:ea typeface="Arial"/>
@@ -14512,7 +14512,7 @@
             <a:r>
               <a:rPr sz="825" b="0">
                 <a:solidFill>
-                  <a:srgbClr val="B8C9D3"/>
+                  <a:srgbClr val="587080"/>
                 </a:solidFill>
                 <a:latin typeface="Arial"/>
                 <a:ea typeface="Arial"/>
@@ -14528,7 +14528,7 @@
           <p:cNvPr id="27" name="">
             <a:extLst xmlns:a="http://schemas.openxmlformats.org/drawingml/2006/main">
               <a:ext uri="{FF2B5EF4-FFF2-40B4-BE49-F238E27FC236}">
-                <a16:creationId xmlns:a16="http://schemas.microsoft.com/office/drawing/2014/main" id="{85B02036-3F86-46AE-B945-D6CA3327EAF5}"/>
+                <a16:creationId xmlns:a16="http://schemas.microsoft.com/office/drawing/2014/main" id="{FA597A40-7044-4EFA-8C12-46EEEAAEDEF3}"/>
               </a:ext>
             </a:extLst>
           </p:cNvPr>
@@ -14548,7 +14548,7 @@
           <a:noFill xmlns:a="http://schemas.openxmlformats.org/drawingml/2006/main"/>
           <a:ln xmlns:a="http://schemas.openxmlformats.org/drawingml/2006/main" w="28575">
             <a:solidFill>
-              <a:srgbClr val="2A4D65"/>
+              <a:srgbClr val="C5D4DC"/>
             </a:solidFill>
             <a:prstDash val="solid"/>
           </a:ln>
@@ -14559,7 +14559,7 @@
           <p:cNvPr id="28" name="">
             <a:extLst xmlns:a="http://schemas.openxmlformats.org/drawingml/2006/main">
               <a:ext uri="{FF2B5EF4-FFF2-40B4-BE49-F238E27FC236}">
-                <a16:creationId xmlns:a16="http://schemas.microsoft.com/office/drawing/2014/main" id="{ABE53688-0C9D-4A9A-A55C-BEC306C5069D}"/>
+                <a16:creationId xmlns:a16="http://schemas.microsoft.com/office/drawing/2014/main" id="{A7C38090-BFC2-4A7D-8B34-A510E966D953}"/>
               </a:ext>
             </a:extLst>
           </p:cNvPr>
@@ -14616,7 +14616,7 @@
           <p:cNvPr id="29" name="">
             <a:extLst xmlns:a="http://schemas.openxmlformats.org/drawingml/2006/main">
               <a:ext uri="{FF2B5EF4-FFF2-40B4-BE49-F238E27FC236}">
-                <a16:creationId xmlns:a16="http://schemas.microsoft.com/office/drawing/2014/main" id="{DD686788-8C9F-4DA8-99DA-2E68BA98285F}"/>
+                <a16:creationId xmlns:a16="http://schemas.microsoft.com/office/drawing/2014/main" id="{5653CB79-546E-4DAE-84E7-461D5C3CD4AE}"/>
               </a:ext>
             </a:extLst>
           </p:cNvPr>
@@ -14674,7 +14674,7 @@
           <p:cNvPr id="30" name="">
             <a:extLst xmlns:a="http://schemas.openxmlformats.org/drawingml/2006/main">
               <a:ext uri="{FF2B5EF4-FFF2-40B4-BE49-F238E27FC236}">
-                <a16:creationId xmlns:a16="http://schemas.microsoft.com/office/drawing/2014/main" id="{A34E60FE-FD40-41C8-93B4-7DE9FD6C11D4}"/>
+                <a16:creationId xmlns:a16="http://schemas.microsoft.com/office/drawing/2014/main" id="{B758D8B0-56B9-4914-9602-A04D2E3A446A}"/>
               </a:ext>
             </a:extLst>
           </p:cNvPr>
@@ -14706,7 +14706,7 @@
             <a:pPr algn="ctr">
               <a:defRPr sz="975" b="1">
                 <a:solidFill>
-                  <a:srgbClr val="F3F8FA"/>
+                  <a:srgbClr val="132E41"/>
                 </a:solidFill>
                 <a:latin typeface="Arial"/>
                 <a:ea typeface="Arial"/>
@@ -14716,7 +14716,7 @@
             <a:r>
               <a:rPr sz="975" b="1">
                 <a:solidFill>
-                  <a:srgbClr val="F3F8FA"/>
+                  <a:srgbClr val="132E41"/>
                 </a:solidFill>
                 <a:latin typeface="Arial"/>
                 <a:ea typeface="Arial"/>
@@ -14732,7 +14732,7 @@
           <p:cNvPr id="31" name="">
             <a:extLst xmlns:a="http://schemas.openxmlformats.org/drawingml/2006/main">
               <a:ext uri="{FF2B5EF4-FFF2-40B4-BE49-F238E27FC236}">
-                <a16:creationId xmlns:a16="http://schemas.microsoft.com/office/drawing/2014/main" id="{9EB61257-EA45-4EE8-BB5A-EB708C7B9F9B}"/>
+                <a16:creationId xmlns:a16="http://schemas.microsoft.com/office/drawing/2014/main" id="{95D87AF6-38D5-418C-A9B4-F43A3A94768A}"/>
               </a:ext>
             </a:extLst>
           </p:cNvPr>
@@ -14764,7 +14764,7 @@
             <a:pPr algn="ctr">
               <a:defRPr sz="825" b="0">
                 <a:solidFill>
-                  <a:srgbClr val="B8C9D3"/>
+                  <a:srgbClr val="587080"/>
                 </a:solidFill>
                 <a:latin typeface="Arial"/>
                 <a:ea typeface="Arial"/>
@@ -14774,7 +14774,7 @@
             <a:r>
               <a:rPr sz="825" b="0">
                 <a:solidFill>
-                  <a:srgbClr val="B8C9D3"/>
+                  <a:srgbClr val="587080"/>
                 </a:solidFill>
                 <a:latin typeface="Arial"/>
                 <a:ea typeface="Arial"/>
@@ -14790,7 +14790,7 @@
           <p:cNvPr id="32" name="">
             <a:extLst xmlns:a="http://schemas.openxmlformats.org/drawingml/2006/main">
               <a:ext uri="{FF2B5EF4-FFF2-40B4-BE49-F238E27FC236}">
-                <a16:creationId xmlns:a16="http://schemas.microsoft.com/office/drawing/2014/main" id="{C44C4C9D-4042-4FB0-8160-3CDF18EAC00C}"/>
+                <a16:creationId xmlns:a16="http://schemas.microsoft.com/office/drawing/2014/main" id="{D217743F-674F-4151-9482-033CFE20DA1A}"/>
               </a:ext>
             </a:extLst>
           </p:cNvPr>
@@ -14810,7 +14810,7 @@
           <a:noFill xmlns:a="http://schemas.openxmlformats.org/drawingml/2006/main"/>
           <a:ln xmlns:a="http://schemas.openxmlformats.org/drawingml/2006/main" w="28575">
             <a:solidFill>
-              <a:srgbClr val="2A4D65"/>
+              <a:srgbClr val="C5D4DC"/>
             </a:solidFill>
             <a:prstDash val="solid"/>
           </a:ln>
@@ -14821,7 +14821,7 @@
           <p:cNvPr id="33" name="">
             <a:extLst xmlns:a="http://schemas.openxmlformats.org/drawingml/2006/main">
               <a:ext uri="{FF2B5EF4-FFF2-40B4-BE49-F238E27FC236}">
-                <a16:creationId xmlns:a16="http://schemas.microsoft.com/office/drawing/2014/main" id="{283C9517-CC95-40FD-93A6-1B8F2D2191AF}"/>
+                <a16:creationId xmlns:a16="http://schemas.microsoft.com/office/drawing/2014/main" id="{A60AAD06-C37B-4854-A2D8-4905F71BCD50}"/>
               </a:ext>
             </a:extLst>
           </p:cNvPr>
@@ -14878,7 +14878,7 @@
           <p:cNvPr id="34" name="">
             <a:extLst xmlns:a="http://schemas.openxmlformats.org/drawingml/2006/main">
               <a:ext uri="{FF2B5EF4-FFF2-40B4-BE49-F238E27FC236}">
-                <a16:creationId xmlns:a16="http://schemas.microsoft.com/office/drawing/2014/main" id="{FE0A60A3-30A6-492C-A8B8-B87D1F730904}"/>
+                <a16:creationId xmlns:a16="http://schemas.microsoft.com/office/drawing/2014/main" id="{2205BCAF-BCDC-4A96-B85B-A084DF79C13F}"/>
               </a:ext>
             </a:extLst>
           </p:cNvPr>
@@ -14936,7 +14936,7 @@
           <p:cNvPr id="35" name="">
             <a:extLst xmlns:a="http://schemas.openxmlformats.org/drawingml/2006/main">
               <a:ext uri="{FF2B5EF4-FFF2-40B4-BE49-F238E27FC236}">
-                <a16:creationId xmlns:a16="http://schemas.microsoft.com/office/drawing/2014/main" id="{8B631E6F-F8FA-4C53-8A93-03D0BB269D32}"/>
+                <a16:creationId xmlns:a16="http://schemas.microsoft.com/office/drawing/2014/main" id="{85187E23-3FC3-4152-BB52-7AB8F162563B}"/>
               </a:ext>
             </a:extLst>
           </p:cNvPr>
@@ -14968,7 +14968,7 @@
             <a:pPr algn="ctr">
               <a:defRPr sz="975" b="1">
                 <a:solidFill>
-                  <a:srgbClr val="F3F8FA"/>
+                  <a:srgbClr val="132E41"/>
                 </a:solidFill>
                 <a:latin typeface="Arial"/>
                 <a:ea typeface="Arial"/>
@@ -14978,7 +14978,7 @@
             <a:r>
               <a:rPr sz="975" b="1">
                 <a:solidFill>
-                  <a:srgbClr val="F3F8FA"/>
+                  <a:srgbClr val="132E41"/>
                 </a:solidFill>
                 <a:latin typeface="Arial"/>
                 <a:ea typeface="Arial"/>
@@ -14994,7 +14994,7 @@
           <p:cNvPr id="36" name="">
             <a:extLst xmlns:a="http://schemas.openxmlformats.org/drawingml/2006/main">
               <a:ext uri="{FF2B5EF4-FFF2-40B4-BE49-F238E27FC236}">
-                <a16:creationId xmlns:a16="http://schemas.microsoft.com/office/drawing/2014/main" id="{41CEADC4-4935-434F-8B99-0A7FC531CBD5}"/>
+                <a16:creationId xmlns:a16="http://schemas.microsoft.com/office/drawing/2014/main" id="{312E3F07-0220-44F4-B172-19AE62518126}"/>
               </a:ext>
             </a:extLst>
           </p:cNvPr>
@@ -15026,7 +15026,7 @@
             <a:pPr algn="ctr">
               <a:defRPr sz="825" b="0">
                 <a:solidFill>
-                  <a:srgbClr val="B8C9D3"/>
+                  <a:srgbClr val="587080"/>
                 </a:solidFill>
                 <a:latin typeface="Arial"/>
                 <a:ea typeface="Arial"/>
@@ -15036,7 +15036,7 @@
             <a:r>
               <a:rPr sz="825" b="0">
                 <a:solidFill>
-                  <a:srgbClr val="B8C9D3"/>
+                  <a:srgbClr val="587080"/>
                 </a:solidFill>
                 <a:latin typeface="Arial"/>
                 <a:ea typeface="Arial"/>
@@ -15052,7 +15052,7 @@
           <p:cNvPr id="37" name="">
             <a:extLst xmlns:a="http://schemas.openxmlformats.org/drawingml/2006/main">
               <a:ext uri="{FF2B5EF4-FFF2-40B4-BE49-F238E27FC236}">
-                <a16:creationId xmlns:a16="http://schemas.microsoft.com/office/drawing/2014/main" id="{EFC2C500-12D3-4F0C-B736-BE9295977150}"/>
+                <a16:creationId xmlns:a16="http://schemas.microsoft.com/office/drawing/2014/main" id="{BBD79751-98F1-4225-8E7D-C5127C93AD3E}"/>
               </a:ext>
             </a:extLst>
           </p:cNvPr>
@@ -15109,7 +15109,7 @@
           <p:cNvPr id="38" name="">
             <a:extLst xmlns:a="http://schemas.openxmlformats.org/drawingml/2006/main">
               <a:ext uri="{FF2B5EF4-FFF2-40B4-BE49-F238E27FC236}">
-                <a16:creationId xmlns:a16="http://schemas.microsoft.com/office/drawing/2014/main" id="{27BD11DC-3831-486C-BAAD-BB9AA663E36C}"/>
+                <a16:creationId xmlns:a16="http://schemas.microsoft.com/office/drawing/2014/main" id="{3EE97D93-0067-4043-8C78-BEA48A4A80A0}"/>
               </a:ext>
             </a:extLst>
           </p:cNvPr>
@@ -15167,7 +15167,7 @@
           <p:cNvPr id="39" name="">
             <a:extLst xmlns:a="http://schemas.openxmlformats.org/drawingml/2006/main">
               <a:ext uri="{FF2B5EF4-FFF2-40B4-BE49-F238E27FC236}">
-                <a16:creationId xmlns:a16="http://schemas.microsoft.com/office/drawing/2014/main" id="{6B3F1108-2D44-40E4-8763-FC2FCFB1FAEC}"/>
+                <a16:creationId xmlns:a16="http://schemas.microsoft.com/office/drawing/2014/main" id="{94FB0BF8-4360-4735-B88E-D9058768A776}"/>
               </a:ext>
             </a:extLst>
           </p:cNvPr>
@@ -15199,7 +15199,7 @@
             <a:pPr algn="ctr">
               <a:defRPr sz="975" b="1">
                 <a:solidFill>
-                  <a:srgbClr val="F3F8FA"/>
+                  <a:srgbClr val="132E41"/>
                 </a:solidFill>
                 <a:latin typeface="Arial"/>
                 <a:ea typeface="Arial"/>
@@ -15209,7 +15209,7 @@
             <a:r>
               <a:rPr sz="975" b="1">
                 <a:solidFill>
-                  <a:srgbClr val="F3F8FA"/>
+                  <a:srgbClr val="132E41"/>
                 </a:solidFill>
                 <a:latin typeface="Arial"/>
                 <a:ea typeface="Arial"/>
@@ -15225,7 +15225,7 @@
           <p:cNvPr id="40" name="">
             <a:extLst xmlns:a="http://schemas.openxmlformats.org/drawingml/2006/main">
               <a:ext uri="{FF2B5EF4-FFF2-40B4-BE49-F238E27FC236}">
-                <a16:creationId xmlns:a16="http://schemas.microsoft.com/office/drawing/2014/main" id="{0B099A37-2E29-4DC6-A711-2199D78785A0}"/>
+                <a16:creationId xmlns:a16="http://schemas.microsoft.com/office/drawing/2014/main" id="{41C3E31C-271D-444C-872C-729EBB6C7265}"/>
               </a:ext>
             </a:extLst>
           </p:cNvPr>
@@ -15257,7 +15257,7 @@
             <a:pPr algn="ctr">
               <a:defRPr sz="825" b="0">
                 <a:solidFill>
-                  <a:srgbClr val="B8C9D3"/>
+                  <a:srgbClr val="587080"/>
                 </a:solidFill>
                 <a:latin typeface="Arial"/>
                 <a:ea typeface="Arial"/>
@@ -15267,7 +15267,7 @@
             <a:r>
               <a:rPr sz="825" b="0">
                 <a:solidFill>
-                  <a:srgbClr val="B8C9D3"/>
+                  <a:srgbClr val="587080"/>
                 </a:solidFill>
                 <a:latin typeface="Arial"/>
                 <a:ea typeface="Arial"/>
@@ -15283,7 +15283,7 @@
           <p:cNvPr id="41" name="">
             <a:extLst xmlns:a="http://schemas.openxmlformats.org/drawingml/2006/main">
               <a:ext uri="{FF2B5EF4-FFF2-40B4-BE49-F238E27FC236}">
-                <a16:creationId xmlns:a16="http://schemas.microsoft.com/office/drawing/2014/main" id="{3D73ABFF-9998-461A-8E2D-73C1E1A944B4}"/>
+                <a16:creationId xmlns:a16="http://schemas.microsoft.com/office/drawing/2014/main" id="{9B2F907E-A9FF-4CB0-97A8-5AC3DEC58DC8}"/>
               </a:ext>
             </a:extLst>
           </p:cNvPr>
@@ -15303,11 +15303,11 @@
             </a:avLst>
           </a:prstGeom>
           <a:solidFill xmlns:a="http://schemas.openxmlformats.org/drawingml/2006/main">
-            <a:srgbClr val="102F46"/>
+            <a:srgbClr val="FFFFFF"/>
           </a:solidFill>
           <a:ln xmlns:a="http://schemas.openxmlformats.org/drawingml/2006/main" w="9525">
             <a:solidFill>
-              <a:srgbClr val="2A4D65"/>
+              <a:srgbClr val="C5D4DC"/>
             </a:solidFill>
             <a:prstDash val="solid"/>
           </a:ln>
@@ -15318,7 +15318,7 @@
           <p:cNvPr id="42" name="">
             <a:extLst xmlns:a="http://schemas.openxmlformats.org/drawingml/2006/main">
               <a:ext uri="{FF2B5EF4-FFF2-40B4-BE49-F238E27FC236}">
-                <a16:creationId xmlns:a16="http://schemas.microsoft.com/office/drawing/2014/main" id="{E97157C9-8FD4-466A-84C3-0169F4062C23}"/>
+                <a16:creationId xmlns:a16="http://schemas.microsoft.com/office/drawing/2014/main" id="{4C0DAE53-F2BD-44AF-8144-CD80B7038CAA}"/>
               </a:ext>
             </a:extLst>
           </p:cNvPr>
@@ -15374,7 +15374,7 @@
     </p:spTree>
     <p:extLst>
       <p:ext uri="{BB962C8B-B14F-4D97-AF65-F5344CB8AC3E}">
-        <p14:creationId xmlns:p14="http://schemas.microsoft.com/office/powerpoint/2010/main" val="1564227031"/>
+        <p14:creationId xmlns:p14="http://schemas.microsoft.com/office/powerpoint/2010/main" val="152405535"/>
       </p:ext>
     </p:extLst>
   </p:cSld>
@@ -15387,7 +15387,7 @@
     <p:bg>
       <p:bgPr>
         <a:solidFill xmlns:a="http://schemas.openxmlformats.org/drawingml/2006/main">
-          <a:srgbClr val="0E293C"/>
+          <a:srgbClr val="F3F1EB"/>
         </a:solidFill>
       </p:bgPr>
     </p:bg>
@@ -15405,7 +15405,7 @@
           <p:cNvPr id="32" name="">
             <a:extLst xmlns:a="http://schemas.openxmlformats.org/drawingml/2006/main">
               <a:ext uri="{FF2B5EF4-FFF2-40B4-BE49-F238E27FC236}">
-                <a16:creationId xmlns:a16="http://schemas.microsoft.com/office/drawing/2014/main" id="{8E56D34E-1023-4B0B-B7AD-35F83C8F8F8E}"/>
+                <a16:creationId xmlns:a16="http://schemas.microsoft.com/office/drawing/2014/main" id="{DD403E46-D9FB-4B99-A7E3-83C9FEE0EB37}"/>
               </a:ext>
             </a:extLst>
           </p:cNvPr>
@@ -15462,7 +15462,7 @@
           <p:cNvPr id="2" name="">
             <a:extLst xmlns:a="http://schemas.openxmlformats.org/drawingml/2006/main">
               <a:ext uri="{FF2B5EF4-FFF2-40B4-BE49-F238E27FC236}">
-                <a16:creationId xmlns:a16="http://schemas.microsoft.com/office/drawing/2014/main" id="{CA90BB70-789E-42DA-9D6E-D40BD00E22B3}"/>
+                <a16:creationId xmlns:a16="http://schemas.microsoft.com/office/drawing/2014/main" id="{768A5316-A184-41FB-90EB-AAD32B8A2EFD}"/>
               </a:ext>
             </a:extLst>
           </p:cNvPr>
@@ -15519,7 +15519,7 @@
           <p:cNvPr id="3" name="">
             <a:extLst xmlns:a="http://schemas.openxmlformats.org/drawingml/2006/main">
               <a:ext uri="{FF2B5EF4-FFF2-40B4-BE49-F238E27FC236}">
-                <a16:creationId xmlns:a16="http://schemas.microsoft.com/office/drawing/2014/main" id="{E6387C3D-765A-42A2-96F0-5CCC14710F1F}"/>
+                <a16:creationId xmlns:a16="http://schemas.microsoft.com/office/drawing/2014/main" id="{7EF87CE7-33AC-4D1F-B892-B47F21501FFE}"/>
               </a:ext>
             </a:extLst>
           </p:cNvPr>
@@ -15576,7 +15576,7 @@
           <p:cNvPr id="4" name="">
             <a:extLst xmlns:a="http://schemas.openxmlformats.org/drawingml/2006/main">
               <a:ext uri="{FF2B5EF4-FFF2-40B4-BE49-F238E27FC236}">
-                <a16:creationId xmlns:a16="http://schemas.microsoft.com/office/drawing/2014/main" id="{0C74F2DC-1FCC-4B54-BF7F-1C4B30CDD5A5}"/>
+                <a16:creationId xmlns:a16="http://schemas.microsoft.com/office/drawing/2014/main" id="{E9B04468-5CF7-4CCE-8342-B3A25DE53309}"/>
               </a:ext>
             </a:extLst>
           </p:cNvPr>
@@ -15607,7 +15607,7 @@
           <p:cNvPr id="5" name="">
             <a:extLst xmlns:a="http://schemas.openxmlformats.org/drawingml/2006/main">
               <a:ext uri="{FF2B5EF4-FFF2-40B4-BE49-F238E27FC236}">
-                <a16:creationId xmlns:a16="http://schemas.microsoft.com/office/drawing/2014/main" id="{3E2A2206-1729-4D1D-837B-B290E8376D57}"/>
+                <a16:creationId xmlns:a16="http://schemas.microsoft.com/office/drawing/2014/main" id="{B2873ACA-74E1-4665-87E3-03C4F15ECF07}"/>
               </a:ext>
             </a:extLst>
           </p:cNvPr>
@@ -15627,7 +15627,7 @@
           <a:noFill xmlns:a="http://schemas.openxmlformats.org/drawingml/2006/main"/>
           <a:ln xmlns:a="http://schemas.openxmlformats.org/drawingml/2006/main" w="9525">
             <a:solidFill>
-              <a:srgbClr val="2A4D65"/>
+              <a:srgbClr val="C5D4DC"/>
             </a:solidFill>
             <a:prstDash val="solid"/>
           </a:ln>
@@ -15638,7 +15638,7 @@
           <p:cNvPr id="6" name="">
             <a:extLst xmlns:a="http://schemas.openxmlformats.org/drawingml/2006/main">
               <a:ext uri="{FF2B5EF4-FFF2-40B4-BE49-F238E27FC236}">
-                <a16:creationId xmlns:a16="http://schemas.microsoft.com/office/drawing/2014/main" id="{EB69D6DA-BBA1-48D4-83F1-177FF2925420}"/>
+                <a16:creationId xmlns:a16="http://schemas.microsoft.com/office/drawing/2014/main" id="{188C7FE1-4F6C-4FBE-BB09-0A40ACFA0733}"/>
               </a:ext>
             </a:extLst>
           </p:cNvPr>
@@ -15695,7 +15695,7 @@
           <p:cNvPr id="7" name="">
             <a:extLst xmlns:a="http://schemas.openxmlformats.org/drawingml/2006/main">
               <a:ext uri="{FF2B5EF4-FFF2-40B4-BE49-F238E27FC236}">
-                <a16:creationId xmlns:a16="http://schemas.microsoft.com/office/drawing/2014/main" id="{5B733A44-8AC2-4987-AC01-AAF3D9291160}"/>
+                <a16:creationId xmlns:a16="http://schemas.microsoft.com/office/drawing/2014/main" id="{194A1A45-8AF9-419B-A306-9ECC7E50576A}"/>
               </a:ext>
             </a:extLst>
           </p:cNvPr>
@@ -15752,7 +15752,7 @@
           <p:cNvPr id="8" name="">
             <a:extLst xmlns:a="http://schemas.openxmlformats.org/drawingml/2006/main">
               <a:ext uri="{FF2B5EF4-FFF2-40B4-BE49-F238E27FC236}">
-                <a16:creationId xmlns:a16="http://schemas.microsoft.com/office/drawing/2014/main" id="{A0C354DC-C79A-4B3E-9F72-70D5DB8AF9A2}"/>
+                <a16:creationId xmlns:a16="http://schemas.microsoft.com/office/drawing/2014/main" id="{406B4856-2566-4587-9188-F02586B3116D}"/>
               </a:ext>
             </a:extLst>
           </p:cNvPr>
@@ -15809,7 +15809,7 @@
           <p:cNvPr id="9" name="">
             <a:extLst xmlns:a="http://schemas.openxmlformats.org/drawingml/2006/main">
               <a:ext uri="{FF2B5EF4-FFF2-40B4-BE49-F238E27FC236}">
-                <a16:creationId xmlns:a16="http://schemas.microsoft.com/office/drawing/2014/main" id="{4D626366-A002-4887-AB7F-A045216C312F}"/>
+                <a16:creationId xmlns:a16="http://schemas.microsoft.com/office/drawing/2014/main" id="{AE85615B-48C2-49B9-A10D-64FBA2342834}"/>
               </a:ext>
             </a:extLst>
           </p:cNvPr>
@@ -15840,7 +15840,7 @@
           <p:cNvPr id="10" name="">
             <a:extLst xmlns:a="http://schemas.openxmlformats.org/drawingml/2006/main">
               <a:ext uri="{FF2B5EF4-FFF2-40B4-BE49-F238E27FC236}">
-                <a16:creationId xmlns:a16="http://schemas.microsoft.com/office/drawing/2014/main" id="{4C0F08CF-916A-41E0-AA80-37977CE55313}"/>
+                <a16:creationId xmlns:a16="http://schemas.microsoft.com/office/drawing/2014/main" id="{AF654038-503C-4BB9-8FC8-4C9EBDA7638F}"/>
               </a:ext>
             </a:extLst>
           </p:cNvPr>
@@ -15860,7 +15860,7 @@
           <a:noFill xmlns:a="http://schemas.openxmlformats.org/drawingml/2006/main"/>
           <a:ln xmlns:a="http://schemas.openxmlformats.org/drawingml/2006/main" w="9525">
             <a:solidFill>
-              <a:srgbClr val="2A4D65"/>
+              <a:srgbClr val="C5D4DC"/>
             </a:solidFill>
             <a:prstDash val="solid"/>
           </a:ln>
@@ -15871,7 +15871,7 @@
           <p:cNvPr id="11" name="">
             <a:extLst xmlns:a="http://schemas.openxmlformats.org/drawingml/2006/main">
               <a:ext uri="{FF2B5EF4-FFF2-40B4-BE49-F238E27FC236}">
-                <a16:creationId xmlns:a16="http://schemas.microsoft.com/office/drawing/2014/main" id="{76D5B144-6D73-46C2-9ECB-9D3F37CA5D7D}"/>
+                <a16:creationId xmlns:a16="http://schemas.microsoft.com/office/drawing/2014/main" id="{3677CD73-5D52-4305-B0C1-F91A02C4E8D6}"/>
               </a:ext>
             </a:extLst>
           </p:cNvPr>
@@ -15929,7 +15929,7 @@
           <p:cNvPr id="12" name="">
             <a:extLst xmlns:a="http://schemas.openxmlformats.org/drawingml/2006/main">
               <a:ext uri="{FF2B5EF4-FFF2-40B4-BE49-F238E27FC236}">
-                <a16:creationId xmlns:a16="http://schemas.microsoft.com/office/drawing/2014/main" id="{F9CBF036-292F-48FA-BDB9-67635731C78A}"/>
+                <a16:creationId xmlns:a16="http://schemas.microsoft.com/office/drawing/2014/main" id="{09C3D771-AC87-4E79-A877-8FC0DD9335E7}"/>
               </a:ext>
             </a:extLst>
           </p:cNvPr>
@@ -15961,7 +15961,7 @@
             <a:pPr algn="r">
               <a:defRPr sz="750" b="1">
                 <a:solidFill>
-                  <a:srgbClr val="B8C9D3"/>
+                  <a:srgbClr val="587080"/>
                 </a:solidFill>
                 <a:latin typeface="Arial"/>
                 <a:ea typeface="Arial"/>
@@ -15971,7 +15971,7 @@
             <a:r>
               <a:rPr sz="750" b="1">
                 <a:solidFill>
-                  <a:srgbClr val="B8C9D3"/>
+                  <a:srgbClr val="587080"/>
                 </a:solidFill>
                 <a:latin typeface="Arial"/>
                 <a:ea typeface="Arial"/>
@@ -15987,7 +15987,7 @@
           <p:cNvPr id="13" name="">
             <a:extLst xmlns:a="http://schemas.openxmlformats.org/drawingml/2006/main">
               <a:ext uri="{FF2B5EF4-FFF2-40B4-BE49-F238E27FC236}">
-                <a16:creationId xmlns:a16="http://schemas.microsoft.com/office/drawing/2014/main" id="{2FF80A97-E57D-4C9C-809D-782F33BDD70C}"/>
+                <a16:creationId xmlns:a16="http://schemas.microsoft.com/office/drawing/2014/main" id="{F38FC9D6-2FE4-439E-9572-5CBEC33D7C77}"/>
               </a:ext>
             </a:extLst>
           </p:cNvPr>
@@ -16019,7 +16019,7 @@
             <a:pPr algn="l">
               <a:defRPr sz="600" b="0">
                 <a:solidFill>
-                  <a:srgbClr val="B8C9D3"/>
+                  <a:srgbClr val="587080"/>
                 </a:solidFill>
                 <a:latin typeface="Arial"/>
                 <a:ea typeface="Arial"/>
@@ -16029,7 +16029,7 @@
             <a:r>
               <a:rPr sz="600" b="0">
                 <a:solidFill>
-                  <a:srgbClr val="B8C9D3"/>
+                  <a:srgbClr val="587080"/>
                 </a:solidFill>
                 <a:latin typeface="Arial"/>
                 <a:ea typeface="Arial"/>
@@ -16045,7 +16045,7 @@
           <p:cNvPr id="14" name="">
             <a:extLst xmlns:a="http://schemas.openxmlformats.org/drawingml/2006/main">
               <a:ext uri="{FF2B5EF4-FFF2-40B4-BE49-F238E27FC236}">
-                <a16:creationId xmlns:a16="http://schemas.microsoft.com/office/drawing/2014/main" id="{97C2FD07-90BE-4144-A488-632115CA1A4D}"/>
+                <a16:creationId xmlns:a16="http://schemas.microsoft.com/office/drawing/2014/main" id="{405E7607-B9F6-4147-B82D-C4CFD3C22402}"/>
               </a:ext>
             </a:extLst>
           </p:cNvPr>
@@ -16077,7 +16077,7 @@
             <a:pPr algn="r">
               <a:defRPr sz="600" b="1">
                 <a:solidFill>
-                  <a:srgbClr val="B8C9D3"/>
+                  <a:srgbClr val="587080"/>
                 </a:solidFill>
                 <a:latin typeface="Arial"/>
                 <a:ea typeface="Arial"/>
@@ -16087,7 +16087,7 @@
             <a:r>
               <a:rPr sz="600" b="1">
                 <a:solidFill>
-                  <a:srgbClr val="B8C9D3"/>
+                  <a:srgbClr val="587080"/>
                 </a:solidFill>
                 <a:latin typeface="Arial"/>
                 <a:ea typeface="Arial"/>
@@ -16103,7 +16103,7 @@
           <p:cNvPr id="15" name="">
             <a:extLst xmlns:a="http://schemas.openxmlformats.org/drawingml/2006/main">
               <a:ext uri="{FF2B5EF4-FFF2-40B4-BE49-F238E27FC236}">
-                <a16:creationId xmlns:a16="http://schemas.microsoft.com/office/drawing/2014/main" id="{A08AEB0E-1B92-4053-82DD-08B1938B4A10}"/>
+                <a16:creationId xmlns:a16="http://schemas.microsoft.com/office/drawing/2014/main" id="{817887B0-D74F-4519-BC46-14A75817DA37}"/>
               </a:ext>
             </a:extLst>
           </p:cNvPr>
@@ -16135,7 +16135,7 @@
             <a:pPr algn="l">
               <a:defRPr sz="2250" b="0">
                 <a:solidFill>
-                  <a:srgbClr val="00E1C6"/>
+                  <a:srgbClr val="132E41"/>
                 </a:solidFill>
                 <a:latin typeface="Georgia"/>
                 <a:ea typeface="Georgia"/>
@@ -16145,7 +16145,7 @@
             <a:r>
               <a:rPr sz="2250" b="0">
                 <a:solidFill>
-                  <a:srgbClr val="00E1C6"/>
+                  <a:srgbClr val="132E41"/>
                 </a:solidFill>
                 <a:latin typeface="Georgia"/>
                 <a:ea typeface="Georgia"/>
@@ -16161,7 +16161,7 @@
           <p:cNvPr id="16" name="">
             <a:extLst xmlns:a="http://schemas.openxmlformats.org/drawingml/2006/main">
               <a:ext uri="{FF2B5EF4-FFF2-40B4-BE49-F238E27FC236}">
-                <a16:creationId xmlns:a16="http://schemas.microsoft.com/office/drawing/2014/main" id="{350CCD64-E3EC-40C4-8EDF-DD6578CD7DEE}"/>
+                <a16:creationId xmlns:a16="http://schemas.microsoft.com/office/drawing/2014/main" id="{09D58EAA-B176-4C7A-9B22-96A63B700D95}"/>
               </a:ext>
             </a:extLst>
           </p:cNvPr>
@@ -16193,7 +16193,7 @@
             <a:pPr algn="l">
               <a:defRPr sz="1125" b="0">
                 <a:solidFill>
-                  <a:srgbClr val="B8C9D3"/>
+                  <a:srgbClr val="587080"/>
                 </a:solidFill>
                 <a:latin typeface="Arial"/>
                 <a:ea typeface="Arial"/>
@@ -16203,7 +16203,7 @@
             <a:r>
               <a:rPr sz="1125" b="0">
                 <a:solidFill>
-                  <a:srgbClr val="B8C9D3"/>
+                  <a:srgbClr val="587080"/>
                 </a:solidFill>
                 <a:latin typeface="Arial"/>
                 <a:ea typeface="Arial"/>
@@ -16219,7 +16219,7 @@
           <p:cNvPr id="17" name="">
             <a:extLst xmlns:a="http://schemas.openxmlformats.org/drawingml/2006/main">
               <a:ext uri="{FF2B5EF4-FFF2-40B4-BE49-F238E27FC236}">
-                <a16:creationId xmlns:a16="http://schemas.microsoft.com/office/drawing/2014/main" id="{E49CE37B-0081-4EEE-8A8B-9F008B4D85B1}"/>
+                <a16:creationId xmlns:a16="http://schemas.microsoft.com/office/drawing/2014/main" id="{8742898B-B02C-45EF-BECB-CB056F455D59}"/>
               </a:ext>
             </a:extLst>
           </p:cNvPr>
@@ -16239,7 +16239,7 @@
             </a:avLst>
           </a:prstGeom>
           <a:solidFill xmlns:a="http://schemas.openxmlformats.org/drawingml/2006/main">
-            <a:srgbClr val="102F46"/>
+            <a:srgbClr val="FFFFFF"/>
           </a:solidFill>
           <a:ln xmlns:a="http://schemas.openxmlformats.org/drawingml/2006/main" w="14288">
             <a:solidFill>
@@ -16254,7 +16254,7 @@
           <p:cNvPr id="18" name="">
             <a:extLst xmlns:a="http://schemas.openxmlformats.org/drawingml/2006/main">
               <a:ext uri="{FF2B5EF4-FFF2-40B4-BE49-F238E27FC236}">
-                <a16:creationId xmlns:a16="http://schemas.microsoft.com/office/drawing/2014/main" id="{B4D3E340-41E5-460D-82A5-94FCCAAF3FBA}"/>
+                <a16:creationId xmlns:a16="http://schemas.microsoft.com/office/drawing/2014/main" id="{170D1E29-A67E-49BE-B0FE-5BC421EB2C17}"/>
               </a:ext>
             </a:extLst>
           </p:cNvPr>
@@ -16312,7 +16312,7 @@
           <p:cNvPr id="19" name="">
             <a:extLst xmlns:a="http://schemas.openxmlformats.org/drawingml/2006/main">
               <a:ext uri="{FF2B5EF4-FFF2-40B4-BE49-F238E27FC236}">
-                <a16:creationId xmlns:a16="http://schemas.microsoft.com/office/drawing/2014/main" id="{D1EE2C52-10A3-4476-A85C-DB8F6D54FF52}"/>
+                <a16:creationId xmlns:a16="http://schemas.microsoft.com/office/drawing/2014/main" id="{A50BC827-1BE3-4776-A38A-725E7B43FF1E}"/>
               </a:ext>
             </a:extLst>
           </p:cNvPr>
@@ -16344,7 +16344,7 @@
             <a:pPr algn="ctr">
               <a:defRPr sz="1050" b="1">
                 <a:solidFill>
-                  <a:srgbClr val="F3F8FA"/>
+                  <a:srgbClr val="132E41"/>
                 </a:solidFill>
                 <a:latin typeface="Arial"/>
                 <a:ea typeface="Arial"/>
@@ -16354,7 +16354,7 @@
             <a:r>
               <a:rPr sz="1050" b="1">
                 <a:solidFill>
-                  <a:srgbClr val="F3F8FA"/>
+                  <a:srgbClr val="132E41"/>
                 </a:solidFill>
                 <a:latin typeface="Arial"/>
                 <a:ea typeface="Arial"/>
@@ -16370,7 +16370,7 @@
           <p:cNvPr id="20" name="">
             <a:extLst xmlns:a="http://schemas.openxmlformats.org/drawingml/2006/main">
               <a:ext uri="{FF2B5EF4-FFF2-40B4-BE49-F238E27FC236}">
-                <a16:creationId xmlns:a16="http://schemas.microsoft.com/office/drawing/2014/main" id="{1BBB40E2-B493-4EED-8FD2-8315FD5B4880}"/>
+                <a16:creationId xmlns:a16="http://schemas.microsoft.com/office/drawing/2014/main" id="{D8164761-CDEF-48A1-9D8C-7CFA85042D43}"/>
               </a:ext>
             </a:extLst>
           </p:cNvPr>
@@ -16407,7 +16407,7 @@
           <p:cNvPr id="21" name="">
             <a:extLst xmlns:a="http://schemas.openxmlformats.org/drawingml/2006/main">
               <a:ext uri="{FF2B5EF4-FFF2-40B4-BE49-F238E27FC236}">
-                <a16:creationId xmlns:a16="http://schemas.microsoft.com/office/drawing/2014/main" id="{D547CD85-7EA4-4A98-9723-4A9A8A95F5F4}"/>
+                <a16:creationId xmlns:a16="http://schemas.microsoft.com/office/drawing/2014/main" id="{F299902E-E1B8-4E1A-BBAE-21C6BE2D6845}"/>
               </a:ext>
             </a:extLst>
           </p:cNvPr>
@@ -16465,7 +16465,7 @@
           <p:cNvPr id="22" name="">
             <a:extLst xmlns:a="http://schemas.openxmlformats.org/drawingml/2006/main">
               <a:ext uri="{FF2B5EF4-FFF2-40B4-BE49-F238E27FC236}">
-                <a16:creationId xmlns:a16="http://schemas.microsoft.com/office/drawing/2014/main" id="{0F5EB497-83DF-4A8C-AAE7-44C980B24A77}"/>
+                <a16:creationId xmlns:a16="http://schemas.microsoft.com/office/drawing/2014/main" id="{970F4912-9F91-4A5D-92C8-5D969FE0B151}"/>
               </a:ext>
             </a:extLst>
           </p:cNvPr>
@@ -16497,7 +16497,7 @@
             <a:pPr algn="ctr">
               <a:defRPr sz="1050" b="0">
                 <a:solidFill>
-                  <a:srgbClr val="B8C9D3"/>
+                  <a:srgbClr val="587080"/>
                 </a:solidFill>
                 <a:latin typeface="Arial"/>
                 <a:ea typeface="Arial"/>
@@ -16507,7 +16507,7 @@
             <a:r>
               <a:rPr sz="1050" b="0">
                 <a:solidFill>
-                  <a:srgbClr val="B8C9D3"/>
+                  <a:srgbClr val="587080"/>
                 </a:solidFill>
                 <a:latin typeface="Arial"/>
                 <a:ea typeface="Arial"/>
@@ -16520,7 +16520,7 @@
             <a:pPr algn="ctr">
               <a:defRPr sz="1050" b="0">
                 <a:solidFill>
-                  <a:srgbClr val="B8C9D3"/>
+                  <a:srgbClr val="587080"/>
                 </a:solidFill>
                 <a:latin typeface="Arial"/>
                 <a:ea typeface="Arial"/>
@@ -16530,7 +16530,7 @@
             <a:r>
               <a:rPr sz="1050" b="0">
                 <a:solidFill>
-                  <a:srgbClr val="B8C9D3"/>
+                  <a:srgbClr val="587080"/>
                 </a:solidFill>
                 <a:latin typeface="Arial"/>
                 <a:ea typeface="Arial"/>
@@ -16546,7 +16546,7 @@
           <p:cNvPr id="23" name="">
             <a:extLst xmlns:a="http://schemas.openxmlformats.org/drawingml/2006/main">
               <a:ext uri="{FF2B5EF4-FFF2-40B4-BE49-F238E27FC236}">
-                <a16:creationId xmlns:a16="http://schemas.microsoft.com/office/drawing/2014/main" id="{EF9E78CF-E700-42E9-96B7-EF7AEB1F0CC4}"/>
+                <a16:creationId xmlns:a16="http://schemas.microsoft.com/office/drawing/2014/main" id="{8B527924-60F2-4AA0-ADC4-72247B229FE0}"/>
               </a:ext>
             </a:extLst>
           </p:cNvPr>
@@ -16566,11 +16566,11 @@
             </a:avLst>
           </a:prstGeom>
           <a:solidFill xmlns:a="http://schemas.openxmlformats.org/drawingml/2006/main">
-            <a:srgbClr val="102F46"/>
+            <a:srgbClr val="FFFFFF"/>
           </a:solidFill>
           <a:ln xmlns:a="http://schemas.openxmlformats.org/drawingml/2006/main" w="9525">
             <a:solidFill>
-              <a:srgbClr val="2A4D65"/>
+              <a:srgbClr val="C5D4DC"/>
             </a:solidFill>
             <a:prstDash val="solid"/>
           </a:ln>
@@ -16581,7 +16581,7 @@
           <p:cNvPr id="24" name="">
             <a:extLst xmlns:a="http://schemas.openxmlformats.org/drawingml/2006/main">
               <a:ext uri="{FF2B5EF4-FFF2-40B4-BE49-F238E27FC236}">
-                <a16:creationId xmlns:a16="http://schemas.microsoft.com/office/drawing/2014/main" id="{0705BB71-6D20-4794-A5B1-750BA6980CE5}"/>
+                <a16:creationId xmlns:a16="http://schemas.microsoft.com/office/drawing/2014/main" id="{DE456534-3F64-4B77-BD1F-2D58A5D45E7A}"/>
               </a:ext>
             </a:extLst>
           </p:cNvPr>
@@ -16639,7 +16639,7 @@
           <p:cNvPr id="25" name="">
             <a:extLst xmlns:a="http://schemas.openxmlformats.org/drawingml/2006/main">
               <a:ext uri="{FF2B5EF4-FFF2-40B4-BE49-F238E27FC236}">
-                <a16:creationId xmlns:a16="http://schemas.microsoft.com/office/drawing/2014/main" id="{78585FF1-C6BA-4B1F-A97C-EAC7605ACCD5}"/>
+                <a16:creationId xmlns:a16="http://schemas.microsoft.com/office/drawing/2014/main" id="{274F358C-23CC-4E02-A738-51FDF666A83E}"/>
               </a:ext>
             </a:extLst>
           </p:cNvPr>
@@ -16697,7 +16697,7 @@
           <p:cNvPr id="26" name="">
             <a:extLst xmlns:a="http://schemas.openxmlformats.org/drawingml/2006/main">
               <a:ext uri="{FF2B5EF4-FFF2-40B4-BE49-F238E27FC236}">
-                <a16:creationId xmlns:a16="http://schemas.microsoft.com/office/drawing/2014/main" id="{BE89F5C3-E63D-402F-BA2D-752F658CBBE3}"/>
+                <a16:creationId xmlns:a16="http://schemas.microsoft.com/office/drawing/2014/main" id="{1E68E37F-2280-43FA-A30A-10CAB2BE6810}"/>
               </a:ext>
             </a:extLst>
           </p:cNvPr>
@@ -16755,7 +16755,7 @@
           <p:cNvPr id="27" name="">
             <a:extLst xmlns:a="http://schemas.openxmlformats.org/drawingml/2006/main">
               <a:ext uri="{FF2B5EF4-FFF2-40B4-BE49-F238E27FC236}">
-                <a16:creationId xmlns:a16="http://schemas.microsoft.com/office/drawing/2014/main" id="{22A7D26D-0C62-47F0-950F-D1DB1F435BBA}"/>
+                <a16:creationId xmlns:a16="http://schemas.microsoft.com/office/drawing/2014/main" id="{E64F063B-023F-4A5C-B44F-179AEC0643B7}"/>
               </a:ext>
             </a:extLst>
           </p:cNvPr>
@@ -16813,7 +16813,7 @@
           <p:cNvPr id="28" name="">
             <a:extLst xmlns:a="http://schemas.openxmlformats.org/drawingml/2006/main">
               <a:ext uri="{FF2B5EF4-FFF2-40B4-BE49-F238E27FC236}">
-                <a16:creationId xmlns:a16="http://schemas.microsoft.com/office/drawing/2014/main" id="{EFEE8C38-4D55-4CA4-A5D1-2309F0EAD8F6}"/>
+                <a16:creationId xmlns:a16="http://schemas.microsoft.com/office/drawing/2014/main" id="{158640BE-415B-4D0E-AD12-9AF47BD7724B}"/>
               </a:ext>
             </a:extLst>
           </p:cNvPr>
@@ -16871,7 +16871,7 @@
           <p:cNvPr id="29" name="">
             <a:extLst xmlns:a="http://schemas.openxmlformats.org/drawingml/2006/main">
               <a:ext uri="{FF2B5EF4-FFF2-40B4-BE49-F238E27FC236}">
-                <a16:creationId xmlns:a16="http://schemas.microsoft.com/office/drawing/2014/main" id="{3FB3C50B-4524-4E5D-8B61-AC9987C15FA7}"/>
+                <a16:creationId xmlns:a16="http://schemas.microsoft.com/office/drawing/2014/main" id="{C1E43DD9-4810-4EA3-9AD7-9FC7C89F3390}"/>
               </a:ext>
             </a:extLst>
           </p:cNvPr>
@@ -16891,7 +16891,7 @@
           <a:noFill xmlns:a="http://schemas.openxmlformats.org/drawingml/2006/main"/>
           <a:ln xmlns:a="http://schemas.openxmlformats.org/drawingml/2006/main" w="9525">
             <a:solidFill>
-              <a:srgbClr val="2A4D65"/>
+              <a:srgbClr val="C5D4DC"/>
             </a:solidFill>
             <a:prstDash val="solid"/>
           </a:ln>
@@ -16902,7 +16902,7 @@
           <p:cNvPr id="30" name="">
             <a:extLst xmlns:a="http://schemas.openxmlformats.org/drawingml/2006/main">
               <a:ext uri="{FF2B5EF4-FFF2-40B4-BE49-F238E27FC236}">
-                <a16:creationId xmlns:a16="http://schemas.microsoft.com/office/drawing/2014/main" id="{47E84BCC-4D34-48C4-9AA4-0C53F5CA2DE7}"/>
+                <a16:creationId xmlns:a16="http://schemas.microsoft.com/office/drawing/2014/main" id="{09299D7B-35F4-407C-9435-D93F499BD216}"/>
               </a:ext>
             </a:extLst>
           </p:cNvPr>
@@ -16934,7 +16934,7 @@
             <a:pPr algn="ctr">
               <a:defRPr sz="900" b="0">
                 <a:solidFill>
-                  <a:srgbClr val="B8C9D3"/>
+                  <a:srgbClr val="587080"/>
                 </a:solidFill>
                 <a:latin typeface="Arial"/>
                 <a:ea typeface="Arial"/>
@@ -16944,7 +16944,7 @@
             <a:r>
               <a:rPr sz="900" b="0">
                 <a:solidFill>
-                  <a:srgbClr val="B8C9D3"/>
+                  <a:srgbClr val="587080"/>
                 </a:solidFill>
                 <a:latin typeface="Arial"/>
                 <a:ea typeface="Arial"/>
@@ -16960,7 +16960,7 @@
           <p:cNvPr id="31" name="">
             <a:extLst xmlns:a="http://schemas.openxmlformats.org/drawingml/2006/main">
               <a:ext uri="{FF2B5EF4-FFF2-40B4-BE49-F238E27FC236}">
-                <a16:creationId xmlns:a16="http://schemas.microsoft.com/office/drawing/2014/main" id="{2B65567B-102D-4450-B8B6-A40607E468E2}"/>
+                <a16:creationId xmlns:a16="http://schemas.microsoft.com/office/drawing/2014/main" id="{6576297A-44C9-403C-A83D-0529BAA53872}"/>
               </a:ext>
             </a:extLst>
           </p:cNvPr>
@@ -16992,7 +16992,7 @@
             <a:pPr algn="ctr">
               <a:defRPr sz="900" b="0">
                 <a:solidFill>
-                  <a:srgbClr val="B8C9D3"/>
+                  <a:srgbClr val="587080"/>
                 </a:solidFill>
                 <a:latin typeface="Arial"/>
                 <a:ea typeface="Arial"/>
@@ -17002,7 +17002,7 @@
             <a:r>
               <a:rPr sz="900" b="0">
                 <a:solidFill>
-                  <a:srgbClr val="B8C9D3"/>
+                  <a:srgbClr val="587080"/>
                 </a:solidFill>
                 <a:latin typeface="Arial"/>
                 <a:ea typeface="Arial"/>
@@ -17016,7 +17016,7 @@
     </p:spTree>
     <p:extLst>
       <p:ext uri="{BB962C8B-B14F-4D97-AF65-F5344CB8AC3E}">
-        <p14:creationId xmlns:p14="http://schemas.microsoft.com/office/powerpoint/2010/main" val="2084444475"/>
+        <p14:creationId xmlns:p14="http://schemas.microsoft.com/office/powerpoint/2010/main" val="205548986"/>
       </p:ext>
     </p:extLst>
   </p:cSld>
@@ -17029,7 +17029,7 @@
     <p:bg>
       <p:bgPr>
         <a:solidFill xmlns:a="http://schemas.openxmlformats.org/drawingml/2006/main">
-          <a:srgbClr val="0E293C"/>
+          <a:srgbClr val="F3F1EB"/>
         </a:solidFill>
       </p:bgPr>
     </p:bg>
@@ -17047,7 +17047,7 @@
           <p:cNvPr id="40" name="">
             <a:extLst xmlns:a="http://schemas.openxmlformats.org/drawingml/2006/main">
               <a:ext uri="{FF2B5EF4-FFF2-40B4-BE49-F238E27FC236}">
-                <a16:creationId xmlns:a16="http://schemas.microsoft.com/office/drawing/2014/main" id="{5C646C98-1594-4F7D-8006-DD7F071EA868}"/>
+                <a16:creationId xmlns:a16="http://schemas.microsoft.com/office/drawing/2014/main" id="{199B0B0F-0B41-4842-B6E3-75D977D8BF8D}"/>
               </a:ext>
             </a:extLst>
           </p:cNvPr>
@@ -17104,7 +17104,7 @@
           <p:cNvPr id="2" name="">
             <a:extLst xmlns:a="http://schemas.openxmlformats.org/drawingml/2006/main">
               <a:ext uri="{FF2B5EF4-FFF2-40B4-BE49-F238E27FC236}">
-                <a16:creationId xmlns:a16="http://schemas.microsoft.com/office/drawing/2014/main" id="{B64EC8AE-7F4B-4F50-8B06-926297241B22}"/>
+                <a16:creationId xmlns:a16="http://schemas.microsoft.com/office/drawing/2014/main" id="{DFCA42DD-E3C2-465A-B4DC-4D94804919AB}"/>
               </a:ext>
             </a:extLst>
           </p:cNvPr>
@@ -17161,7 +17161,7 @@
           <p:cNvPr id="3" name="">
             <a:extLst xmlns:a="http://schemas.openxmlformats.org/drawingml/2006/main">
               <a:ext uri="{FF2B5EF4-FFF2-40B4-BE49-F238E27FC236}">
-                <a16:creationId xmlns:a16="http://schemas.microsoft.com/office/drawing/2014/main" id="{F190312C-0512-4532-9A57-C7C7AAFD1364}"/>
+                <a16:creationId xmlns:a16="http://schemas.microsoft.com/office/drawing/2014/main" id="{E6EB56E8-5284-496A-A806-9668605DA067}"/>
               </a:ext>
             </a:extLst>
           </p:cNvPr>
@@ -17218,7 +17218,7 @@
           <p:cNvPr id="4" name="">
             <a:extLst xmlns:a="http://schemas.openxmlformats.org/drawingml/2006/main">
               <a:ext uri="{FF2B5EF4-FFF2-40B4-BE49-F238E27FC236}">
-                <a16:creationId xmlns:a16="http://schemas.microsoft.com/office/drawing/2014/main" id="{ED13489C-A7E2-41E7-9D2D-0EBC9BA56E47}"/>
+                <a16:creationId xmlns:a16="http://schemas.microsoft.com/office/drawing/2014/main" id="{1D96D4B0-C1C5-4758-97E2-F1A562C4411A}"/>
               </a:ext>
             </a:extLst>
           </p:cNvPr>
@@ -17249,7 +17249,7 @@
           <p:cNvPr id="5" name="">
             <a:extLst xmlns:a="http://schemas.openxmlformats.org/drawingml/2006/main">
               <a:ext uri="{FF2B5EF4-FFF2-40B4-BE49-F238E27FC236}">
-                <a16:creationId xmlns:a16="http://schemas.microsoft.com/office/drawing/2014/main" id="{FADA54AF-AD9A-4646-9566-4DBBFE34AA41}"/>
+                <a16:creationId xmlns:a16="http://schemas.microsoft.com/office/drawing/2014/main" id="{FE87620A-F283-4F36-B178-BC7D1C2B11B8}"/>
               </a:ext>
             </a:extLst>
           </p:cNvPr>
@@ -17269,7 +17269,7 @@
           <a:noFill xmlns:a="http://schemas.openxmlformats.org/drawingml/2006/main"/>
           <a:ln xmlns:a="http://schemas.openxmlformats.org/drawingml/2006/main" w="9525">
             <a:solidFill>
-              <a:srgbClr val="2A4D65"/>
+              <a:srgbClr val="C5D4DC"/>
             </a:solidFill>
             <a:prstDash val="solid"/>
           </a:ln>
@@ -17280,7 +17280,7 @@
           <p:cNvPr id="6" name="">
             <a:extLst xmlns:a="http://schemas.openxmlformats.org/drawingml/2006/main">
               <a:ext uri="{FF2B5EF4-FFF2-40B4-BE49-F238E27FC236}">
-                <a16:creationId xmlns:a16="http://schemas.microsoft.com/office/drawing/2014/main" id="{E6F31D1F-A05D-4A76-841B-8F3F50BF5CB3}"/>
+                <a16:creationId xmlns:a16="http://schemas.microsoft.com/office/drawing/2014/main" id="{09C66476-F7A6-4BA7-9380-526C8BC4C749}"/>
               </a:ext>
             </a:extLst>
           </p:cNvPr>
@@ -17337,7 +17337,7 @@
           <p:cNvPr id="7" name="">
             <a:extLst xmlns:a="http://schemas.openxmlformats.org/drawingml/2006/main">
               <a:ext uri="{FF2B5EF4-FFF2-40B4-BE49-F238E27FC236}">
-                <a16:creationId xmlns:a16="http://schemas.microsoft.com/office/drawing/2014/main" id="{82E9C000-51BF-4454-ADE9-BF94489070BE}"/>
+                <a16:creationId xmlns:a16="http://schemas.microsoft.com/office/drawing/2014/main" id="{15542518-B849-454B-9343-590461BB7DCD}"/>
               </a:ext>
             </a:extLst>
           </p:cNvPr>
@@ -17394,7 +17394,7 @@
           <p:cNvPr id="8" name="">
             <a:extLst xmlns:a="http://schemas.openxmlformats.org/drawingml/2006/main">
               <a:ext uri="{FF2B5EF4-FFF2-40B4-BE49-F238E27FC236}">
-                <a16:creationId xmlns:a16="http://schemas.microsoft.com/office/drawing/2014/main" id="{80FA3CE5-16E7-4016-9FC3-E338B7F2B34A}"/>
+                <a16:creationId xmlns:a16="http://schemas.microsoft.com/office/drawing/2014/main" id="{4D6810FE-2F43-43F5-960E-DA2A92B7E18C}"/>
               </a:ext>
             </a:extLst>
           </p:cNvPr>
@@ -17451,7 +17451,7 @@
           <p:cNvPr id="9" name="">
             <a:extLst xmlns:a="http://schemas.openxmlformats.org/drawingml/2006/main">
               <a:ext uri="{FF2B5EF4-FFF2-40B4-BE49-F238E27FC236}">
-                <a16:creationId xmlns:a16="http://schemas.microsoft.com/office/drawing/2014/main" id="{C9412B90-88BF-4FFD-B2EA-E3E7C140B764}"/>
+                <a16:creationId xmlns:a16="http://schemas.microsoft.com/office/drawing/2014/main" id="{AECB48FE-0D38-41A8-A20B-8768C2121DCA}"/>
               </a:ext>
             </a:extLst>
           </p:cNvPr>
@@ -17482,7 +17482,7 @@
           <p:cNvPr id="10" name="">
             <a:extLst xmlns:a="http://schemas.openxmlformats.org/drawingml/2006/main">
               <a:ext uri="{FF2B5EF4-FFF2-40B4-BE49-F238E27FC236}">
-                <a16:creationId xmlns:a16="http://schemas.microsoft.com/office/drawing/2014/main" id="{73F97C66-8074-46CE-8760-89D44A8E6013}"/>
+                <a16:creationId xmlns:a16="http://schemas.microsoft.com/office/drawing/2014/main" id="{C11F1635-84E4-4947-9386-99D68B3EBB5D}"/>
               </a:ext>
             </a:extLst>
           </p:cNvPr>
@@ -17502,7 +17502,7 @@
           <a:noFill xmlns:a="http://schemas.openxmlformats.org/drawingml/2006/main"/>
           <a:ln xmlns:a="http://schemas.openxmlformats.org/drawingml/2006/main" w="9525">
             <a:solidFill>
-              <a:srgbClr val="2A4D65"/>
+              <a:srgbClr val="C5D4DC"/>
             </a:solidFill>
             <a:prstDash val="solid"/>
           </a:ln>
@@ -17513,7 +17513,7 @@
           <p:cNvPr id="11" name="">
             <a:extLst xmlns:a="http://schemas.openxmlformats.org/drawingml/2006/main">
               <a:ext uri="{FF2B5EF4-FFF2-40B4-BE49-F238E27FC236}">
-                <a16:creationId xmlns:a16="http://schemas.microsoft.com/office/drawing/2014/main" id="{847B3BAE-ECAA-495C-B3AC-4246475E2120}"/>
+                <a16:creationId xmlns:a16="http://schemas.microsoft.com/office/drawing/2014/main" id="{9AC43883-6A28-4ADE-872B-52997E37A71A}"/>
               </a:ext>
             </a:extLst>
           </p:cNvPr>
@@ -17571,7 +17571,7 @@
           <p:cNvPr id="12" name="">
             <a:extLst xmlns:a="http://schemas.openxmlformats.org/drawingml/2006/main">
               <a:ext uri="{FF2B5EF4-FFF2-40B4-BE49-F238E27FC236}">
-                <a16:creationId xmlns:a16="http://schemas.microsoft.com/office/drawing/2014/main" id="{EAC69F14-5A1A-4AAF-ABC6-79391D315DB6}"/>
+                <a16:creationId xmlns:a16="http://schemas.microsoft.com/office/drawing/2014/main" id="{B86FF3BE-1D08-47F0-8B35-D59696451387}"/>
               </a:ext>
             </a:extLst>
           </p:cNvPr>
@@ -17603,7 +17603,7 @@
             <a:pPr algn="r">
               <a:defRPr sz="750" b="1">
                 <a:solidFill>
-                  <a:srgbClr val="B8C9D3"/>
+                  <a:srgbClr val="587080"/>
                 </a:solidFill>
                 <a:latin typeface="Arial"/>
                 <a:ea typeface="Arial"/>
@@ -17613,7 +17613,7 @@
             <a:r>
               <a:rPr sz="750" b="1">
                 <a:solidFill>
-                  <a:srgbClr val="B8C9D3"/>
+                  <a:srgbClr val="587080"/>
                 </a:solidFill>
                 <a:latin typeface="Arial"/>
                 <a:ea typeface="Arial"/>
@@ -17629,7 +17629,7 @@
           <p:cNvPr id="13" name="">
             <a:extLst xmlns:a="http://schemas.openxmlformats.org/drawingml/2006/main">
               <a:ext uri="{FF2B5EF4-FFF2-40B4-BE49-F238E27FC236}">
-                <a16:creationId xmlns:a16="http://schemas.microsoft.com/office/drawing/2014/main" id="{2A1E9392-C300-4A4C-9ECA-341CE030AD84}"/>
+                <a16:creationId xmlns:a16="http://schemas.microsoft.com/office/drawing/2014/main" id="{5D017268-F4AD-44DC-BCAF-845054E035D1}"/>
               </a:ext>
             </a:extLst>
           </p:cNvPr>
@@ -17661,7 +17661,7 @@
             <a:pPr algn="l">
               <a:defRPr sz="600" b="0">
                 <a:solidFill>
-                  <a:srgbClr val="B8C9D3"/>
+                  <a:srgbClr val="587080"/>
                 </a:solidFill>
                 <a:latin typeface="Arial"/>
                 <a:ea typeface="Arial"/>
@@ -17671,7 +17671,7 @@
             <a:r>
               <a:rPr sz="600" b="0">
                 <a:solidFill>
-                  <a:srgbClr val="B8C9D3"/>
+                  <a:srgbClr val="587080"/>
                 </a:solidFill>
                 <a:latin typeface="Arial"/>
                 <a:ea typeface="Arial"/>
@@ -17687,7 +17687,7 @@
           <p:cNvPr id="14" name="">
             <a:extLst xmlns:a="http://schemas.openxmlformats.org/drawingml/2006/main">
               <a:ext uri="{FF2B5EF4-FFF2-40B4-BE49-F238E27FC236}">
-                <a16:creationId xmlns:a16="http://schemas.microsoft.com/office/drawing/2014/main" id="{08E2C077-CDFD-4CD3-98E3-8AC2376975EC}"/>
+                <a16:creationId xmlns:a16="http://schemas.microsoft.com/office/drawing/2014/main" id="{52A1826B-62C0-4F11-9C46-8BDF3B1FFB9A}"/>
               </a:ext>
             </a:extLst>
           </p:cNvPr>
@@ -17719,7 +17719,7 @@
             <a:pPr algn="r">
               <a:defRPr sz="600" b="1">
                 <a:solidFill>
-                  <a:srgbClr val="B8C9D3"/>
+                  <a:srgbClr val="587080"/>
                 </a:solidFill>
                 <a:latin typeface="Arial"/>
                 <a:ea typeface="Arial"/>
@@ -17729,7 +17729,7 @@
             <a:r>
               <a:rPr sz="600" b="1">
                 <a:solidFill>
-                  <a:srgbClr val="B8C9D3"/>
+                  <a:srgbClr val="587080"/>
                 </a:solidFill>
                 <a:latin typeface="Arial"/>
                 <a:ea typeface="Arial"/>
@@ -17745,7 +17745,7 @@
           <p:cNvPr id="15" name="">
             <a:extLst xmlns:a="http://schemas.openxmlformats.org/drawingml/2006/main">
               <a:ext uri="{FF2B5EF4-FFF2-40B4-BE49-F238E27FC236}">
-                <a16:creationId xmlns:a16="http://schemas.microsoft.com/office/drawing/2014/main" id="{2606A3B8-7334-4E9E-A767-75625D7ED08D}"/>
+                <a16:creationId xmlns:a16="http://schemas.microsoft.com/office/drawing/2014/main" id="{328D0167-9D5A-485A-A97B-FE042204CE02}"/>
               </a:ext>
             </a:extLst>
           </p:cNvPr>
@@ -17777,7 +17777,7 @@
             <a:pPr algn="l">
               <a:defRPr sz="2250" b="0">
                 <a:solidFill>
-                  <a:srgbClr val="00E1C6"/>
+                  <a:srgbClr val="132E41"/>
                 </a:solidFill>
                 <a:latin typeface="Georgia"/>
                 <a:ea typeface="Georgia"/>
@@ -17787,7 +17787,7 @@
             <a:r>
               <a:rPr sz="2250" b="0">
                 <a:solidFill>
-                  <a:srgbClr val="00E1C6"/>
+                  <a:srgbClr val="132E41"/>
                 </a:solidFill>
                 <a:latin typeface="Georgia"/>
                 <a:ea typeface="Georgia"/>
@@ -17803,7 +17803,7 @@
           <p:cNvPr id="16" name="">
             <a:extLst xmlns:a="http://schemas.openxmlformats.org/drawingml/2006/main">
               <a:ext uri="{FF2B5EF4-FFF2-40B4-BE49-F238E27FC236}">
-                <a16:creationId xmlns:a16="http://schemas.microsoft.com/office/drawing/2014/main" id="{E637CCA2-0C72-46FB-B81E-815992D786F0}"/>
+                <a16:creationId xmlns:a16="http://schemas.microsoft.com/office/drawing/2014/main" id="{076B0BF3-632A-4857-B99A-AFF892765874}"/>
               </a:ext>
             </a:extLst>
           </p:cNvPr>
@@ -17835,7 +17835,7 @@
             <a:pPr algn="l">
               <a:defRPr sz="1125" b="0">
                 <a:solidFill>
-                  <a:srgbClr val="B8C9D3"/>
+                  <a:srgbClr val="587080"/>
                 </a:solidFill>
                 <a:latin typeface="Arial"/>
                 <a:ea typeface="Arial"/>
@@ -17845,7 +17845,7 @@
             <a:r>
               <a:rPr sz="1125" b="0">
                 <a:solidFill>
-                  <a:srgbClr val="B8C9D3"/>
+                  <a:srgbClr val="587080"/>
                 </a:solidFill>
                 <a:latin typeface="Arial"/>
                 <a:ea typeface="Arial"/>
@@ -17861,7 +17861,7 @@
           <p:cNvPr id="17" name="">
             <a:extLst xmlns:a="http://schemas.openxmlformats.org/drawingml/2006/main">
               <a:ext uri="{FF2B5EF4-FFF2-40B4-BE49-F238E27FC236}">
-                <a16:creationId xmlns:a16="http://schemas.microsoft.com/office/drawing/2014/main" id="{4D3BBB89-F273-4561-8DB8-EEE63780FDEF}"/>
+                <a16:creationId xmlns:a16="http://schemas.microsoft.com/office/drawing/2014/main" id="{BA97B934-780F-4CB9-92CD-71307A05F69F}"/>
               </a:ext>
             </a:extLst>
           </p:cNvPr>
@@ -17881,7 +17881,7 @@
           <a:noFill xmlns:a="http://schemas.openxmlformats.org/drawingml/2006/main"/>
           <a:ln xmlns:a="http://schemas.openxmlformats.org/drawingml/2006/main" w="23813">
             <a:solidFill>
-              <a:srgbClr val="2A4D65"/>
+              <a:srgbClr val="C5D4DC"/>
             </a:solidFill>
             <a:prstDash val="solid"/>
           </a:ln>
@@ -17892,7 +17892,7 @@
           <p:cNvPr id="18" name="">
             <a:extLst xmlns:a="http://schemas.openxmlformats.org/drawingml/2006/main">
               <a:ext uri="{FF2B5EF4-FFF2-40B4-BE49-F238E27FC236}">
-                <a16:creationId xmlns:a16="http://schemas.microsoft.com/office/drawing/2014/main" id="{055BB7CF-BEB0-4559-8FA9-E83E3A977AF3}"/>
+                <a16:creationId xmlns:a16="http://schemas.microsoft.com/office/drawing/2014/main" id="{B4E38FD4-AD1A-464E-97EF-1C754B92E055}"/>
               </a:ext>
             </a:extLst>
           </p:cNvPr>
@@ -17949,7 +17949,7 @@
           <p:cNvPr id="19" name="">
             <a:extLst xmlns:a="http://schemas.openxmlformats.org/drawingml/2006/main">
               <a:ext uri="{FF2B5EF4-FFF2-40B4-BE49-F238E27FC236}">
-                <a16:creationId xmlns:a16="http://schemas.microsoft.com/office/drawing/2014/main" id="{3A8E8937-8ACD-441D-B00D-A4F5A48F356D}"/>
+                <a16:creationId xmlns:a16="http://schemas.microsoft.com/office/drawing/2014/main" id="{5E6E5811-BF7A-4468-AE22-4065ED9C349B}"/>
               </a:ext>
             </a:extLst>
           </p:cNvPr>
@@ -17981,7 +17981,7 @@
             <a:pPr algn="ctr">
               <a:defRPr sz="975" b="1">
                 <a:solidFill>
-                  <a:srgbClr val="F3F8FA"/>
+                  <a:srgbClr val="132E41"/>
                 </a:solidFill>
                 <a:latin typeface="Arial"/>
                 <a:ea typeface="Arial"/>
@@ -17991,7 +17991,7 @@
             <a:r>
               <a:rPr sz="975" b="1">
                 <a:solidFill>
-                  <a:srgbClr val="F3F8FA"/>
+                  <a:srgbClr val="132E41"/>
                 </a:solidFill>
                 <a:latin typeface="Arial"/>
                 <a:ea typeface="Arial"/>
@@ -18007,7 +18007,7 @@
           <p:cNvPr id="20" name="">
             <a:extLst xmlns:a="http://schemas.openxmlformats.org/drawingml/2006/main">
               <a:ext uri="{FF2B5EF4-FFF2-40B4-BE49-F238E27FC236}">
-                <a16:creationId xmlns:a16="http://schemas.microsoft.com/office/drawing/2014/main" id="{92C7AF71-D6F5-4101-BE7B-A46FC83A6AD0}"/>
+                <a16:creationId xmlns:a16="http://schemas.microsoft.com/office/drawing/2014/main" id="{C08F334C-75EE-437C-8DDC-C6EEFDC2284B}"/>
               </a:ext>
             </a:extLst>
           </p:cNvPr>
@@ -18039,7 +18039,7 @@
             <a:pPr algn="ctr">
               <a:defRPr sz="825" b="0">
                 <a:solidFill>
-                  <a:srgbClr val="B8C9D3"/>
+                  <a:srgbClr val="587080"/>
                 </a:solidFill>
                 <a:latin typeface="Arial"/>
                 <a:ea typeface="Arial"/>
@@ -18049,7 +18049,7 @@
             <a:r>
               <a:rPr sz="825" b="0">
                 <a:solidFill>
-                  <a:srgbClr val="B8C9D3"/>
+                  <a:srgbClr val="587080"/>
                 </a:solidFill>
                 <a:latin typeface="Arial"/>
                 <a:ea typeface="Arial"/>
@@ -18065,7 +18065,7 @@
           <p:cNvPr id="21" name="">
             <a:extLst xmlns:a="http://schemas.openxmlformats.org/drawingml/2006/main">
               <a:ext uri="{FF2B5EF4-FFF2-40B4-BE49-F238E27FC236}">
-                <a16:creationId xmlns:a16="http://schemas.microsoft.com/office/drawing/2014/main" id="{B5970180-DAB1-42EF-94E7-180962A1033B}"/>
+                <a16:creationId xmlns:a16="http://schemas.microsoft.com/office/drawing/2014/main" id="{C8E26816-6563-4C9B-B66E-2EDFC707D600}"/>
               </a:ext>
             </a:extLst>
           </p:cNvPr>
@@ -18085,7 +18085,7 @@
           <a:noFill xmlns:a="http://schemas.openxmlformats.org/drawingml/2006/main"/>
           <a:ln xmlns:a="http://schemas.openxmlformats.org/drawingml/2006/main" w="23813">
             <a:solidFill>
-              <a:srgbClr val="2A4D65"/>
+              <a:srgbClr val="C5D4DC"/>
             </a:solidFill>
             <a:prstDash val="solid"/>
           </a:ln>
@@ -18096,7 +18096,7 @@
           <p:cNvPr id="22" name="">
             <a:extLst xmlns:a="http://schemas.openxmlformats.org/drawingml/2006/main">
               <a:ext uri="{FF2B5EF4-FFF2-40B4-BE49-F238E27FC236}">
-                <a16:creationId xmlns:a16="http://schemas.microsoft.com/office/drawing/2014/main" id="{EBF67DAB-D0AE-49CE-93EB-8D2AD873912F}"/>
+                <a16:creationId xmlns:a16="http://schemas.microsoft.com/office/drawing/2014/main" id="{7ADA2C20-F137-46B3-A0A2-50086EAB754B}"/>
               </a:ext>
             </a:extLst>
           </p:cNvPr>
@@ -18153,7 +18153,7 @@
           <p:cNvPr id="23" name="">
             <a:extLst xmlns:a="http://schemas.openxmlformats.org/drawingml/2006/main">
               <a:ext uri="{FF2B5EF4-FFF2-40B4-BE49-F238E27FC236}">
-                <a16:creationId xmlns:a16="http://schemas.microsoft.com/office/drawing/2014/main" id="{DDEF3A35-9187-452F-810D-661479DCF825}"/>
+                <a16:creationId xmlns:a16="http://schemas.microsoft.com/office/drawing/2014/main" id="{01EE1F48-3AAB-4EC5-9EEB-4D5C79D061F7}"/>
               </a:ext>
             </a:extLst>
           </p:cNvPr>
@@ -18185,7 +18185,7 @@
             <a:pPr algn="ctr">
               <a:defRPr sz="975" b="1">
                 <a:solidFill>
-                  <a:srgbClr val="F3F8FA"/>
+                  <a:srgbClr val="132E41"/>
                 </a:solidFill>
                 <a:latin typeface="Arial"/>
                 <a:ea typeface="Arial"/>
@@ -18195,7 +18195,7 @@
             <a:r>
               <a:rPr sz="975" b="1">
                 <a:solidFill>
-                  <a:srgbClr val="F3F8FA"/>
+                  <a:srgbClr val="132E41"/>
                 </a:solidFill>
                 <a:latin typeface="Arial"/>
                 <a:ea typeface="Arial"/>
@@ -18211,7 +18211,7 @@
           <p:cNvPr id="24" name="">
             <a:extLst xmlns:a="http://schemas.openxmlformats.org/drawingml/2006/main">
               <a:ext uri="{FF2B5EF4-FFF2-40B4-BE49-F238E27FC236}">
-                <a16:creationId xmlns:a16="http://schemas.microsoft.com/office/drawing/2014/main" id="{CF4BF18E-052D-4BF8-B885-43BC5F8EE45A}"/>
+                <a16:creationId xmlns:a16="http://schemas.microsoft.com/office/drawing/2014/main" id="{C40BD9A5-DD87-4766-8A1E-AAB4A22B9735}"/>
               </a:ext>
             </a:extLst>
           </p:cNvPr>
@@ -18243,7 +18243,7 @@
             <a:pPr algn="ctr">
               <a:defRPr sz="825" b="0">
                 <a:solidFill>
-                  <a:srgbClr val="B8C9D3"/>
+                  <a:srgbClr val="587080"/>
                 </a:solidFill>
                 <a:latin typeface="Arial"/>
                 <a:ea typeface="Arial"/>
@@ -18253,7 +18253,7 @@
             <a:r>
               <a:rPr sz="825" b="0">
                 <a:solidFill>
-                  <a:srgbClr val="B8C9D3"/>
+                  <a:srgbClr val="587080"/>
                 </a:solidFill>
                 <a:latin typeface="Arial"/>
                 <a:ea typeface="Arial"/>
@@ -18269,7 +18269,7 @@
           <p:cNvPr id="25" name="">
             <a:extLst xmlns:a="http://schemas.openxmlformats.org/drawingml/2006/main">
               <a:ext uri="{FF2B5EF4-FFF2-40B4-BE49-F238E27FC236}">
-                <a16:creationId xmlns:a16="http://schemas.microsoft.com/office/drawing/2014/main" id="{4F83A84A-7BBA-4696-8718-3AA1A17C6F8F}"/>
+                <a16:creationId xmlns:a16="http://schemas.microsoft.com/office/drawing/2014/main" id="{2F9B2210-DD62-4E4C-B7AD-B047EC5A4F3C}"/>
               </a:ext>
             </a:extLst>
           </p:cNvPr>
@@ -18289,7 +18289,7 @@
           <a:noFill xmlns:a="http://schemas.openxmlformats.org/drawingml/2006/main"/>
           <a:ln xmlns:a="http://schemas.openxmlformats.org/drawingml/2006/main" w="23813">
             <a:solidFill>
-              <a:srgbClr val="2A4D65"/>
+              <a:srgbClr val="C5D4DC"/>
             </a:solidFill>
             <a:prstDash val="solid"/>
           </a:ln>
@@ -18300,7 +18300,7 @@
           <p:cNvPr id="26" name="">
             <a:extLst xmlns:a="http://schemas.openxmlformats.org/drawingml/2006/main">
               <a:ext uri="{FF2B5EF4-FFF2-40B4-BE49-F238E27FC236}">
-                <a16:creationId xmlns:a16="http://schemas.microsoft.com/office/drawing/2014/main" id="{84A2967C-1ADA-4A71-9F32-1F42381372FF}"/>
+                <a16:creationId xmlns:a16="http://schemas.microsoft.com/office/drawing/2014/main" id="{81C1772E-FB46-412B-A8C3-5F30B9355741}"/>
               </a:ext>
             </a:extLst>
           </p:cNvPr>
@@ -18357,7 +18357,7 @@
           <p:cNvPr id="27" name="">
             <a:extLst xmlns:a="http://schemas.openxmlformats.org/drawingml/2006/main">
               <a:ext uri="{FF2B5EF4-FFF2-40B4-BE49-F238E27FC236}">
-                <a16:creationId xmlns:a16="http://schemas.microsoft.com/office/drawing/2014/main" id="{18DCCA98-EC3B-46E0-827A-40D759125BB8}"/>
+                <a16:creationId xmlns:a16="http://schemas.microsoft.com/office/drawing/2014/main" id="{73413E5C-6729-4EAA-9AFA-614C08EF294F}"/>
               </a:ext>
             </a:extLst>
           </p:cNvPr>
@@ -18389,7 +18389,7 @@
             <a:pPr algn="ctr">
               <a:defRPr sz="975" b="1">
                 <a:solidFill>
-                  <a:srgbClr val="F3F8FA"/>
+                  <a:srgbClr val="132E41"/>
                 </a:solidFill>
                 <a:latin typeface="Arial"/>
                 <a:ea typeface="Arial"/>
@@ -18399,7 +18399,7 @@
             <a:r>
               <a:rPr sz="975" b="1">
                 <a:solidFill>
-                  <a:srgbClr val="F3F8FA"/>
+                  <a:srgbClr val="132E41"/>
                 </a:solidFill>
                 <a:latin typeface="Arial"/>
                 <a:ea typeface="Arial"/>
@@ -18415,7 +18415,7 @@
           <p:cNvPr id="28" name="">
             <a:extLst xmlns:a="http://schemas.openxmlformats.org/drawingml/2006/main">
               <a:ext uri="{FF2B5EF4-FFF2-40B4-BE49-F238E27FC236}">
-                <a16:creationId xmlns:a16="http://schemas.microsoft.com/office/drawing/2014/main" id="{CBFD116A-C8F4-4B06-BF1E-B2FEE781D9FB}"/>
+                <a16:creationId xmlns:a16="http://schemas.microsoft.com/office/drawing/2014/main" id="{E2347F0C-4B6C-48E4-B927-26F9F3B3CBBC}"/>
               </a:ext>
             </a:extLst>
           </p:cNvPr>
@@ -18447,7 +18447,7 @@
             <a:pPr algn="ctr">
               <a:defRPr sz="825" b="0">
                 <a:solidFill>
-                  <a:srgbClr val="B8C9D3"/>
+                  <a:srgbClr val="587080"/>
                 </a:solidFill>
                 <a:latin typeface="Arial"/>
                 <a:ea typeface="Arial"/>
@@ -18457,7 +18457,7 @@
             <a:r>
               <a:rPr sz="825" b="0">
                 <a:solidFill>
-                  <a:srgbClr val="B8C9D3"/>
+                  <a:srgbClr val="587080"/>
                 </a:solidFill>
                 <a:latin typeface="Arial"/>
                 <a:ea typeface="Arial"/>
@@ -18473,7 +18473,7 @@
           <p:cNvPr id="29" name="">
             <a:extLst xmlns:a="http://schemas.openxmlformats.org/drawingml/2006/main">
               <a:ext uri="{FF2B5EF4-FFF2-40B4-BE49-F238E27FC236}">
-                <a16:creationId xmlns:a16="http://schemas.microsoft.com/office/drawing/2014/main" id="{71668D8F-E9FB-40A7-B21F-2C9F87DF1B98}"/>
+                <a16:creationId xmlns:a16="http://schemas.microsoft.com/office/drawing/2014/main" id="{1C1DC81C-62B3-483B-B0E4-21A0C9E4F6BF}"/>
               </a:ext>
             </a:extLst>
           </p:cNvPr>
@@ -18493,7 +18493,7 @@
           <a:noFill xmlns:a="http://schemas.openxmlformats.org/drawingml/2006/main"/>
           <a:ln xmlns:a="http://schemas.openxmlformats.org/drawingml/2006/main" w="23813">
             <a:solidFill>
-              <a:srgbClr val="2A4D65"/>
+              <a:srgbClr val="C5D4DC"/>
             </a:solidFill>
             <a:prstDash val="solid"/>
           </a:ln>
@@ -18504,7 +18504,7 @@
           <p:cNvPr id="30" name="">
             <a:extLst xmlns:a="http://schemas.openxmlformats.org/drawingml/2006/main">
               <a:ext uri="{FF2B5EF4-FFF2-40B4-BE49-F238E27FC236}">
-                <a16:creationId xmlns:a16="http://schemas.microsoft.com/office/drawing/2014/main" id="{632C1659-EF0D-4A1E-8B42-65E151587EBF}"/>
+                <a16:creationId xmlns:a16="http://schemas.microsoft.com/office/drawing/2014/main" id="{32F110A4-43B0-48D2-AA3C-8C22BF177349}"/>
               </a:ext>
             </a:extLst>
           </p:cNvPr>
@@ -18561,7 +18561,7 @@
           <p:cNvPr id="31" name="">
             <a:extLst xmlns:a="http://schemas.openxmlformats.org/drawingml/2006/main">
               <a:ext uri="{FF2B5EF4-FFF2-40B4-BE49-F238E27FC236}">
-                <a16:creationId xmlns:a16="http://schemas.microsoft.com/office/drawing/2014/main" id="{C24836F5-AB8C-4EC6-9501-964A1C1A2C81}"/>
+                <a16:creationId xmlns:a16="http://schemas.microsoft.com/office/drawing/2014/main" id="{D4FA40EC-2724-49EB-86BF-716912EB61D8}"/>
               </a:ext>
             </a:extLst>
           </p:cNvPr>
@@ -18593,7 +18593,7 @@
             <a:pPr algn="ctr">
               <a:defRPr sz="975" b="1">
                 <a:solidFill>
-                  <a:srgbClr val="F3F8FA"/>
+                  <a:srgbClr val="132E41"/>
                 </a:solidFill>
                 <a:latin typeface="Arial"/>
                 <a:ea typeface="Arial"/>
@@ -18603,7 +18603,7 @@
             <a:r>
               <a:rPr sz="975" b="1">
                 <a:solidFill>
-                  <a:srgbClr val="F3F8FA"/>
+                  <a:srgbClr val="132E41"/>
                 </a:solidFill>
                 <a:latin typeface="Arial"/>
                 <a:ea typeface="Arial"/>
@@ -18619,7 +18619,7 @@
           <p:cNvPr id="32" name="">
             <a:extLst xmlns:a="http://schemas.openxmlformats.org/drawingml/2006/main">
               <a:ext uri="{FF2B5EF4-FFF2-40B4-BE49-F238E27FC236}">
-                <a16:creationId xmlns:a16="http://schemas.microsoft.com/office/drawing/2014/main" id="{B0674F0F-C345-436F-818F-6776CB91C068}"/>
+                <a16:creationId xmlns:a16="http://schemas.microsoft.com/office/drawing/2014/main" id="{0171B823-5858-4AF4-9B97-8A5A42688CA7}"/>
               </a:ext>
             </a:extLst>
           </p:cNvPr>
@@ -18651,7 +18651,7 @@
             <a:pPr algn="ctr">
               <a:defRPr sz="825" b="0">
                 <a:solidFill>
-                  <a:srgbClr val="B8C9D3"/>
+                  <a:srgbClr val="587080"/>
                 </a:solidFill>
                 <a:latin typeface="Arial"/>
                 <a:ea typeface="Arial"/>
@@ -18661,7 +18661,7 @@
             <a:r>
               <a:rPr sz="825" b="0">
                 <a:solidFill>
-                  <a:srgbClr val="B8C9D3"/>
+                  <a:srgbClr val="587080"/>
                 </a:solidFill>
                 <a:latin typeface="Arial"/>
                 <a:ea typeface="Arial"/>
@@ -18677,7 +18677,7 @@
           <p:cNvPr id="33" name="">
             <a:extLst xmlns:a="http://schemas.openxmlformats.org/drawingml/2006/main">
               <a:ext uri="{FF2B5EF4-FFF2-40B4-BE49-F238E27FC236}">
-                <a16:creationId xmlns:a16="http://schemas.microsoft.com/office/drawing/2014/main" id="{7FAD1F64-7C1B-4ED0-AC85-AD622FB804C3}"/>
+                <a16:creationId xmlns:a16="http://schemas.microsoft.com/office/drawing/2014/main" id="{43B8E744-39F0-45ED-855E-F7BADECD4CC8}"/>
               </a:ext>
             </a:extLst>
           </p:cNvPr>
@@ -18734,7 +18734,7 @@
           <p:cNvPr id="34" name="">
             <a:extLst xmlns:a="http://schemas.openxmlformats.org/drawingml/2006/main">
               <a:ext uri="{FF2B5EF4-FFF2-40B4-BE49-F238E27FC236}">
-                <a16:creationId xmlns:a16="http://schemas.microsoft.com/office/drawing/2014/main" id="{FE96B8A1-4CD1-4935-B5BF-AF69EDEB4F0F}"/>
+                <a16:creationId xmlns:a16="http://schemas.microsoft.com/office/drawing/2014/main" id="{FAE4160C-45FC-4E3D-8DBB-0E07A4A57A2B}"/>
               </a:ext>
             </a:extLst>
           </p:cNvPr>
@@ -18766,7 +18766,7 @@
             <a:pPr algn="ctr">
               <a:defRPr sz="975" b="1">
                 <a:solidFill>
-                  <a:srgbClr val="F3F8FA"/>
+                  <a:srgbClr val="132E41"/>
                 </a:solidFill>
                 <a:latin typeface="Arial"/>
                 <a:ea typeface="Arial"/>
@@ -18776,7 +18776,7 @@
             <a:r>
               <a:rPr sz="975" b="1">
                 <a:solidFill>
-                  <a:srgbClr val="F3F8FA"/>
+                  <a:srgbClr val="132E41"/>
                 </a:solidFill>
                 <a:latin typeface="Arial"/>
                 <a:ea typeface="Arial"/>
@@ -18792,7 +18792,7 @@
           <p:cNvPr id="35" name="">
             <a:extLst xmlns:a="http://schemas.openxmlformats.org/drawingml/2006/main">
               <a:ext uri="{FF2B5EF4-FFF2-40B4-BE49-F238E27FC236}">
-                <a16:creationId xmlns:a16="http://schemas.microsoft.com/office/drawing/2014/main" id="{A84E7873-52BB-40FD-B4B8-75CB8EB74E43}"/>
+                <a16:creationId xmlns:a16="http://schemas.microsoft.com/office/drawing/2014/main" id="{4D3B42CC-DF9B-4277-803F-6FBFAD5B0ADA}"/>
               </a:ext>
             </a:extLst>
           </p:cNvPr>
@@ -18824,7 +18824,7 @@
             <a:pPr algn="ctr">
               <a:defRPr sz="825" b="0">
                 <a:solidFill>
-                  <a:srgbClr val="B8C9D3"/>
+                  <a:srgbClr val="587080"/>
                 </a:solidFill>
                 <a:latin typeface="Arial"/>
                 <a:ea typeface="Arial"/>
@@ -18834,7 +18834,7 @@
             <a:r>
               <a:rPr sz="825" b="0">
                 <a:solidFill>
-                  <a:srgbClr val="B8C9D3"/>
+                  <a:srgbClr val="587080"/>
                 </a:solidFill>
                 <a:latin typeface="Arial"/>
                 <a:ea typeface="Arial"/>
@@ -18850,7 +18850,7 @@
           <p:cNvPr id="36" name="">
             <a:extLst xmlns:a="http://schemas.openxmlformats.org/drawingml/2006/main">
               <a:ext uri="{FF2B5EF4-FFF2-40B4-BE49-F238E27FC236}">
-                <a16:creationId xmlns:a16="http://schemas.microsoft.com/office/drawing/2014/main" id="{5CF1FD19-417A-41FF-9CE5-711688CB8DA1}"/>
+                <a16:creationId xmlns:a16="http://schemas.microsoft.com/office/drawing/2014/main" id="{889A350D-3458-4506-BF88-093DA6720838}"/>
               </a:ext>
             </a:extLst>
           </p:cNvPr>
@@ -18870,11 +18870,11 @@
             </a:avLst>
           </a:prstGeom>
           <a:solidFill xmlns:a="http://schemas.openxmlformats.org/drawingml/2006/main">
-            <a:srgbClr val="102F46"/>
+            <a:srgbClr val="FFFFFF"/>
           </a:solidFill>
           <a:ln xmlns:a="http://schemas.openxmlformats.org/drawingml/2006/main" w="9525">
             <a:solidFill>
-              <a:srgbClr val="2A4D65"/>
+              <a:srgbClr val="C5D4DC"/>
             </a:solidFill>
             <a:prstDash val="solid"/>
           </a:ln>
@@ -18885,7 +18885,7 @@
           <p:cNvPr id="37" name="">
             <a:extLst xmlns:a="http://schemas.openxmlformats.org/drawingml/2006/main">
               <a:ext uri="{FF2B5EF4-FFF2-40B4-BE49-F238E27FC236}">
-                <a16:creationId xmlns:a16="http://schemas.microsoft.com/office/drawing/2014/main" id="{BF55C8B4-E705-48CD-B75C-9B836764B13A}"/>
+                <a16:creationId xmlns:a16="http://schemas.microsoft.com/office/drawing/2014/main" id="{D1DFFD72-13DE-47F6-BD4D-A1AAC47045C8}"/>
               </a:ext>
             </a:extLst>
           </p:cNvPr>
@@ -18943,7 +18943,7 @@
           <p:cNvPr id="38" name="">
             <a:extLst xmlns:a="http://schemas.openxmlformats.org/drawingml/2006/main">
               <a:ext uri="{FF2B5EF4-FFF2-40B4-BE49-F238E27FC236}">
-                <a16:creationId xmlns:a16="http://schemas.microsoft.com/office/drawing/2014/main" id="{C36982BB-10FB-4CA7-9223-1EF11419CD45}"/>
+                <a16:creationId xmlns:a16="http://schemas.microsoft.com/office/drawing/2014/main" id="{17D95434-B744-4FE0-8F93-9C62744A4856}"/>
               </a:ext>
             </a:extLst>
           </p:cNvPr>
@@ -18980,7 +18980,7 @@
           <p:cNvPr id="39" name="">
             <a:extLst xmlns:a="http://schemas.openxmlformats.org/drawingml/2006/main">
               <a:ext uri="{FF2B5EF4-FFF2-40B4-BE49-F238E27FC236}">
-                <a16:creationId xmlns:a16="http://schemas.microsoft.com/office/drawing/2014/main" id="{127808B7-90D4-4FF2-BDBA-9B9714F898CB}"/>
+                <a16:creationId xmlns:a16="http://schemas.microsoft.com/office/drawing/2014/main" id="{2F9CB3B7-13ED-495C-814F-1C6D19E75C1A}"/>
               </a:ext>
             </a:extLst>
           </p:cNvPr>
@@ -19012,7 +19012,7 @@
             <a:pPr algn="ctr">
               <a:defRPr sz="975" b="1">
                 <a:solidFill>
-                  <a:srgbClr val="F3F8FA"/>
+                  <a:srgbClr val="132E41"/>
                 </a:solidFill>
                 <a:latin typeface="Arial"/>
                 <a:ea typeface="Arial"/>
@@ -19022,7 +19022,7 @@
             <a:r>
               <a:rPr sz="975" b="1">
                 <a:solidFill>
-                  <a:srgbClr val="F3F8FA"/>
+                  <a:srgbClr val="132E41"/>
                 </a:solidFill>
                 <a:latin typeface="Arial"/>
                 <a:ea typeface="Arial"/>
@@ -19036,7 +19036,7 @@
     </p:spTree>
     <p:extLst>
       <p:ext uri="{BB962C8B-B14F-4D97-AF65-F5344CB8AC3E}">
-        <p14:creationId xmlns:p14="http://schemas.microsoft.com/office/powerpoint/2010/main" val="1967848779"/>
+        <p14:creationId xmlns:p14="http://schemas.microsoft.com/office/powerpoint/2010/main" val="1083170420"/>
       </p:ext>
     </p:extLst>
   </p:cSld>
@@ -19049,7 +19049,7 @@
     <p:bg>
       <p:bgPr>
         <a:solidFill xmlns:a="http://schemas.openxmlformats.org/drawingml/2006/main">
-          <a:srgbClr val="0E293C"/>
+          <a:srgbClr val="F3F1EB"/>
         </a:solidFill>
       </p:bgPr>
     </p:bg>
@@ -19067,7 +19067,7 @@
           <p:cNvPr id="32" name="">
             <a:extLst xmlns:a="http://schemas.openxmlformats.org/drawingml/2006/main">
               <a:ext uri="{FF2B5EF4-FFF2-40B4-BE49-F238E27FC236}">
-                <a16:creationId xmlns:a16="http://schemas.microsoft.com/office/drawing/2014/main" id="{FE2AC0FA-9484-40D1-A232-EBB45A026B8D}"/>
+                <a16:creationId xmlns:a16="http://schemas.microsoft.com/office/drawing/2014/main" id="{5525D137-6650-420E-B236-2D29B26FAAE4}"/>
               </a:ext>
             </a:extLst>
           </p:cNvPr>
@@ -19124,7 +19124,7 @@
           <p:cNvPr id="2" name="">
             <a:extLst xmlns:a="http://schemas.openxmlformats.org/drawingml/2006/main">
               <a:ext uri="{FF2B5EF4-FFF2-40B4-BE49-F238E27FC236}">
-                <a16:creationId xmlns:a16="http://schemas.microsoft.com/office/drawing/2014/main" id="{8011E109-8831-473C-9B8F-5282B8E1483A}"/>
+                <a16:creationId xmlns:a16="http://schemas.microsoft.com/office/drawing/2014/main" id="{824E54E7-6C1A-4100-8944-F797E2D04EE2}"/>
               </a:ext>
             </a:extLst>
           </p:cNvPr>
@@ -19181,7 +19181,7 @@
           <p:cNvPr id="3" name="">
             <a:extLst xmlns:a="http://schemas.openxmlformats.org/drawingml/2006/main">
               <a:ext uri="{FF2B5EF4-FFF2-40B4-BE49-F238E27FC236}">
-                <a16:creationId xmlns:a16="http://schemas.microsoft.com/office/drawing/2014/main" id="{E339096A-14F7-4C9E-BC19-278BA91D2EB4}"/>
+                <a16:creationId xmlns:a16="http://schemas.microsoft.com/office/drawing/2014/main" id="{A5C2EAF6-9949-4F98-9B55-6F936F01EA0F}"/>
               </a:ext>
             </a:extLst>
           </p:cNvPr>
@@ -19238,7 +19238,7 @@
           <p:cNvPr id="4" name="">
             <a:extLst xmlns:a="http://schemas.openxmlformats.org/drawingml/2006/main">
               <a:ext uri="{FF2B5EF4-FFF2-40B4-BE49-F238E27FC236}">
-                <a16:creationId xmlns:a16="http://schemas.microsoft.com/office/drawing/2014/main" id="{9B52322E-276B-4AAA-A295-F51EDD198A56}"/>
+                <a16:creationId xmlns:a16="http://schemas.microsoft.com/office/drawing/2014/main" id="{FDA86E83-A3A6-4186-9204-CEE5ED0D93A1}"/>
               </a:ext>
             </a:extLst>
           </p:cNvPr>
@@ -19269,7 +19269,7 @@
           <p:cNvPr id="5" name="">
             <a:extLst xmlns:a="http://schemas.openxmlformats.org/drawingml/2006/main">
               <a:ext uri="{FF2B5EF4-FFF2-40B4-BE49-F238E27FC236}">
-                <a16:creationId xmlns:a16="http://schemas.microsoft.com/office/drawing/2014/main" id="{CF81605D-6D5B-4228-9E6A-FC778FE4EA78}"/>
+                <a16:creationId xmlns:a16="http://schemas.microsoft.com/office/drawing/2014/main" id="{DF4D8768-2A42-4238-9265-E111B9ED54E1}"/>
               </a:ext>
             </a:extLst>
           </p:cNvPr>
@@ -19289,7 +19289,7 @@
           <a:noFill xmlns:a="http://schemas.openxmlformats.org/drawingml/2006/main"/>
           <a:ln xmlns:a="http://schemas.openxmlformats.org/drawingml/2006/main" w="9525">
             <a:solidFill>
-              <a:srgbClr val="2A4D65"/>
+              <a:srgbClr val="C5D4DC"/>
             </a:solidFill>
             <a:prstDash val="solid"/>
           </a:ln>
@@ -19300,7 +19300,7 @@
           <p:cNvPr id="6" name="">
             <a:extLst xmlns:a="http://schemas.openxmlformats.org/drawingml/2006/main">
               <a:ext uri="{FF2B5EF4-FFF2-40B4-BE49-F238E27FC236}">
-                <a16:creationId xmlns:a16="http://schemas.microsoft.com/office/drawing/2014/main" id="{0C6D067A-72E1-455B-8F0A-9F79C873C17F}"/>
+                <a16:creationId xmlns:a16="http://schemas.microsoft.com/office/drawing/2014/main" id="{4192737C-2C6B-4440-B3C2-43B2D50E8EDF}"/>
               </a:ext>
             </a:extLst>
           </p:cNvPr>
@@ -19357,7 +19357,7 @@
           <p:cNvPr id="7" name="">
             <a:extLst xmlns:a="http://schemas.openxmlformats.org/drawingml/2006/main">
               <a:ext uri="{FF2B5EF4-FFF2-40B4-BE49-F238E27FC236}">
-                <a16:creationId xmlns:a16="http://schemas.microsoft.com/office/drawing/2014/main" id="{44F664D0-52E4-407B-A121-6F92FDCB6D3D}"/>
+                <a16:creationId xmlns:a16="http://schemas.microsoft.com/office/drawing/2014/main" id="{76968EDE-7665-4A64-9810-9DFD65FFF599}"/>
               </a:ext>
             </a:extLst>
           </p:cNvPr>
@@ -19414,7 +19414,7 @@
           <p:cNvPr id="8" name="">
             <a:extLst xmlns:a="http://schemas.openxmlformats.org/drawingml/2006/main">
               <a:ext uri="{FF2B5EF4-FFF2-40B4-BE49-F238E27FC236}">
-                <a16:creationId xmlns:a16="http://schemas.microsoft.com/office/drawing/2014/main" id="{4AB2B999-FF05-483C-91CF-3FCDBA97EF21}"/>
+                <a16:creationId xmlns:a16="http://schemas.microsoft.com/office/drawing/2014/main" id="{66236B76-0CCA-4512-9F2E-37AD7226DB0C}"/>
               </a:ext>
             </a:extLst>
           </p:cNvPr>
@@ -19471,7 +19471,7 @@
           <p:cNvPr id="9" name="">
             <a:extLst xmlns:a="http://schemas.openxmlformats.org/drawingml/2006/main">
               <a:ext uri="{FF2B5EF4-FFF2-40B4-BE49-F238E27FC236}">
-                <a16:creationId xmlns:a16="http://schemas.microsoft.com/office/drawing/2014/main" id="{1556A008-9A71-4379-AE86-66378476006C}"/>
+                <a16:creationId xmlns:a16="http://schemas.microsoft.com/office/drawing/2014/main" id="{67E961FC-665D-448A-B216-1D5EF3EF9C22}"/>
               </a:ext>
             </a:extLst>
           </p:cNvPr>
@@ -19502,7 +19502,7 @@
           <p:cNvPr id="10" name="">
             <a:extLst xmlns:a="http://schemas.openxmlformats.org/drawingml/2006/main">
               <a:ext uri="{FF2B5EF4-FFF2-40B4-BE49-F238E27FC236}">
-                <a16:creationId xmlns:a16="http://schemas.microsoft.com/office/drawing/2014/main" id="{A01190A0-0A7C-4ADF-A7D9-387262514D59}"/>
+                <a16:creationId xmlns:a16="http://schemas.microsoft.com/office/drawing/2014/main" id="{BB08FC35-49FD-4F92-B69C-77790FA961E1}"/>
               </a:ext>
             </a:extLst>
           </p:cNvPr>
@@ -19522,7 +19522,7 @@
           <a:noFill xmlns:a="http://schemas.openxmlformats.org/drawingml/2006/main"/>
           <a:ln xmlns:a="http://schemas.openxmlformats.org/drawingml/2006/main" w="9525">
             <a:solidFill>
-              <a:srgbClr val="2A4D65"/>
+              <a:srgbClr val="C5D4DC"/>
             </a:solidFill>
             <a:prstDash val="solid"/>
           </a:ln>
@@ -19533,7 +19533,7 @@
           <p:cNvPr id="11" name="">
             <a:extLst xmlns:a="http://schemas.openxmlformats.org/drawingml/2006/main">
               <a:ext uri="{FF2B5EF4-FFF2-40B4-BE49-F238E27FC236}">
-                <a16:creationId xmlns:a16="http://schemas.microsoft.com/office/drawing/2014/main" id="{DBED640C-855F-4094-95E9-BC4DC04BD9A4}"/>
+                <a16:creationId xmlns:a16="http://schemas.microsoft.com/office/drawing/2014/main" id="{45EEF821-0A2A-434E-A1AA-9DE0483DDAE6}"/>
               </a:ext>
             </a:extLst>
           </p:cNvPr>
@@ -19591,7 +19591,7 @@
           <p:cNvPr id="12" name="">
             <a:extLst xmlns:a="http://schemas.openxmlformats.org/drawingml/2006/main">
               <a:ext uri="{FF2B5EF4-FFF2-40B4-BE49-F238E27FC236}">
-                <a16:creationId xmlns:a16="http://schemas.microsoft.com/office/drawing/2014/main" id="{5443C22D-6963-4CCD-9FCA-E3A4BCA47E58}"/>
+                <a16:creationId xmlns:a16="http://schemas.microsoft.com/office/drawing/2014/main" id="{87619834-2F08-4233-8C84-4203EE89EC40}"/>
               </a:ext>
             </a:extLst>
           </p:cNvPr>
@@ -19623,7 +19623,7 @@
             <a:pPr algn="r">
               <a:defRPr sz="750" b="1">
                 <a:solidFill>
-                  <a:srgbClr val="B8C9D3"/>
+                  <a:srgbClr val="587080"/>
                 </a:solidFill>
                 <a:latin typeface="Arial"/>
                 <a:ea typeface="Arial"/>
@@ -19633,7 +19633,7 @@
             <a:r>
               <a:rPr sz="750" b="1">
                 <a:solidFill>
-                  <a:srgbClr val="B8C9D3"/>
+                  <a:srgbClr val="587080"/>
                 </a:solidFill>
                 <a:latin typeface="Arial"/>
                 <a:ea typeface="Arial"/>
@@ -19649,7 +19649,7 @@
           <p:cNvPr id="13" name="">
             <a:extLst xmlns:a="http://schemas.openxmlformats.org/drawingml/2006/main">
               <a:ext uri="{FF2B5EF4-FFF2-40B4-BE49-F238E27FC236}">
-                <a16:creationId xmlns:a16="http://schemas.microsoft.com/office/drawing/2014/main" id="{A786D6CB-0122-459D-9B82-2FFC779F2EEF}"/>
+                <a16:creationId xmlns:a16="http://schemas.microsoft.com/office/drawing/2014/main" id="{5359BEEC-2BFF-4AD4-A7F4-C6C48275F995}"/>
               </a:ext>
             </a:extLst>
           </p:cNvPr>
@@ -19681,7 +19681,7 @@
             <a:pPr algn="l">
               <a:defRPr sz="600" b="0">
                 <a:solidFill>
-                  <a:srgbClr val="B8C9D3"/>
+                  <a:srgbClr val="587080"/>
                 </a:solidFill>
                 <a:latin typeface="Arial"/>
                 <a:ea typeface="Arial"/>
@@ -19691,7 +19691,7 @@
             <a:r>
               <a:rPr sz="600" b="0">
                 <a:solidFill>
-                  <a:srgbClr val="B8C9D3"/>
+                  <a:srgbClr val="587080"/>
                 </a:solidFill>
                 <a:latin typeface="Arial"/>
                 <a:ea typeface="Arial"/>
@@ -19707,7 +19707,7 @@
           <p:cNvPr id="14" name="">
             <a:extLst xmlns:a="http://schemas.openxmlformats.org/drawingml/2006/main">
               <a:ext uri="{FF2B5EF4-FFF2-40B4-BE49-F238E27FC236}">
-                <a16:creationId xmlns:a16="http://schemas.microsoft.com/office/drawing/2014/main" id="{B1B8C50C-4E79-4630-B723-B34FD1EA12B8}"/>
+                <a16:creationId xmlns:a16="http://schemas.microsoft.com/office/drawing/2014/main" id="{BA54D1D4-D14F-47BB-92D6-4DCDA026F380}"/>
               </a:ext>
             </a:extLst>
           </p:cNvPr>
@@ -19739,7 +19739,7 @@
             <a:pPr algn="r">
               <a:defRPr sz="600" b="1">
                 <a:solidFill>
-                  <a:srgbClr val="B8C9D3"/>
+                  <a:srgbClr val="587080"/>
                 </a:solidFill>
                 <a:latin typeface="Arial"/>
                 <a:ea typeface="Arial"/>
@@ -19749,7 +19749,7 @@
             <a:r>
               <a:rPr sz="600" b="1">
                 <a:solidFill>
-                  <a:srgbClr val="B8C9D3"/>
+                  <a:srgbClr val="587080"/>
                 </a:solidFill>
                 <a:latin typeface="Arial"/>
                 <a:ea typeface="Arial"/>
@@ -19765,7 +19765,7 @@
           <p:cNvPr id="15" name="">
             <a:extLst xmlns:a="http://schemas.openxmlformats.org/drawingml/2006/main">
               <a:ext uri="{FF2B5EF4-FFF2-40B4-BE49-F238E27FC236}">
-                <a16:creationId xmlns:a16="http://schemas.microsoft.com/office/drawing/2014/main" id="{84A0CD53-179E-4182-92A2-154300E818E9}"/>
+                <a16:creationId xmlns:a16="http://schemas.microsoft.com/office/drawing/2014/main" id="{F92464D1-0304-42D1-A5EA-E15CBB91E26B}"/>
               </a:ext>
             </a:extLst>
           </p:cNvPr>
@@ -19797,7 +19797,7 @@
             <a:pPr algn="l">
               <a:defRPr sz="2250" b="0">
                 <a:solidFill>
-                  <a:srgbClr val="00E1C6"/>
+                  <a:srgbClr val="132E41"/>
                 </a:solidFill>
                 <a:latin typeface="Georgia"/>
                 <a:ea typeface="Georgia"/>
@@ -19807,7 +19807,7 @@
             <a:r>
               <a:rPr sz="2250" b="0">
                 <a:solidFill>
-                  <a:srgbClr val="00E1C6"/>
+                  <a:srgbClr val="132E41"/>
                 </a:solidFill>
                 <a:latin typeface="Georgia"/>
                 <a:ea typeface="Georgia"/>
@@ -19823,7 +19823,7 @@
           <p:cNvPr id="16" name="">
             <a:extLst xmlns:a="http://schemas.openxmlformats.org/drawingml/2006/main">
               <a:ext uri="{FF2B5EF4-FFF2-40B4-BE49-F238E27FC236}">
-                <a16:creationId xmlns:a16="http://schemas.microsoft.com/office/drawing/2014/main" id="{A4976373-6C08-4110-BA0E-752D8FBBA049}"/>
+                <a16:creationId xmlns:a16="http://schemas.microsoft.com/office/drawing/2014/main" id="{D096921C-0E8D-4D27-B742-66094C95EF51}"/>
               </a:ext>
             </a:extLst>
           </p:cNvPr>
@@ -19855,7 +19855,7 @@
             <a:pPr algn="l">
               <a:defRPr sz="1125" b="0">
                 <a:solidFill>
-                  <a:srgbClr val="B8C9D3"/>
+                  <a:srgbClr val="587080"/>
                 </a:solidFill>
                 <a:latin typeface="Arial"/>
                 <a:ea typeface="Arial"/>
@@ -19865,7 +19865,7 @@
             <a:r>
               <a:rPr sz="1125" b="0">
                 <a:solidFill>
-                  <a:srgbClr val="B8C9D3"/>
+                  <a:srgbClr val="587080"/>
                 </a:solidFill>
                 <a:latin typeface="Arial"/>
                 <a:ea typeface="Arial"/>
@@ -19881,7 +19881,7 @@
           <p:cNvPr id="17" name="">
             <a:extLst xmlns:a="http://schemas.openxmlformats.org/drawingml/2006/main">
               <a:ext uri="{FF2B5EF4-FFF2-40B4-BE49-F238E27FC236}">
-                <a16:creationId xmlns:a16="http://schemas.microsoft.com/office/drawing/2014/main" id="{DB4A94DD-59C7-45B3-88CB-3E317CD87227}"/>
+                <a16:creationId xmlns:a16="http://schemas.microsoft.com/office/drawing/2014/main" id="{48FA33D4-9C89-4B38-868D-E3F78D683907}"/>
               </a:ext>
             </a:extLst>
           </p:cNvPr>
@@ -19916,7 +19916,7 @@
           <p:cNvPr id="18" name="">
             <a:extLst xmlns:a="http://schemas.openxmlformats.org/drawingml/2006/main">
               <a:ext uri="{FF2B5EF4-FFF2-40B4-BE49-F238E27FC236}">
-                <a16:creationId xmlns:a16="http://schemas.microsoft.com/office/drawing/2014/main" id="{CDE31FD7-6DA9-495E-9FAB-00D9AFD00405}"/>
+                <a16:creationId xmlns:a16="http://schemas.microsoft.com/office/drawing/2014/main" id="{25316540-E119-4AC2-86D9-8D60CFF4D23D}"/>
               </a:ext>
             </a:extLst>
           </p:cNvPr>
@@ -19951,7 +19951,7 @@
           <p:cNvPr id="19" name="">
             <a:extLst xmlns:a="http://schemas.openxmlformats.org/drawingml/2006/main">
               <a:ext uri="{FF2B5EF4-FFF2-40B4-BE49-F238E27FC236}">
-                <a16:creationId xmlns:a16="http://schemas.microsoft.com/office/drawing/2014/main" id="{42C9B470-29C5-4874-ADA6-183BD7AF0CC7}"/>
+                <a16:creationId xmlns:a16="http://schemas.microsoft.com/office/drawing/2014/main" id="{1A861B51-7805-4677-9C70-E8C3109EAB7F}"/>
               </a:ext>
             </a:extLst>
           </p:cNvPr>
@@ -20013,7 +20013,7 @@
           <p:nvPr/>
         </p:nvPicPr>
         <p:blipFill>
-          <a:blip xmlns:r="http://schemas.openxmlformats.org/officeDocument/2006/relationships" xmlns:a="http://schemas.openxmlformats.org/drawingml/2006/main" r:embed="Rc90983d34b224e31"/>
+          <a:blip xmlns:r="http://schemas.openxmlformats.org/officeDocument/2006/relationships" xmlns:a="http://schemas.openxmlformats.org/drawingml/2006/main" r:embed="R5482b7631acf4bc8"/>
           <a:stretch xmlns:a="http://schemas.openxmlformats.org/drawingml/2006/main"/>
         </p:blipFill>
         <p:spPr>
@@ -20033,7 +20033,7 @@
           <p:cNvPr id="21" name="">
             <a:extLst xmlns:a="http://schemas.openxmlformats.org/drawingml/2006/main">
               <a:ext uri="{FF2B5EF4-FFF2-40B4-BE49-F238E27FC236}">
-                <a16:creationId xmlns:a16="http://schemas.microsoft.com/office/drawing/2014/main" id="{502E385F-0485-459A-BC6B-B15523CFBC3A}"/>
+                <a16:creationId xmlns:a16="http://schemas.microsoft.com/office/drawing/2014/main" id="{E92A41D2-C3C9-4E0E-A32A-C92A132FF513}"/>
               </a:ext>
             </a:extLst>
           </p:cNvPr>
@@ -20091,7 +20091,7 @@
           <p:cNvPr id="22" name="">
             <a:extLst xmlns:a="http://schemas.openxmlformats.org/drawingml/2006/main">
               <a:ext uri="{FF2B5EF4-FFF2-40B4-BE49-F238E27FC236}">
-                <a16:creationId xmlns:a16="http://schemas.microsoft.com/office/drawing/2014/main" id="{FE7959B1-03CF-4E3C-9041-9C2E8F085703}"/>
+                <a16:creationId xmlns:a16="http://schemas.microsoft.com/office/drawing/2014/main" id="{D97DB9DE-C8FD-46E5-8E9C-F03059ECB3AB}"/>
               </a:ext>
             </a:extLst>
           </p:cNvPr>
@@ -20111,11 +20111,11 @@
             </a:avLst>
           </a:prstGeom>
           <a:solidFill xmlns:a="http://schemas.openxmlformats.org/drawingml/2006/main">
-            <a:srgbClr val="102F46"/>
+            <a:srgbClr val="FFFFFF"/>
           </a:solidFill>
           <a:ln xmlns:a="http://schemas.openxmlformats.org/drawingml/2006/main" w="9525">
             <a:solidFill>
-              <a:srgbClr val="2A4D65"/>
+              <a:srgbClr val="C5D4DC"/>
             </a:solidFill>
             <a:prstDash val="solid"/>
           </a:ln>
@@ -20126,7 +20126,7 @@
           <p:cNvPr id="23" name="">
             <a:extLst xmlns:a="http://schemas.openxmlformats.org/drawingml/2006/main">
               <a:ext uri="{FF2B5EF4-FFF2-40B4-BE49-F238E27FC236}">
-                <a16:creationId xmlns:a16="http://schemas.microsoft.com/office/drawing/2014/main" id="{5AF9A6B7-4201-474C-A09F-5D68FD286C2E}"/>
+                <a16:creationId xmlns:a16="http://schemas.microsoft.com/office/drawing/2014/main" id="{3433F99D-0F80-45F3-A635-F4CECE01278D}"/>
               </a:ext>
             </a:extLst>
           </p:cNvPr>
@@ -20184,7 +20184,7 @@
           <p:cNvPr id="24" name="">
             <a:extLst xmlns:a="http://schemas.openxmlformats.org/drawingml/2006/main">
               <a:ext uri="{FF2B5EF4-FFF2-40B4-BE49-F238E27FC236}">
-                <a16:creationId xmlns:a16="http://schemas.microsoft.com/office/drawing/2014/main" id="{114C0768-3E25-40D7-9B83-F7604316DDCF}"/>
+                <a16:creationId xmlns:a16="http://schemas.microsoft.com/office/drawing/2014/main" id="{B50C8851-0364-4C68-8DA0-3E51357ED986}"/>
               </a:ext>
             </a:extLst>
           </p:cNvPr>
@@ -20216,7 +20216,7 @@
             <a:pPr algn="l">
               <a:defRPr sz="825" b="0">
                 <a:solidFill>
-                  <a:srgbClr val="B8C9D3"/>
+                  <a:srgbClr val="587080"/>
                 </a:solidFill>
                 <a:latin typeface="Arial"/>
                 <a:ea typeface="Arial"/>
@@ -20226,7 +20226,7 @@
             <a:r>
               <a:rPr sz="825" b="0">
                 <a:solidFill>
-                  <a:srgbClr val="B8C9D3"/>
+                  <a:srgbClr val="587080"/>
                 </a:solidFill>
                 <a:latin typeface="Arial"/>
                 <a:ea typeface="Arial"/>
@@ -20242,7 +20242,7 @@
           <p:cNvPr id="25" name="">
             <a:extLst xmlns:a="http://schemas.openxmlformats.org/drawingml/2006/main">
               <a:ext uri="{FF2B5EF4-FFF2-40B4-BE49-F238E27FC236}">
-                <a16:creationId xmlns:a16="http://schemas.microsoft.com/office/drawing/2014/main" id="{710E1493-4303-4A78-BC95-1F3ADAE98B79}"/>
+                <a16:creationId xmlns:a16="http://schemas.microsoft.com/office/drawing/2014/main" id="{5248CBB6-A9B2-4E84-99B8-9C8A8BBF3D0F}"/>
               </a:ext>
             </a:extLst>
           </p:cNvPr>
@@ -20262,11 +20262,11 @@
             </a:avLst>
           </a:prstGeom>
           <a:solidFill xmlns:a="http://schemas.openxmlformats.org/drawingml/2006/main">
-            <a:srgbClr val="102F46"/>
+            <a:srgbClr val="FFFFFF"/>
           </a:solidFill>
           <a:ln xmlns:a="http://schemas.openxmlformats.org/drawingml/2006/main" w="9525">
             <a:solidFill>
-              <a:srgbClr val="2A4D65"/>
+              <a:srgbClr val="C5D4DC"/>
             </a:solidFill>
             <a:prstDash val="solid"/>
           </a:ln>
@@ -20277,7 +20277,7 @@
           <p:cNvPr id="26" name="">
             <a:extLst xmlns:a="http://schemas.openxmlformats.org/drawingml/2006/main">
               <a:ext uri="{FF2B5EF4-FFF2-40B4-BE49-F238E27FC236}">
-                <a16:creationId xmlns:a16="http://schemas.microsoft.com/office/drawing/2014/main" id="{2C7BDA40-C166-41D4-AA39-D39DF850E8DB}"/>
+                <a16:creationId xmlns:a16="http://schemas.microsoft.com/office/drawing/2014/main" id="{097D9C77-B66D-47CA-923A-9C6E4333D9AD}"/>
               </a:ext>
             </a:extLst>
           </p:cNvPr>
@@ -20335,7 +20335,7 @@
           <p:cNvPr id="27" name="">
             <a:extLst xmlns:a="http://schemas.openxmlformats.org/drawingml/2006/main">
               <a:ext uri="{FF2B5EF4-FFF2-40B4-BE49-F238E27FC236}">
-                <a16:creationId xmlns:a16="http://schemas.microsoft.com/office/drawing/2014/main" id="{FFFB824F-9C43-451E-94D4-E24EBC9D386C}"/>
+                <a16:creationId xmlns:a16="http://schemas.microsoft.com/office/drawing/2014/main" id="{C1D86FBD-3828-4C31-8F5B-40C9CBC2C318}"/>
               </a:ext>
             </a:extLst>
           </p:cNvPr>
@@ -20367,7 +20367,7 @@
             <a:pPr algn="l">
               <a:defRPr sz="825" b="0">
                 <a:solidFill>
-                  <a:srgbClr val="B8C9D3"/>
+                  <a:srgbClr val="587080"/>
                 </a:solidFill>
                 <a:latin typeface="Arial"/>
                 <a:ea typeface="Arial"/>
@@ -20377,7 +20377,7 @@
             <a:r>
               <a:rPr sz="825" b="0">
                 <a:solidFill>
-                  <a:srgbClr val="B8C9D3"/>
+                  <a:srgbClr val="587080"/>
                 </a:solidFill>
                 <a:latin typeface="Arial"/>
                 <a:ea typeface="Arial"/>
@@ -20393,7 +20393,7 @@
           <p:cNvPr id="28" name="">
             <a:extLst xmlns:a="http://schemas.openxmlformats.org/drawingml/2006/main">
               <a:ext uri="{FF2B5EF4-FFF2-40B4-BE49-F238E27FC236}">
-                <a16:creationId xmlns:a16="http://schemas.microsoft.com/office/drawing/2014/main" id="{72B233C9-E3CE-42F0-8CC3-E30B46BB128B}"/>
+                <a16:creationId xmlns:a16="http://schemas.microsoft.com/office/drawing/2014/main" id="{0BF1E22E-4628-4CA2-9818-ED3BAC735A32}"/>
               </a:ext>
             </a:extLst>
           </p:cNvPr>
@@ -20413,11 +20413,11 @@
             </a:avLst>
           </a:prstGeom>
           <a:solidFill xmlns:a="http://schemas.openxmlformats.org/drawingml/2006/main">
-            <a:srgbClr val="102F46"/>
+            <a:srgbClr val="FFFFFF"/>
           </a:solidFill>
           <a:ln xmlns:a="http://schemas.openxmlformats.org/drawingml/2006/main" w="9525">
             <a:solidFill>
-              <a:srgbClr val="2A4D65"/>
+              <a:srgbClr val="C5D4DC"/>
             </a:solidFill>
             <a:prstDash val="solid"/>
           </a:ln>
@@ -20428,7 +20428,7 @@
           <p:cNvPr id="29" name="">
             <a:extLst xmlns:a="http://schemas.openxmlformats.org/drawingml/2006/main">
               <a:ext uri="{FF2B5EF4-FFF2-40B4-BE49-F238E27FC236}">
-                <a16:creationId xmlns:a16="http://schemas.microsoft.com/office/drawing/2014/main" id="{897A442F-7C59-4956-A2F6-1B6CBF315298}"/>
+                <a16:creationId xmlns:a16="http://schemas.microsoft.com/office/drawing/2014/main" id="{379C9154-F3B2-4FF5-A87C-9BD8732FDD81}"/>
               </a:ext>
             </a:extLst>
           </p:cNvPr>
@@ -20486,7 +20486,7 @@
           <p:cNvPr id="30" name="">
             <a:extLst xmlns:a="http://schemas.openxmlformats.org/drawingml/2006/main">
               <a:ext uri="{FF2B5EF4-FFF2-40B4-BE49-F238E27FC236}">
-                <a16:creationId xmlns:a16="http://schemas.microsoft.com/office/drawing/2014/main" id="{52A57E61-FB50-4A23-B7E0-B5EC4A453570}"/>
+                <a16:creationId xmlns:a16="http://schemas.microsoft.com/office/drawing/2014/main" id="{D3170D01-67F5-443F-99D9-BF297A708E89}"/>
               </a:ext>
             </a:extLst>
           </p:cNvPr>
@@ -20518,7 +20518,7 @@
             <a:pPr algn="l">
               <a:defRPr sz="825" b="0">
                 <a:solidFill>
-                  <a:srgbClr val="B8C9D3"/>
+                  <a:srgbClr val="587080"/>
                 </a:solidFill>
                 <a:latin typeface="Arial"/>
                 <a:ea typeface="Arial"/>
@@ -20528,7 +20528,7 @@
             <a:r>
               <a:rPr sz="825" b="0">
                 <a:solidFill>
-                  <a:srgbClr val="B8C9D3"/>
+                  <a:srgbClr val="587080"/>
                 </a:solidFill>
                 <a:latin typeface="Arial"/>
                 <a:ea typeface="Arial"/>
@@ -20544,7 +20544,7 @@
           <p:cNvPr id="31" name="">
             <a:extLst xmlns:a="http://schemas.openxmlformats.org/drawingml/2006/main">
               <a:ext uri="{FF2B5EF4-FFF2-40B4-BE49-F238E27FC236}">
-                <a16:creationId xmlns:a16="http://schemas.microsoft.com/office/drawing/2014/main" id="{48007A2E-8851-4A49-BB49-87AB6F991E09}"/>
+                <a16:creationId xmlns:a16="http://schemas.microsoft.com/office/drawing/2014/main" id="{299F78D8-DD57-4240-8146-A7BBBE9AADA9}"/>
               </a:ext>
             </a:extLst>
           </p:cNvPr>
@@ -20576,7 +20576,7 @@
             <a:pPr algn="ctr">
               <a:defRPr sz="750" b="0">
                 <a:solidFill>
-                  <a:srgbClr val="B8C9D3"/>
+                  <a:srgbClr val="587080"/>
                 </a:solidFill>
                 <a:latin typeface="Arial"/>
                 <a:ea typeface="Arial"/>
@@ -20586,7 +20586,7 @@
             <a:r>
               <a:rPr sz="750" b="0">
                 <a:solidFill>
-                  <a:srgbClr val="B8C9D3"/>
+                  <a:srgbClr val="587080"/>
                 </a:solidFill>
                 <a:latin typeface="Arial"/>
                 <a:ea typeface="Arial"/>
@@ -20599,7 +20599,7 @@
             <a:pPr algn="ctr">
               <a:defRPr sz="750" b="0">
                 <a:solidFill>
-                  <a:srgbClr val="B8C9D3"/>
+                  <a:srgbClr val="587080"/>
                 </a:solidFill>
                 <a:latin typeface="Arial"/>
                 <a:ea typeface="Arial"/>
@@ -20609,7 +20609,7 @@
             <a:r>
               <a:rPr sz="750" b="0">
                 <a:solidFill>
-                  <a:srgbClr val="B8C9D3"/>
+                  <a:srgbClr val="587080"/>
                 </a:solidFill>
                 <a:latin typeface="Arial"/>
                 <a:ea typeface="Arial"/>
@@ -20623,7 +20623,7 @@
     </p:spTree>
     <p:extLst>
       <p:ext uri="{BB962C8B-B14F-4D97-AF65-F5344CB8AC3E}">
-        <p14:creationId xmlns:p14="http://schemas.microsoft.com/office/powerpoint/2010/main" val="1626819535"/>
+        <p14:creationId xmlns:p14="http://schemas.microsoft.com/office/powerpoint/2010/main" val="499452206"/>
       </p:ext>
     </p:extLst>
   </p:cSld>
@@ -20636,7 +20636,7 @@
     <p:bg>
       <p:bgPr>
         <a:solidFill xmlns:a="http://schemas.openxmlformats.org/drawingml/2006/main">
-          <a:srgbClr val="0E293C"/>
+          <a:srgbClr val="F3F1EB"/>
         </a:solidFill>
       </p:bgPr>
     </p:bg>
@@ -20654,7 +20654,7 @@
           <p:cNvPr id="32" name="">
             <a:extLst xmlns:a="http://schemas.openxmlformats.org/drawingml/2006/main">
               <a:ext uri="{FF2B5EF4-FFF2-40B4-BE49-F238E27FC236}">
-                <a16:creationId xmlns:a16="http://schemas.microsoft.com/office/drawing/2014/main" id="{202CEB1A-0FA4-4988-B821-6997DCC21D7B}"/>
+                <a16:creationId xmlns:a16="http://schemas.microsoft.com/office/drawing/2014/main" id="{392BFF6E-985B-45A3-AEBF-2D49C2C30AA4}"/>
               </a:ext>
             </a:extLst>
           </p:cNvPr>
@@ -20711,7 +20711,7 @@
           <p:cNvPr id="2" name="">
             <a:extLst xmlns:a="http://schemas.openxmlformats.org/drawingml/2006/main">
               <a:ext uri="{FF2B5EF4-FFF2-40B4-BE49-F238E27FC236}">
-                <a16:creationId xmlns:a16="http://schemas.microsoft.com/office/drawing/2014/main" id="{E4E76713-899D-4C79-A00B-36329EF71AE4}"/>
+                <a16:creationId xmlns:a16="http://schemas.microsoft.com/office/drawing/2014/main" id="{607AABE1-79A7-4AEA-9229-B612B968EC9E}"/>
               </a:ext>
             </a:extLst>
           </p:cNvPr>
@@ -20768,7 +20768,7 @@
           <p:cNvPr id="3" name="">
             <a:extLst xmlns:a="http://schemas.openxmlformats.org/drawingml/2006/main">
               <a:ext uri="{FF2B5EF4-FFF2-40B4-BE49-F238E27FC236}">
-                <a16:creationId xmlns:a16="http://schemas.microsoft.com/office/drawing/2014/main" id="{BD040354-2432-4894-9ECA-5B5B2EDF91F5}"/>
+                <a16:creationId xmlns:a16="http://schemas.microsoft.com/office/drawing/2014/main" id="{57581E4B-4839-4598-A4C9-E7FD0827250F}"/>
               </a:ext>
             </a:extLst>
           </p:cNvPr>
@@ -20825,7 +20825,7 @@
           <p:cNvPr id="4" name="">
             <a:extLst xmlns:a="http://schemas.openxmlformats.org/drawingml/2006/main">
               <a:ext uri="{FF2B5EF4-FFF2-40B4-BE49-F238E27FC236}">
-                <a16:creationId xmlns:a16="http://schemas.microsoft.com/office/drawing/2014/main" id="{3603AC11-983B-49C7-A5FF-3ED45EB62C57}"/>
+                <a16:creationId xmlns:a16="http://schemas.microsoft.com/office/drawing/2014/main" id="{85624920-306D-4019-A79F-1855F534F6FB}"/>
               </a:ext>
             </a:extLst>
           </p:cNvPr>
@@ -20856,7 +20856,7 @@
           <p:cNvPr id="5" name="">
             <a:extLst xmlns:a="http://schemas.openxmlformats.org/drawingml/2006/main">
               <a:ext uri="{FF2B5EF4-FFF2-40B4-BE49-F238E27FC236}">
-                <a16:creationId xmlns:a16="http://schemas.microsoft.com/office/drawing/2014/main" id="{2F51D47B-CD17-46EF-A668-69E98B4270F4}"/>
+                <a16:creationId xmlns:a16="http://schemas.microsoft.com/office/drawing/2014/main" id="{F80EBAFA-B8BF-4066-BB94-160B467D8F52}"/>
               </a:ext>
             </a:extLst>
           </p:cNvPr>
@@ -20876,7 +20876,7 @@
           <a:noFill xmlns:a="http://schemas.openxmlformats.org/drawingml/2006/main"/>
           <a:ln xmlns:a="http://schemas.openxmlformats.org/drawingml/2006/main" w="9525">
             <a:solidFill>
-              <a:srgbClr val="2A4D65"/>
+              <a:srgbClr val="C5D4DC"/>
             </a:solidFill>
             <a:prstDash val="solid"/>
           </a:ln>
@@ -20887,7 +20887,7 @@
           <p:cNvPr id="6" name="">
             <a:extLst xmlns:a="http://schemas.openxmlformats.org/drawingml/2006/main">
               <a:ext uri="{FF2B5EF4-FFF2-40B4-BE49-F238E27FC236}">
-                <a16:creationId xmlns:a16="http://schemas.microsoft.com/office/drawing/2014/main" id="{E1813A32-9714-4503-AE71-51DD23951C7F}"/>
+                <a16:creationId xmlns:a16="http://schemas.microsoft.com/office/drawing/2014/main" id="{3271CC82-96E8-43C9-A16B-2A76934A6E0A}"/>
               </a:ext>
             </a:extLst>
           </p:cNvPr>
@@ -20944,7 +20944,7 @@
           <p:cNvPr id="7" name="">
             <a:extLst xmlns:a="http://schemas.openxmlformats.org/drawingml/2006/main">
               <a:ext uri="{FF2B5EF4-FFF2-40B4-BE49-F238E27FC236}">
-                <a16:creationId xmlns:a16="http://schemas.microsoft.com/office/drawing/2014/main" id="{9B406644-6EBF-43A6-A99D-7608286B4FEA}"/>
+                <a16:creationId xmlns:a16="http://schemas.microsoft.com/office/drawing/2014/main" id="{2C68B8F0-D0E5-420B-98E5-87A628BC54DD}"/>
               </a:ext>
             </a:extLst>
           </p:cNvPr>
@@ -21001,7 +21001,7 @@
           <p:cNvPr id="8" name="">
             <a:extLst xmlns:a="http://schemas.openxmlformats.org/drawingml/2006/main">
               <a:ext uri="{FF2B5EF4-FFF2-40B4-BE49-F238E27FC236}">
-                <a16:creationId xmlns:a16="http://schemas.microsoft.com/office/drawing/2014/main" id="{37254844-0ACF-4406-8AD3-F2773AF6F8C1}"/>
+                <a16:creationId xmlns:a16="http://schemas.microsoft.com/office/drawing/2014/main" id="{02E0065D-FA51-40F8-BA86-B7C51ED57470}"/>
               </a:ext>
             </a:extLst>
           </p:cNvPr>
@@ -21058,7 +21058,7 @@
           <p:cNvPr id="9" name="">
             <a:extLst xmlns:a="http://schemas.openxmlformats.org/drawingml/2006/main">
               <a:ext uri="{FF2B5EF4-FFF2-40B4-BE49-F238E27FC236}">
-                <a16:creationId xmlns:a16="http://schemas.microsoft.com/office/drawing/2014/main" id="{F8AC119D-9BF9-4B50-977F-0C8B3C52C339}"/>
+                <a16:creationId xmlns:a16="http://schemas.microsoft.com/office/drawing/2014/main" id="{032AA200-66DE-42C5-9505-65AD9CF16F84}"/>
               </a:ext>
             </a:extLst>
           </p:cNvPr>
@@ -21089,7 +21089,7 @@
           <p:cNvPr id="10" name="">
             <a:extLst xmlns:a="http://schemas.openxmlformats.org/drawingml/2006/main">
               <a:ext uri="{FF2B5EF4-FFF2-40B4-BE49-F238E27FC236}">
-                <a16:creationId xmlns:a16="http://schemas.microsoft.com/office/drawing/2014/main" id="{20B5F258-97A0-490A-8EA7-4BF4B8A54C18}"/>
+                <a16:creationId xmlns:a16="http://schemas.microsoft.com/office/drawing/2014/main" id="{7E94685D-C874-4CC1-9237-9EB79F757752}"/>
               </a:ext>
             </a:extLst>
           </p:cNvPr>
@@ -21109,7 +21109,7 @@
           <a:noFill xmlns:a="http://schemas.openxmlformats.org/drawingml/2006/main"/>
           <a:ln xmlns:a="http://schemas.openxmlformats.org/drawingml/2006/main" w="9525">
             <a:solidFill>
-              <a:srgbClr val="2A4D65"/>
+              <a:srgbClr val="C5D4DC"/>
             </a:solidFill>
             <a:prstDash val="solid"/>
           </a:ln>
@@ -21120,7 +21120,7 @@
           <p:cNvPr id="11" name="">
             <a:extLst xmlns:a="http://schemas.openxmlformats.org/drawingml/2006/main">
               <a:ext uri="{FF2B5EF4-FFF2-40B4-BE49-F238E27FC236}">
-                <a16:creationId xmlns:a16="http://schemas.microsoft.com/office/drawing/2014/main" id="{E9EC2B44-4701-40D0-8D4A-2CC8E7EA0771}"/>
+                <a16:creationId xmlns:a16="http://schemas.microsoft.com/office/drawing/2014/main" id="{5E4312FB-1478-42C4-95C5-06C62A5F96E7}"/>
               </a:ext>
             </a:extLst>
           </p:cNvPr>
@@ -21178,7 +21178,7 @@
           <p:cNvPr id="12" name="">
             <a:extLst xmlns:a="http://schemas.openxmlformats.org/drawingml/2006/main">
               <a:ext uri="{FF2B5EF4-FFF2-40B4-BE49-F238E27FC236}">
-                <a16:creationId xmlns:a16="http://schemas.microsoft.com/office/drawing/2014/main" id="{A07C184A-665A-41A1-8EFF-DAD624135E27}"/>
+                <a16:creationId xmlns:a16="http://schemas.microsoft.com/office/drawing/2014/main" id="{022CFF9C-E001-40E0-9612-8B5F4270EC4D}"/>
               </a:ext>
             </a:extLst>
           </p:cNvPr>
@@ -21210,7 +21210,7 @@
             <a:pPr algn="r">
               <a:defRPr sz="750" b="1">
                 <a:solidFill>
-                  <a:srgbClr val="B8C9D3"/>
+                  <a:srgbClr val="587080"/>
                 </a:solidFill>
                 <a:latin typeface="Arial"/>
                 <a:ea typeface="Arial"/>
@@ -21220,7 +21220,7 @@
             <a:r>
               <a:rPr sz="750" b="1">
                 <a:solidFill>
-                  <a:srgbClr val="B8C9D3"/>
+                  <a:srgbClr val="587080"/>
                 </a:solidFill>
                 <a:latin typeface="Arial"/>
                 <a:ea typeface="Arial"/>
@@ -21236,7 +21236,7 @@
           <p:cNvPr id="13" name="">
             <a:extLst xmlns:a="http://schemas.openxmlformats.org/drawingml/2006/main">
               <a:ext uri="{FF2B5EF4-FFF2-40B4-BE49-F238E27FC236}">
-                <a16:creationId xmlns:a16="http://schemas.microsoft.com/office/drawing/2014/main" id="{7E925F42-F0EE-4F56-BF8D-FFE868D86CFE}"/>
+                <a16:creationId xmlns:a16="http://schemas.microsoft.com/office/drawing/2014/main" id="{AB995FAA-6452-4FB7-BEF3-F8471D32FB2E}"/>
               </a:ext>
             </a:extLst>
           </p:cNvPr>
@@ -21268,7 +21268,7 @@
             <a:pPr algn="l">
               <a:defRPr sz="600" b="0">
                 <a:solidFill>
-                  <a:srgbClr val="B8C9D3"/>
+                  <a:srgbClr val="587080"/>
                 </a:solidFill>
                 <a:latin typeface="Arial"/>
                 <a:ea typeface="Arial"/>
@@ -21278,7 +21278,7 @@
             <a:r>
               <a:rPr sz="600" b="0">
                 <a:solidFill>
-                  <a:srgbClr val="B8C9D3"/>
+                  <a:srgbClr val="587080"/>
                 </a:solidFill>
                 <a:latin typeface="Arial"/>
                 <a:ea typeface="Arial"/>
@@ -21294,7 +21294,7 @@
           <p:cNvPr id="14" name="">
             <a:extLst xmlns:a="http://schemas.openxmlformats.org/drawingml/2006/main">
               <a:ext uri="{FF2B5EF4-FFF2-40B4-BE49-F238E27FC236}">
-                <a16:creationId xmlns:a16="http://schemas.microsoft.com/office/drawing/2014/main" id="{53A9B991-522F-4482-92FD-A02926437C71}"/>
+                <a16:creationId xmlns:a16="http://schemas.microsoft.com/office/drawing/2014/main" id="{EF66A09F-176F-436A-9790-DCF4D96EE82A}"/>
               </a:ext>
             </a:extLst>
           </p:cNvPr>
@@ -21326,7 +21326,7 @@
             <a:pPr algn="r">
               <a:defRPr sz="600" b="1">
                 <a:solidFill>
-                  <a:srgbClr val="B8C9D3"/>
+                  <a:srgbClr val="587080"/>
                 </a:solidFill>
                 <a:latin typeface="Arial"/>
                 <a:ea typeface="Arial"/>
@@ -21336,7 +21336,7 @@
             <a:r>
               <a:rPr sz="600" b="1">
                 <a:solidFill>
-                  <a:srgbClr val="B8C9D3"/>
+                  <a:srgbClr val="587080"/>
                 </a:solidFill>
                 <a:latin typeface="Arial"/>
                 <a:ea typeface="Arial"/>
@@ -21352,7 +21352,7 @@
           <p:cNvPr id="15" name="">
             <a:extLst xmlns:a="http://schemas.openxmlformats.org/drawingml/2006/main">
               <a:ext uri="{FF2B5EF4-FFF2-40B4-BE49-F238E27FC236}">
-                <a16:creationId xmlns:a16="http://schemas.microsoft.com/office/drawing/2014/main" id="{2758E405-E2E1-484F-A759-4BFD5BFA971A}"/>
+                <a16:creationId xmlns:a16="http://schemas.microsoft.com/office/drawing/2014/main" id="{22A39E42-B912-4ABB-B940-13B6AAD5CCF8}"/>
               </a:ext>
             </a:extLst>
           </p:cNvPr>
@@ -21384,7 +21384,7 @@
             <a:pPr algn="l">
               <a:defRPr sz="2250" b="0">
                 <a:solidFill>
-                  <a:srgbClr val="00E1C6"/>
+                  <a:srgbClr val="132E41"/>
                 </a:solidFill>
                 <a:latin typeface="Georgia"/>
                 <a:ea typeface="Georgia"/>
@@ -21394,7 +21394,7 @@
             <a:r>
               <a:rPr sz="2250" b="0">
                 <a:solidFill>
-                  <a:srgbClr val="00E1C6"/>
+                  <a:srgbClr val="132E41"/>
                 </a:solidFill>
                 <a:latin typeface="Georgia"/>
                 <a:ea typeface="Georgia"/>
@@ -21410,7 +21410,7 @@
           <p:cNvPr id="16" name="">
             <a:extLst xmlns:a="http://schemas.openxmlformats.org/drawingml/2006/main">
               <a:ext uri="{FF2B5EF4-FFF2-40B4-BE49-F238E27FC236}">
-                <a16:creationId xmlns:a16="http://schemas.microsoft.com/office/drawing/2014/main" id="{E38E106C-964F-4A51-829A-0AAD7A99982D}"/>
+                <a16:creationId xmlns:a16="http://schemas.microsoft.com/office/drawing/2014/main" id="{82185EE2-5355-4482-88AF-3BA779BDFE29}"/>
               </a:ext>
             </a:extLst>
           </p:cNvPr>
@@ -21442,7 +21442,7 @@
             <a:pPr algn="l">
               <a:defRPr sz="1125" b="0">
                 <a:solidFill>
-                  <a:srgbClr val="B8C9D3"/>
+                  <a:srgbClr val="587080"/>
                 </a:solidFill>
                 <a:latin typeface="Arial"/>
                 <a:ea typeface="Arial"/>
@@ -21452,7 +21452,7 @@
             <a:r>
               <a:rPr sz="1125" b="0">
                 <a:solidFill>
-                  <a:srgbClr val="B8C9D3"/>
+                  <a:srgbClr val="587080"/>
                 </a:solidFill>
                 <a:latin typeface="Arial"/>
                 <a:ea typeface="Arial"/>
@@ -21468,7 +21468,7 @@
           <p:cNvPr id="17" name="">
             <a:extLst xmlns:a="http://schemas.openxmlformats.org/drawingml/2006/main">
               <a:ext uri="{FF2B5EF4-FFF2-40B4-BE49-F238E27FC236}">
-                <a16:creationId xmlns:a16="http://schemas.microsoft.com/office/drawing/2014/main" id="{74E22370-B395-4E34-8CA4-211A964E3F99}"/>
+                <a16:creationId xmlns:a16="http://schemas.microsoft.com/office/drawing/2014/main" id="{4661C973-7056-4F48-A808-F8F30C3AB915}"/>
               </a:ext>
             </a:extLst>
           </p:cNvPr>
@@ -21503,7 +21503,7 @@
           <p:cNvPr id="18" name="">
             <a:extLst xmlns:a="http://schemas.openxmlformats.org/drawingml/2006/main">
               <a:ext uri="{FF2B5EF4-FFF2-40B4-BE49-F238E27FC236}">
-                <a16:creationId xmlns:a16="http://schemas.microsoft.com/office/drawing/2014/main" id="{9275BF22-34BC-4561-886A-8756000B8582}"/>
+                <a16:creationId xmlns:a16="http://schemas.microsoft.com/office/drawing/2014/main" id="{E1476D3D-5626-49CC-9DD9-FB9B89048DAF}"/>
               </a:ext>
             </a:extLst>
           </p:cNvPr>
@@ -21538,7 +21538,7 @@
           <p:cNvPr id="19" name="">
             <a:extLst xmlns:a="http://schemas.openxmlformats.org/drawingml/2006/main">
               <a:ext uri="{FF2B5EF4-FFF2-40B4-BE49-F238E27FC236}">
-                <a16:creationId xmlns:a16="http://schemas.microsoft.com/office/drawing/2014/main" id="{E4884AE7-E1C6-42D6-A7F2-3E991EF8943B}"/>
+                <a16:creationId xmlns:a16="http://schemas.microsoft.com/office/drawing/2014/main" id="{9E257DE6-1E8E-4CC2-8CA6-854D75E764F9}"/>
               </a:ext>
             </a:extLst>
           </p:cNvPr>
@@ -21600,7 +21600,7 @@
           <p:nvPr/>
         </p:nvPicPr>
         <p:blipFill>
-          <a:blip xmlns:r="http://schemas.openxmlformats.org/officeDocument/2006/relationships" xmlns:a="http://schemas.openxmlformats.org/drawingml/2006/main" r:embed="R5e0373436c834a3c"/>
+          <a:blip xmlns:r="http://schemas.openxmlformats.org/officeDocument/2006/relationships" xmlns:a="http://schemas.openxmlformats.org/drawingml/2006/main" r:embed="R80caff7a98b842aa"/>
           <a:stretch xmlns:a="http://schemas.openxmlformats.org/drawingml/2006/main"/>
         </p:blipFill>
         <p:spPr>
@@ -21620,7 +21620,7 @@
           <p:cNvPr id="21" name="">
             <a:extLst xmlns:a="http://schemas.openxmlformats.org/drawingml/2006/main">
               <a:ext uri="{FF2B5EF4-FFF2-40B4-BE49-F238E27FC236}">
-                <a16:creationId xmlns:a16="http://schemas.microsoft.com/office/drawing/2014/main" id="{7CE14A83-13A8-4DDC-A522-7F3FA517E0E9}"/>
+                <a16:creationId xmlns:a16="http://schemas.microsoft.com/office/drawing/2014/main" id="{351E4B88-36EF-4263-B53D-4CF7393FEFB4}"/>
               </a:ext>
             </a:extLst>
           </p:cNvPr>
@@ -21678,7 +21678,7 @@
           <p:cNvPr id="22" name="">
             <a:extLst xmlns:a="http://schemas.openxmlformats.org/drawingml/2006/main">
               <a:ext uri="{FF2B5EF4-FFF2-40B4-BE49-F238E27FC236}">
-                <a16:creationId xmlns:a16="http://schemas.microsoft.com/office/drawing/2014/main" id="{E8C70CDD-40BE-4B65-AAC7-F0EFCEC2F89C}"/>
+                <a16:creationId xmlns:a16="http://schemas.microsoft.com/office/drawing/2014/main" id="{65134B3C-75A3-40E2-9923-1EC468A33FCD}"/>
               </a:ext>
             </a:extLst>
           </p:cNvPr>
@@ -21698,11 +21698,11 @@
             </a:avLst>
           </a:prstGeom>
           <a:solidFill xmlns:a="http://schemas.openxmlformats.org/drawingml/2006/main">
-            <a:srgbClr val="102F46"/>
+            <a:srgbClr val="FFFFFF"/>
           </a:solidFill>
           <a:ln xmlns:a="http://schemas.openxmlformats.org/drawingml/2006/main" w="9525">
             <a:solidFill>
-              <a:srgbClr val="2A4D65"/>
+              <a:srgbClr val="C5D4DC"/>
             </a:solidFill>
             <a:prstDash val="solid"/>
           </a:ln>
@@ -21713,7 +21713,7 @@
           <p:cNvPr id="23" name="">
             <a:extLst xmlns:a="http://schemas.openxmlformats.org/drawingml/2006/main">
               <a:ext uri="{FF2B5EF4-FFF2-40B4-BE49-F238E27FC236}">
-                <a16:creationId xmlns:a16="http://schemas.microsoft.com/office/drawing/2014/main" id="{8D12E05A-96C9-4531-A4E8-38A9FC6F70F7}"/>
+                <a16:creationId xmlns:a16="http://schemas.microsoft.com/office/drawing/2014/main" id="{AEDBEF0B-A9C7-4A94-AD91-EC4E985895F2}"/>
               </a:ext>
             </a:extLst>
           </p:cNvPr>
@@ -21771,7 +21771,7 @@
           <p:cNvPr id="24" name="">
             <a:extLst xmlns:a="http://schemas.openxmlformats.org/drawingml/2006/main">
               <a:ext uri="{FF2B5EF4-FFF2-40B4-BE49-F238E27FC236}">
-                <a16:creationId xmlns:a16="http://schemas.microsoft.com/office/drawing/2014/main" id="{B5F274E5-E3B4-4755-A6FC-0655465BF05E}"/>
+                <a16:creationId xmlns:a16="http://schemas.microsoft.com/office/drawing/2014/main" id="{036588FC-6BB9-465F-AD73-F351F9F20EE2}"/>
               </a:ext>
             </a:extLst>
           </p:cNvPr>
@@ -21803,7 +21803,7 @@
             <a:pPr algn="l">
               <a:defRPr sz="825" b="0">
                 <a:solidFill>
-                  <a:srgbClr val="B8C9D3"/>
+                  <a:srgbClr val="587080"/>
                 </a:solidFill>
                 <a:latin typeface="Arial"/>
                 <a:ea typeface="Arial"/>
@@ -21813,7 +21813,7 @@
             <a:r>
               <a:rPr sz="825" b="0">
                 <a:solidFill>
-                  <a:srgbClr val="B8C9D3"/>
+                  <a:srgbClr val="587080"/>
                 </a:solidFill>
                 <a:latin typeface="Arial"/>
                 <a:ea typeface="Arial"/>
@@ -21829,7 +21829,7 @@
           <p:cNvPr id="25" name="">
             <a:extLst xmlns:a="http://schemas.openxmlformats.org/drawingml/2006/main">
               <a:ext uri="{FF2B5EF4-FFF2-40B4-BE49-F238E27FC236}">
-                <a16:creationId xmlns:a16="http://schemas.microsoft.com/office/drawing/2014/main" id="{F651E902-D768-4829-A60E-F56CE6AED01A}"/>
+                <a16:creationId xmlns:a16="http://schemas.microsoft.com/office/drawing/2014/main" id="{D079EA51-2131-48A1-AC21-EA9921DE0246}"/>
               </a:ext>
             </a:extLst>
           </p:cNvPr>
@@ -21849,11 +21849,11 @@
             </a:avLst>
           </a:prstGeom>
           <a:solidFill xmlns:a="http://schemas.openxmlformats.org/drawingml/2006/main">
-            <a:srgbClr val="102F46"/>
+            <a:srgbClr val="FFFFFF"/>
           </a:solidFill>
           <a:ln xmlns:a="http://schemas.openxmlformats.org/drawingml/2006/main" w="9525">
             <a:solidFill>
-              <a:srgbClr val="2A4D65"/>
+              <a:srgbClr val="C5D4DC"/>
             </a:solidFill>
             <a:prstDash val="solid"/>
           </a:ln>
@@ -21864,7 +21864,7 @@
           <p:cNvPr id="26" name="">
             <a:extLst xmlns:a="http://schemas.openxmlformats.org/drawingml/2006/main">
               <a:ext uri="{FF2B5EF4-FFF2-40B4-BE49-F238E27FC236}">
-                <a16:creationId xmlns:a16="http://schemas.microsoft.com/office/drawing/2014/main" id="{70E29028-1FA0-4D4F-A648-4AF3FE38A91A}"/>
+                <a16:creationId xmlns:a16="http://schemas.microsoft.com/office/drawing/2014/main" id="{0C8F255D-6EF1-4FF7-99CB-A466B3B8EED8}"/>
               </a:ext>
             </a:extLst>
           </p:cNvPr>
@@ -21922,7 +21922,7 @@
           <p:cNvPr id="27" name="">
             <a:extLst xmlns:a="http://schemas.openxmlformats.org/drawingml/2006/main">
               <a:ext uri="{FF2B5EF4-FFF2-40B4-BE49-F238E27FC236}">
-                <a16:creationId xmlns:a16="http://schemas.microsoft.com/office/drawing/2014/main" id="{3CCE4FB0-850F-413A-AF29-2E521F00D2CB}"/>
+                <a16:creationId xmlns:a16="http://schemas.microsoft.com/office/drawing/2014/main" id="{135435A6-F2D7-4903-A132-9434CB85B942}"/>
               </a:ext>
             </a:extLst>
           </p:cNvPr>
@@ -21954,7 +21954,7 @@
             <a:pPr algn="l">
               <a:defRPr sz="825" b="0">
                 <a:solidFill>
-                  <a:srgbClr val="B8C9D3"/>
+                  <a:srgbClr val="587080"/>
                 </a:solidFill>
                 <a:latin typeface="Arial"/>
                 <a:ea typeface="Arial"/>
@@ -21964,7 +21964,7 @@
             <a:r>
               <a:rPr sz="825" b="0">
                 <a:solidFill>
-                  <a:srgbClr val="B8C9D3"/>
+                  <a:srgbClr val="587080"/>
                 </a:solidFill>
                 <a:latin typeface="Arial"/>
                 <a:ea typeface="Arial"/>
@@ -21980,7 +21980,7 @@
           <p:cNvPr id="28" name="">
             <a:extLst xmlns:a="http://schemas.openxmlformats.org/drawingml/2006/main">
               <a:ext uri="{FF2B5EF4-FFF2-40B4-BE49-F238E27FC236}">
-                <a16:creationId xmlns:a16="http://schemas.microsoft.com/office/drawing/2014/main" id="{CA2B50B5-82A0-4C8F-8266-A6FC1587805D}"/>
+                <a16:creationId xmlns:a16="http://schemas.microsoft.com/office/drawing/2014/main" id="{963A30FD-2BB1-4AD8-96D5-A8D51B27A873}"/>
               </a:ext>
             </a:extLst>
           </p:cNvPr>
@@ -22000,11 +22000,11 @@
             </a:avLst>
           </a:prstGeom>
           <a:solidFill xmlns:a="http://schemas.openxmlformats.org/drawingml/2006/main">
-            <a:srgbClr val="102F46"/>
+            <a:srgbClr val="FFFFFF"/>
           </a:solidFill>
           <a:ln xmlns:a="http://schemas.openxmlformats.org/drawingml/2006/main" w="9525">
             <a:solidFill>
-              <a:srgbClr val="2A4D65"/>
+              <a:srgbClr val="C5D4DC"/>
             </a:solidFill>
             <a:prstDash val="solid"/>
           </a:ln>
@@ -22015,7 +22015,7 @@
           <p:cNvPr id="29" name="">
             <a:extLst xmlns:a="http://schemas.openxmlformats.org/drawingml/2006/main">
               <a:ext uri="{FF2B5EF4-FFF2-40B4-BE49-F238E27FC236}">
-                <a16:creationId xmlns:a16="http://schemas.microsoft.com/office/drawing/2014/main" id="{7A78ED93-9E26-4777-A798-F093C958F67B}"/>
+                <a16:creationId xmlns:a16="http://schemas.microsoft.com/office/drawing/2014/main" id="{85DF8299-9EAF-4AFE-BA7B-4D9B820FC96B}"/>
               </a:ext>
             </a:extLst>
           </p:cNvPr>
@@ -22073,7 +22073,7 @@
           <p:cNvPr id="30" name="">
             <a:extLst xmlns:a="http://schemas.openxmlformats.org/drawingml/2006/main">
               <a:ext uri="{FF2B5EF4-FFF2-40B4-BE49-F238E27FC236}">
-                <a16:creationId xmlns:a16="http://schemas.microsoft.com/office/drawing/2014/main" id="{6163F3C7-6F60-479C-A91F-01B1B3DBDAB2}"/>
+                <a16:creationId xmlns:a16="http://schemas.microsoft.com/office/drawing/2014/main" id="{B9A04211-49B3-41EE-8B82-2BE530466A4B}"/>
               </a:ext>
             </a:extLst>
           </p:cNvPr>
@@ -22105,7 +22105,7 @@
             <a:pPr algn="l">
               <a:defRPr sz="825" b="0">
                 <a:solidFill>
-                  <a:srgbClr val="B8C9D3"/>
+                  <a:srgbClr val="587080"/>
                 </a:solidFill>
                 <a:latin typeface="Arial"/>
                 <a:ea typeface="Arial"/>
@@ -22115,7 +22115,7 @@
             <a:r>
               <a:rPr sz="825" b="0">
                 <a:solidFill>
-                  <a:srgbClr val="B8C9D3"/>
+                  <a:srgbClr val="587080"/>
                 </a:solidFill>
                 <a:latin typeface="Arial"/>
                 <a:ea typeface="Arial"/>
@@ -22131,7 +22131,7 @@
           <p:cNvPr id="31" name="">
             <a:extLst xmlns:a="http://schemas.openxmlformats.org/drawingml/2006/main">
               <a:ext uri="{FF2B5EF4-FFF2-40B4-BE49-F238E27FC236}">
-                <a16:creationId xmlns:a16="http://schemas.microsoft.com/office/drawing/2014/main" id="{84ED4A61-8058-4106-8FD6-A0521C9DFC99}"/>
+                <a16:creationId xmlns:a16="http://schemas.microsoft.com/office/drawing/2014/main" id="{27D2CDA0-4E24-4278-BAD3-8CED10BBD970}"/>
               </a:ext>
             </a:extLst>
           </p:cNvPr>
@@ -22163,7 +22163,7 @@
             <a:pPr algn="ctr">
               <a:defRPr sz="750" b="0">
                 <a:solidFill>
-                  <a:srgbClr val="B8C9D3"/>
+                  <a:srgbClr val="587080"/>
                 </a:solidFill>
                 <a:latin typeface="Arial"/>
                 <a:ea typeface="Arial"/>
@@ -22173,7 +22173,7 @@
             <a:r>
               <a:rPr sz="750" b="0">
                 <a:solidFill>
-                  <a:srgbClr val="B8C9D3"/>
+                  <a:srgbClr val="587080"/>
                 </a:solidFill>
                 <a:latin typeface="Arial"/>
                 <a:ea typeface="Arial"/>
@@ -22186,7 +22186,7 @@
             <a:pPr algn="ctr">
               <a:defRPr sz="750" b="0">
                 <a:solidFill>
-                  <a:srgbClr val="B8C9D3"/>
+                  <a:srgbClr val="587080"/>
                 </a:solidFill>
                 <a:latin typeface="Arial"/>
                 <a:ea typeface="Arial"/>
@@ -22196,7 +22196,7 @@
             <a:r>
               <a:rPr sz="750" b="0">
                 <a:solidFill>
-                  <a:srgbClr val="B8C9D3"/>
+                  <a:srgbClr val="587080"/>
                 </a:solidFill>
                 <a:latin typeface="Arial"/>
                 <a:ea typeface="Arial"/>
@@ -22210,7 +22210,7 @@
     </p:spTree>
     <p:extLst>
       <p:ext uri="{BB962C8B-B14F-4D97-AF65-F5344CB8AC3E}">
-        <p14:creationId xmlns:p14="http://schemas.microsoft.com/office/powerpoint/2010/main" val="1121149777"/>
+        <p14:creationId xmlns:p14="http://schemas.microsoft.com/office/powerpoint/2010/main" val="330279588"/>
       </p:ext>
     </p:extLst>
   </p:cSld>
@@ -22223,7 +22223,7 @@
     <p:bg>
       <p:bgPr>
         <a:solidFill xmlns:a="http://schemas.openxmlformats.org/drawingml/2006/main">
-          <a:srgbClr val="0E293C"/>
+          <a:srgbClr val="F3F1EB"/>
         </a:solidFill>
       </p:bgPr>
     </p:bg>
@@ -22241,7 +22241,7 @@
           <p:cNvPr id="31" name="">
             <a:extLst xmlns:a="http://schemas.openxmlformats.org/drawingml/2006/main">
               <a:ext uri="{FF2B5EF4-FFF2-40B4-BE49-F238E27FC236}">
-                <a16:creationId xmlns:a16="http://schemas.microsoft.com/office/drawing/2014/main" id="{1CBAE793-9AFF-406E-8C54-E14F04833019}"/>
+                <a16:creationId xmlns:a16="http://schemas.microsoft.com/office/drawing/2014/main" id="{A06749CD-ABFC-4056-9740-1A79F130AC25}"/>
               </a:ext>
             </a:extLst>
           </p:cNvPr>
@@ -22298,7 +22298,7 @@
           <p:cNvPr id="2" name="">
             <a:extLst xmlns:a="http://schemas.openxmlformats.org/drawingml/2006/main">
               <a:ext uri="{FF2B5EF4-FFF2-40B4-BE49-F238E27FC236}">
-                <a16:creationId xmlns:a16="http://schemas.microsoft.com/office/drawing/2014/main" id="{36819450-92B5-459D-8461-EB61E974A5FB}"/>
+                <a16:creationId xmlns:a16="http://schemas.microsoft.com/office/drawing/2014/main" id="{73E7008F-5F21-4A2A-87D7-5C3CDD517CBD}"/>
               </a:ext>
             </a:extLst>
           </p:cNvPr>
@@ -22355,7 +22355,7 @@
           <p:cNvPr id="3" name="">
             <a:extLst xmlns:a="http://schemas.openxmlformats.org/drawingml/2006/main">
               <a:ext uri="{FF2B5EF4-FFF2-40B4-BE49-F238E27FC236}">
-                <a16:creationId xmlns:a16="http://schemas.microsoft.com/office/drawing/2014/main" id="{AAD12902-2C16-448C-A779-40A80FF6FF34}"/>
+                <a16:creationId xmlns:a16="http://schemas.microsoft.com/office/drawing/2014/main" id="{45A37592-AE49-41AC-9536-148C3848B85B}"/>
               </a:ext>
             </a:extLst>
           </p:cNvPr>
@@ -22412,7 +22412,7 @@
           <p:cNvPr id="4" name="">
             <a:extLst xmlns:a="http://schemas.openxmlformats.org/drawingml/2006/main">
               <a:ext uri="{FF2B5EF4-FFF2-40B4-BE49-F238E27FC236}">
-                <a16:creationId xmlns:a16="http://schemas.microsoft.com/office/drawing/2014/main" id="{7557C09E-68A8-4710-BECF-48F8355613B3}"/>
+                <a16:creationId xmlns:a16="http://schemas.microsoft.com/office/drawing/2014/main" id="{1C0586EE-327E-47C8-8639-ED9D23667FA1}"/>
               </a:ext>
             </a:extLst>
           </p:cNvPr>
@@ -22443,7 +22443,7 @@
           <p:cNvPr id="5" name="">
             <a:extLst xmlns:a="http://schemas.openxmlformats.org/drawingml/2006/main">
               <a:ext uri="{FF2B5EF4-FFF2-40B4-BE49-F238E27FC236}">
-                <a16:creationId xmlns:a16="http://schemas.microsoft.com/office/drawing/2014/main" id="{50984BE7-77BE-4073-8706-B381AD34D810}"/>
+                <a16:creationId xmlns:a16="http://schemas.microsoft.com/office/drawing/2014/main" id="{640DA7D5-C0EB-4BCB-B000-FE71C262E93C}"/>
               </a:ext>
             </a:extLst>
           </p:cNvPr>
@@ -22463,7 +22463,7 @@
           <a:noFill xmlns:a="http://schemas.openxmlformats.org/drawingml/2006/main"/>
           <a:ln xmlns:a="http://schemas.openxmlformats.org/drawingml/2006/main" w="9525">
             <a:solidFill>
-              <a:srgbClr val="2A4D65"/>
+              <a:srgbClr val="C5D4DC"/>
             </a:solidFill>
             <a:prstDash val="solid"/>
           </a:ln>
@@ -22474,7 +22474,7 @@
           <p:cNvPr id="6" name="">
             <a:extLst xmlns:a="http://schemas.openxmlformats.org/drawingml/2006/main">
               <a:ext uri="{FF2B5EF4-FFF2-40B4-BE49-F238E27FC236}">
-                <a16:creationId xmlns:a16="http://schemas.microsoft.com/office/drawing/2014/main" id="{775685ED-CDA8-4B89-B57D-A80C22F07B26}"/>
+                <a16:creationId xmlns:a16="http://schemas.microsoft.com/office/drawing/2014/main" id="{C1DA1E62-0465-478D-9B95-327AC1242E85}"/>
               </a:ext>
             </a:extLst>
           </p:cNvPr>
@@ -22531,7 +22531,7 @@
           <p:cNvPr id="7" name="">
             <a:extLst xmlns:a="http://schemas.openxmlformats.org/drawingml/2006/main">
               <a:ext uri="{FF2B5EF4-FFF2-40B4-BE49-F238E27FC236}">
-                <a16:creationId xmlns:a16="http://schemas.microsoft.com/office/drawing/2014/main" id="{84D0F3CC-DAB9-4E89-A17A-1FAE3986DB85}"/>
+                <a16:creationId xmlns:a16="http://schemas.microsoft.com/office/drawing/2014/main" id="{FD3D391A-046A-4079-B143-F41EC51F27D2}"/>
               </a:ext>
             </a:extLst>
           </p:cNvPr>
@@ -22588,7 +22588,7 @@
           <p:cNvPr id="8" name="">
             <a:extLst xmlns:a="http://schemas.openxmlformats.org/drawingml/2006/main">
               <a:ext uri="{FF2B5EF4-FFF2-40B4-BE49-F238E27FC236}">
-                <a16:creationId xmlns:a16="http://schemas.microsoft.com/office/drawing/2014/main" id="{A8BB8E7F-9E22-41BC-9823-50482D6C440C}"/>
+                <a16:creationId xmlns:a16="http://schemas.microsoft.com/office/drawing/2014/main" id="{51C71156-1AD7-48A0-90B5-332817A3357E}"/>
               </a:ext>
             </a:extLst>
           </p:cNvPr>
@@ -22645,7 +22645,7 @@
           <p:cNvPr id="9" name="">
             <a:extLst xmlns:a="http://schemas.openxmlformats.org/drawingml/2006/main">
               <a:ext uri="{FF2B5EF4-FFF2-40B4-BE49-F238E27FC236}">
-                <a16:creationId xmlns:a16="http://schemas.microsoft.com/office/drawing/2014/main" id="{0C8E2185-F5AC-4634-81F5-81D2C9CC3131}"/>
+                <a16:creationId xmlns:a16="http://schemas.microsoft.com/office/drawing/2014/main" id="{5BEEFC83-57AC-4AC4-90E8-DE8E4758E695}"/>
               </a:ext>
             </a:extLst>
           </p:cNvPr>
@@ -22676,7 +22676,7 @@
           <p:cNvPr id="10" name="">
             <a:extLst xmlns:a="http://schemas.openxmlformats.org/drawingml/2006/main">
               <a:ext uri="{FF2B5EF4-FFF2-40B4-BE49-F238E27FC236}">
-                <a16:creationId xmlns:a16="http://schemas.microsoft.com/office/drawing/2014/main" id="{D46EDDED-6CB4-4548-A9A2-E92B6F30EEBC}"/>
+                <a16:creationId xmlns:a16="http://schemas.microsoft.com/office/drawing/2014/main" id="{654EB27E-BA9C-4283-8B52-AB8999587E16}"/>
               </a:ext>
             </a:extLst>
           </p:cNvPr>
@@ -22696,7 +22696,7 @@
           <a:noFill xmlns:a="http://schemas.openxmlformats.org/drawingml/2006/main"/>
           <a:ln xmlns:a="http://schemas.openxmlformats.org/drawingml/2006/main" w="9525">
             <a:solidFill>
-              <a:srgbClr val="2A4D65"/>
+              <a:srgbClr val="C5D4DC"/>
             </a:solidFill>
             <a:prstDash val="solid"/>
           </a:ln>
@@ -22707,7 +22707,7 @@
           <p:cNvPr id="11" name="">
             <a:extLst xmlns:a="http://schemas.openxmlformats.org/drawingml/2006/main">
               <a:ext uri="{FF2B5EF4-FFF2-40B4-BE49-F238E27FC236}">
-                <a16:creationId xmlns:a16="http://schemas.microsoft.com/office/drawing/2014/main" id="{462D7A3D-C87C-41B9-8334-3FE64B3010CD}"/>
+                <a16:creationId xmlns:a16="http://schemas.microsoft.com/office/drawing/2014/main" id="{4B46962D-37B2-4826-879B-3FB953B3D9E1}"/>
               </a:ext>
             </a:extLst>
           </p:cNvPr>
@@ -22765,7 +22765,7 @@
           <p:cNvPr id="12" name="">
             <a:extLst xmlns:a="http://schemas.openxmlformats.org/drawingml/2006/main">
               <a:ext uri="{FF2B5EF4-FFF2-40B4-BE49-F238E27FC236}">
-                <a16:creationId xmlns:a16="http://schemas.microsoft.com/office/drawing/2014/main" id="{61BAA860-D08F-4824-B5C3-0B4808D88A6C}"/>
+                <a16:creationId xmlns:a16="http://schemas.microsoft.com/office/drawing/2014/main" id="{3B042941-A9D6-4A02-89E1-1A1E18929D81}"/>
               </a:ext>
             </a:extLst>
           </p:cNvPr>
@@ -22797,7 +22797,7 @@
             <a:pPr algn="r">
               <a:defRPr sz="750" b="1">
                 <a:solidFill>
-                  <a:srgbClr val="B8C9D3"/>
+                  <a:srgbClr val="587080"/>
                 </a:solidFill>
                 <a:latin typeface="Arial"/>
                 <a:ea typeface="Arial"/>
@@ -22807,7 +22807,7 @@
             <a:r>
               <a:rPr sz="750" b="1">
                 <a:solidFill>
-                  <a:srgbClr val="B8C9D3"/>
+                  <a:srgbClr val="587080"/>
                 </a:solidFill>
                 <a:latin typeface="Arial"/>
                 <a:ea typeface="Arial"/>
@@ -22823,7 +22823,7 @@
           <p:cNvPr id="13" name="">
             <a:extLst xmlns:a="http://schemas.openxmlformats.org/drawingml/2006/main">
               <a:ext uri="{FF2B5EF4-FFF2-40B4-BE49-F238E27FC236}">
-                <a16:creationId xmlns:a16="http://schemas.microsoft.com/office/drawing/2014/main" id="{907D6887-4E18-4F04-8867-4CD4F2DCE511}"/>
+                <a16:creationId xmlns:a16="http://schemas.microsoft.com/office/drawing/2014/main" id="{AA0681E6-4121-4C05-A11D-D640B2FF97F1}"/>
               </a:ext>
             </a:extLst>
           </p:cNvPr>
@@ -22855,7 +22855,7 @@
             <a:pPr algn="l">
               <a:defRPr sz="600" b="0">
                 <a:solidFill>
-                  <a:srgbClr val="B8C9D3"/>
+                  <a:srgbClr val="587080"/>
                 </a:solidFill>
                 <a:latin typeface="Arial"/>
                 <a:ea typeface="Arial"/>
@@ -22865,7 +22865,7 @@
             <a:r>
               <a:rPr sz="600" b="0">
                 <a:solidFill>
-                  <a:srgbClr val="B8C9D3"/>
+                  <a:srgbClr val="587080"/>
                 </a:solidFill>
                 <a:latin typeface="Arial"/>
                 <a:ea typeface="Arial"/>
@@ -22881,7 +22881,7 @@
           <p:cNvPr id="14" name="">
             <a:extLst xmlns:a="http://schemas.openxmlformats.org/drawingml/2006/main">
               <a:ext uri="{FF2B5EF4-FFF2-40B4-BE49-F238E27FC236}">
-                <a16:creationId xmlns:a16="http://schemas.microsoft.com/office/drawing/2014/main" id="{ABB83FDB-41CE-46B3-AC31-E26D013C8907}"/>
+                <a16:creationId xmlns:a16="http://schemas.microsoft.com/office/drawing/2014/main" id="{5216B7E7-7BA4-4884-99A5-2CCFEA8F9162}"/>
               </a:ext>
             </a:extLst>
           </p:cNvPr>
@@ -22913,7 +22913,7 @@
             <a:pPr algn="r">
               <a:defRPr sz="600" b="1">
                 <a:solidFill>
-                  <a:srgbClr val="B8C9D3"/>
+                  <a:srgbClr val="587080"/>
                 </a:solidFill>
                 <a:latin typeface="Arial"/>
                 <a:ea typeface="Arial"/>
@@ -22923,7 +22923,7 @@
             <a:r>
               <a:rPr sz="600" b="1">
                 <a:solidFill>
-                  <a:srgbClr val="B8C9D3"/>
+                  <a:srgbClr val="587080"/>
                 </a:solidFill>
                 <a:latin typeface="Arial"/>
                 <a:ea typeface="Arial"/>
@@ -22939,7 +22939,7 @@
           <p:cNvPr id="15" name="">
             <a:extLst xmlns:a="http://schemas.openxmlformats.org/drawingml/2006/main">
               <a:ext uri="{FF2B5EF4-FFF2-40B4-BE49-F238E27FC236}">
-                <a16:creationId xmlns:a16="http://schemas.microsoft.com/office/drawing/2014/main" id="{0612011C-E6C7-4542-BBAB-9DF0CF30A79B}"/>
+                <a16:creationId xmlns:a16="http://schemas.microsoft.com/office/drawing/2014/main" id="{6CD89DE3-8AB6-4FF4-80C4-8FEB79C7842E}"/>
               </a:ext>
             </a:extLst>
           </p:cNvPr>
@@ -22971,7 +22971,7 @@
             <a:pPr algn="l">
               <a:defRPr sz="2250" b="0">
                 <a:solidFill>
-                  <a:srgbClr val="00E1C6"/>
+                  <a:srgbClr val="132E41"/>
                 </a:solidFill>
                 <a:latin typeface="Georgia"/>
                 <a:ea typeface="Georgia"/>
@@ -22981,7 +22981,7 @@
             <a:r>
               <a:rPr sz="2250" b="0">
                 <a:solidFill>
-                  <a:srgbClr val="00E1C6"/>
+                  <a:srgbClr val="132E41"/>
                 </a:solidFill>
                 <a:latin typeface="Georgia"/>
                 <a:ea typeface="Georgia"/>
@@ -22997,7 +22997,7 @@
           <p:cNvPr id="16" name="">
             <a:extLst xmlns:a="http://schemas.openxmlformats.org/drawingml/2006/main">
               <a:ext uri="{FF2B5EF4-FFF2-40B4-BE49-F238E27FC236}">
-                <a16:creationId xmlns:a16="http://schemas.microsoft.com/office/drawing/2014/main" id="{59B148D5-B5FF-4307-B6B3-573F63BBA37F}"/>
+                <a16:creationId xmlns:a16="http://schemas.microsoft.com/office/drawing/2014/main" id="{637C34D7-039B-46DC-B0A6-2CE977B2FD3D}"/>
               </a:ext>
             </a:extLst>
           </p:cNvPr>
@@ -23029,7 +23029,7 @@
             <a:pPr algn="l">
               <a:defRPr sz="1125" b="0">
                 <a:solidFill>
-                  <a:srgbClr val="B8C9D3"/>
+                  <a:srgbClr val="587080"/>
                 </a:solidFill>
                 <a:latin typeface="Arial"/>
                 <a:ea typeface="Arial"/>
@@ -23039,7 +23039,7 @@
             <a:r>
               <a:rPr sz="1125" b="0">
                 <a:solidFill>
-                  <a:srgbClr val="B8C9D3"/>
+                  <a:srgbClr val="587080"/>
                 </a:solidFill>
                 <a:latin typeface="Arial"/>
                 <a:ea typeface="Arial"/>
@@ -23055,7 +23055,7 @@
           <p:cNvPr id="17" name="">
             <a:extLst xmlns:a="http://schemas.openxmlformats.org/drawingml/2006/main">
               <a:ext uri="{FF2B5EF4-FFF2-40B4-BE49-F238E27FC236}">
-                <a16:creationId xmlns:a16="http://schemas.microsoft.com/office/drawing/2014/main" id="{FA21F6DC-2D06-4275-9734-A474665339BC}"/>
+                <a16:creationId xmlns:a16="http://schemas.microsoft.com/office/drawing/2014/main" id="{BE803382-EC44-4B02-9FC8-74D66C2B2CBF}"/>
               </a:ext>
             </a:extLst>
           </p:cNvPr>
@@ -23090,7 +23090,7 @@
           <p:cNvPr id="18" name="">
             <a:extLst xmlns:a="http://schemas.openxmlformats.org/drawingml/2006/main">
               <a:ext uri="{FF2B5EF4-FFF2-40B4-BE49-F238E27FC236}">
-                <a16:creationId xmlns:a16="http://schemas.microsoft.com/office/drawing/2014/main" id="{C25E64B0-F286-4C34-9550-6B93BC3235A8}"/>
+                <a16:creationId xmlns:a16="http://schemas.microsoft.com/office/drawing/2014/main" id="{9EAD39A7-0A90-4787-9F74-FFA200D13F51}"/>
               </a:ext>
             </a:extLst>
           </p:cNvPr>
@@ -23125,7 +23125,7 @@
           <p:cNvPr id="19" name="">
             <a:extLst xmlns:a="http://schemas.openxmlformats.org/drawingml/2006/main">
               <a:ext uri="{FF2B5EF4-FFF2-40B4-BE49-F238E27FC236}">
-                <a16:creationId xmlns:a16="http://schemas.microsoft.com/office/drawing/2014/main" id="{43F3C664-8C38-4694-9744-B5556DC39FD9}"/>
+                <a16:creationId xmlns:a16="http://schemas.microsoft.com/office/drawing/2014/main" id="{26CE1FFC-3DEB-4735-83E4-768CB745801D}"/>
               </a:ext>
             </a:extLst>
           </p:cNvPr>
@@ -23187,7 +23187,7 @@
           <p:nvPr/>
         </p:nvPicPr>
         <p:blipFill>
-          <a:blip xmlns:r="http://schemas.openxmlformats.org/officeDocument/2006/relationships" xmlns:a="http://schemas.openxmlformats.org/drawingml/2006/main" r:embed="Rb70d142200b644ac"/>
+          <a:blip xmlns:r="http://schemas.openxmlformats.org/officeDocument/2006/relationships" xmlns:a="http://schemas.openxmlformats.org/drawingml/2006/main" r:embed="R05e9449ddaaa4b67"/>
           <a:stretch xmlns:a="http://schemas.openxmlformats.org/drawingml/2006/main"/>
         </p:blipFill>
         <p:spPr>
@@ -23207,7 +23207,7 @@
           <p:cNvPr id="21" name="">
             <a:extLst xmlns:a="http://schemas.openxmlformats.org/drawingml/2006/main">
               <a:ext uri="{FF2B5EF4-FFF2-40B4-BE49-F238E27FC236}">
-                <a16:creationId xmlns:a16="http://schemas.microsoft.com/office/drawing/2014/main" id="{FB4163F0-9261-4CD4-AC16-E54FE4F8BD58}"/>
+                <a16:creationId xmlns:a16="http://schemas.microsoft.com/office/drawing/2014/main" id="{DC3182EA-44E3-4C25-9364-DDA83295ABC4}"/>
               </a:ext>
             </a:extLst>
           </p:cNvPr>
@@ -23227,11 +23227,11 @@
             </a:avLst>
           </a:prstGeom>
           <a:solidFill xmlns:a="http://schemas.openxmlformats.org/drawingml/2006/main">
-            <a:srgbClr val="102F46"/>
+            <a:srgbClr val="FFFFFF"/>
           </a:solidFill>
           <a:ln xmlns:a="http://schemas.openxmlformats.org/drawingml/2006/main" w="9525">
             <a:solidFill>
-              <a:srgbClr val="2A4D65"/>
+              <a:srgbClr val="C5D4DC"/>
             </a:solidFill>
             <a:prstDash val="solid"/>
           </a:ln>
@@ -23242,7 +23242,7 @@
           <p:cNvPr id="22" name="">
             <a:extLst xmlns:a="http://schemas.openxmlformats.org/drawingml/2006/main">
               <a:ext uri="{FF2B5EF4-FFF2-40B4-BE49-F238E27FC236}">
-                <a16:creationId xmlns:a16="http://schemas.microsoft.com/office/drawing/2014/main" id="{01E619C4-D713-4147-8723-6FF5660DFFE9}"/>
+                <a16:creationId xmlns:a16="http://schemas.microsoft.com/office/drawing/2014/main" id="{9D8CEE68-D7F7-4B51-AEAC-290E895FDE33}"/>
               </a:ext>
             </a:extLst>
           </p:cNvPr>
@@ -23300,7 +23300,7 @@
           <p:cNvPr id="23" name="">
             <a:extLst xmlns:a="http://schemas.openxmlformats.org/drawingml/2006/main">
               <a:ext uri="{FF2B5EF4-FFF2-40B4-BE49-F238E27FC236}">
-                <a16:creationId xmlns:a16="http://schemas.microsoft.com/office/drawing/2014/main" id="{2DE44155-C586-40A3-A6F6-C542F048AAC7}"/>
+                <a16:creationId xmlns:a16="http://schemas.microsoft.com/office/drawing/2014/main" id="{3CE63108-B564-4865-AD80-4F94048F4D56}"/>
               </a:ext>
             </a:extLst>
           </p:cNvPr>
@@ -23358,7 +23358,7 @@
           <p:cNvPr id="24" name="">
             <a:extLst xmlns:a="http://schemas.openxmlformats.org/drawingml/2006/main">
               <a:ext uri="{FF2B5EF4-FFF2-40B4-BE49-F238E27FC236}">
-                <a16:creationId xmlns:a16="http://schemas.microsoft.com/office/drawing/2014/main" id="{5D648338-C71A-4F09-B76F-FC03DF401990}"/>
+                <a16:creationId xmlns:a16="http://schemas.microsoft.com/office/drawing/2014/main" id="{2BAB23ED-242F-4272-B76A-51857D2F3255}"/>
               </a:ext>
             </a:extLst>
           </p:cNvPr>
@@ -23390,7 +23390,7 @@
             <a:pPr algn="l">
               <a:defRPr sz="900" b="1">
                 <a:solidFill>
-                  <a:srgbClr val="F3F8FA"/>
+                  <a:srgbClr val="132E41"/>
                 </a:solidFill>
                 <a:latin typeface="Arial"/>
                 <a:ea typeface="Arial"/>
@@ -23400,7 +23400,7 @@
             <a:r>
               <a:rPr sz="900" b="1">
                 <a:solidFill>
-                  <a:srgbClr val="F3F8FA"/>
+                  <a:srgbClr val="132E41"/>
                 </a:solidFill>
                 <a:latin typeface="Arial"/>
                 <a:ea typeface="Arial"/>
@@ -23416,7 +23416,7 @@
           <p:cNvPr id="25" name="">
             <a:extLst xmlns:a="http://schemas.openxmlformats.org/drawingml/2006/main">
               <a:ext uri="{FF2B5EF4-FFF2-40B4-BE49-F238E27FC236}">
-                <a16:creationId xmlns:a16="http://schemas.microsoft.com/office/drawing/2014/main" id="{CDB12125-567D-4539-A00B-6BF7620C516B}"/>
+                <a16:creationId xmlns:a16="http://schemas.microsoft.com/office/drawing/2014/main" id="{D269FC34-FBFA-47CC-8CD1-BB65C55AB796}"/>
               </a:ext>
             </a:extLst>
           </p:cNvPr>
@@ -23448,7 +23448,7 @@
             <a:pPr algn="l">
               <a:defRPr sz="1875" b="1">
                 <a:solidFill>
-                  <a:srgbClr val="B8C9D3"/>
+                  <a:srgbClr val="587080"/>
                 </a:solidFill>
                 <a:latin typeface="Arial"/>
                 <a:ea typeface="Arial"/>
@@ -23458,7 +23458,7 @@
             <a:r>
               <a:rPr sz="1875" b="1">
                 <a:solidFill>
-                  <a:srgbClr val="B8C9D3"/>
+                  <a:srgbClr val="587080"/>
                 </a:solidFill>
                 <a:latin typeface="Arial"/>
                 <a:ea typeface="Arial"/>
@@ -23474,7 +23474,7 @@
           <p:cNvPr id="26" name="">
             <a:extLst xmlns:a="http://schemas.openxmlformats.org/drawingml/2006/main">
               <a:ext uri="{FF2B5EF4-FFF2-40B4-BE49-F238E27FC236}">
-                <a16:creationId xmlns:a16="http://schemas.microsoft.com/office/drawing/2014/main" id="{79BF3347-B925-4E84-9A70-5E187F87E294}"/>
+                <a16:creationId xmlns:a16="http://schemas.microsoft.com/office/drawing/2014/main" id="{2FD27583-1402-471D-97F4-74750596E3C3}"/>
               </a:ext>
             </a:extLst>
           </p:cNvPr>
@@ -23506,7 +23506,7 @@
             <a:pPr algn="l">
               <a:defRPr sz="900" b="1">
                 <a:solidFill>
-                  <a:srgbClr val="F3F8FA"/>
+                  <a:srgbClr val="132E41"/>
                 </a:solidFill>
                 <a:latin typeface="Arial"/>
                 <a:ea typeface="Arial"/>
@@ -23516,7 +23516,7 @@
             <a:r>
               <a:rPr sz="900" b="1">
                 <a:solidFill>
-                  <a:srgbClr val="F3F8FA"/>
+                  <a:srgbClr val="132E41"/>
                 </a:solidFill>
                 <a:latin typeface="Arial"/>
                 <a:ea typeface="Arial"/>
@@ -23532,7 +23532,7 @@
           <p:cNvPr id="27" name="">
             <a:extLst xmlns:a="http://schemas.openxmlformats.org/drawingml/2006/main">
               <a:ext uri="{FF2B5EF4-FFF2-40B4-BE49-F238E27FC236}">
-                <a16:creationId xmlns:a16="http://schemas.microsoft.com/office/drawing/2014/main" id="{0E94BFFD-CBD3-4A8F-8B02-5F91800EF428}"/>
+                <a16:creationId xmlns:a16="http://schemas.microsoft.com/office/drawing/2014/main" id="{4888598A-620F-4896-A2D8-5D4C88C07B51}"/>
               </a:ext>
             </a:extLst>
           </p:cNvPr>
@@ -23564,7 +23564,7 @@
             <a:pPr algn="l">
               <a:defRPr sz="1875" b="1">
                 <a:solidFill>
-                  <a:srgbClr val="B8C9D3"/>
+                  <a:srgbClr val="587080"/>
                 </a:solidFill>
                 <a:latin typeface="Arial"/>
                 <a:ea typeface="Arial"/>
@@ -23574,7 +23574,7 @@
             <a:r>
               <a:rPr sz="1875" b="1">
                 <a:solidFill>
-                  <a:srgbClr val="B8C9D3"/>
+                  <a:srgbClr val="587080"/>
                 </a:solidFill>
                 <a:latin typeface="Arial"/>
                 <a:ea typeface="Arial"/>
@@ -23590,7 +23590,7 @@
           <p:cNvPr id="28" name="">
             <a:extLst xmlns:a="http://schemas.openxmlformats.org/drawingml/2006/main">
               <a:ext uri="{FF2B5EF4-FFF2-40B4-BE49-F238E27FC236}">
-                <a16:creationId xmlns:a16="http://schemas.microsoft.com/office/drawing/2014/main" id="{117C8A9D-67A1-4637-8DE6-5E77A54BBE15}"/>
+                <a16:creationId xmlns:a16="http://schemas.microsoft.com/office/drawing/2014/main" id="{64336DED-5C5A-4C07-BF87-F14AC529BDE1}"/>
               </a:ext>
             </a:extLst>
           </p:cNvPr>
@@ -23622,7 +23622,7 @@
             <a:pPr algn="l">
               <a:defRPr sz="900" b="1">
                 <a:solidFill>
-                  <a:srgbClr val="F3F8FA"/>
+                  <a:srgbClr val="132E41"/>
                 </a:solidFill>
                 <a:latin typeface="Arial"/>
                 <a:ea typeface="Arial"/>
@@ -23632,7 +23632,7 @@
             <a:r>
               <a:rPr sz="900" b="1">
                 <a:solidFill>
-                  <a:srgbClr val="F3F8FA"/>
+                  <a:srgbClr val="132E41"/>
                 </a:solidFill>
                 <a:latin typeface="Arial"/>
                 <a:ea typeface="Arial"/>
@@ -23648,7 +23648,7 @@
           <p:cNvPr id="29" name="">
             <a:extLst xmlns:a="http://schemas.openxmlformats.org/drawingml/2006/main">
               <a:ext uri="{FF2B5EF4-FFF2-40B4-BE49-F238E27FC236}">
-                <a16:creationId xmlns:a16="http://schemas.microsoft.com/office/drawing/2014/main" id="{FB772AC5-D788-42D1-A556-2887C6237998}"/>
+                <a16:creationId xmlns:a16="http://schemas.microsoft.com/office/drawing/2014/main" id="{B41DB712-EDF3-432A-A12F-367EBA37C388}"/>
               </a:ext>
             </a:extLst>
           </p:cNvPr>
@@ -23685,7 +23685,7 @@
           <p:cNvPr id="30" name="">
             <a:extLst xmlns:a="http://schemas.openxmlformats.org/drawingml/2006/main">
               <a:ext uri="{FF2B5EF4-FFF2-40B4-BE49-F238E27FC236}">
-                <a16:creationId xmlns:a16="http://schemas.microsoft.com/office/drawing/2014/main" id="{3338AA80-7E3B-45E6-B0FA-20D9800B090F}"/>
+                <a16:creationId xmlns:a16="http://schemas.microsoft.com/office/drawing/2014/main" id="{75BC61FE-87C9-49EB-9BB9-0E462E6A348E}"/>
               </a:ext>
             </a:extLst>
           </p:cNvPr>
@@ -23741,7 +23741,7 @@
     </p:spTree>
     <p:extLst>
       <p:ext uri="{BB962C8B-B14F-4D97-AF65-F5344CB8AC3E}">
-        <p14:creationId xmlns:p14="http://schemas.microsoft.com/office/powerpoint/2010/main" val="1303320600"/>
+        <p14:creationId xmlns:p14="http://schemas.microsoft.com/office/powerpoint/2010/main" val="1997774080"/>
       </p:ext>
     </p:extLst>
   </p:cSld>
@@ -23754,7 +23754,7 @@
     <p:bg>
       <p:bgPr>
         <a:solidFill xmlns:a="http://schemas.openxmlformats.org/drawingml/2006/main">
-          <a:srgbClr val="0E293C"/>
+          <a:srgbClr val="F3F1EB"/>
         </a:solidFill>
       </p:bgPr>
     </p:bg>
@@ -23772,7 +23772,7 @@
           <p:cNvPr id="31" name="">
             <a:extLst xmlns:a="http://schemas.openxmlformats.org/drawingml/2006/main">
               <a:ext uri="{FF2B5EF4-FFF2-40B4-BE49-F238E27FC236}">
-                <a16:creationId xmlns:a16="http://schemas.microsoft.com/office/drawing/2014/main" id="{F850B091-3398-437C-BD19-A8F924747C81}"/>
+                <a16:creationId xmlns:a16="http://schemas.microsoft.com/office/drawing/2014/main" id="{C81F250B-FC4E-4CA6-B04C-82E8D2F7B094}"/>
               </a:ext>
             </a:extLst>
           </p:cNvPr>
@@ -23829,7 +23829,7 @@
           <p:cNvPr id="2" name="">
             <a:extLst xmlns:a="http://schemas.openxmlformats.org/drawingml/2006/main">
               <a:ext uri="{FF2B5EF4-FFF2-40B4-BE49-F238E27FC236}">
-                <a16:creationId xmlns:a16="http://schemas.microsoft.com/office/drawing/2014/main" id="{CA4584DB-7C30-4FEE-A368-3BB3FC7496E1}"/>
+                <a16:creationId xmlns:a16="http://schemas.microsoft.com/office/drawing/2014/main" id="{1982DB2D-5C41-4946-8E19-6DFB15B9DCE2}"/>
               </a:ext>
             </a:extLst>
           </p:cNvPr>
@@ -23886,7 +23886,7 @@
           <p:cNvPr id="3" name="">
             <a:extLst xmlns:a="http://schemas.openxmlformats.org/drawingml/2006/main">
               <a:ext uri="{FF2B5EF4-FFF2-40B4-BE49-F238E27FC236}">
-                <a16:creationId xmlns:a16="http://schemas.microsoft.com/office/drawing/2014/main" id="{27C530AE-442D-4483-B200-9CE0DA341A2A}"/>
+                <a16:creationId xmlns:a16="http://schemas.microsoft.com/office/drawing/2014/main" id="{64B82D1F-1117-4F58-A614-654E61C2BF55}"/>
               </a:ext>
             </a:extLst>
           </p:cNvPr>
@@ -23943,7 +23943,7 @@
           <p:cNvPr id="4" name="">
             <a:extLst xmlns:a="http://schemas.openxmlformats.org/drawingml/2006/main">
               <a:ext uri="{FF2B5EF4-FFF2-40B4-BE49-F238E27FC236}">
-                <a16:creationId xmlns:a16="http://schemas.microsoft.com/office/drawing/2014/main" id="{F8234761-6125-4237-9241-2EDA71436EA4}"/>
+                <a16:creationId xmlns:a16="http://schemas.microsoft.com/office/drawing/2014/main" id="{63A623E8-E095-453B-808B-80A65A2D2CCD}"/>
               </a:ext>
             </a:extLst>
           </p:cNvPr>
@@ -23974,7 +23974,7 @@
           <p:cNvPr id="5" name="">
             <a:extLst xmlns:a="http://schemas.openxmlformats.org/drawingml/2006/main">
               <a:ext uri="{FF2B5EF4-FFF2-40B4-BE49-F238E27FC236}">
-                <a16:creationId xmlns:a16="http://schemas.microsoft.com/office/drawing/2014/main" id="{94CC1C70-AD42-44BF-8063-CF7AD9365EEC}"/>
+                <a16:creationId xmlns:a16="http://schemas.microsoft.com/office/drawing/2014/main" id="{BC9F0753-E0E6-483F-91E6-A73B8C13D995}"/>
               </a:ext>
             </a:extLst>
           </p:cNvPr>
@@ -23994,7 +23994,7 @@
           <a:noFill xmlns:a="http://schemas.openxmlformats.org/drawingml/2006/main"/>
           <a:ln xmlns:a="http://schemas.openxmlformats.org/drawingml/2006/main" w="9525">
             <a:solidFill>
-              <a:srgbClr val="2A4D65"/>
+              <a:srgbClr val="C5D4DC"/>
             </a:solidFill>
             <a:prstDash val="solid"/>
           </a:ln>
@@ -24005,7 +24005,7 @@
           <p:cNvPr id="6" name="">
             <a:extLst xmlns:a="http://schemas.openxmlformats.org/drawingml/2006/main">
               <a:ext uri="{FF2B5EF4-FFF2-40B4-BE49-F238E27FC236}">
-                <a16:creationId xmlns:a16="http://schemas.microsoft.com/office/drawing/2014/main" id="{545E6C8C-369B-454E-861E-646933D867DA}"/>
+                <a16:creationId xmlns:a16="http://schemas.microsoft.com/office/drawing/2014/main" id="{01EC4055-07F2-45EE-96E4-6F569DB07175}"/>
               </a:ext>
             </a:extLst>
           </p:cNvPr>
@@ -24062,7 +24062,7 @@
           <p:cNvPr id="7" name="">
             <a:extLst xmlns:a="http://schemas.openxmlformats.org/drawingml/2006/main">
               <a:ext uri="{FF2B5EF4-FFF2-40B4-BE49-F238E27FC236}">
-                <a16:creationId xmlns:a16="http://schemas.microsoft.com/office/drawing/2014/main" id="{89003C48-9569-40A7-93BF-D70510D27E5A}"/>
+                <a16:creationId xmlns:a16="http://schemas.microsoft.com/office/drawing/2014/main" id="{C7A048B2-D00C-4B42-BFDE-4F88AB0E0F5B}"/>
               </a:ext>
             </a:extLst>
           </p:cNvPr>
@@ -24119,7 +24119,7 @@
           <p:cNvPr id="8" name="">
             <a:extLst xmlns:a="http://schemas.openxmlformats.org/drawingml/2006/main">
               <a:ext uri="{FF2B5EF4-FFF2-40B4-BE49-F238E27FC236}">
-                <a16:creationId xmlns:a16="http://schemas.microsoft.com/office/drawing/2014/main" id="{0717022D-FF78-49DF-9636-1F1CD9BA2702}"/>
+                <a16:creationId xmlns:a16="http://schemas.microsoft.com/office/drawing/2014/main" id="{61BB6A67-7835-46C0-B8EE-78332946587F}"/>
               </a:ext>
             </a:extLst>
           </p:cNvPr>
@@ -24176,7 +24176,7 @@
           <p:cNvPr id="9" name="">
             <a:extLst xmlns:a="http://schemas.openxmlformats.org/drawingml/2006/main">
               <a:ext uri="{FF2B5EF4-FFF2-40B4-BE49-F238E27FC236}">
-                <a16:creationId xmlns:a16="http://schemas.microsoft.com/office/drawing/2014/main" id="{291D4C61-2D76-4721-9909-4D0475BB06C9}"/>
+                <a16:creationId xmlns:a16="http://schemas.microsoft.com/office/drawing/2014/main" id="{C76634AF-117A-4844-8A8D-C9DBEB9E14AE}"/>
               </a:ext>
             </a:extLst>
           </p:cNvPr>
@@ -24207,7 +24207,7 @@
           <p:cNvPr id="10" name="">
             <a:extLst xmlns:a="http://schemas.openxmlformats.org/drawingml/2006/main">
               <a:ext uri="{FF2B5EF4-FFF2-40B4-BE49-F238E27FC236}">
-                <a16:creationId xmlns:a16="http://schemas.microsoft.com/office/drawing/2014/main" id="{2B86EA18-455F-42F9-8DCF-8A23C1161CB8}"/>
+                <a16:creationId xmlns:a16="http://schemas.microsoft.com/office/drawing/2014/main" id="{2547D24A-3727-4573-AECA-2E3ACCC858B4}"/>
               </a:ext>
             </a:extLst>
           </p:cNvPr>
@@ -24227,7 +24227,7 @@
           <a:noFill xmlns:a="http://schemas.openxmlformats.org/drawingml/2006/main"/>
           <a:ln xmlns:a="http://schemas.openxmlformats.org/drawingml/2006/main" w="9525">
             <a:solidFill>
-              <a:srgbClr val="2A4D65"/>
+              <a:srgbClr val="C5D4DC"/>
             </a:solidFill>
             <a:prstDash val="solid"/>
           </a:ln>
@@ -24238,7 +24238,7 @@
           <p:cNvPr id="11" name="">
             <a:extLst xmlns:a="http://schemas.openxmlformats.org/drawingml/2006/main">
               <a:ext uri="{FF2B5EF4-FFF2-40B4-BE49-F238E27FC236}">
-                <a16:creationId xmlns:a16="http://schemas.microsoft.com/office/drawing/2014/main" id="{517E6541-8B9C-49C7-BE71-2A4BE11FBE03}"/>
+                <a16:creationId xmlns:a16="http://schemas.microsoft.com/office/drawing/2014/main" id="{71D10D89-8EC3-4FD9-B1E6-F1D4F0BC5FA7}"/>
               </a:ext>
             </a:extLst>
           </p:cNvPr>
@@ -24296,7 +24296,7 @@
           <p:cNvPr id="12" name="">
             <a:extLst xmlns:a="http://schemas.openxmlformats.org/drawingml/2006/main">
               <a:ext uri="{FF2B5EF4-FFF2-40B4-BE49-F238E27FC236}">
-                <a16:creationId xmlns:a16="http://schemas.microsoft.com/office/drawing/2014/main" id="{6CAE2D15-8D9A-446A-8BEB-74A6B87B7F12}"/>
+                <a16:creationId xmlns:a16="http://schemas.microsoft.com/office/drawing/2014/main" id="{DE313819-7DD5-4121-80CC-A70443DEF199}"/>
               </a:ext>
             </a:extLst>
           </p:cNvPr>
@@ -24328,7 +24328,7 @@
             <a:pPr algn="r">
               <a:defRPr sz="750" b="1">
                 <a:solidFill>
-                  <a:srgbClr val="B8C9D3"/>
+                  <a:srgbClr val="587080"/>
                 </a:solidFill>
                 <a:latin typeface="Arial"/>
                 <a:ea typeface="Arial"/>
@@ -24338,7 +24338,7 @@
             <a:r>
               <a:rPr sz="750" b="1">
                 <a:solidFill>
-                  <a:srgbClr val="B8C9D3"/>
+                  <a:srgbClr val="587080"/>
                 </a:solidFill>
                 <a:latin typeface="Arial"/>
                 <a:ea typeface="Arial"/>
@@ -24354,7 +24354,7 @@
           <p:cNvPr id="13" name="">
             <a:extLst xmlns:a="http://schemas.openxmlformats.org/drawingml/2006/main">
               <a:ext uri="{FF2B5EF4-FFF2-40B4-BE49-F238E27FC236}">
-                <a16:creationId xmlns:a16="http://schemas.microsoft.com/office/drawing/2014/main" id="{68744BAD-61DA-412E-8B19-22AA3A8DC62B}"/>
+                <a16:creationId xmlns:a16="http://schemas.microsoft.com/office/drawing/2014/main" id="{4CFED221-F7EB-4B3D-9A73-3AA1D3218335}"/>
               </a:ext>
             </a:extLst>
           </p:cNvPr>
@@ -24386,7 +24386,7 @@
             <a:pPr algn="l">
               <a:defRPr sz="600" b="0">
                 <a:solidFill>
-                  <a:srgbClr val="B8C9D3"/>
+                  <a:srgbClr val="587080"/>
                 </a:solidFill>
                 <a:latin typeface="Arial"/>
                 <a:ea typeface="Arial"/>
@@ -24396,7 +24396,7 @@
             <a:r>
               <a:rPr sz="600" b="0">
                 <a:solidFill>
-                  <a:srgbClr val="B8C9D3"/>
+                  <a:srgbClr val="587080"/>
                 </a:solidFill>
                 <a:latin typeface="Arial"/>
                 <a:ea typeface="Arial"/>
@@ -24412,7 +24412,7 @@
           <p:cNvPr id="14" name="">
             <a:extLst xmlns:a="http://schemas.openxmlformats.org/drawingml/2006/main">
               <a:ext uri="{FF2B5EF4-FFF2-40B4-BE49-F238E27FC236}">
-                <a16:creationId xmlns:a16="http://schemas.microsoft.com/office/drawing/2014/main" id="{827AE7FA-A8B6-4F9F-8536-D11A0015BFAE}"/>
+                <a16:creationId xmlns:a16="http://schemas.microsoft.com/office/drawing/2014/main" id="{CC300B7B-6CD3-4D28-BCFC-C9BC7EBA6EC6}"/>
               </a:ext>
             </a:extLst>
           </p:cNvPr>
@@ -24444,7 +24444,7 @@
             <a:pPr algn="r">
               <a:defRPr sz="600" b="1">
                 <a:solidFill>
-                  <a:srgbClr val="B8C9D3"/>
+                  <a:srgbClr val="587080"/>
                 </a:solidFill>
                 <a:latin typeface="Arial"/>
                 <a:ea typeface="Arial"/>
@@ -24454,7 +24454,7 @@
             <a:r>
               <a:rPr sz="600" b="1">
                 <a:solidFill>
-                  <a:srgbClr val="B8C9D3"/>
+                  <a:srgbClr val="587080"/>
                 </a:solidFill>
                 <a:latin typeface="Arial"/>
                 <a:ea typeface="Arial"/>
@@ -24470,7 +24470,7 @@
           <p:cNvPr id="15" name="">
             <a:extLst xmlns:a="http://schemas.openxmlformats.org/drawingml/2006/main">
               <a:ext uri="{FF2B5EF4-FFF2-40B4-BE49-F238E27FC236}">
-                <a16:creationId xmlns:a16="http://schemas.microsoft.com/office/drawing/2014/main" id="{C3003F35-5C8B-4376-A510-9D2317C14FC1}"/>
+                <a16:creationId xmlns:a16="http://schemas.microsoft.com/office/drawing/2014/main" id="{A24994C1-ED92-46A4-9A1B-843098580D98}"/>
               </a:ext>
             </a:extLst>
           </p:cNvPr>
@@ -24502,7 +24502,7 @@
             <a:pPr algn="l">
               <a:defRPr sz="2250" b="0">
                 <a:solidFill>
-                  <a:srgbClr val="00E1C6"/>
+                  <a:srgbClr val="132E41"/>
                 </a:solidFill>
                 <a:latin typeface="Georgia"/>
                 <a:ea typeface="Georgia"/>
@@ -24512,7 +24512,7 @@
             <a:r>
               <a:rPr sz="2250" b="0">
                 <a:solidFill>
-                  <a:srgbClr val="00E1C6"/>
+                  <a:srgbClr val="132E41"/>
                 </a:solidFill>
                 <a:latin typeface="Georgia"/>
                 <a:ea typeface="Georgia"/>
@@ -24528,7 +24528,7 @@
           <p:cNvPr id="16" name="">
             <a:extLst xmlns:a="http://schemas.openxmlformats.org/drawingml/2006/main">
               <a:ext uri="{FF2B5EF4-FFF2-40B4-BE49-F238E27FC236}">
-                <a16:creationId xmlns:a16="http://schemas.microsoft.com/office/drawing/2014/main" id="{F5ADC7B5-A776-4CDE-9988-36E469CB2C4E}"/>
+                <a16:creationId xmlns:a16="http://schemas.microsoft.com/office/drawing/2014/main" id="{F11DC89C-9F6B-47FC-8903-E5B04E07C9C0}"/>
               </a:ext>
             </a:extLst>
           </p:cNvPr>
@@ -24560,7 +24560,7 @@
             <a:pPr algn="l">
               <a:defRPr sz="1125" b="0">
                 <a:solidFill>
-                  <a:srgbClr val="B8C9D3"/>
+                  <a:srgbClr val="587080"/>
                 </a:solidFill>
                 <a:latin typeface="Arial"/>
                 <a:ea typeface="Arial"/>
@@ -24570,7 +24570,7 @@
             <a:r>
               <a:rPr sz="1125" b="0">
                 <a:solidFill>
-                  <a:srgbClr val="B8C9D3"/>
+                  <a:srgbClr val="587080"/>
                 </a:solidFill>
                 <a:latin typeface="Arial"/>
                 <a:ea typeface="Arial"/>
@@ -24586,7 +24586,7 @@
           <p:cNvPr id="17" name="">
             <a:extLst xmlns:a="http://schemas.openxmlformats.org/drawingml/2006/main">
               <a:ext uri="{FF2B5EF4-FFF2-40B4-BE49-F238E27FC236}">
-                <a16:creationId xmlns:a16="http://schemas.microsoft.com/office/drawing/2014/main" id="{45BE842E-F793-45D7-8EC8-58FFF1E6CB63}"/>
+                <a16:creationId xmlns:a16="http://schemas.microsoft.com/office/drawing/2014/main" id="{604AF2A3-8A9F-4200-B239-6187DFC419ED}"/>
               </a:ext>
             </a:extLst>
           </p:cNvPr>
@@ -24621,7 +24621,7 @@
           <p:cNvPr id="18" name="">
             <a:extLst xmlns:a="http://schemas.openxmlformats.org/drawingml/2006/main">
               <a:ext uri="{FF2B5EF4-FFF2-40B4-BE49-F238E27FC236}">
-                <a16:creationId xmlns:a16="http://schemas.microsoft.com/office/drawing/2014/main" id="{682E5993-82E6-4FFB-95D5-68D5BFD1AA23}"/>
+                <a16:creationId xmlns:a16="http://schemas.microsoft.com/office/drawing/2014/main" id="{7AF22149-1783-4449-AEF1-368B2784E517}"/>
               </a:ext>
             </a:extLst>
           </p:cNvPr>
@@ -24656,7 +24656,7 @@
           <p:cNvPr id="19" name="">
             <a:extLst xmlns:a="http://schemas.openxmlformats.org/drawingml/2006/main">
               <a:ext uri="{FF2B5EF4-FFF2-40B4-BE49-F238E27FC236}">
-                <a16:creationId xmlns:a16="http://schemas.microsoft.com/office/drawing/2014/main" id="{E4B1C4E8-483A-4510-9CA8-F7D2E0CDC362}"/>
+                <a16:creationId xmlns:a16="http://schemas.microsoft.com/office/drawing/2014/main" id="{14681F45-403D-48FC-A8E9-3E7CC9B25728}"/>
               </a:ext>
             </a:extLst>
           </p:cNvPr>
@@ -24718,7 +24718,7 @@
           <p:nvPr/>
         </p:nvPicPr>
         <p:blipFill>
-          <a:blip xmlns:r="http://schemas.openxmlformats.org/officeDocument/2006/relationships" xmlns:a="http://schemas.openxmlformats.org/drawingml/2006/main" r:embed="R490c202a9e1e42aa"/>
+          <a:blip xmlns:r="http://schemas.openxmlformats.org/officeDocument/2006/relationships" xmlns:a="http://schemas.openxmlformats.org/drawingml/2006/main" r:embed="R26180de230d1462a"/>
           <a:stretch xmlns:a="http://schemas.openxmlformats.org/drawingml/2006/main"/>
         </p:blipFill>
         <p:spPr>
@@ -24738,7 +24738,7 @@
           <p:cNvPr id="21" name="">
             <a:extLst xmlns:a="http://schemas.openxmlformats.org/drawingml/2006/main">
               <a:ext uri="{FF2B5EF4-FFF2-40B4-BE49-F238E27FC236}">
-                <a16:creationId xmlns:a16="http://schemas.microsoft.com/office/drawing/2014/main" id="{50AE8EB8-40C7-4126-9EC9-DA4617F9510C}"/>
+                <a16:creationId xmlns:a16="http://schemas.microsoft.com/office/drawing/2014/main" id="{0D072457-F0AB-43C1-B50E-E80CE7919351}"/>
               </a:ext>
             </a:extLst>
           </p:cNvPr>
@@ -24758,11 +24758,11 @@
             </a:avLst>
           </a:prstGeom>
           <a:solidFill xmlns:a="http://schemas.openxmlformats.org/drawingml/2006/main">
-            <a:srgbClr val="102F46"/>
+            <a:srgbClr val="FFFFFF"/>
           </a:solidFill>
           <a:ln xmlns:a="http://schemas.openxmlformats.org/drawingml/2006/main" w="9525">
             <a:solidFill>
-              <a:srgbClr val="2A4D65"/>
+              <a:srgbClr val="C5D4DC"/>
             </a:solidFill>
             <a:prstDash val="solid"/>
           </a:ln>
@@ -24773,7 +24773,7 @@
           <p:cNvPr id="22" name="">
             <a:extLst xmlns:a="http://schemas.openxmlformats.org/drawingml/2006/main">
               <a:ext uri="{FF2B5EF4-FFF2-40B4-BE49-F238E27FC236}">
-                <a16:creationId xmlns:a16="http://schemas.microsoft.com/office/drawing/2014/main" id="{E9FE8993-178C-4A85-9DFA-6C388334D43E}"/>
+                <a16:creationId xmlns:a16="http://schemas.microsoft.com/office/drawing/2014/main" id="{FB615CF8-C62C-4742-AAB6-BC0CB1F576F1}"/>
               </a:ext>
             </a:extLst>
           </p:cNvPr>
@@ -24831,7 +24831,7 @@
           <p:cNvPr id="23" name="">
             <a:extLst xmlns:a="http://schemas.openxmlformats.org/drawingml/2006/main">
               <a:ext uri="{FF2B5EF4-FFF2-40B4-BE49-F238E27FC236}">
-                <a16:creationId xmlns:a16="http://schemas.microsoft.com/office/drawing/2014/main" id="{6D1DDD2D-C709-44B9-9B51-25055C50D71E}"/>
+                <a16:creationId xmlns:a16="http://schemas.microsoft.com/office/drawing/2014/main" id="{54D4CB56-04B7-45F3-B104-198E8158BBB2}"/>
               </a:ext>
             </a:extLst>
           </p:cNvPr>
@@ -24862,7 +24862,7 @@
           <p:cNvPr id="24" name="">
             <a:extLst xmlns:a="http://schemas.openxmlformats.org/drawingml/2006/main">
               <a:ext uri="{FF2B5EF4-FFF2-40B4-BE49-F238E27FC236}">
-                <a16:creationId xmlns:a16="http://schemas.microsoft.com/office/drawing/2014/main" id="{CDCC73B1-FFBB-4A3B-8166-44FF8E83EE12}"/>
+                <a16:creationId xmlns:a16="http://schemas.microsoft.com/office/drawing/2014/main" id="{D2B8ABCD-38D8-4274-86B3-592FC1201773}"/>
               </a:ext>
             </a:extLst>
           </p:cNvPr>
@@ -24894,7 +24894,7 @@
             <a:pPr algn="l">
               <a:defRPr sz="825" b="1">
                 <a:solidFill>
-                  <a:srgbClr val="F3F8FA"/>
+                  <a:srgbClr val="132E41"/>
                 </a:solidFill>
                 <a:latin typeface="Arial"/>
                 <a:ea typeface="Arial"/>
@@ -24904,7 +24904,7 @@
             <a:r>
               <a:rPr sz="825" b="1">
                 <a:solidFill>
-                  <a:srgbClr val="F3F8FA"/>
+                  <a:srgbClr val="132E41"/>
                 </a:solidFill>
                 <a:latin typeface="Arial"/>
                 <a:ea typeface="Arial"/>
@@ -24920,7 +24920,7 @@
           <p:cNvPr id="25" name="">
             <a:extLst xmlns:a="http://schemas.openxmlformats.org/drawingml/2006/main">
               <a:ext uri="{FF2B5EF4-FFF2-40B4-BE49-F238E27FC236}">
-                <a16:creationId xmlns:a16="http://schemas.microsoft.com/office/drawing/2014/main" id="{5AB4B84F-F4A6-4621-9E48-D9B6AA7E2CEE}"/>
+                <a16:creationId xmlns:a16="http://schemas.microsoft.com/office/drawing/2014/main" id="{9E6DCFEC-FE0B-486B-A43A-54881B606063}"/>
               </a:ext>
             </a:extLst>
           </p:cNvPr>
@@ -24951,7 +24951,7 @@
           <p:cNvPr id="26" name="">
             <a:extLst xmlns:a="http://schemas.openxmlformats.org/drawingml/2006/main">
               <a:ext uri="{FF2B5EF4-FFF2-40B4-BE49-F238E27FC236}">
-                <a16:creationId xmlns:a16="http://schemas.microsoft.com/office/drawing/2014/main" id="{95CF0201-1AA9-48B8-9E3B-86E7A1D5EBB2}"/>
+                <a16:creationId xmlns:a16="http://schemas.microsoft.com/office/drawing/2014/main" id="{40563D25-C56B-4BF7-8A9B-F296B7FE47AF}"/>
               </a:ext>
             </a:extLst>
           </p:cNvPr>
@@ -24983,7 +24983,7 @@
             <a:pPr algn="l">
               <a:defRPr sz="825" b="1">
                 <a:solidFill>
-                  <a:srgbClr val="F3F8FA"/>
+                  <a:srgbClr val="132E41"/>
                 </a:solidFill>
                 <a:latin typeface="Arial"/>
                 <a:ea typeface="Arial"/>
@@ -24993,7 +24993,7 @@
             <a:r>
               <a:rPr sz="825" b="1">
                 <a:solidFill>
-                  <a:srgbClr val="F3F8FA"/>
+                  <a:srgbClr val="132E41"/>
                 </a:solidFill>
                 <a:latin typeface="Arial"/>
                 <a:ea typeface="Arial"/>
@@ -25009,7 +25009,7 @@
           <p:cNvPr id="27" name="">
             <a:extLst xmlns:a="http://schemas.openxmlformats.org/drawingml/2006/main">
               <a:ext uri="{FF2B5EF4-FFF2-40B4-BE49-F238E27FC236}">
-                <a16:creationId xmlns:a16="http://schemas.microsoft.com/office/drawing/2014/main" id="{CC0F4893-AECA-4CE0-A089-D031C25F887B}"/>
+                <a16:creationId xmlns:a16="http://schemas.microsoft.com/office/drawing/2014/main" id="{889B03B9-E164-4A43-BC12-4D73BD5B0761}"/>
               </a:ext>
             </a:extLst>
           </p:cNvPr>
@@ -25040,7 +25040,7 @@
           <p:cNvPr id="28" name="">
             <a:extLst xmlns:a="http://schemas.openxmlformats.org/drawingml/2006/main">
               <a:ext uri="{FF2B5EF4-FFF2-40B4-BE49-F238E27FC236}">
-                <a16:creationId xmlns:a16="http://schemas.microsoft.com/office/drawing/2014/main" id="{EEA1D73F-FEF4-477D-874B-A9B0B25926C2}"/>
+                <a16:creationId xmlns:a16="http://schemas.microsoft.com/office/drawing/2014/main" id="{E2F9F224-F972-4C5C-B298-913949E4014E}"/>
               </a:ext>
             </a:extLst>
           </p:cNvPr>
@@ -25072,7 +25072,7 @@
             <a:pPr algn="l">
               <a:defRPr sz="825" b="1">
                 <a:solidFill>
-                  <a:srgbClr val="F3F8FA"/>
+                  <a:srgbClr val="132E41"/>
                 </a:solidFill>
                 <a:latin typeface="Arial"/>
                 <a:ea typeface="Arial"/>
@@ -25082,7 +25082,7 @@
             <a:r>
               <a:rPr sz="825" b="1">
                 <a:solidFill>
-                  <a:srgbClr val="F3F8FA"/>
+                  <a:srgbClr val="132E41"/>
                 </a:solidFill>
                 <a:latin typeface="Arial"/>
                 <a:ea typeface="Arial"/>
@@ -25098,7 +25098,7 @@
           <p:cNvPr id="29" name="">
             <a:extLst xmlns:a="http://schemas.openxmlformats.org/drawingml/2006/main">
               <a:ext uri="{FF2B5EF4-FFF2-40B4-BE49-F238E27FC236}">
-                <a16:creationId xmlns:a16="http://schemas.microsoft.com/office/drawing/2014/main" id="{8E2278C2-D89A-4DAD-86A8-96C4C9C4FA8E}"/>
+                <a16:creationId xmlns:a16="http://schemas.microsoft.com/office/drawing/2014/main" id="{0D4143BF-DA20-4558-AA82-B1DF989D338C}"/>
               </a:ext>
             </a:extLst>
           </p:cNvPr>
@@ -25156,7 +25156,7 @@
           <p:cNvPr id="30" name="">
             <a:extLst xmlns:a="http://schemas.openxmlformats.org/drawingml/2006/main">
               <a:ext uri="{FF2B5EF4-FFF2-40B4-BE49-F238E27FC236}">
-                <a16:creationId xmlns:a16="http://schemas.microsoft.com/office/drawing/2014/main" id="{4DEDD437-4DB6-4781-B8A2-84696C5AE045}"/>
+                <a16:creationId xmlns:a16="http://schemas.microsoft.com/office/drawing/2014/main" id="{DF797CE7-3A95-40A9-84F1-602C027E4844}"/>
               </a:ext>
             </a:extLst>
           </p:cNvPr>
@@ -25188,7 +25188,7 @@
             <a:pPr algn="ctr">
               <a:defRPr sz="750" b="0">
                 <a:solidFill>
-                  <a:srgbClr val="B8C9D3"/>
+                  <a:srgbClr val="587080"/>
                 </a:solidFill>
                 <a:latin typeface="Arial"/>
                 <a:ea typeface="Arial"/>
@@ -25198,7 +25198,7 @@
             <a:r>
               <a:rPr sz="750" b="0">
                 <a:solidFill>
-                  <a:srgbClr val="B8C9D3"/>
+                  <a:srgbClr val="587080"/>
                 </a:solidFill>
                 <a:latin typeface="Arial"/>
                 <a:ea typeface="Arial"/>
@@ -25211,7 +25211,7 @@
             <a:pPr algn="ctr">
               <a:defRPr sz="750" b="0">
                 <a:solidFill>
-                  <a:srgbClr val="B8C9D3"/>
+                  <a:srgbClr val="587080"/>
                 </a:solidFill>
                 <a:latin typeface="Arial"/>
                 <a:ea typeface="Arial"/>
@@ -25221,7 +25221,7 @@
             <a:r>
               <a:rPr sz="750" b="0">
                 <a:solidFill>
-                  <a:srgbClr val="B8C9D3"/>
+                  <a:srgbClr val="587080"/>
                 </a:solidFill>
                 <a:latin typeface="Arial"/>
                 <a:ea typeface="Arial"/>
@@ -25234,7 +25234,7 @@
             <a:pPr algn="ctr">
               <a:defRPr sz="750" b="0">
                 <a:solidFill>
-                  <a:srgbClr val="B8C9D3"/>
+                  <a:srgbClr val="587080"/>
                 </a:solidFill>
                 <a:latin typeface="Arial"/>
                 <a:ea typeface="Arial"/>
@@ -25244,7 +25244,7 @@
             <a:r>
               <a:rPr sz="750" b="0">
                 <a:solidFill>
-                  <a:srgbClr val="B8C9D3"/>
+                  <a:srgbClr val="587080"/>
                 </a:solidFill>
                 <a:latin typeface="Arial"/>
                 <a:ea typeface="Arial"/>
@@ -25257,7 +25257,7 @@
             <a:pPr algn="ctr">
               <a:defRPr sz="750" b="0">
                 <a:solidFill>
-                  <a:srgbClr val="B8C9D3"/>
+                  <a:srgbClr val="587080"/>
                 </a:solidFill>
                 <a:latin typeface="Arial"/>
                 <a:ea typeface="Arial"/>
@@ -25267,7 +25267,7 @@
             <a:r>
               <a:rPr sz="750" b="0">
                 <a:solidFill>
-                  <a:srgbClr val="B8C9D3"/>
+                  <a:srgbClr val="587080"/>
                 </a:solidFill>
                 <a:latin typeface="Arial"/>
                 <a:ea typeface="Arial"/>
@@ -25281,7 +25281,7 @@
     </p:spTree>
     <p:extLst>
       <p:ext uri="{BB962C8B-B14F-4D97-AF65-F5344CB8AC3E}">
-        <p14:creationId xmlns:p14="http://schemas.microsoft.com/office/powerpoint/2010/main" val="1962331875"/>
+        <p14:creationId xmlns:p14="http://schemas.microsoft.com/office/powerpoint/2010/main" val="519823252"/>
       </p:ext>
     </p:extLst>
   </p:cSld>
